--- a/slides/01-tong-quan-giao-tiep.pptx
+++ b/slides/01-tong-quan-giao-tiep.pptx
@@ -13972,108 +13972,14 @@
     </a:clrScheme>
     <a:fontScheme name="Office">
       <a:majorFont>
-        <a:latin typeface="Calibri Light" panose="020F0302020204030204"/>
-        <a:ea typeface=""/>
-        <a:cs typeface=""/>
-        <a:font script="Jpan" typeface="游ゴシック Light"/>
-        <a:font script="Hang" typeface="맑은 고딕"/>
-        <a:font script="Hans" typeface="等线 Light"/>
-        <a:font script="Hant" typeface="新細明體"/>
-        <a:font script="Arab" typeface="Times New Roman"/>
-        <a:font script="Hebr" typeface="Times New Roman"/>
-        <a:font script="Thai" typeface="Angsana New"/>
-        <a:font script="Ethi" typeface="Nyala"/>
-        <a:font script="Beng" typeface="Vrinda"/>
-        <a:font script="Gujr" typeface="Shruti"/>
-        <a:font script="Khmr" typeface="MoolBoran"/>
-        <a:font script="Knda" typeface="Tunga"/>
-        <a:font script="Guru" typeface="Raavi"/>
-        <a:font script="Cans" typeface="Euphemia"/>
-        <a:font script="Cher" typeface="Plantagenet Cherokee"/>
-        <a:font script="Yiii" typeface="Microsoft Yi Baiti"/>
-        <a:font script="Tibt" typeface="Microsoft Himalaya"/>
-        <a:font script="Thaa" typeface="MV Boli"/>
-        <a:font script="Deva" typeface="Mangal"/>
-        <a:font script="Telu" typeface="Gautami"/>
-        <a:font script="Taml" typeface="Latha"/>
-        <a:font script="Syrc" typeface="Estrangelo Edessa"/>
-        <a:font script="Orya" typeface="Kalinga"/>
-        <a:font script="Mlym" typeface="Kartika"/>
-        <a:font script="Laoo" typeface="DokChampa"/>
-        <a:font script="Sinh" typeface="Iskoola Pota"/>
-        <a:font script="Mong" typeface="Mongolian Baiti"/>
-        <a:font script="Viet" typeface="Times New Roman"/>
-        <a:font script="Uigh" typeface="Microsoft Uighur"/>
-        <a:font script="Geor" typeface="Sylfaen"/>
-        <a:font script="Armn" typeface="Arial"/>
-        <a:font script="Bugi" typeface="Leelawadee UI"/>
-        <a:font script="Bopo" typeface="Microsoft JhengHei"/>
-        <a:font script="Java" typeface="Javanese Text"/>
-        <a:font script="Lisu" typeface="Segoe UI"/>
-        <a:font script="Mymr" typeface="Myanmar Text"/>
-        <a:font script="Nkoo" typeface="Ebrima"/>
-        <a:font script="Olck" typeface="Nirmala UI"/>
-        <a:font script="Osma" typeface="Ebrima"/>
-        <a:font script="Phag" typeface="Phagspa"/>
-        <a:font script="Syrn" typeface="Estrangelo Edessa"/>
-        <a:font script="Syrj" typeface="Estrangelo Edessa"/>
-        <a:font script="Syre" typeface="Estrangelo Edessa"/>
-        <a:font script="Sora" typeface="Nirmala UI"/>
-        <a:font script="Tale" typeface="Microsoft Tai Le"/>
-        <a:font script="Talu" typeface="Microsoft New Tai Lue"/>
-        <a:font script="Tfng" typeface="Ebrima"/>
+        <a:latin typeface="Cambria" panose="020F0302020204030204"/>
+        <a:ea typeface="Cambria"/>
+        <a:cs typeface="Cambria"/>
       </a:majorFont>
       <a:minorFont>
         <a:latin typeface="Calibri" panose="020F0502020204030204"/>
-        <a:ea typeface=""/>
-        <a:cs typeface=""/>
-        <a:font script="Jpan" typeface="游ゴシック"/>
-        <a:font script="Hang" typeface="맑은 고딕"/>
-        <a:font script="Hans" typeface="等线"/>
-        <a:font script="Hant" typeface="新細明體"/>
-        <a:font script="Arab" typeface="Arial"/>
-        <a:font script="Hebr" typeface="Arial"/>
-        <a:font script="Thai" typeface="Cordia New"/>
-        <a:font script="Ethi" typeface="Nyala"/>
-        <a:font script="Beng" typeface="Vrinda"/>
-        <a:font script="Gujr" typeface="Shruti"/>
-        <a:font script="Khmr" typeface="DaunPenh"/>
-        <a:font script="Knda" typeface="Tunga"/>
-        <a:font script="Guru" typeface="Raavi"/>
-        <a:font script="Cans" typeface="Euphemia"/>
-        <a:font script="Cher" typeface="Plantagenet Cherokee"/>
-        <a:font script="Yiii" typeface="Microsoft Yi Baiti"/>
-        <a:font script="Tibt" typeface="Microsoft Himalaya"/>
-        <a:font script="Thaa" typeface="MV Boli"/>
-        <a:font script="Deva" typeface="Mangal"/>
-        <a:font script="Telu" typeface="Gautami"/>
-        <a:font script="Taml" typeface="Latha"/>
-        <a:font script="Syrc" typeface="Estrangelo Edessa"/>
-        <a:font script="Orya" typeface="Kalinga"/>
-        <a:font script="Mlym" typeface="Kartika"/>
-        <a:font script="Laoo" typeface="DokChampa"/>
-        <a:font script="Sinh" typeface="Iskoola Pota"/>
-        <a:font script="Mong" typeface="Mongolian Baiti"/>
-        <a:font script="Viet" typeface="Arial"/>
-        <a:font script="Uigh" typeface="Microsoft Uighur"/>
-        <a:font script="Geor" typeface="Sylfaen"/>
-        <a:font script="Armn" typeface="Arial"/>
-        <a:font script="Bugi" typeface="Leelawadee UI"/>
-        <a:font script="Bopo" typeface="Microsoft JhengHei"/>
-        <a:font script="Java" typeface="Javanese Text"/>
-        <a:font script="Lisu" typeface="Segoe UI"/>
-        <a:font script="Mymr" typeface="Myanmar Text"/>
-        <a:font script="Nkoo" typeface="Ebrima"/>
-        <a:font script="Olck" typeface="Nirmala UI"/>
-        <a:font script="Osma" typeface="Ebrima"/>
-        <a:font script="Phag" typeface="Phagspa"/>
-        <a:font script="Syrn" typeface="Estrangelo Edessa"/>
-        <a:font script="Syrj" typeface="Estrangelo Edessa"/>
-        <a:font script="Syre" typeface="Estrangelo Edessa"/>
-        <a:font script="Sora" typeface="Nirmala UI"/>
-        <a:font script="Tale" typeface="Microsoft Tai Le"/>
-        <a:font script="Talu" typeface="Microsoft New Tai Lue"/>
-        <a:font script="Tfng" typeface="Ebrima"/>
+        <a:ea typeface="Calibri"/>
+        <a:cs typeface="Calibri"/>
       </a:minorFont>
     </a:fontScheme>
     <a:fmtScheme name="Office">

--- a/slides/01-tong-quan-giao-tiep.pptx
+++ b/slides/01-tong-quan-giao-tiep.pptx
@@ -9983,7 +9983,7 @@
         <p:spPr>
           <a:xfrm>
             <a:off x="1051560" y="1545336"/>
-            <a:ext cx="10652760" cy="1131570"/>
+            <a:ext cx="10652760" cy="960120"/>
           </a:xfrm>
           <a:prstGeom prst="rect">
             <a:avLst/>
@@ -10035,7 +10035,7 @@
         </p:nvSpPr>
         <p:spPr>
           <a:xfrm>
-            <a:off x="502920" y="2750058"/>
+            <a:off x="502920" y="2578608"/>
             <a:ext cx="384048" cy="384048"/>
           </a:xfrm>
           <a:prstGeom prst="ellipse">
@@ -10059,7 +10059,7 @@
         </p:nvSpPr>
         <p:spPr>
           <a:xfrm>
-            <a:off x="502920" y="2750058"/>
+            <a:off x="502920" y="2578608"/>
             <a:ext cx="384048" cy="384048"/>
           </a:xfrm>
           <a:prstGeom prst="rect">
@@ -10098,8 +10098,8 @@
         </p:nvSpPr>
         <p:spPr>
           <a:xfrm>
-            <a:off x="1051560" y="2676906"/>
-            <a:ext cx="10652760" cy="1131570"/>
+            <a:off x="1051560" y="2505456"/>
+            <a:ext cx="10652760" cy="960120"/>
           </a:xfrm>
           <a:prstGeom prst="rect">
             <a:avLst/>
@@ -10151,7 +10151,7 @@
         </p:nvSpPr>
         <p:spPr>
           <a:xfrm>
-            <a:off x="502920" y="3881628"/>
+            <a:off x="502920" y="3538728"/>
             <a:ext cx="384048" cy="384048"/>
           </a:xfrm>
           <a:prstGeom prst="ellipse">
@@ -10175,7 +10175,7 @@
         </p:nvSpPr>
         <p:spPr>
           <a:xfrm>
-            <a:off x="502920" y="3881628"/>
+            <a:off x="502920" y="3538728"/>
             <a:ext cx="384048" cy="384048"/>
           </a:xfrm>
           <a:prstGeom prst="rect">
@@ -10214,8 +10214,8 @@
         </p:nvSpPr>
         <p:spPr>
           <a:xfrm>
-            <a:off x="1051560" y="3808476"/>
-            <a:ext cx="10652760" cy="1131570"/>
+            <a:off x="1051560" y="3465576"/>
+            <a:ext cx="10652760" cy="960120"/>
           </a:xfrm>
           <a:prstGeom prst="rect">
             <a:avLst/>
@@ -10267,7 +10267,7 @@
         </p:nvSpPr>
         <p:spPr>
           <a:xfrm>
-            <a:off x="502920" y="5013198"/>
+            <a:off x="502920" y="4498848"/>
             <a:ext cx="384048" cy="384048"/>
           </a:xfrm>
           <a:prstGeom prst="ellipse">
@@ -10291,7 +10291,7 @@
         </p:nvSpPr>
         <p:spPr>
           <a:xfrm>
-            <a:off x="502920" y="5013198"/>
+            <a:off x="502920" y="4498848"/>
             <a:ext cx="384048" cy="384048"/>
           </a:xfrm>
           <a:prstGeom prst="rect">
@@ -10330,8 +10330,8 @@
         </p:nvSpPr>
         <p:spPr>
           <a:xfrm>
-            <a:off x="1051560" y="4940046"/>
-            <a:ext cx="10652760" cy="1131570"/>
+            <a:off x="1051560" y="4425696"/>
+            <a:ext cx="10652760" cy="960120"/>
           </a:xfrm>
           <a:prstGeom prst="rect">
             <a:avLst/>

--- a/slides/01-tong-quan-giao-tiep.pptx
+++ b/slides/01-tong-quan-giao-tiep.pptx
@@ -643,6 +643,32 @@
               <a:t>• Nhắc: giao tiếp số vẫn phải giữ đúng chuẩn mực như gặp mặt.</a:t>
             </a:r>
           </a:p>
+          <a:p/>
+          <a:p>
+            <a:r>
+              <a:t>NÓI ĐỦ Ý (phần đã rút khỏi slide)</a:t>
+            </a:r>
+          </a:p>
+          <a:p>
+            <a:r>
+              <a:t>• Trực tiếp: giàu thông tin, phản hồi ngay. Gián tiếp (điện thoại, văn bản, email): vượt khoảng cách, có bằng chứng — nhưng dễ hiểu nhầm.</a:t>
+            </a:r>
+          </a:p>
+          <a:p>
+            <a:r>
+              <a:t>• Chính thức: họp, văn bản, hội nghị theo quy định. Không chính thức: trò chuyện ngoài lề, tin đồn — người quản lý giỏi dùng cả hai.</a:t>
+            </a:r>
+          </a:p>
+          <a:p>
+            <a:r>
+              <a:t>• Cá nhân 1–1: sâu, riêng tư. Nhóm: cần điều phối. Đám đông: cần kỹ năng thuyết trình, học ở Chương 2.</a:t>
+            </a:r>
+          </a:p>
+          <a:p>
+            <a:r>
+              <a:t>• Giao tiếp số: email, họp trực tuyến, mạng xã hội, tin nhắn nhóm — chuẩn mực mới là trả lời đúng hạn, đúng kênh, giữ hình ảnh số chuyên nghiệp.</a:t>
+            </a:r>
+          </a:p>
         </p:txBody>
       </p:sp>
       <p:sp>
@@ -837,6 +863,37 @@
               <a:t>CHUYỂN Ý: "Bây giờ ta thử áp dụng cả chương vào một tình huống."''</a:t>
             </a:r>
           </a:p>
+          <a:p/>
+          <a:p>
+            <a:r>
+              <a:t>NÓI ĐỦ Ý (phần đã rút khỏi slide)</a:t>
+            </a:r>
+          </a:p>
+          <a:p>
+            <a:r>
+              <a:t>• Tôn trọng nhân cách, thời gian, lợi ích và sự khác biệt của đối tượng.</a:t>
+            </a:r>
+          </a:p>
+          <a:p>
+            <a:r>
+              <a:t>• Thiện chí và hợp tác: hướng tới hai bên cùng có lợi — thắng một cuộc cãi có thể thua một khách hàng.</a:t>
+            </a:r>
+          </a:p>
+          <a:p>
+            <a:r>
+              <a:t>• Lắng nghe và thấu hiểu trước: hiểu đúng nhu cầu đối phương rồi mới trình bày quan điểm mình.</a:t>
+            </a:r>
+          </a:p>
+          <a:p>
+            <a:r>
+              <a:t>• Phù hợp ngữ cảnh: đúng vai, đúng lúc, đúng nơi, đúng kênh, đúng mức độ trang trọng.</a:t>
+            </a:r>
+          </a:p>
+          <a:p>
+            <a:r>
+              <a:t>• Chuẩn mực và giữ chữ tín: lời nói và văn bản nhất quán; đã hứa là làm — chữ tín là tài sản kinh doanh.</a:t>
+            </a:r>
+          </a:p>
         </p:txBody>
       </p:sp>
       <p:sp>
@@ -1049,6 +1106,27 @@
               <a:t>• Giao việc: làm 40 câu trắc nghiệm Chương 1 trước buổi sau.</a:t>
             </a:r>
           </a:p>
+          <a:p/>
+          <a:p>
+            <a:r>
+              <a:t>NÓI ĐỦ Ý (phần đã rút khỏi slide)</a:t>
+            </a:r>
+          </a:p>
+          <a:p>
+            <a:r>
+              <a:t>• Giao tiếp kinh doanh không phải trò chuyện ngẫu nhiên: mỗi tương tác phục vụ mục tiêu, chịu chuẩn mực và ràng buộc lợi ích – pháp lý.</a:t>
+            </a:r>
+          </a:p>
+          <a:p>
+            <a:r>
+              <a:t>• Muốn sửa một cuộc giao tiếp thất bại, dò lại từng khâu: ý tưởng – mã hóa – kênh – giải mã – phản hồi.</a:t>
+            </a:r>
+          </a:p>
+          <a:p>
+            <a:r>
+              <a:t>• Trang phục, ánh mắt, giọng điệu, đúng giờ… "nói" trước và nói to hơn lời — hãy để chúng nói cùng một điều với bạn.</a:t>
+            </a:r>
+          </a:p>
         </p:txBody>
       </p:sp>
       <p:sp>
@@ -1507,6 +1585,37 @@
               <a:t>• Liên hệ Chương 3: phần giao tiếp đa văn hóa sẽ quay lại điểm này.</a:t>
             </a:r>
           </a:p>
+          <a:p/>
+          <a:p>
+            <a:r>
+              <a:t>NÓI ĐỦ Ý (phần đã rút khỏi slide)</a:t>
+            </a:r>
+          </a:p>
+          <a:p>
+            <a:r>
+              <a:t>• Chủ thể: trạng thái tâm lý, cảm xúc, sức khỏe, vốn hiểu biết, kỹ năng, uy tín.</a:t>
+            </a:r>
+          </a:p>
+          <a:p>
+            <a:r>
+              <a:t>• Thông điệp: rõ hay mơ hồ, cấu trúc hợp lý hay lộn xộn, hợp người nghe hay không.</a:t>
+            </a:r>
+          </a:p>
+          <a:p>
+            <a:r>
+              <a:t>• Kênh và nhiễu: chọn kênh sai (việc hệ trọng lại nhắn tin), đường truyền kém, môi trường ồn ào.</a:t>
+            </a:r>
+          </a:p>
+          <a:p>
+            <a:r>
+              <a:t>• Bối cảnh văn hóa – xã hội: chuẩn mực, tôn giáo, vùng miền, thứ bậc — bình thường nơi này có thể thất lễ nơi khác.</a:t>
+            </a:r>
+          </a:p>
+          <a:p>
+            <a:r>
+              <a:t>• Quan hệ và định kiến: ấn tượng cũ, tin đồn, khoảng cách quyền lực làm méo cách diễn giải.</a:t>
+            </a:r>
+          </a:p>
         </p:txBody>
       </p:sp>
       <p:sp>
@@ -1595,6 +1704,27 @@
           <a:p>
             <a:r>
               <a:t>CHUYỂN Ý: "Giờ ta bắt đầu từ mục tiêu của chương một."''</a:t>
+            </a:r>
+          </a:p>
+          <a:p/>
+          <a:p>
+            <a:r>
+              <a:t>NÓI ĐỦ Ý (phần đã rút khỏi slide)</a:t>
+            </a:r>
+          </a:p>
+          <a:p>
+            <a:r>
+              <a:t>• Lý thuyết: 10 buổi sáng T7 &amp; CN, 05/12/2026 – 03/01/2027, phòng C0105 — Chương 1 Tổng quan giao tiếp; Chương 2 Kỹ năng chuyên nghiệp; Chương 3 Tình huống đặc thù; Chương 4 Đàm phán; Chương 5 Soạn thảo văn bản.</a:t>
+            </a:r>
+          </a:p>
+          <a:p>
+            <a:r>
+              <a:t>• Thực hành: chiều T7/CN, 26/12 – 24/01, phòng A0105 Mô phỏng Kinh tế — Bài 1 Thể thức; Bài 2 Văn bản hành chính; Bài 3 Văn bản thương mại.</a:t>
+            </a:r>
+          </a:p>
+          <a:p>
+            <a:r>
+              <a:t>• Đánh giá: chuyên cần (dự lớp ≥ 80%, bài tập đầy đủ); quá trình (trắc nghiệm + tự luận + thực hành); cuối kỳ thi thực hành.</a:t>
             </a:r>
           </a:p>
         </p:txBody>
@@ -1900,6 +2030,27 @@
               <a:t>HỎI LỚP: "Hôm nay các bạn đã có cuộc giao tiếp kinh doanh nào chưa?" (mua cà phê, hỏi bài giáo vụ...).</a:t>
             </a:r>
           </a:p>
+          <a:p/>
+          <a:p>
+            <a:r>
+              <a:t>NÓI ĐỦ Ý (phần đã rút khỏi slide)</a:t>
+            </a:r>
+          </a:p>
+          <a:p>
+            <a:r>
+              <a:t>• Giao tiếp: quá trình trao đổi thông tin, tư tưởng, tình cảm giữa người với người nhằm đạt một mục đích — bằng cả lời nói, chữ viết và hành vi không lời.</a:t>
+            </a:r>
+          </a:p>
+          <a:p>
+            <a:r>
+              <a:t>• Giao tiếp kinh doanh: gắn với quá trình kinh doanh — doanh nghiệp với khách hàng, đối tác, cơ quan quản lý, và giữa các thành viên trong tổ chức — hướng tới mục tiêu kinh doanh cụ thể.</a:t>
+            </a:r>
+          </a:p>
+          <a:p>
+            <a:r>
+              <a:t>• Vì sao học: khảo sát nhà tuyển dụng nhiều năm liền xếp kỹ năng giao tiếp vào nhóm được yêu cầu cao nhất — bán được ý tưởng trước khi bán được sản phẩm.</a:t>
+            </a:r>
+          </a:p>
         </p:txBody>
       </p:sp>
       <p:sp>
@@ -2006,6 +2157,32 @@
               <a:t>CHUYỂN Ý: "Vậy một cuộc giao tiếp diễn ra qua những khâu nào?"''</a:t>
             </a:r>
           </a:p>
+          <a:p/>
+          <a:p>
+            <a:r>
+              <a:t>NÓI ĐỦ Ý (phần đã rút khỏi slide)</a:t>
+            </a:r>
+          </a:p>
+          <a:p>
+            <a:r>
+              <a:t>• Có mục đích: mỗi cuộc gặp, cuộc gọi, email đều phục vụ một mục tiêu công việc — bán hàng, hợp tác, giải quyết vấn đề.</a:t>
+            </a:r>
+          </a:p>
+          <a:p>
+            <a:r>
+              <a:t>• Đa dạng chủ thể: cùng lúc giao tiếp với khách hàng, cấp trên, đồng nghiệp, cơ quan nhà nước — mỗi đối tượng một chuẩn mực riêng.</a:t>
+            </a:r>
+          </a:p>
+          <a:p>
+            <a:r>
+              <a:t>• Ràng buộc: lời nói và văn bản trong kinh doanh có thể tạo ra nghĩa vụ, hợp đồng, trách nhiệm.</a:t>
+            </a:r>
+          </a:p>
+          <a:p>
+            <a:r>
+              <a:t>• Khoa học và nghệ thuật: có nguyên tắc, quy trình để học; vận dụng linh hoạt theo con người và hoàn cảnh mới hiệu quả.</a:t>
+            </a:r>
+          </a:p>
         </p:txBody>
       </p:sp>
       <p:sp>
@@ -2117,6 +2294,42 @@
               <a:t>• CHỐT: cuộc giao tiếp thất bại thì đừng đổ lỗi, hãy DÒ LẠI TỪNG KHÂU.</a:t>
             </a:r>
           </a:p>
+          <a:p/>
+          <a:p>
+            <a:r>
+              <a:t>NÓI ĐỦ Ý (phần đã rút khỏi slide)</a:t>
+            </a:r>
+          </a:p>
+          <a:p>
+            <a:r>
+              <a:t>• Người gửi: hình thành ý tưởng, xác định mục đích truyền đạt.</a:t>
+            </a:r>
+          </a:p>
+          <a:p>
+            <a:r>
+              <a:t>• Mã hóa: chuyển ý tưởng thành lời nói, chữ viết, cử chỉ.</a:t>
+            </a:r>
+          </a:p>
+          <a:p>
+            <a:r>
+              <a:t>• Thông điệp: nội dung truyền qua kênh — trực tiếp, điện thoại, email…</a:t>
+            </a:r>
+          </a:p>
+          <a:p>
+            <a:r>
+              <a:t>• Giải mã: người nhận tiếp nhận và diễn giải.</a:t>
+            </a:r>
+          </a:p>
+          <a:p>
+            <a:r>
+              <a:t>• Phản hồi: người nhận đáp lại — căn cứ để biết giao tiếp có hiệu quả.</a:t>
+            </a:r>
+          </a:p>
+          <a:p>
+            <a:r>
+              <a:t>• NHIỄU: tiếng ồn, đường truyền kém, khác biệt ngôn ngữ – văn hóa, định kiến, cảm xúc tiêu cực… xuất hiện ở mọi khâu. Người giao tiếp giỏi chủ động giảm nhiễu ở từng bước.</a:t>
+            </a:r>
+          </a:p>
         </p:txBody>
       </p:sp>
       <p:sp>
@@ -2218,6 +2431,27 @@
               <a:t>• Liên hệ nghề nghiệp: đây chính là kỹ năng nửa sau học phần.</a:t>
             </a:r>
           </a:p>
+          <a:p/>
+          <a:p>
+            <a:r>
+              <a:t>NÓI ĐỦ Ý (phần đã rút khỏi slide)</a:t>
+            </a:r>
+          </a:p>
+          <a:p>
+            <a:r>
+              <a:t>• Nói: trực tiếp, nhanh, giàu cảm xúc, phản hồi tức thì — nhưng "lời nói gió bay", dễ sai khi thiếu chuẩn bị. Chú ý phát âm, tốc độ, âm lượng, ngữ điệu.</a:t>
+            </a:r>
+          </a:p>
+          <a:p>
+            <a:r>
+              <a:t>• Viết: chính xác, cân nhắc được, lưu lại làm bằng chứng — nền tảng của Chương 5. Chú ý chính tả, thể thức, văn phong.</a:t>
+            </a:r>
+          </a:p>
+          <a:p>
+            <a:r>
+              <a:t>• Dùng từ: rõ ràng, lịch sự, tích cực; tránh khẩu ngữ, tiếng lóng, từ đa nghĩa; ưu tiên câu chủ động, ngắn gọn.</a:t>
+            </a:r>
+          </a:p>
         </p:txBody>
       </p:sp>
       <p:sp>
@@ -2322,6 +2556,37 @@
           <a:p>
             <a:r>
               <a:t>• CHỐT: đừng để cơ thể nói ngược lại lời của mình.</a:t>
+            </a:r>
+          </a:p>
+          <a:p/>
+          <a:p>
+            <a:r>
+              <a:t>NÓI ĐỦ Ý (phần đã rút khỏi slide)</a:t>
+            </a:r>
+          </a:p>
+          <a:p>
+            <a:r>
+              <a:t>• Ánh mắt – nét mặt – nụ cười: kênh biểu cảm mạnh nhất; nhìn vào mắt thể hiện tự tin và tôn trọng.</a:t>
+            </a:r>
+          </a:p>
+          <a:p>
+            <a:r>
+              <a:t>• Cử chỉ – tư thế – dáng đi: thẳng, cởi mở tạo thiện cảm; khoanh tay, nhìn đồng hồ phát tín hiệu khép kín, sốt ruột.</a:t>
+            </a:r>
+          </a:p>
+          <a:p>
+            <a:r>
+              <a:t>• Khoảng cách: thân mật (&lt;0,5 m) – cá nhân – xã giao (1,2–3,5 m) – công cộng; chọn sai gây khó chịu.</a:t>
+            </a:r>
+          </a:p>
+          <a:p>
+            <a:r>
+              <a:t>• Trang phục – giọng điệu – thời gian: ăn mặc phù hợp bối cảnh; giọng điệu quyết định cách thông điệp được đón nhận; đúng giờ cũng là thông điệp.</a:t>
+            </a:r>
+          </a:p>
+          <a:p>
+            <a:r>
+              <a:t>• Ba con số trên slide là của Mehrabian, cho THÔNG ĐIỆP CẢM XÚC — đừng khái quát thành mọi loại giao tiếp. Chốt: đừng để cơ thể "nói" ngược với lời.</a:t>
             </a:r>
           </a:p>
         </p:txBody>
@@ -3319,351 +3584,62 @@
           </a:p>
         </p:txBody>
       </p:sp>
-      <p:sp>
-        <p:nvSpPr>
-          <p:cNvPr id="9" name="Shape 6"/>
-          <p:cNvSpPr/>
-          <p:nvPr/>
-        </p:nvSpPr>
-        <p:spPr>
-          <a:xfrm>
-            <a:off x="502920" y="1417320"/>
-            <a:ext cx="5509260" cy="2308860"/>
-          </a:xfrm>
-          <a:prstGeom prst="roundRect">
-            <a:avLst>
-              <a:gd name="adj" fmla="val 3564"/>
-            </a:avLst>
-          </a:prstGeom>
-          <a:solidFill>
-            <a:srgbClr val="FDF1EF"/>
-          </a:solidFill>
-          <a:ln w="15875">
-            <a:solidFill>
-              <a:srgbClr val="FBCEC9"/>
-            </a:solidFill>
-            <a:prstDash val="solid"/>
-          </a:ln>
-        </p:spPr>
-        <p:txBody>
-          <a:bodyPr/>
-          <a:p/>
-        </p:txBody>
-      </p:sp>
-      <p:sp>
-        <p:nvSpPr>
-          <p:cNvPr id="10" name="Text 7"/>
-          <p:cNvSpPr/>
-          <p:nvPr/>
-        </p:nvSpPr>
-        <p:spPr>
-          <a:xfrm>
-            <a:off x="722376" y="1490472"/>
-            <a:ext cx="5070348" cy="2162556"/>
-          </a:xfrm>
-          <a:prstGeom prst="rect">
-            <a:avLst/>
-          </a:prstGeom>
-          <a:noFill/>
-          <a:ln/>
-        </p:spPr>
-        <p:txBody>
-          <a:bodyPr wrap="square" lIns="0" tIns="0" rIns="0" bIns="0" rtlCol="0" anchor="ctr"/>
-          <a:lstStyle/>
-          <a:p>
-            <a:pPr indent="0" marL="0">
-              <a:buNone/>
-            </a:pPr>
-            <a:r>
-              <a:rPr lang="en-US" sz="1500" b="1" dirty="0">
-                <a:solidFill>
-                  <a:srgbClr val="AC4D33"/>
-                </a:solidFill>
-                <a:latin typeface="Calibri" pitchFamily="34" charset="0"/>
-                <a:ea typeface="Calibri" pitchFamily="34" charset="-122"/>
-                <a:cs typeface="Calibri" pitchFamily="34" charset="-120"/>
-              </a:rPr>
-              <a:t>Trực tiếp  ↔  Gián tiếp</a:t>
-            </a:r>
-            <a:endParaRPr lang="en-US" sz="1500" dirty="0"/>
-          </a:p>
-          <a:p>
-            <a:pPr indent="0" marL="0">
-              <a:buNone/>
-            </a:pPr>
-            <a:r>
-              <a:rPr lang="en-US" sz="1250" dirty="0">
-                <a:solidFill>
-                  <a:srgbClr val="3A2B28"/>
-                </a:solidFill>
-                <a:latin typeface="Calibri" pitchFamily="34" charset="0"/>
-                <a:ea typeface="Calibri" pitchFamily="34" charset="-122"/>
-                <a:cs typeface="Calibri" pitchFamily="34" charset="-120"/>
-              </a:rPr>
-              <a:t>Mặt đối mặt: giàu thông tin, phản hồi ngay. Gián tiếp (điện thoại, văn bản, email): vượt khoảng cách, có bằng chứng — nhưng dễ hiểu nhầm.</a:t>
-            </a:r>
-            <a:endParaRPr lang="en-US" sz="1500" dirty="0"/>
-          </a:p>
-        </p:txBody>
-      </p:sp>
-      <p:sp>
-        <p:nvSpPr>
-          <p:cNvPr id="11" name="Shape 8"/>
-          <p:cNvSpPr/>
-          <p:nvPr/>
-        </p:nvSpPr>
-        <p:spPr>
-          <a:xfrm>
-            <a:off x="6195060" y="1417320"/>
-            <a:ext cx="5509260" cy="2308860"/>
-          </a:xfrm>
-          <a:prstGeom prst="roundRect">
-            <a:avLst>
-              <a:gd name="adj" fmla="val 3564"/>
-            </a:avLst>
-          </a:prstGeom>
-          <a:solidFill>
-            <a:srgbClr val="FDF1EF"/>
-          </a:solidFill>
-          <a:ln w="15875">
-            <a:solidFill>
-              <a:srgbClr val="FBCEC9"/>
-            </a:solidFill>
-            <a:prstDash val="solid"/>
-          </a:ln>
-        </p:spPr>
-        <p:txBody>
-          <a:bodyPr/>
-          <a:p/>
-        </p:txBody>
-      </p:sp>
-      <p:sp>
-        <p:nvSpPr>
-          <p:cNvPr id="12" name="Text 9"/>
-          <p:cNvSpPr/>
-          <p:nvPr/>
-        </p:nvSpPr>
-        <p:spPr>
-          <a:xfrm>
-            <a:off x="6414516" y="1490472"/>
-            <a:ext cx="5070348" cy="2162556"/>
-          </a:xfrm>
-          <a:prstGeom prst="rect">
-            <a:avLst/>
-          </a:prstGeom>
-          <a:noFill/>
-          <a:ln/>
-        </p:spPr>
-        <p:txBody>
-          <a:bodyPr wrap="square" lIns="0" tIns="0" rIns="0" bIns="0" rtlCol="0" anchor="ctr"/>
-          <a:lstStyle/>
-          <a:p>
-            <a:pPr indent="0" marL="0">
-              <a:buNone/>
-            </a:pPr>
-            <a:r>
-              <a:rPr lang="en-US" sz="1500" b="1" dirty="0">
-                <a:solidFill>
-                  <a:srgbClr val="AC4D33"/>
-                </a:solidFill>
-                <a:latin typeface="Calibri" pitchFamily="34" charset="0"/>
-                <a:ea typeface="Calibri" pitchFamily="34" charset="-122"/>
-                <a:cs typeface="Calibri" pitchFamily="34" charset="-120"/>
-              </a:rPr>
-              <a:t>Chính thức  ↔  Không chính thức</a:t>
-            </a:r>
-            <a:endParaRPr lang="en-US" sz="1500" dirty="0"/>
-          </a:p>
-          <a:p>
-            <a:pPr indent="0" marL="0">
-              <a:buNone/>
-            </a:pPr>
-            <a:r>
-              <a:rPr lang="en-US" sz="1250" dirty="0">
-                <a:solidFill>
-                  <a:srgbClr val="3A2B28"/>
-                </a:solidFill>
-                <a:latin typeface="Calibri" pitchFamily="34" charset="0"/>
-                <a:ea typeface="Calibri" pitchFamily="34" charset="-122"/>
-                <a:cs typeface="Calibri" pitchFamily="34" charset="-120"/>
-              </a:rPr>
-              <a:t>Cuộc họp, văn bản, hội nghị theo quy định; trò chuyện ngoài lề, tin đồn — người quản lý giỏi biết dùng cả hai.</a:t>
-            </a:r>
-            <a:endParaRPr lang="en-US" sz="1500" dirty="0"/>
-          </a:p>
-        </p:txBody>
-      </p:sp>
-      <p:sp>
-        <p:nvSpPr>
-          <p:cNvPr id="13" name="Shape 10"/>
-          <p:cNvSpPr/>
-          <p:nvPr/>
-        </p:nvSpPr>
-        <p:spPr>
-          <a:xfrm>
-            <a:off x="502920" y="3909060"/>
-            <a:ext cx="5509260" cy="2308860"/>
-          </a:xfrm>
-          <a:prstGeom prst="roundRect">
-            <a:avLst>
-              <a:gd name="adj" fmla="val 3564"/>
-            </a:avLst>
-          </a:prstGeom>
-          <a:solidFill>
-            <a:srgbClr val="FDF1EF"/>
-          </a:solidFill>
-          <a:ln w="15875">
-            <a:solidFill>
-              <a:srgbClr val="FBCEC9"/>
-            </a:solidFill>
-            <a:prstDash val="solid"/>
-          </a:ln>
-        </p:spPr>
-        <p:txBody>
-          <a:bodyPr/>
-          <a:p/>
-        </p:txBody>
-      </p:sp>
-      <p:sp>
-        <p:nvSpPr>
-          <p:cNvPr id="14" name="Text 11"/>
-          <p:cNvSpPr/>
-          <p:nvPr/>
-        </p:nvSpPr>
-        <p:spPr>
-          <a:xfrm>
-            <a:off x="722376" y="3982212"/>
-            <a:ext cx="5070348" cy="2162556"/>
-          </a:xfrm>
-          <a:prstGeom prst="rect">
-            <a:avLst/>
-          </a:prstGeom>
-          <a:noFill/>
-          <a:ln/>
-        </p:spPr>
-        <p:txBody>
-          <a:bodyPr wrap="square" lIns="0" tIns="0" rIns="0" bIns="0" rtlCol="0" anchor="ctr"/>
-          <a:lstStyle/>
-          <a:p>
-            <a:pPr indent="0" marL="0">
-              <a:buNone/>
-            </a:pPr>
-            <a:r>
-              <a:rPr lang="en-US" sz="1500" b="1" dirty="0">
-                <a:solidFill>
-                  <a:srgbClr val="AC4D33"/>
-                </a:solidFill>
-                <a:latin typeface="Calibri" pitchFamily="34" charset="0"/>
-                <a:ea typeface="Calibri" pitchFamily="34" charset="-122"/>
-                <a:cs typeface="Calibri" pitchFamily="34" charset="-120"/>
-              </a:rPr>
-              <a:t>Cá nhân  ↔  Nhóm / đám đông</a:t>
-            </a:r>
-            <a:endParaRPr lang="en-US" sz="1500" dirty="0"/>
-          </a:p>
-          <a:p>
-            <a:pPr indent="0" marL="0">
-              <a:buNone/>
-            </a:pPr>
-            <a:r>
-              <a:rPr lang="en-US" sz="1250" dirty="0">
-                <a:solidFill>
-                  <a:srgbClr val="3A2B28"/>
-                </a:solidFill>
-                <a:latin typeface="Calibri" pitchFamily="34" charset="0"/>
-                <a:ea typeface="Calibri" pitchFamily="34" charset="-122"/>
-                <a:cs typeface="Calibri" pitchFamily="34" charset="-120"/>
-              </a:rPr>
-              <a:t>1-1: sâu, riêng tư. Nhóm: cần điều phối; đám đông: cần kỹ năng thuyết trình (học ở Chương 2).</a:t>
-            </a:r>
-            <a:endParaRPr lang="en-US" sz="1500" dirty="0"/>
-          </a:p>
-        </p:txBody>
-      </p:sp>
-      <p:sp>
-        <p:nvSpPr>
-          <p:cNvPr id="15" name="Shape 12"/>
-          <p:cNvSpPr/>
-          <p:nvPr/>
-        </p:nvSpPr>
-        <p:spPr>
-          <a:xfrm>
-            <a:off x="6195060" y="3909060"/>
-            <a:ext cx="5509260" cy="2308860"/>
-          </a:xfrm>
-          <a:prstGeom prst="roundRect">
-            <a:avLst>
-              <a:gd name="adj" fmla="val 3564"/>
-            </a:avLst>
-          </a:prstGeom>
-          <a:solidFill>
-            <a:srgbClr val="FDF1EF"/>
-          </a:solidFill>
-          <a:ln w="15875">
-            <a:solidFill>
-              <a:srgbClr val="FBCEC9"/>
-            </a:solidFill>
-            <a:prstDash val="solid"/>
-          </a:ln>
-        </p:spPr>
-        <p:txBody>
-          <a:bodyPr/>
-          <a:p/>
-        </p:txBody>
-      </p:sp>
-      <p:sp>
-        <p:nvSpPr>
-          <p:cNvPr id="16" name="Text 13"/>
-          <p:cNvSpPr/>
-          <p:nvPr/>
-        </p:nvSpPr>
-        <p:spPr>
-          <a:xfrm>
-            <a:off x="6414516" y="3982212"/>
-            <a:ext cx="5070348" cy="2162556"/>
-          </a:xfrm>
-          <a:prstGeom prst="rect">
-            <a:avLst/>
-          </a:prstGeom>
-          <a:noFill/>
-          <a:ln/>
-        </p:spPr>
-        <p:txBody>
-          <a:bodyPr wrap="square" lIns="0" tIns="0" rIns="0" bIns="0" rtlCol="0" anchor="ctr"/>
-          <a:lstStyle/>
-          <a:p>
-            <a:pPr indent="0" marL="0">
-              <a:buNone/>
-            </a:pPr>
-            <a:r>
-              <a:rPr lang="en-US" sz="1500" b="1" dirty="0">
-                <a:solidFill>
-                  <a:srgbClr val="AC4D33"/>
-                </a:solidFill>
-                <a:latin typeface="Calibri" pitchFamily="34" charset="0"/>
-                <a:ea typeface="Calibri" pitchFamily="34" charset="-122"/>
-                <a:cs typeface="Calibri" pitchFamily="34" charset="-120"/>
-              </a:rPr>
-              <a:t>Truyền thống  ↔  Giao tiếp số</a:t>
-            </a:r>
-            <a:endParaRPr lang="en-US" sz="1500" dirty="0"/>
-          </a:p>
-          <a:p>
-            <a:pPr indent="0" marL="0">
-              <a:buNone/>
-            </a:pPr>
-            <a:r>
-              <a:rPr lang="en-US" sz="1250" dirty="0">
-                <a:solidFill>
-                  <a:srgbClr val="3A2B28"/>
-                </a:solidFill>
-                <a:latin typeface="Calibri" pitchFamily="34" charset="0"/>
-                <a:ea typeface="Calibri" pitchFamily="34" charset="-122"/>
-                <a:cs typeface="Calibri" pitchFamily="34" charset="-120"/>
-              </a:rPr>
-              <a:t>Email, họp trực tuyến, mạng xã hội, tin nhắn nhóm — chuẩn mực mới: trả lời đúng hạn, đúng kênh, giữ hình ảnh số chuyên nghiệp.</a:t>
-            </a:r>
-            <a:endParaRPr lang="en-US" sz="1500" dirty="0"/>
+      <p:pic>
+        <p:nvPicPr>
+          <p:cNvPr id="9" name="Picture 8" descr="c1-hinh-thuc-giao-tiep-nt.png"/>
+          <p:cNvPicPr>
+            <a:picLocks noChangeAspect="1"/>
+          </p:cNvPicPr>
+          <p:nvPr/>
+        </p:nvPicPr>
+        <p:blipFill>
+          <a:blip r:embed="rId4"/>
+          <a:stretch>
+            <a:fillRect/>
+          </a:stretch>
+        </p:blipFill>
+        <p:spPr>
+          <a:xfrm>
+            <a:off x="840137" y="1745568"/>
+            <a:ext cx="10511419" cy="4180678"/>
+          </a:xfrm>
+          <a:prstGeom prst="rect">
+            <a:avLst/>
+          </a:prstGeom>
+        </p:spPr>
+      </p:pic>
+      <p:sp>
+        <p:nvSpPr>
+          <p:cNvPr id="10" name="TextBox 9"/>
+          <p:cNvSpPr txBox="1"/>
+          <p:nvPr/>
+        </p:nvSpPr>
+        <p:spPr>
+          <a:xfrm>
+            <a:off x="548640" y="5999399"/>
+            <a:ext cx="11109960" cy="310896"/>
+          </a:xfrm>
+          <a:prstGeom prst="rect">
+            <a:avLst/>
+          </a:prstGeom>
+          <a:noFill/>
+        </p:spPr>
+        <p:txBody>
+          <a:bodyPr wrap="square">
+            <a:spAutoFit/>
+          </a:bodyPr>
+          <a:lstStyle/>
+          <a:p>
+            <a:pPr algn="ctr"/>
+            <a:r>
+              <a:rPr sz="1150" i="1">
+                <a:solidFill>
+                  <a:srgbClr val="8A7A76"/>
+                </a:solidFill>
+                <a:latin typeface="Calibri"/>
+              </a:rPr>
+              <a:t>Bốn cặp này không loại trừ nhau — một cuộc giao tiếp nằm đâu đó trên cả bốn trục cùng lúc.</a:t>
+            </a:r>
           </a:p>
         </p:txBody>
       </p:sp>
@@ -3942,583 +3918,62 @@
           </a:p>
         </p:txBody>
       </p:sp>
-      <p:sp>
-        <p:nvSpPr>
-          <p:cNvPr id="9" name="Shape 6"/>
-          <p:cNvSpPr/>
-          <p:nvPr/>
-        </p:nvSpPr>
-        <p:spPr>
-          <a:xfrm>
-            <a:off x="502920" y="1572768"/>
-            <a:ext cx="384048" cy="384048"/>
-          </a:xfrm>
-          <a:prstGeom prst="ellipse">
-            <a:avLst/>
-          </a:prstGeom>
-          <a:solidFill>
-            <a:srgbClr val="DC756A"/>
-          </a:solidFill>
-          <a:ln/>
-        </p:spPr>
-        <p:txBody>
-          <a:bodyPr/>
-          <a:p/>
-        </p:txBody>
-      </p:sp>
-      <p:sp>
-        <p:nvSpPr>
-          <p:cNvPr id="10" name="Text 7"/>
-          <p:cNvSpPr/>
-          <p:nvPr/>
-        </p:nvSpPr>
-        <p:spPr>
-          <a:xfrm>
-            <a:off x="502920" y="1572768"/>
-            <a:ext cx="384048" cy="384048"/>
-          </a:xfrm>
-          <a:prstGeom prst="rect">
-            <a:avLst/>
-          </a:prstGeom>
-          <a:noFill/>
-          <a:ln/>
-        </p:spPr>
-        <p:txBody>
-          <a:bodyPr wrap="square" lIns="0" tIns="0" rIns="0" bIns="0" rtlCol="0" anchor="ctr"/>
-          <a:lstStyle/>
-          <a:p>
-            <a:pPr algn="ctr" indent="0" marL="0">
-              <a:buNone/>
-            </a:pPr>
-            <a:r>
-              <a:rPr lang="en-US" sz="1400" b="1" dirty="0">
-                <a:solidFill>
-                  <a:srgbClr val="FFFFFF"/>
-                </a:solidFill>
-                <a:latin typeface="Calibri" pitchFamily="34" charset="0"/>
-                <a:ea typeface="Calibri" pitchFamily="34" charset="-122"/>
-                <a:cs typeface="Calibri" pitchFamily="34" charset="-120"/>
-              </a:rPr>
-              <a:t>1</a:t>
-            </a:r>
-            <a:endParaRPr lang="en-US" sz="1400" dirty="0"/>
-          </a:p>
-        </p:txBody>
-      </p:sp>
-      <p:sp>
-        <p:nvSpPr>
-          <p:cNvPr id="11" name="Text 8"/>
-          <p:cNvSpPr/>
-          <p:nvPr/>
-        </p:nvSpPr>
-        <p:spPr>
-          <a:xfrm>
-            <a:off x="1051560" y="1499616"/>
-            <a:ext cx="10652760" cy="941832"/>
-          </a:xfrm>
-          <a:prstGeom prst="rect">
-            <a:avLst/>
-          </a:prstGeom>
-          <a:noFill/>
-          <a:ln/>
-        </p:spPr>
-        <p:txBody>
-          <a:bodyPr wrap="square" lIns="0" tIns="0" rIns="0" bIns="0" rtlCol="0" anchor="t"/>
-          <a:lstStyle/>
-          <a:p>
-            <a:pPr indent="0" marL="0">
-              <a:buNone/>
-            </a:pPr>
-            <a:r>
-              <a:rPr lang="en-US" sz="1400" b="1" dirty="0">
-                <a:solidFill>
-                  <a:srgbClr val="AC4D33"/>
-                </a:solidFill>
-                <a:latin typeface="Calibri" pitchFamily="34" charset="0"/>
-                <a:ea typeface="Calibri" pitchFamily="34" charset="-122"/>
-                <a:cs typeface="Calibri" pitchFamily="34" charset="-120"/>
-              </a:rPr>
-              <a:t>Yếu tố thuộc chủ thể  —  </a:t>
-            </a:r>
-            <a:pPr indent="0" marL="0">
-              <a:buNone/>
-            </a:pPr>
-            <a:r>
-              <a:rPr lang="en-US" sz="1350" dirty="0">
-                <a:solidFill>
-                  <a:srgbClr val="3A2B28"/>
-                </a:solidFill>
-                <a:latin typeface="Calibri" pitchFamily="34" charset="0"/>
-                <a:ea typeface="Calibri" pitchFamily="34" charset="-122"/>
-                <a:cs typeface="Calibri" pitchFamily="34" charset="-120"/>
-              </a:rPr>
-              <a:t>trạng thái tâm lý, cảm xúc, sức khỏe, vốn hiểu biết, kỹ năng và uy tín của người giao tiếp.</a:t>
-            </a:r>
-            <a:endParaRPr lang="en-US" sz="1400" dirty="0"/>
-          </a:p>
-        </p:txBody>
-      </p:sp>
-      <p:sp>
-        <p:nvSpPr>
-          <p:cNvPr id="12" name="Shape 9"/>
-          <p:cNvSpPr/>
-          <p:nvPr/>
-        </p:nvSpPr>
-        <p:spPr>
-          <a:xfrm>
-            <a:off x="502920" y="2514600"/>
-            <a:ext cx="384048" cy="384048"/>
-          </a:xfrm>
-          <a:prstGeom prst="ellipse">
-            <a:avLst/>
-          </a:prstGeom>
-          <a:solidFill>
-            <a:srgbClr val="DC756A"/>
-          </a:solidFill>
-          <a:ln/>
-        </p:spPr>
-        <p:txBody>
-          <a:bodyPr/>
-          <a:p/>
-        </p:txBody>
-      </p:sp>
-      <p:sp>
-        <p:nvSpPr>
-          <p:cNvPr id="13" name="Text 10"/>
-          <p:cNvSpPr/>
-          <p:nvPr/>
-        </p:nvSpPr>
-        <p:spPr>
-          <a:xfrm>
-            <a:off x="502920" y="2514600"/>
-            <a:ext cx="384048" cy="384048"/>
-          </a:xfrm>
-          <a:prstGeom prst="rect">
-            <a:avLst/>
-          </a:prstGeom>
-          <a:noFill/>
-          <a:ln/>
-        </p:spPr>
-        <p:txBody>
-          <a:bodyPr wrap="square" lIns="0" tIns="0" rIns="0" bIns="0" rtlCol="0" anchor="ctr"/>
-          <a:lstStyle/>
-          <a:p>
-            <a:pPr algn="ctr" indent="0" marL="0">
-              <a:buNone/>
-            </a:pPr>
-            <a:r>
-              <a:rPr lang="en-US" sz="1400" b="1" dirty="0">
-                <a:solidFill>
-                  <a:srgbClr val="FFFFFF"/>
-                </a:solidFill>
-                <a:latin typeface="Calibri" pitchFamily="34" charset="0"/>
-                <a:ea typeface="Calibri" pitchFamily="34" charset="-122"/>
-                <a:cs typeface="Calibri" pitchFamily="34" charset="-120"/>
-              </a:rPr>
-              <a:t>2</a:t>
-            </a:r>
-            <a:endParaRPr lang="en-US" sz="1400" dirty="0"/>
-          </a:p>
-        </p:txBody>
-      </p:sp>
-      <p:sp>
-        <p:nvSpPr>
-          <p:cNvPr id="14" name="Text 11"/>
-          <p:cNvSpPr/>
-          <p:nvPr/>
-        </p:nvSpPr>
-        <p:spPr>
-          <a:xfrm>
-            <a:off x="1051560" y="2441448"/>
-            <a:ext cx="10652760" cy="941832"/>
-          </a:xfrm>
-          <a:prstGeom prst="rect">
-            <a:avLst/>
-          </a:prstGeom>
-          <a:noFill/>
-          <a:ln/>
-        </p:spPr>
-        <p:txBody>
-          <a:bodyPr wrap="square" lIns="0" tIns="0" rIns="0" bIns="0" rtlCol="0" anchor="t"/>
-          <a:lstStyle/>
-          <a:p>
-            <a:pPr indent="0" marL="0">
-              <a:buNone/>
-            </a:pPr>
-            <a:r>
-              <a:rPr lang="en-US" sz="1400" b="1" dirty="0">
-                <a:solidFill>
-                  <a:srgbClr val="AC4D33"/>
-                </a:solidFill>
-                <a:latin typeface="Calibri" pitchFamily="34" charset="0"/>
-                <a:ea typeface="Calibri" pitchFamily="34" charset="-122"/>
-                <a:cs typeface="Calibri" pitchFamily="34" charset="-120"/>
-              </a:rPr>
-              <a:t>Thông điệp  —  </a:t>
-            </a:r>
-            <a:pPr indent="0" marL="0">
-              <a:buNone/>
-            </a:pPr>
-            <a:r>
-              <a:rPr lang="en-US" sz="1350" dirty="0">
-                <a:solidFill>
-                  <a:srgbClr val="3A2B28"/>
-                </a:solidFill>
-                <a:latin typeface="Calibri" pitchFamily="34" charset="0"/>
-                <a:ea typeface="Calibri" pitchFamily="34" charset="-122"/>
-                <a:cs typeface="Calibri" pitchFamily="34" charset="-120"/>
-              </a:rPr>
-              <a:t>nội dung rõ hay mơ hồ, cấu trúc hợp lý hay lộn xộn, phù hợp người nghe hay không.</a:t>
-            </a:r>
-            <a:endParaRPr lang="en-US" sz="1400" dirty="0"/>
-          </a:p>
-        </p:txBody>
-      </p:sp>
-      <p:sp>
-        <p:nvSpPr>
-          <p:cNvPr id="15" name="Shape 12"/>
-          <p:cNvSpPr/>
-          <p:nvPr/>
-        </p:nvSpPr>
-        <p:spPr>
-          <a:xfrm>
-            <a:off x="502920" y="3456432"/>
-            <a:ext cx="384048" cy="384048"/>
-          </a:xfrm>
-          <a:prstGeom prst="ellipse">
-            <a:avLst/>
-          </a:prstGeom>
-          <a:solidFill>
-            <a:srgbClr val="DC756A"/>
-          </a:solidFill>
-          <a:ln/>
-        </p:spPr>
-        <p:txBody>
-          <a:bodyPr/>
-          <a:p/>
-        </p:txBody>
-      </p:sp>
-      <p:sp>
-        <p:nvSpPr>
-          <p:cNvPr id="16" name="Text 13"/>
-          <p:cNvSpPr/>
-          <p:nvPr/>
-        </p:nvSpPr>
-        <p:spPr>
-          <a:xfrm>
-            <a:off x="502920" y="3456432"/>
-            <a:ext cx="384048" cy="384048"/>
-          </a:xfrm>
-          <a:prstGeom prst="rect">
-            <a:avLst/>
-          </a:prstGeom>
-          <a:noFill/>
-          <a:ln/>
-        </p:spPr>
-        <p:txBody>
-          <a:bodyPr wrap="square" lIns="0" tIns="0" rIns="0" bIns="0" rtlCol="0" anchor="ctr"/>
-          <a:lstStyle/>
-          <a:p>
-            <a:pPr algn="ctr" indent="0" marL="0">
-              <a:buNone/>
-            </a:pPr>
-            <a:r>
-              <a:rPr lang="en-US" sz="1400" b="1" dirty="0">
-                <a:solidFill>
-                  <a:srgbClr val="FFFFFF"/>
-                </a:solidFill>
-                <a:latin typeface="Calibri" pitchFamily="34" charset="0"/>
-                <a:ea typeface="Calibri" pitchFamily="34" charset="-122"/>
-                <a:cs typeface="Calibri" pitchFamily="34" charset="-120"/>
-              </a:rPr>
-              <a:t>3</a:t>
-            </a:r>
-            <a:endParaRPr lang="en-US" sz="1400" dirty="0"/>
-          </a:p>
-        </p:txBody>
-      </p:sp>
-      <p:sp>
-        <p:nvSpPr>
-          <p:cNvPr id="17" name="Text 14"/>
-          <p:cNvSpPr/>
-          <p:nvPr/>
-        </p:nvSpPr>
-        <p:spPr>
-          <a:xfrm>
-            <a:off x="1051560" y="3383280"/>
-            <a:ext cx="10652760" cy="941832"/>
-          </a:xfrm>
-          <a:prstGeom prst="rect">
-            <a:avLst/>
-          </a:prstGeom>
-          <a:noFill/>
-          <a:ln/>
-        </p:spPr>
-        <p:txBody>
-          <a:bodyPr wrap="square" lIns="0" tIns="0" rIns="0" bIns="0" rtlCol="0" anchor="t"/>
-          <a:lstStyle/>
-          <a:p>
-            <a:pPr indent="0" marL="0">
-              <a:buNone/>
-            </a:pPr>
-            <a:r>
-              <a:rPr lang="en-US" sz="1400" b="1" dirty="0">
-                <a:solidFill>
-                  <a:srgbClr val="AC4D33"/>
-                </a:solidFill>
-                <a:latin typeface="Calibri" pitchFamily="34" charset="0"/>
-                <a:ea typeface="Calibri" pitchFamily="34" charset="-122"/>
-                <a:cs typeface="Calibri" pitchFamily="34" charset="-120"/>
-              </a:rPr>
-              <a:t>Kênh và nhiễu  —  </a:t>
-            </a:r>
-            <a:pPr indent="0" marL="0">
-              <a:buNone/>
-            </a:pPr>
-            <a:r>
-              <a:rPr lang="en-US" sz="1350" dirty="0">
-                <a:solidFill>
-                  <a:srgbClr val="3A2B28"/>
-                </a:solidFill>
-                <a:latin typeface="Calibri" pitchFamily="34" charset="0"/>
-                <a:ea typeface="Calibri" pitchFamily="34" charset="-122"/>
-                <a:cs typeface="Calibri" pitchFamily="34" charset="-120"/>
-              </a:rPr>
-              <a:t>chọn kênh sai (việc hệ trọng lại nhắn tin), chất lượng đường truyền, môi trường ồn ào.</a:t>
-            </a:r>
-            <a:endParaRPr lang="en-US" sz="1400" dirty="0"/>
-          </a:p>
-        </p:txBody>
-      </p:sp>
-      <p:sp>
-        <p:nvSpPr>
-          <p:cNvPr id="18" name="Shape 15"/>
-          <p:cNvSpPr/>
-          <p:nvPr/>
-        </p:nvSpPr>
-        <p:spPr>
-          <a:xfrm>
-            <a:off x="502920" y="4398264"/>
-            <a:ext cx="384048" cy="384048"/>
-          </a:xfrm>
-          <a:prstGeom prst="ellipse">
-            <a:avLst/>
-          </a:prstGeom>
-          <a:solidFill>
-            <a:srgbClr val="DC756A"/>
-          </a:solidFill>
-          <a:ln/>
-        </p:spPr>
-        <p:txBody>
-          <a:bodyPr/>
-          <a:p/>
-        </p:txBody>
-      </p:sp>
-      <p:sp>
-        <p:nvSpPr>
-          <p:cNvPr id="19" name="Text 16"/>
-          <p:cNvSpPr/>
-          <p:nvPr/>
-        </p:nvSpPr>
-        <p:spPr>
-          <a:xfrm>
-            <a:off x="502920" y="4398264"/>
-            <a:ext cx="384048" cy="384048"/>
-          </a:xfrm>
-          <a:prstGeom prst="rect">
-            <a:avLst/>
-          </a:prstGeom>
-          <a:noFill/>
-          <a:ln/>
-        </p:spPr>
-        <p:txBody>
-          <a:bodyPr wrap="square" lIns="0" tIns="0" rIns="0" bIns="0" rtlCol="0" anchor="ctr"/>
-          <a:lstStyle/>
-          <a:p>
-            <a:pPr algn="ctr" indent="0" marL="0">
-              <a:buNone/>
-            </a:pPr>
-            <a:r>
-              <a:rPr lang="en-US" sz="1400" b="1" dirty="0">
-                <a:solidFill>
-                  <a:srgbClr val="FFFFFF"/>
-                </a:solidFill>
-                <a:latin typeface="Calibri" pitchFamily="34" charset="0"/>
-                <a:ea typeface="Calibri" pitchFamily="34" charset="-122"/>
-                <a:cs typeface="Calibri" pitchFamily="34" charset="-120"/>
-              </a:rPr>
-              <a:t>4</a:t>
-            </a:r>
-            <a:endParaRPr lang="en-US" sz="1400" dirty="0"/>
-          </a:p>
-        </p:txBody>
-      </p:sp>
-      <p:sp>
-        <p:nvSpPr>
-          <p:cNvPr id="20" name="Text 17"/>
-          <p:cNvSpPr/>
-          <p:nvPr/>
-        </p:nvSpPr>
-        <p:spPr>
-          <a:xfrm>
-            <a:off x="1051560" y="4325112"/>
-            <a:ext cx="10652760" cy="941832"/>
-          </a:xfrm>
-          <a:prstGeom prst="rect">
-            <a:avLst/>
-          </a:prstGeom>
-          <a:noFill/>
-          <a:ln/>
-        </p:spPr>
-        <p:txBody>
-          <a:bodyPr wrap="square" lIns="0" tIns="0" rIns="0" bIns="0" rtlCol="0" anchor="t"/>
-          <a:lstStyle/>
-          <a:p>
-            <a:pPr indent="0" marL="0">
-              <a:buNone/>
-            </a:pPr>
-            <a:r>
-              <a:rPr lang="en-US" sz="1400" b="1" dirty="0">
-                <a:solidFill>
-                  <a:srgbClr val="AC4D33"/>
-                </a:solidFill>
-                <a:latin typeface="Calibri" pitchFamily="34" charset="0"/>
-                <a:ea typeface="Calibri" pitchFamily="34" charset="-122"/>
-                <a:cs typeface="Calibri" pitchFamily="34" charset="-120"/>
-              </a:rPr>
-              <a:t>Bối cảnh văn hóa – xã hội  —  </a:t>
-            </a:r>
-            <a:pPr indent="0" marL="0">
-              <a:buNone/>
-            </a:pPr>
-            <a:r>
-              <a:rPr lang="en-US" sz="1350" dirty="0">
-                <a:solidFill>
-                  <a:srgbClr val="3A2B28"/>
-                </a:solidFill>
-                <a:latin typeface="Calibri" pitchFamily="34" charset="0"/>
-                <a:ea typeface="Calibri" pitchFamily="34" charset="-122"/>
-                <a:cs typeface="Calibri" pitchFamily="34" charset="-120"/>
-              </a:rPr>
-              <a:t>chuẩn mực, tôn giáo, vùng miền, thứ bậc; điều bình thường nơi này có thể là thất lễ nơi khác.</a:t>
-            </a:r>
-            <a:endParaRPr lang="en-US" sz="1400" dirty="0"/>
-          </a:p>
-        </p:txBody>
-      </p:sp>
-      <p:sp>
-        <p:nvSpPr>
-          <p:cNvPr id="21" name="Shape 18"/>
-          <p:cNvSpPr/>
-          <p:nvPr/>
-        </p:nvSpPr>
-        <p:spPr>
-          <a:xfrm>
-            <a:off x="502920" y="5340096"/>
-            <a:ext cx="384048" cy="384048"/>
-          </a:xfrm>
-          <a:prstGeom prst="ellipse">
-            <a:avLst/>
-          </a:prstGeom>
-          <a:solidFill>
-            <a:srgbClr val="DC756A"/>
-          </a:solidFill>
-          <a:ln/>
-        </p:spPr>
-        <p:txBody>
-          <a:bodyPr/>
-          <a:p/>
-        </p:txBody>
-      </p:sp>
-      <p:sp>
-        <p:nvSpPr>
-          <p:cNvPr id="22" name="Text 19"/>
-          <p:cNvSpPr/>
-          <p:nvPr/>
-        </p:nvSpPr>
-        <p:spPr>
-          <a:xfrm>
-            <a:off x="502920" y="5340096"/>
-            <a:ext cx="384048" cy="384048"/>
-          </a:xfrm>
-          <a:prstGeom prst="rect">
-            <a:avLst/>
-          </a:prstGeom>
-          <a:noFill/>
-          <a:ln/>
-        </p:spPr>
-        <p:txBody>
-          <a:bodyPr wrap="square" lIns="0" tIns="0" rIns="0" bIns="0" rtlCol="0" anchor="ctr"/>
-          <a:lstStyle/>
-          <a:p>
-            <a:pPr algn="ctr" indent="0" marL="0">
-              <a:buNone/>
-            </a:pPr>
-            <a:r>
-              <a:rPr lang="en-US" sz="1400" b="1" dirty="0">
-                <a:solidFill>
-                  <a:srgbClr val="FFFFFF"/>
-                </a:solidFill>
-                <a:latin typeface="Calibri" pitchFamily="34" charset="0"/>
-                <a:ea typeface="Calibri" pitchFamily="34" charset="-122"/>
-                <a:cs typeface="Calibri" pitchFamily="34" charset="-120"/>
-              </a:rPr>
-              <a:t>5</a:t>
-            </a:r>
-            <a:endParaRPr lang="en-US" sz="1400" dirty="0"/>
-          </a:p>
-        </p:txBody>
-      </p:sp>
-      <p:sp>
-        <p:nvSpPr>
-          <p:cNvPr id="23" name="Text 20"/>
-          <p:cNvSpPr/>
-          <p:nvPr/>
-        </p:nvSpPr>
-        <p:spPr>
-          <a:xfrm>
-            <a:off x="1051560" y="5266944"/>
-            <a:ext cx="10652760" cy="941832"/>
-          </a:xfrm>
-          <a:prstGeom prst="rect">
-            <a:avLst/>
-          </a:prstGeom>
-          <a:noFill/>
-          <a:ln/>
-        </p:spPr>
-        <p:txBody>
-          <a:bodyPr wrap="square" lIns="0" tIns="0" rIns="0" bIns="0" rtlCol="0" anchor="t"/>
-          <a:lstStyle/>
-          <a:p>
-            <a:pPr indent="0" marL="0">
-              <a:buNone/>
-            </a:pPr>
-            <a:r>
-              <a:rPr lang="en-US" sz="1400" b="1" dirty="0">
-                <a:solidFill>
-                  <a:srgbClr val="AC4D33"/>
-                </a:solidFill>
-                <a:latin typeface="Calibri" pitchFamily="34" charset="0"/>
-                <a:ea typeface="Calibri" pitchFamily="34" charset="-122"/>
-                <a:cs typeface="Calibri" pitchFamily="34" charset="-120"/>
-              </a:rPr>
-              <a:t>Quan hệ và định kiến sẵn có  —  </a:t>
-            </a:r>
-            <a:pPr indent="0" marL="0">
-              <a:buNone/>
-            </a:pPr>
-            <a:r>
-              <a:rPr lang="en-US" sz="1350" dirty="0">
-                <a:solidFill>
-                  <a:srgbClr val="3A2B28"/>
-                </a:solidFill>
-                <a:latin typeface="Calibri" pitchFamily="34" charset="0"/>
-                <a:ea typeface="Calibri" pitchFamily="34" charset="-122"/>
-                <a:cs typeface="Calibri" pitchFamily="34" charset="-120"/>
-              </a:rPr>
-              <a:t>ấn tượng cũ, tin đồn, khoảng cách quyền lực làm méo cách diễn giải thông điệp.</a:t>
-            </a:r>
-            <a:endParaRPr lang="en-US" sz="1400" dirty="0"/>
+      <p:pic>
+        <p:nvPicPr>
+          <p:cNvPr id="9" name="Picture 8" descr="c1-yeu-to-anh-huong-nt.png"/>
+          <p:cNvPicPr>
+            <a:picLocks noChangeAspect="1"/>
+          </p:cNvPicPr>
+          <p:nvPr/>
+        </p:nvPicPr>
+        <p:blipFill>
+          <a:blip r:embed="rId4"/>
+          <a:stretch>
+            <a:fillRect/>
+          </a:stretch>
+        </p:blipFill>
+        <p:spPr>
+          <a:xfrm>
+            <a:off x="973901" y="2342007"/>
+            <a:ext cx="10243892" cy="2987802"/>
+          </a:xfrm>
+          <a:prstGeom prst="rect">
+            <a:avLst/>
+          </a:prstGeom>
+        </p:spPr>
+      </p:pic>
+      <p:sp>
+        <p:nvSpPr>
+          <p:cNvPr id="10" name="TextBox 9"/>
+          <p:cNvSpPr txBox="1"/>
+          <p:nvPr/>
+        </p:nvSpPr>
+        <p:spPr>
+          <a:xfrm>
+            <a:off x="548640" y="5402961"/>
+            <a:ext cx="11109960" cy="310896"/>
+          </a:xfrm>
+          <a:prstGeom prst="rect">
+            <a:avLst/>
+          </a:prstGeom>
+          <a:noFill/>
+        </p:spPr>
+        <p:txBody>
+          <a:bodyPr wrap="square">
+            <a:spAutoFit/>
+          </a:bodyPr>
+          <a:lstStyle/>
+          <a:p>
+            <a:pPr algn="ctr"/>
+            <a:r>
+              <a:rPr sz="1150" i="1">
+                <a:solidFill>
+                  <a:srgbClr val="8A7A76"/>
+                </a:solidFill>
+                <a:latin typeface="Calibri"/>
+              </a:rPr>
+              <a:t>Hỏng ở yếu tố nào thì sửa đúng yếu tố ấy, đừng đổ hết cho “nói chưa khéo”.</a:t>
+            </a:r>
           </a:p>
         </p:txBody>
       </p:sp>
@@ -4805,7 +4260,7 @@
         </p:nvSpPr>
         <p:spPr>
           <a:xfrm>
-            <a:off x="502920" y="1572768"/>
+            <a:off x="502920" y="1847088"/>
             <a:ext cx="384048" cy="384048"/>
           </a:xfrm>
           <a:prstGeom prst="ellipse">
@@ -4829,7 +4284,7 @@
         </p:nvSpPr>
         <p:spPr>
           <a:xfrm>
-            <a:off x="502920" y="1572768"/>
+            <a:off x="502920" y="1847088"/>
             <a:ext cx="384048" cy="384048"/>
           </a:xfrm>
           <a:prstGeom prst="rect">
@@ -4868,8 +4323,8 @@
         </p:nvSpPr>
         <p:spPr>
           <a:xfrm>
-            <a:off x="1051560" y="1499616"/>
-            <a:ext cx="10652760" cy="941832"/>
+            <a:off x="1051560" y="1773936"/>
+            <a:ext cx="10652760" cy="841248"/>
           </a:xfrm>
           <a:prstGeom prst="rect">
             <a:avLst/>
@@ -4885,7 +4340,7 @@
               <a:buNone/>
             </a:pPr>
             <a:r>
-              <a:rPr lang="en-US" sz="1400" b="1" dirty="0">
+              <a:rPr lang="en-US" sz="1800" b="1" dirty="0">
                 <a:solidFill>
                   <a:srgbClr val="AC4D33"/>
                 </a:solidFill>
@@ -4899,7 +4354,7 @@
               <a:buNone/>
             </a:pPr>
             <a:r>
-              <a:rPr lang="en-US" sz="1350" dirty="0">
+              <a:rPr lang="en-US" sz="1600" dirty="0">
                 <a:solidFill>
                   <a:srgbClr val="3A2B28"/>
                 </a:solidFill>
@@ -4907,9 +4362,9 @@
                 <a:ea typeface="Calibri" pitchFamily="34" charset="-122"/>
                 <a:cs typeface="Calibri" pitchFamily="34" charset="-120"/>
               </a:rPr>
-              <a:t>tôn trọng nhân cách, thời gian, lợi ích và sự khác biệt của đối tượng giao tiếp.</a:t>
-            </a:r>
-            <a:endParaRPr lang="en-US" sz="1400" dirty="0"/>
+              <a:t>nhân cách, thời gian, lợi ích, khác biệt</a:t>
+            </a:r>
+            <a:endParaRPr lang="en-US" sz="1800" dirty="0"/>
           </a:p>
         </p:txBody>
       </p:sp>
@@ -4921,7 +4376,7 @@
         </p:nvSpPr>
         <p:spPr>
           <a:xfrm>
-            <a:off x="502920" y="2514600"/>
+            <a:off x="502920" y="2688336"/>
             <a:ext cx="384048" cy="384048"/>
           </a:xfrm>
           <a:prstGeom prst="ellipse">
@@ -4945,7 +4400,7 @@
         </p:nvSpPr>
         <p:spPr>
           <a:xfrm>
-            <a:off x="502920" y="2514600"/>
+            <a:off x="502920" y="2688336"/>
             <a:ext cx="384048" cy="384048"/>
           </a:xfrm>
           <a:prstGeom prst="rect">
@@ -4984,8 +4439,8 @@
         </p:nvSpPr>
         <p:spPr>
           <a:xfrm>
-            <a:off x="1051560" y="2441448"/>
-            <a:ext cx="10652760" cy="941832"/>
+            <a:off x="1051560" y="2615184"/>
+            <a:ext cx="10652760" cy="841248"/>
           </a:xfrm>
           <a:prstGeom prst="rect">
             <a:avLst/>
@@ -5001,7 +4456,7 @@
               <a:buNone/>
             </a:pPr>
             <a:r>
-              <a:rPr lang="en-US" sz="1400" b="1" dirty="0">
+              <a:rPr lang="en-US" sz="1800" b="1" dirty="0">
                 <a:solidFill>
                   <a:srgbClr val="AC4D33"/>
                 </a:solidFill>
@@ -5009,13 +4464,13 @@
                 <a:ea typeface="Calibri" pitchFamily="34" charset="-122"/>
                 <a:cs typeface="Calibri" pitchFamily="34" charset="-120"/>
               </a:rPr>
-              <a:t>Thiện chí và hợp tác  —  </a:t>
+              <a:t>Thiện chí – hợp tác  —  </a:t>
             </a:r>
             <a:pPr indent="0" marL="0">
               <a:buNone/>
             </a:pPr>
             <a:r>
-              <a:rPr lang="en-US" sz="1350" dirty="0">
+              <a:rPr lang="en-US" sz="1600" dirty="0">
                 <a:solidFill>
                   <a:srgbClr val="3A2B28"/>
                 </a:solidFill>
@@ -5023,9 +4478,9 @@
                 <a:ea typeface="Calibri" pitchFamily="34" charset="-122"/>
                 <a:cs typeface="Calibri" pitchFamily="34" charset="-120"/>
               </a:rPr>
-              <a:t>hướng tới hai bên cùng có lợi; thắng một cuộc cãi có thể thua một khách hàng.</a:t>
-            </a:r>
-            <a:endParaRPr lang="en-US" sz="1400" dirty="0"/>
+              <a:t>thắng một cuộc cãi, thua một khách hàng</a:t>
+            </a:r>
+            <a:endParaRPr lang="en-US" sz="1800" dirty="0"/>
           </a:p>
         </p:txBody>
       </p:sp>
@@ -5037,7 +4492,7 @@
         </p:nvSpPr>
         <p:spPr>
           <a:xfrm>
-            <a:off x="502920" y="3456432"/>
+            <a:off x="502920" y="3529584"/>
             <a:ext cx="384048" cy="384048"/>
           </a:xfrm>
           <a:prstGeom prst="ellipse">
@@ -5061,7 +4516,7 @@
         </p:nvSpPr>
         <p:spPr>
           <a:xfrm>
-            <a:off x="502920" y="3456432"/>
+            <a:off x="502920" y="3529584"/>
             <a:ext cx="384048" cy="384048"/>
           </a:xfrm>
           <a:prstGeom prst="rect">
@@ -5100,8 +4555,8 @@
         </p:nvSpPr>
         <p:spPr>
           <a:xfrm>
-            <a:off x="1051560" y="3383280"/>
-            <a:ext cx="10652760" cy="941832"/>
+            <a:off x="1051560" y="3456432"/>
+            <a:ext cx="10652760" cy="841248"/>
           </a:xfrm>
           <a:prstGeom prst="rect">
             <a:avLst/>
@@ -5117,7 +4572,7 @@
               <a:buNone/>
             </a:pPr>
             <a:r>
-              <a:rPr lang="en-US" sz="1400" b="1" dirty="0">
+              <a:rPr lang="en-US" sz="1800" b="1" dirty="0">
                 <a:solidFill>
                   <a:srgbClr val="AC4D33"/>
                 </a:solidFill>
@@ -5125,13 +4580,13 @@
                 <a:ea typeface="Calibri" pitchFamily="34" charset="-122"/>
                 <a:cs typeface="Calibri" pitchFamily="34" charset="-120"/>
               </a:rPr>
-              <a:t>Lắng nghe và thấu hiểu trước  —  </a:t>
+              <a:t>Lắng nghe trước  —  </a:t>
             </a:r>
             <a:pPr indent="0" marL="0">
               <a:buNone/>
             </a:pPr>
             <a:r>
-              <a:rPr lang="en-US" sz="1350" dirty="0">
+              <a:rPr lang="en-US" sz="1600" dirty="0">
                 <a:solidFill>
                   <a:srgbClr val="3A2B28"/>
                 </a:solidFill>
@@ -5139,9 +4594,9 @@
                 <a:ea typeface="Calibri" pitchFamily="34" charset="-122"/>
                 <a:cs typeface="Calibri" pitchFamily="34" charset="-120"/>
               </a:rPr>
-              <a:t>hiểu đúng nhu cầu đối phương rồi mới trình bày quan điểm của mình.</a:t>
-            </a:r>
-            <a:endParaRPr lang="en-US" sz="1400" dirty="0"/>
+              <a:t>hiểu đúng rồi mới nói</a:t>
+            </a:r>
+            <a:endParaRPr lang="en-US" sz="1800" dirty="0"/>
           </a:p>
         </p:txBody>
       </p:sp>
@@ -5153,7 +4608,7 @@
         </p:nvSpPr>
         <p:spPr>
           <a:xfrm>
-            <a:off x="502920" y="4398264"/>
+            <a:off x="502920" y="4370832"/>
             <a:ext cx="384048" cy="384048"/>
           </a:xfrm>
           <a:prstGeom prst="ellipse">
@@ -5177,7 +4632,7 @@
         </p:nvSpPr>
         <p:spPr>
           <a:xfrm>
-            <a:off x="502920" y="4398264"/>
+            <a:off x="502920" y="4370832"/>
             <a:ext cx="384048" cy="384048"/>
           </a:xfrm>
           <a:prstGeom prst="rect">
@@ -5216,8 +4671,8 @@
         </p:nvSpPr>
         <p:spPr>
           <a:xfrm>
-            <a:off x="1051560" y="4325112"/>
-            <a:ext cx="10652760" cy="941832"/>
+            <a:off x="1051560" y="4297680"/>
+            <a:ext cx="10652760" cy="841248"/>
           </a:xfrm>
           <a:prstGeom prst="rect">
             <a:avLst/>
@@ -5233,7 +4688,7 @@
               <a:buNone/>
             </a:pPr>
             <a:r>
-              <a:rPr lang="en-US" sz="1400" b="1" dirty="0">
+              <a:rPr lang="en-US" sz="1800" b="1" dirty="0">
                 <a:solidFill>
                   <a:srgbClr val="AC4D33"/>
                 </a:solidFill>
@@ -5247,7 +4702,7 @@
               <a:buNone/>
             </a:pPr>
             <a:r>
-              <a:rPr lang="en-US" sz="1350" dirty="0">
+              <a:rPr lang="en-US" sz="1600" dirty="0">
                 <a:solidFill>
                   <a:srgbClr val="3A2B28"/>
                 </a:solidFill>
@@ -5255,9 +4710,9 @@
                 <a:ea typeface="Calibri" pitchFamily="34" charset="-122"/>
                 <a:cs typeface="Calibri" pitchFamily="34" charset="-120"/>
               </a:rPr>
-              <a:t>đúng vai, đúng lúc, đúng nơi, đúng kênh, đúng mức độ trang trọng.</a:t>
-            </a:r>
-            <a:endParaRPr lang="en-US" sz="1400" dirty="0"/>
+              <a:t>đúng vai, đúng lúc, đúng kênh</a:t>
+            </a:r>
+            <a:endParaRPr lang="en-US" sz="1800" dirty="0"/>
           </a:p>
         </p:txBody>
       </p:sp>
@@ -5269,7 +4724,7 @@
         </p:nvSpPr>
         <p:spPr>
           <a:xfrm>
-            <a:off x="502920" y="5340096"/>
+            <a:off x="502920" y="5212080"/>
             <a:ext cx="384048" cy="384048"/>
           </a:xfrm>
           <a:prstGeom prst="ellipse">
@@ -5293,7 +4748,7 @@
         </p:nvSpPr>
         <p:spPr>
           <a:xfrm>
-            <a:off x="502920" y="5340096"/>
+            <a:off x="502920" y="5212080"/>
             <a:ext cx="384048" cy="384048"/>
           </a:xfrm>
           <a:prstGeom prst="rect">
@@ -5332,8 +4787,8 @@
         </p:nvSpPr>
         <p:spPr>
           <a:xfrm>
-            <a:off x="1051560" y="5266944"/>
-            <a:ext cx="10652760" cy="941832"/>
+            <a:off x="1051560" y="5138928"/>
+            <a:ext cx="10652760" cy="841248"/>
           </a:xfrm>
           <a:prstGeom prst="rect">
             <a:avLst/>
@@ -5349,7 +4804,7 @@
               <a:buNone/>
             </a:pPr>
             <a:r>
-              <a:rPr lang="en-US" sz="1400" b="1" dirty="0">
+              <a:rPr lang="en-US" sz="1800" b="1" dirty="0">
                 <a:solidFill>
                   <a:srgbClr val="AC4D33"/>
                 </a:solidFill>
@@ -5357,13 +4812,13 @@
                 <a:ea typeface="Calibri" pitchFamily="34" charset="-122"/>
                 <a:cs typeface="Calibri" pitchFamily="34" charset="-120"/>
               </a:rPr>
-              <a:t>Chuẩn mực và giữ chữ tín  —  </a:t>
+              <a:t>Giữ chữ tín  —  </a:t>
             </a:r>
             <a:pPr indent="0" marL="0">
               <a:buNone/>
             </a:pPr>
             <a:r>
-              <a:rPr lang="en-US" sz="1350" dirty="0">
+              <a:rPr lang="en-US" sz="1600" dirty="0">
                 <a:solidFill>
                   <a:srgbClr val="3A2B28"/>
                 </a:solidFill>
@@ -5371,9 +4826,9 @@
                 <a:ea typeface="Calibri" pitchFamily="34" charset="-122"/>
                 <a:cs typeface="Calibri" pitchFamily="34" charset="-120"/>
               </a:rPr>
-              <a:t>lời nói và văn bản nhất quán; đã hứa là làm — chữ tín là tài sản kinh doanh.</a:t>
-            </a:r>
-            <a:endParaRPr lang="en-US" sz="1400" dirty="0"/>
+              <a:t>đã hứa là làm</a:t>
+            </a:r>
+            <a:endParaRPr lang="en-US" sz="1800" dirty="0"/>
           </a:p>
         </p:txBody>
       </p:sp>
@@ -6391,12 +5846,12 @@
         </p:nvSpPr>
         <p:spPr>
           <a:xfrm>
-            <a:off x="502920" y="1463040"/>
-            <a:ext cx="11201400" cy="1490472"/>
+            <a:off x="502920" y="1920240"/>
+            <a:ext cx="11201400" cy="1048512"/>
           </a:xfrm>
           <a:prstGeom prst="roundRect">
             <a:avLst>
-              <a:gd name="adj" fmla="val 5521"/>
+              <a:gd name="adj" fmla="val 7849"/>
             </a:avLst>
           </a:prstGeom>
           <a:solidFill>
@@ -6422,8 +5877,8 @@
         </p:nvSpPr>
         <p:spPr>
           <a:xfrm>
-            <a:off x="722376" y="1517904"/>
-            <a:ext cx="10762488" cy="1380744"/>
+            <a:off x="722376" y="1975104"/>
+            <a:ext cx="10762488" cy="938784"/>
           </a:xfrm>
           <a:prstGeom prst="rect">
             <a:avLst/>
@@ -6439,7 +5894,7 @@
               <a:buNone/>
             </a:pPr>
             <a:r>
-              <a:rPr lang="en-US" sz="1500" b="1" dirty="0">
+              <a:rPr lang="en-US" sz="2000" b="1" dirty="0">
                 <a:solidFill>
                   <a:srgbClr val="AC4D33"/>
                 </a:solidFill>
@@ -6447,16 +5902,16 @@
                 <a:ea typeface="Calibri" pitchFamily="34" charset="-122"/>
                 <a:cs typeface="Calibri" pitchFamily="34" charset="-120"/>
               </a:rPr>
-              <a:t>Giao tiếp kinh doanh có mục đích và có luật chơi</a:t>
-            </a:r>
-            <a:endParaRPr lang="en-US" sz="1500" dirty="0"/>
+              <a:t>Có mục đích và có luật chơi</a:t>
+            </a:r>
+            <a:endParaRPr lang="en-US" sz="2000" dirty="0"/>
           </a:p>
           <a:p>
             <a:pPr indent="0" marL="0">
               <a:buNone/>
             </a:pPr>
             <a:r>
-              <a:rPr lang="en-US" sz="1300" dirty="0">
+              <a:rPr lang="en-US" sz="1500" dirty="0">
                 <a:solidFill>
                   <a:srgbClr val="3A2B28"/>
                 </a:solidFill>
@@ -6464,9 +5919,9 @@
                 <a:ea typeface="Calibri" pitchFamily="34" charset="-122"/>
                 <a:cs typeface="Calibri" pitchFamily="34" charset="-120"/>
               </a:rPr>
-              <a:t>Không phải trò chuyện ngẫu nhiên: mỗi tương tác phục vụ mục tiêu, chịu chuẩn mực và ràng buộc lợi ích – pháp lý.</a:t>
-            </a:r>
-            <a:endParaRPr lang="en-US" sz="1500" dirty="0"/>
+              <a:t>Không phải trò chuyện ngẫu nhiên</a:t>
+            </a:r>
+            <a:endParaRPr lang="en-US" sz="2000" dirty="0"/>
           </a:p>
         </p:txBody>
       </p:sp>
@@ -6478,12 +5933,12 @@
         </p:nvSpPr>
         <p:spPr>
           <a:xfrm>
-            <a:off x="502920" y="3118104"/>
-            <a:ext cx="11201400" cy="1490472"/>
+            <a:off x="502920" y="3133344"/>
+            <a:ext cx="11201400" cy="1048512"/>
           </a:xfrm>
           <a:prstGeom prst="roundRect">
             <a:avLst>
-              <a:gd name="adj" fmla="val 5521"/>
+              <a:gd name="adj" fmla="val 7849"/>
             </a:avLst>
           </a:prstGeom>
           <a:solidFill>
@@ -6509,8 +5964,8 @@
         </p:nvSpPr>
         <p:spPr>
           <a:xfrm>
-            <a:off x="722376" y="3172968"/>
-            <a:ext cx="10762488" cy="1380744"/>
+            <a:off x="722376" y="3188208"/>
+            <a:ext cx="10762488" cy="938784"/>
           </a:xfrm>
           <a:prstGeom prst="rect">
             <a:avLst/>
@@ -6526,7 +5981,7 @@
               <a:buNone/>
             </a:pPr>
             <a:r>
-              <a:rPr lang="en-US" sz="1500" b="1" dirty="0">
+              <a:rPr lang="en-US" sz="2000" b="1" dirty="0">
                 <a:solidFill>
                   <a:srgbClr val="AC4D33"/>
                 </a:solidFill>
@@ -6534,16 +5989,16 @@
                 <a:ea typeface="Calibri" pitchFamily="34" charset="-122"/>
                 <a:cs typeface="Calibri" pitchFamily="34" charset="-120"/>
               </a:rPr>
-              <a:t>Hiệu quả được quyết định ở cả 5 khâu + nhiễu</a:t>
-            </a:r>
-            <a:endParaRPr lang="en-US" sz="1500" dirty="0"/>
+              <a:t>Hỏng ở khâu nào, dò lại khâu đó</a:t>
+            </a:r>
+            <a:endParaRPr lang="en-US" sz="2000" dirty="0"/>
           </a:p>
           <a:p>
             <a:pPr indent="0" marL="0">
               <a:buNone/>
             </a:pPr>
             <a:r>
-              <a:rPr lang="en-US" sz="1300" dirty="0">
+              <a:rPr lang="en-US" sz="1500" dirty="0">
                 <a:solidFill>
                   <a:srgbClr val="3A2B28"/>
                 </a:solidFill>
@@ -6551,9 +6006,9 @@
                 <a:ea typeface="Calibri" pitchFamily="34" charset="-122"/>
                 <a:cs typeface="Calibri" pitchFamily="34" charset="-120"/>
               </a:rPr>
-              <a:t>Muốn sửa một cuộc giao tiếp thất bại, hãy dò lại từng khâu: ý tưởng – mã hóa – kênh – giải mã – phản hồi.</a:t>
-            </a:r>
-            <a:endParaRPr lang="en-US" sz="1500" dirty="0"/>
+              <a:t>Năm khâu, cộng thêm nhiễu</a:t>
+            </a:r>
+            <a:endParaRPr lang="en-US" sz="2000" dirty="0"/>
           </a:p>
         </p:txBody>
       </p:sp>
@@ -6565,12 +6020,12 @@
         </p:nvSpPr>
         <p:spPr>
           <a:xfrm>
-            <a:off x="502920" y="4773168"/>
-            <a:ext cx="11201400" cy="1490472"/>
+            <a:off x="502920" y="4346448"/>
+            <a:ext cx="11201400" cy="1048512"/>
           </a:xfrm>
           <a:prstGeom prst="roundRect">
             <a:avLst>
-              <a:gd name="adj" fmla="val 5521"/>
+              <a:gd name="adj" fmla="val 7849"/>
             </a:avLst>
           </a:prstGeom>
           <a:solidFill>
@@ -6596,8 +6051,8 @@
         </p:nvSpPr>
         <p:spPr>
           <a:xfrm>
-            <a:off x="722376" y="4828032"/>
-            <a:ext cx="10762488" cy="1380744"/>
+            <a:off x="722376" y="4401312"/>
+            <a:ext cx="10762488" cy="938784"/>
           </a:xfrm>
           <a:prstGeom prst="rect">
             <a:avLst/>
@@ -6613,7 +6068,7 @@
               <a:buNone/>
             </a:pPr>
             <a:r>
-              <a:rPr lang="en-US" sz="1500" b="1" dirty="0">
+              <a:rPr lang="en-US" sz="2000" b="1" dirty="0">
                 <a:solidFill>
                   <a:srgbClr val="AC4D33"/>
                 </a:solidFill>
@@ -6623,14 +6078,14 @@
               </a:rPr>
               <a:t>Phi ngôn ngữ mạnh hơn ta nghĩ</a:t>
             </a:r>
-            <a:endParaRPr lang="en-US" sz="1500" dirty="0"/>
+            <a:endParaRPr lang="en-US" sz="2000" dirty="0"/>
           </a:p>
           <a:p>
             <a:pPr indent="0" marL="0">
               <a:buNone/>
             </a:pPr>
             <a:r>
-              <a:rPr lang="en-US" sz="1300" dirty="0">
+              <a:rPr lang="en-US" sz="1500" dirty="0">
                 <a:solidFill>
                   <a:srgbClr val="3A2B28"/>
                 </a:solidFill>
@@ -6638,9 +6093,9 @@
                 <a:ea typeface="Calibri" pitchFamily="34" charset="-122"/>
                 <a:cs typeface="Calibri" pitchFamily="34" charset="-120"/>
               </a:rPr>
-              <a:t>Trang phục, ánh mắt, giọng điệu, đúng giờ… “nói” trước và nói to hơn lời — hãy để chúng nói cùng một điều với bạn.</a:t>
-            </a:r>
-            <a:endParaRPr lang="en-US" sz="1500" dirty="0"/>
+              <a:t>Nó nói trước, và nói to hơn lời</a:t>
+            </a:r>
+            <a:endParaRPr lang="en-US" sz="2000" dirty="0"/>
           </a:p>
         </p:txBody>
       </p:sp>
@@ -9383,12 +8838,12 @@
         </p:nvSpPr>
         <p:spPr>
           <a:xfrm>
-            <a:off x="502920" y="1463040"/>
-            <a:ext cx="11201400" cy="1490472"/>
+            <a:off x="502920" y="1920240"/>
+            <a:ext cx="11201400" cy="1048512"/>
           </a:xfrm>
           <a:prstGeom prst="roundRect">
             <a:avLst>
-              <a:gd name="adj" fmla="val 5521"/>
+              <a:gd name="adj" fmla="val 7849"/>
             </a:avLst>
           </a:prstGeom>
           <a:solidFill>
@@ -9414,8 +8869,8 @@
         </p:nvSpPr>
         <p:spPr>
           <a:xfrm>
-            <a:off x="722376" y="1517904"/>
-            <a:ext cx="10762488" cy="1380744"/>
+            <a:off x="722376" y="1975104"/>
+            <a:ext cx="10762488" cy="938784"/>
           </a:xfrm>
           <a:prstGeom prst="rect">
             <a:avLst/>
@@ -9431,7 +8886,7 @@
               <a:buNone/>
             </a:pPr>
             <a:r>
-              <a:rPr lang="en-US" sz="1500" b="1" dirty="0">
+              <a:rPr lang="en-US" sz="2000" b="1" dirty="0">
                 <a:solidFill>
                   <a:srgbClr val="AC4D33"/>
                 </a:solidFill>
@@ -9439,16 +8894,16 @@
                 <a:ea typeface="Calibri" pitchFamily="34" charset="-122"/>
                 <a:cs typeface="Calibri" pitchFamily="34" charset="-120"/>
               </a:rPr>
-              <a:t>Lý thuyết – 10 buổi sáng Thứ 7 &amp; Chủ nhật (05/12/2026 – 03/01/2027, phòng C0105)</a:t>
-            </a:r>
-            <a:endParaRPr lang="en-US" sz="1500" dirty="0"/>
+              <a:t>Lý thuyết — 10 buổi</a:t>
+            </a:r>
+            <a:endParaRPr lang="en-US" sz="2000" dirty="0"/>
           </a:p>
           <a:p>
             <a:pPr indent="0" marL="0">
               <a:buNone/>
             </a:pPr>
             <a:r>
-              <a:rPr lang="en-US" sz="1250" dirty="0">
+              <a:rPr lang="en-US" sz="1500" dirty="0">
                 <a:solidFill>
                   <a:srgbClr val="3A2B28"/>
                 </a:solidFill>
@@ -9456,9 +8911,9 @@
                 <a:ea typeface="Calibri" pitchFamily="34" charset="-122"/>
                 <a:cs typeface="Calibri" pitchFamily="34" charset="-120"/>
               </a:rPr>
-              <a:t>Chương 1: Tổng quan giao tiếp  •  Chương 2: Kỹ năng giao tiếp chuyên nghiệp  •  Chương 3: Tình huống đặc thù  •  Chương 4: Đàm phán trong kinh doanh  •  Chương 5: Soạn thảo và trình bày văn bản.</a:t>
-            </a:r>
-            <a:endParaRPr lang="en-US" sz="1500" dirty="0"/>
+              <a:t>Sáng T7 &amp; CN  •  5 chương  •  phòng C0105</a:t>
+            </a:r>
+            <a:endParaRPr lang="en-US" sz="2000" dirty="0"/>
           </a:p>
         </p:txBody>
       </p:sp>
@@ -9470,12 +8925,12 @@
         </p:nvSpPr>
         <p:spPr>
           <a:xfrm>
-            <a:off x="502920" y="3118104"/>
-            <a:ext cx="11201400" cy="1490472"/>
+            <a:off x="502920" y="3133344"/>
+            <a:ext cx="11201400" cy="1048512"/>
           </a:xfrm>
           <a:prstGeom prst="roundRect">
             <a:avLst>
-              <a:gd name="adj" fmla="val 5521"/>
+              <a:gd name="adj" fmla="val 7849"/>
             </a:avLst>
           </a:prstGeom>
           <a:solidFill>
@@ -9501,8 +8956,8 @@
         </p:nvSpPr>
         <p:spPr>
           <a:xfrm>
-            <a:off x="722376" y="3172968"/>
-            <a:ext cx="10762488" cy="1380744"/>
+            <a:off x="722376" y="3188208"/>
+            <a:ext cx="10762488" cy="938784"/>
           </a:xfrm>
           <a:prstGeom prst="rect">
             <a:avLst/>
@@ -9518,7 +8973,7 @@
               <a:buNone/>
             </a:pPr>
             <a:r>
-              <a:rPr lang="en-US" sz="1500" b="1" dirty="0">
+              <a:rPr lang="en-US" sz="2000" b="1" dirty="0">
                 <a:solidFill>
                   <a:srgbClr val="AC4D33"/>
                 </a:solidFill>
@@ -9526,16 +8981,16 @@
                 <a:ea typeface="Calibri" pitchFamily="34" charset="-122"/>
                 <a:cs typeface="Calibri" pitchFamily="34" charset="-120"/>
               </a:rPr>
-              <a:t>Thực hành – chiều Thứ 7 / Chủ nhật (26/12 – 24/01, phòng A0105 Mô phỏng Kinh tế)</a:t>
-            </a:r>
-            <a:endParaRPr lang="en-US" sz="1500" dirty="0"/>
+              <a:t>Thực hành — 3 bài</a:t>
+            </a:r>
+            <a:endParaRPr lang="en-US" sz="2000" dirty="0"/>
           </a:p>
           <a:p>
             <a:pPr indent="0" marL="0">
               <a:buNone/>
             </a:pPr>
             <a:r>
-              <a:rPr lang="en-US" sz="1250" dirty="0">
+              <a:rPr lang="en-US" sz="1500" dirty="0">
                 <a:solidFill>
                   <a:srgbClr val="3A2B28"/>
                 </a:solidFill>
@@ -9543,9 +8998,9 @@
                 <a:ea typeface="Calibri" pitchFamily="34" charset="-122"/>
                 <a:cs typeface="Calibri" pitchFamily="34" charset="-120"/>
               </a:rPr>
-              <a:t>Bài 1: Thể thức văn bản  •  Bài 2: Soạn thảo văn bản hành chính  •  Bài 3: Soạn thảo văn bản thương mại.</a:t>
-            </a:r>
-            <a:endParaRPr lang="en-US" sz="1500" dirty="0"/>
+              <a:t>Chiều T7 / CN  •  phòng A0105 Mô phỏng Kinh tế</a:t>
+            </a:r>
+            <a:endParaRPr lang="en-US" sz="2000" dirty="0"/>
           </a:p>
         </p:txBody>
       </p:sp>
@@ -9557,12 +9012,12 @@
         </p:nvSpPr>
         <p:spPr>
           <a:xfrm>
-            <a:off x="502920" y="4773168"/>
-            <a:ext cx="11201400" cy="1490472"/>
+            <a:off x="502920" y="4346448"/>
+            <a:ext cx="11201400" cy="1048512"/>
           </a:xfrm>
           <a:prstGeom prst="roundRect">
             <a:avLst>
-              <a:gd name="adj" fmla="val 5521"/>
+              <a:gd name="adj" fmla="val 7849"/>
             </a:avLst>
           </a:prstGeom>
           <a:solidFill>
@@ -9588,8 +9043,8 @@
         </p:nvSpPr>
         <p:spPr>
           <a:xfrm>
-            <a:off x="722376" y="4828032"/>
-            <a:ext cx="10762488" cy="1380744"/>
+            <a:off x="722376" y="4401312"/>
+            <a:ext cx="10762488" cy="938784"/>
           </a:xfrm>
           <a:prstGeom prst="rect">
             <a:avLst/>
@@ -9605,7 +9060,7 @@
               <a:buNone/>
             </a:pPr>
             <a:r>
-              <a:rPr lang="en-US" sz="1500" b="1" dirty="0">
+              <a:rPr lang="en-US" sz="2000" b="1" dirty="0">
                 <a:solidFill>
                   <a:srgbClr val="AC4D33"/>
                 </a:solidFill>
@@ -9613,16 +9068,16 @@
                 <a:ea typeface="Calibri" pitchFamily="34" charset="-122"/>
                 <a:cs typeface="Calibri" pitchFamily="34" charset="-120"/>
               </a:rPr>
-              <a:t>Đánh giá</a:t>
-            </a:r>
-            <a:endParaRPr lang="en-US" sz="1500" dirty="0"/>
+              <a:t>Đánh giá — 3 cột điểm</a:t>
+            </a:r>
+            <a:endParaRPr lang="en-US" sz="2000" dirty="0"/>
           </a:p>
           <a:p>
             <a:pPr indent="0" marL="0">
               <a:buNone/>
             </a:pPr>
             <a:r>
-              <a:rPr lang="en-US" sz="1250" dirty="0">
+              <a:rPr lang="en-US" sz="1500" dirty="0">
                 <a:solidFill>
                   <a:srgbClr val="3A2B28"/>
                 </a:solidFill>
@@ -9630,9 +9085,9 @@
                 <a:ea typeface="Calibri" pitchFamily="34" charset="-122"/>
                 <a:cs typeface="Calibri" pitchFamily="34" charset="-120"/>
               </a:rPr>
-              <a:t>Chuyên cần (dự lớp ≥ 80%, bài tập đầy đủ)  •  Quá trình: trắc nghiệm + tự luận + thực hành  •  Cuối kỳ: bài thi thực hành.</a:t>
-            </a:r>
-            <a:endParaRPr lang="en-US" sz="1500" dirty="0"/>
+              <a:t>Chuyên cần  •  Quá trình  •  Thi cuối kỳ</a:t>
+            </a:r>
+            <a:endParaRPr lang="en-US" sz="2000" dirty="0"/>
           </a:p>
         </p:txBody>
       </p:sp>
@@ -11513,12 +10968,12 @@
         </p:nvSpPr>
         <p:spPr>
           <a:xfrm>
-            <a:off x="502920" y="1417320"/>
-            <a:ext cx="11201400" cy="1490472"/>
+            <a:off x="502920" y="1920240"/>
+            <a:ext cx="11201400" cy="1048512"/>
           </a:xfrm>
           <a:prstGeom prst="roundRect">
             <a:avLst>
-              <a:gd name="adj" fmla="val 5521"/>
+              <a:gd name="adj" fmla="val 7849"/>
             </a:avLst>
           </a:prstGeom>
           <a:solidFill>
@@ -11544,8 +10999,8 @@
         </p:nvSpPr>
         <p:spPr>
           <a:xfrm>
-            <a:off x="722376" y="1472184"/>
-            <a:ext cx="10762488" cy="1380744"/>
+            <a:off x="722376" y="1975104"/>
+            <a:ext cx="10762488" cy="938784"/>
           </a:xfrm>
           <a:prstGeom prst="rect">
             <a:avLst/>
@@ -11561,7 +11016,7 @@
               <a:buNone/>
             </a:pPr>
             <a:r>
-              <a:rPr lang="en-US" sz="1500" b="1" dirty="0">
+              <a:rPr lang="en-US" sz="2000" b="1" dirty="0">
                 <a:solidFill>
                   <a:srgbClr val="AC4D33"/>
                 </a:solidFill>
@@ -11571,14 +11026,14 @@
               </a:rPr>
               <a:t>Giao tiếp là gì?</a:t>
             </a:r>
-            <a:endParaRPr lang="en-US" sz="1500" dirty="0"/>
+            <a:endParaRPr lang="en-US" sz="2000" dirty="0"/>
           </a:p>
           <a:p>
             <a:pPr indent="0" marL="0">
               <a:buNone/>
             </a:pPr>
             <a:r>
-              <a:rPr lang="en-US" sz="1300" dirty="0">
+              <a:rPr lang="en-US" sz="1500" dirty="0">
                 <a:solidFill>
                   <a:srgbClr val="3A2B28"/>
                 </a:solidFill>
@@ -11586,9 +11041,9 @@
                 <a:ea typeface="Calibri" pitchFamily="34" charset="-122"/>
                 <a:cs typeface="Calibri" pitchFamily="34" charset="-120"/>
               </a:rPr>
-              <a:t>Quá trình trao đổi thông tin, tư tưởng, tình cảm giữa con người với con người nhằm đạt được mục đích nhất định — diễn ra bằng cả lời nói, chữ viết và hành vi không lời.</a:t>
-            </a:r>
-            <a:endParaRPr lang="en-US" sz="1500" dirty="0"/>
+              <a:t>Trao đổi thông tin để đạt một mục đích</a:t>
+            </a:r>
+            <a:endParaRPr lang="en-US" sz="2000" dirty="0"/>
           </a:p>
         </p:txBody>
       </p:sp>
@@ -11600,12 +11055,12 @@
         </p:nvSpPr>
         <p:spPr>
           <a:xfrm>
-            <a:off x="502920" y="3072384"/>
-            <a:ext cx="11201400" cy="1490472"/>
+            <a:off x="502920" y="3133344"/>
+            <a:ext cx="11201400" cy="1048512"/>
           </a:xfrm>
           <a:prstGeom prst="roundRect">
             <a:avLst>
-              <a:gd name="adj" fmla="val 5521"/>
+              <a:gd name="adj" fmla="val 7849"/>
             </a:avLst>
           </a:prstGeom>
           <a:solidFill>
@@ -11631,8 +11086,8 @@
         </p:nvSpPr>
         <p:spPr>
           <a:xfrm>
-            <a:off x="722376" y="3127248"/>
-            <a:ext cx="10762488" cy="1380744"/>
+            <a:off x="722376" y="3188208"/>
+            <a:ext cx="10762488" cy="938784"/>
           </a:xfrm>
           <a:prstGeom prst="rect">
             <a:avLst/>
@@ -11648,7 +11103,7 @@
               <a:buNone/>
             </a:pPr>
             <a:r>
-              <a:rPr lang="en-US" sz="1500" b="1" dirty="0">
+              <a:rPr lang="en-US" sz="2000" b="1" dirty="0">
                 <a:solidFill>
                   <a:srgbClr val="AC4D33"/>
                 </a:solidFill>
@@ -11656,16 +11111,16 @@
                 <a:ea typeface="Calibri" pitchFamily="34" charset="-122"/>
                 <a:cs typeface="Calibri" pitchFamily="34" charset="-120"/>
               </a:rPr>
-              <a:t>Giao tiếp trong kinh doanh</a:t>
-            </a:r>
-            <a:endParaRPr lang="en-US" sz="1500" dirty="0"/>
+              <a:t>Trong kinh doanh?</a:t>
+            </a:r>
+            <a:endParaRPr lang="en-US" sz="2000" dirty="0"/>
           </a:p>
           <a:p>
             <a:pPr indent="0" marL="0">
               <a:buNone/>
             </a:pPr>
             <a:r>
-              <a:rPr lang="en-US" sz="1300" dirty="0">
+              <a:rPr lang="en-US" sz="1500" dirty="0">
                 <a:solidFill>
                   <a:srgbClr val="3A2B28"/>
                 </a:solidFill>
@@ -11673,9 +11128,9 @@
                 <a:ea typeface="Calibri" pitchFamily="34" charset="-122"/>
                 <a:cs typeface="Calibri" pitchFamily="34" charset="-120"/>
               </a:rPr>
-              <a:t>Hoạt động giao tiếp gắn với quá trình kinh doanh: giữa doanh nghiệp với khách hàng, đối tác, cơ quan quản lý và giữa các thành viên trong tổ chức — hướng tới mục tiêu kinh doanh cụ thể.</a:t>
-            </a:r>
-            <a:endParaRPr lang="en-US" sz="1500" dirty="0"/>
+              <a:t>Gắn với mục tiêu công việc, có ràng buộc</a:t>
+            </a:r>
+            <a:endParaRPr lang="en-US" sz="2000" dirty="0"/>
           </a:p>
         </p:txBody>
       </p:sp>
@@ -11687,12 +11142,12 @@
         </p:nvSpPr>
         <p:spPr>
           <a:xfrm>
-            <a:off x="502920" y="4727448"/>
-            <a:ext cx="11201400" cy="1490472"/>
+            <a:off x="502920" y="4346448"/>
+            <a:ext cx="11201400" cy="1048512"/>
           </a:xfrm>
           <a:prstGeom prst="roundRect">
             <a:avLst>
-              <a:gd name="adj" fmla="val 5521"/>
+              <a:gd name="adj" fmla="val 7849"/>
             </a:avLst>
           </a:prstGeom>
           <a:solidFill>
@@ -11718,8 +11173,8 @@
         </p:nvSpPr>
         <p:spPr>
           <a:xfrm>
-            <a:off x="722376" y="4782312"/>
-            <a:ext cx="10762488" cy="1380744"/>
+            <a:off x="722376" y="4401312"/>
+            <a:ext cx="10762488" cy="938784"/>
           </a:xfrm>
           <a:prstGeom prst="rect">
             <a:avLst/>
@@ -11735,7 +11190,7 @@
               <a:buNone/>
             </a:pPr>
             <a:r>
-              <a:rPr lang="en-US" sz="1500" b="1" dirty="0">
+              <a:rPr lang="en-US" sz="2000" b="1" dirty="0">
                 <a:solidFill>
                   <a:srgbClr val="AC4D33"/>
                 </a:solidFill>
@@ -11745,14 +11200,14 @@
               </a:rPr>
               <a:t>Vì sao phải học?</a:t>
             </a:r>
-            <a:endParaRPr lang="en-US" sz="1500" dirty="0"/>
+            <a:endParaRPr lang="en-US" sz="2000" dirty="0"/>
           </a:p>
           <a:p>
             <a:pPr indent="0" marL="0">
               <a:buNone/>
             </a:pPr>
             <a:r>
-              <a:rPr lang="en-US" sz="1300" dirty="0">
+              <a:rPr lang="en-US" sz="1500" dirty="0">
                 <a:solidFill>
                   <a:srgbClr val="3A2B28"/>
                 </a:solidFill>
@@ -11760,9 +11215,9 @@
                 <a:ea typeface="Calibri" pitchFamily="34" charset="-122"/>
                 <a:cs typeface="Calibri" pitchFamily="34" charset="-120"/>
               </a:rPr>
-              <a:t>Khảo sát nhà tuyển dụng nhiều năm liền xếp kỹ năng giao tiếp trong nhóm kỹ năng được yêu cầu cao nhất — bán được ý tưởng trước khi bán được sản phẩm.</a:t>
-            </a:r>
-            <a:endParaRPr lang="en-US" sz="1500" dirty="0"/>
+              <a:t>Nhà tuyển dụng xếp vào nhóm đòi hỏi cao nhất</a:t>
+            </a:r>
+            <a:endParaRPr lang="en-US" sz="2000" dirty="0"/>
           </a:p>
         </p:txBody>
       </p:sp>
@@ -12049,12 +11504,12 @@
         </p:nvSpPr>
         <p:spPr>
           <a:xfrm>
-            <a:off x="502920" y="1417320"/>
-            <a:ext cx="5509260" cy="2308860"/>
+            <a:off x="502920" y="1828800"/>
+            <a:ext cx="5509260" cy="1737360"/>
           </a:xfrm>
           <a:prstGeom prst="roundRect">
             <a:avLst>
-              <a:gd name="adj" fmla="val 3564"/>
+              <a:gd name="adj" fmla="val 4737"/>
             </a:avLst>
           </a:prstGeom>
           <a:solidFill>
@@ -12080,8 +11535,8 @@
         </p:nvSpPr>
         <p:spPr>
           <a:xfrm>
-            <a:off x="722376" y="1490472"/>
-            <a:ext cx="5070348" cy="2162556"/>
+            <a:off x="722376" y="1901952"/>
+            <a:ext cx="5070348" cy="1591056"/>
           </a:xfrm>
           <a:prstGeom prst="rect">
             <a:avLst/>
@@ -12105,7 +11560,7 @@
                 <a:ea typeface="Calibri" pitchFamily="34" charset="-122"/>
                 <a:cs typeface="Calibri" pitchFamily="34" charset="-120"/>
               </a:rPr>
-              <a:t>Luôn có mục đích rõ ràng</a:t>
+              <a:t>Luôn có mục đích</a:t>
             </a:r>
             <a:endParaRPr lang="en-US" sz="1500" dirty="0"/>
           </a:p>
@@ -12122,7 +11577,7 @@
                 <a:ea typeface="Calibri" pitchFamily="34" charset="-122"/>
                 <a:cs typeface="Calibri" pitchFamily="34" charset="-120"/>
               </a:rPr>
-              <a:t>Mỗi cuộc gặp, cuộc gọi, email đều phục vụ một mục tiêu công việc: bán hàng, hợp tác, giải quyết vấn đề.</a:t>
+              <a:t>Mỗi cuộc gặp phục vụ một mục tiêu công việc</a:t>
             </a:r>
             <a:endParaRPr lang="en-US" sz="1500" dirty="0"/>
           </a:p>
@@ -12136,12 +11591,12 @@
         </p:nvSpPr>
         <p:spPr>
           <a:xfrm>
-            <a:off x="6195060" y="1417320"/>
-            <a:ext cx="5509260" cy="2308860"/>
+            <a:off x="6195060" y="1828800"/>
+            <a:ext cx="5509260" cy="1737360"/>
           </a:xfrm>
           <a:prstGeom prst="roundRect">
             <a:avLst>
-              <a:gd name="adj" fmla="val 3564"/>
+              <a:gd name="adj" fmla="val 4737"/>
             </a:avLst>
           </a:prstGeom>
           <a:solidFill>
@@ -12167,8 +11622,8 @@
         </p:nvSpPr>
         <p:spPr>
           <a:xfrm>
-            <a:off x="6414516" y="1490472"/>
-            <a:ext cx="5070348" cy="2162556"/>
+            <a:off x="6414516" y="1901952"/>
+            <a:ext cx="5070348" cy="1591056"/>
           </a:xfrm>
           <a:prstGeom prst="rect">
             <a:avLst/>
@@ -12192,7 +11647,7 @@
                 <a:ea typeface="Calibri" pitchFamily="34" charset="-122"/>
                 <a:cs typeface="Calibri" pitchFamily="34" charset="-120"/>
               </a:rPr>
-              <a:t>Đa dạng chủ thể và vai vế</a:t>
+              <a:t>Đa dạng chủ thể</a:t>
             </a:r>
             <a:endParaRPr lang="en-US" sz="1500" dirty="0"/>
           </a:p>
@@ -12209,7 +11664,7 @@
                 <a:ea typeface="Calibri" pitchFamily="34" charset="-122"/>
                 <a:cs typeface="Calibri" pitchFamily="34" charset="-120"/>
               </a:rPr>
-              <a:t>Cùng lúc giao tiếp với khách hàng, cấp trên, đồng nghiệp, cơ quan nhà nước — mỗi đối tượng một chuẩn mực riêng.</a:t>
+              <a:t>Mỗi đối tượng một chuẩn mực riêng</a:t>
             </a:r>
             <a:endParaRPr lang="en-US" sz="1500" dirty="0"/>
           </a:p>
@@ -12223,12 +11678,12 @@
         </p:nvSpPr>
         <p:spPr>
           <a:xfrm>
-            <a:off x="502920" y="3909060"/>
-            <a:ext cx="5509260" cy="2308860"/>
+            <a:off x="502920" y="3749040"/>
+            <a:ext cx="5509260" cy="1737360"/>
           </a:xfrm>
           <a:prstGeom prst="roundRect">
             <a:avLst>
-              <a:gd name="adj" fmla="val 3564"/>
+              <a:gd name="adj" fmla="val 4737"/>
             </a:avLst>
           </a:prstGeom>
           <a:solidFill>
@@ -12254,8 +11709,8 @@
         </p:nvSpPr>
         <p:spPr>
           <a:xfrm>
-            <a:off x="722376" y="3982212"/>
-            <a:ext cx="5070348" cy="2162556"/>
+            <a:off x="722376" y="3822192"/>
+            <a:ext cx="5070348" cy="1591056"/>
           </a:xfrm>
           <a:prstGeom prst="rect">
             <a:avLst/>
@@ -12279,7 +11734,7 @@
                 <a:ea typeface="Calibri" pitchFamily="34" charset="-122"/>
                 <a:cs typeface="Calibri" pitchFamily="34" charset="-120"/>
               </a:rPr>
-              <a:t>Chịu ràng buộc lợi ích và pháp lý</a:t>
+              <a:t>Ràng buộc lợi ích – pháp lý</a:t>
             </a:r>
             <a:endParaRPr lang="en-US" sz="1500" dirty="0"/>
           </a:p>
@@ -12296,7 +11751,7 @@
                 <a:ea typeface="Calibri" pitchFamily="34" charset="-122"/>
                 <a:cs typeface="Calibri" pitchFamily="34" charset="-120"/>
               </a:rPr>
-              <a:t>Lời nói, văn bản trong kinh doanh có thể tạo ra nghĩa vụ, hợp đồng, trách nhiệm — phải cẩn trọng và chuẩn mực.</a:t>
+              <a:t>Lời nói có thể tạo ra nghĩa vụ</a:t>
             </a:r>
             <a:endParaRPr lang="en-US" sz="1500" dirty="0"/>
           </a:p>
@@ -12310,12 +11765,12 @@
         </p:nvSpPr>
         <p:spPr>
           <a:xfrm>
-            <a:off x="6195060" y="3909060"/>
-            <a:ext cx="5509260" cy="2308860"/>
+            <a:off x="6195060" y="3749040"/>
+            <a:ext cx="5509260" cy="1737360"/>
           </a:xfrm>
           <a:prstGeom prst="roundRect">
             <a:avLst>
-              <a:gd name="adj" fmla="val 3564"/>
+              <a:gd name="adj" fmla="val 4737"/>
             </a:avLst>
           </a:prstGeom>
           <a:solidFill>
@@ -12341,8 +11796,8 @@
         </p:nvSpPr>
         <p:spPr>
           <a:xfrm>
-            <a:off x="6414516" y="3982212"/>
-            <a:ext cx="5070348" cy="2162556"/>
+            <a:off x="6414516" y="3822192"/>
+            <a:ext cx="5070348" cy="1591056"/>
           </a:xfrm>
           <a:prstGeom prst="rect">
             <a:avLst/>
@@ -12366,7 +11821,7 @@
                 <a:ea typeface="Calibri" pitchFamily="34" charset="-122"/>
                 <a:cs typeface="Calibri" pitchFamily="34" charset="-120"/>
               </a:rPr>
-              <a:t>Vừa khoa học, vừa nghệ thuật</a:t>
+              <a:t>Khoa học và nghệ thuật</a:t>
             </a:r>
             <a:endParaRPr lang="en-US" sz="1500" dirty="0"/>
           </a:p>
@@ -12383,7 +11838,7 @@
                 <a:ea typeface="Calibri" pitchFamily="34" charset="-122"/>
                 <a:cs typeface="Calibri" pitchFamily="34" charset="-120"/>
               </a:rPr>
-              <a:t>Có nguyên tắc, quy trình để học; nhưng vận dụng linh hoạt theo con người, hoàn cảnh mới tạo nên hiệu quả.</a:t>
+              <a:t>Có nguyên tắc, nhưng cần linh hoạt</a:t>
             </a:r>
             <a:endParaRPr lang="en-US" sz="1500" dirty="0"/>
           </a:p>
@@ -12680,7 +12135,7 @@
         </p:blipFill>
         <p:spPr>
           <a:xfrm>
-            <a:off x="884939" y="1481328"/>
+            <a:off x="884939" y="1988404"/>
             <a:ext cx="10421815" cy="3695007"/>
           </a:xfrm>
           <a:prstGeom prst="rect">
@@ -12696,7 +12151,7 @@
         </p:nvSpPr>
         <p:spPr>
           <a:xfrm>
-            <a:off x="548640" y="5249487"/>
+            <a:off x="548640" y="5756563"/>
             <a:ext cx="11109960" cy="310896"/>
           </a:xfrm>
           <a:prstGeom prst="rect">
@@ -13006,12 +12461,12 @@
         </p:nvSpPr>
         <p:spPr>
           <a:xfrm>
-            <a:off x="502920" y="1417320"/>
-            <a:ext cx="11201400" cy="1490472"/>
+            <a:off x="502920" y="1920240"/>
+            <a:ext cx="11201400" cy="1048512"/>
           </a:xfrm>
           <a:prstGeom prst="roundRect">
             <a:avLst>
-              <a:gd name="adj" fmla="val 5521"/>
+              <a:gd name="adj" fmla="val 7849"/>
             </a:avLst>
           </a:prstGeom>
           <a:solidFill>
@@ -13037,8 +12492,8 @@
         </p:nvSpPr>
         <p:spPr>
           <a:xfrm>
-            <a:off x="722376" y="1472184"/>
-            <a:ext cx="10762488" cy="1380744"/>
+            <a:off x="722376" y="1975104"/>
+            <a:ext cx="10762488" cy="938784"/>
           </a:xfrm>
           <a:prstGeom prst="rect">
             <a:avLst/>
@@ -13054,7 +12509,7 @@
               <a:buNone/>
             </a:pPr>
             <a:r>
-              <a:rPr lang="en-US" sz="1500" b="1" dirty="0">
+              <a:rPr lang="en-US" sz="2000" b="1" dirty="0">
                 <a:solidFill>
                   <a:srgbClr val="AC4D33"/>
                 </a:solidFill>
@@ -13064,14 +12519,14 @@
               </a:rPr>
               <a:t>Ngôn ngữ nói</a:t>
             </a:r>
-            <a:endParaRPr lang="en-US" sz="1500" dirty="0"/>
+            <a:endParaRPr lang="en-US" sz="2000" dirty="0"/>
           </a:p>
           <a:p>
             <a:pPr indent="0" marL="0">
               <a:buNone/>
             </a:pPr>
             <a:r>
-              <a:rPr lang="en-US" sz="1300" dirty="0">
+              <a:rPr lang="en-US" sz="1500" dirty="0">
                 <a:solidFill>
                   <a:srgbClr val="3A2B28"/>
                 </a:solidFill>
@@ -13079,9 +12534,9 @@
                 <a:ea typeface="Calibri" pitchFamily="34" charset="-122"/>
                 <a:cs typeface="Calibri" pitchFamily="34" charset="-120"/>
               </a:rPr>
-              <a:t>Trực tiếp, nhanh, giàu cảm xúc, phản hồi tức thì — nhưng “lời nói gió bay”, dễ sai sót khi thiếu chuẩn bị. Chú ý: phát âm, tốc độ, âm lượng, ngữ điệu.</a:t>
-            </a:r>
-            <a:endParaRPr lang="en-US" sz="1500" dirty="0"/>
+              <a:t>Nhanh, giàu cảm xúc — nhưng lời nói gió bay</a:t>
+            </a:r>
+            <a:endParaRPr lang="en-US" sz="2000" dirty="0"/>
           </a:p>
         </p:txBody>
       </p:sp>
@@ -13093,12 +12548,12 @@
         </p:nvSpPr>
         <p:spPr>
           <a:xfrm>
-            <a:off x="502920" y="3072384"/>
-            <a:ext cx="11201400" cy="1490472"/>
+            <a:off x="502920" y="3133344"/>
+            <a:ext cx="11201400" cy="1048512"/>
           </a:xfrm>
           <a:prstGeom prst="roundRect">
             <a:avLst>
-              <a:gd name="adj" fmla="val 5521"/>
+              <a:gd name="adj" fmla="val 7849"/>
             </a:avLst>
           </a:prstGeom>
           <a:solidFill>
@@ -13124,8 +12579,8 @@
         </p:nvSpPr>
         <p:spPr>
           <a:xfrm>
-            <a:off x="722376" y="3127248"/>
-            <a:ext cx="10762488" cy="1380744"/>
+            <a:off x="722376" y="3188208"/>
+            <a:ext cx="10762488" cy="938784"/>
           </a:xfrm>
           <a:prstGeom prst="rect">
             <a:avLst/>
@@ -13141,7 +12596,7 @@
               <a:buNone/>
             </a:pPr>
             <a:r>
-              <a:rPr lang="en-US" sz="1500" b="1" dirty="0">
+              <a:rPr lang="en-US" sz="2000" b="1" dirty="0">
                 <a:solidFill>
                   <a:srgbClr val="AC4D33"/>
                 </a:solidFill>
@@ -13151,14 +12606,14 @@
               </a:rPr>
               <a:t>Ngôn ngữ viết</a:t>
             </a:r>
-            <a:endParaRPr lang="en-US" sz="1500" dirty="0"/>
+            <a:endParaRPr lang="en-US" sz="2000" dirty="0"/>
           </a:p>
           <a:p>
             <a:pPr indent="0" marL="0">
               <a:buNone/>
             </a:pPr>
             <a:r>
-              <a:rPr lang="en-US" sz="1300" dirty="0">
+              <a:rPr lang="en-US" sz="1500" dirty="0">
                 <a:solidFill>
                   <a:srgbClr val="3A2B28"/>
                 </a:solidFill>
@@ -13166,9 +12621,9 @@
                 <a:ea typeface="Calibri" pitchFamily="34" charset="-122"/>
                 <a:cs typeface="Calibri" pitchFamily="34" charset="-120"/>
               </a:rPr>
-              <a:t>Chính xác, có thể cân nhắc kỹ, lưu lại làm bằng chứng — nền tảng của Chương 5 (soạn thảo văn bản). Chú ý: đúng chính tả, đúng thể thức, đúng văn phong.</a:t>
-            </a:r>
-            <a:endParaRPr lang="en-US" sz="1500" dirty="0"/>
+              <a:t>Chính xác, lưu được — nền tảng của Chương 5</a:t>
+            </a:r>
+            <a:endParaRPr lang="en-US" sz="2000" dirty="0"/>
           </a:p>
         </p:txBody>
       </p:sp>
@@ -13180,12 +12635,12 @@
         </p:nvSpPr>
         <p:spPr>
           <a:xfrm>
-            <a:off x="502920" y="4727448"/>
-            <a:ext cx="11201400" cy="1490472"/>
+            <a:off x="502920" y="4346448"/>
+            <a:ext cx="11201400" cy="1048512"/>
           </a:xfrm>
           <a:prstGeom prst="roundRect">
             <a:avLst>
-              <a:gd name="adj" fmla="val 5521"/>
+              <a:gd name="adj" fmla="val 7849"/>
             </a:avLst>
           </a:prstGeom>
           <a:solidFill>
@@ -13211,8 +12666,8 @@
         </p:nvSpPr>
         <p:spPr>
           <a:xfrm>
-            <a:off x="722376" y="4782312"/>
-            <a:ext cx="10762488" cy="1380744"/>
+            <a:off x="722376" y="4401312"/>
+            <a:ext cx="10762488" cy="938784"/>
           </a:xfrm>
           <a:prstGeom prst="rect">
             <a:avLst/>
@@ -13228,7 +12683,7 @@
               <a:buNone/>
             </a:pPr>
             <a:r>
-              <a:rPr lang="en-US" sz="1500" b="1" dirty="0">
+              <a:rPr lang="en-US" sz="2000" b="1" dirty="0">
                 <a:solidFill>
                   <a:srgbClr val="AC4D33"/>
                 </a:solidFill>
@@ -13236,16 +12691,16 @@
                 <a:ea typeface="Calibri" pitchFamily="34" charset="-122"/>
                 <a:cs typeface="Calibri" pitchFamily="34" charset="-120"/>
               </a:rPr>
-              <a:t>Nguyên tắc dùng từ trong kinh doanh</a:t>
-            </a:r>
-            <a:endParaRPr lang="en-US" sz="1500" dirty="0"/>
+              <a:t>Nguyên tắc dùng từ</a:t>
+            </a:r>
+            <a:endParaRPr lang="en-US" sz="2000" dirty="0"/>
           </a:p>
           <a:p>
             <a:pPr indent="0" marL="0">
               <a:buNone/>
             </a:pPr>
             <a:r>
-              <a:rPr lang="en-US" sz="1300" dirty="0">
+              <a:rPr lang="en-US" sz="1500" dirty="0">
                 <a:solidFill>
                   <a:srgbClr val="3A2B28"/>
                 </a:solidFill>
@@ -13253,9 +12708,9 @@
                 <a:ea typeface="Calibri" pitchFamily="34" charset="-122"/>
                 <a:cs typeface="Calibri" pitchFamily="34" charset="-120"/>
               </a:rPr>
-              <a:t>Rõ ràng, lịch sự, tích cực; tránh khẩu ngữ, tiếng lóng, từ đa nghĩa; ưu tiên câu chủ động, ngắn gọn.</a:t>
-            </a:r>
-            <a:endParaRPr lang="en-US" sz="1500" dirty="0"/>
+              <a:t>Rõ  •  lịch sự  •  tích cực  •  ngắn gọn</a:t>
+            </a:r>
+            <a:endParaRPr lang="en-US" sz="2000" dirty="0"/>
           </a:p>
         </p:txBody>
       </p:sp>
@@ -13542,12 +12997,12 @@
         </p:nvSpPr>
         <p:spPr>
           <a:xfrm>
-            <a:off x="502920" y="1417320"/>
-            <a:ext cx="5509260" cy="2011680"/>
+            <a:off x="502920" y="1600200"/>
+            <a:ext cx="5509260" cy="1280160"/>
           </a:xfrm>
           <a:prstGeom prst="roundRect">
             <a:avLst>
-              <a:gd name="adj" fmla="val 4091"/>
+              <a:gd name="adj" fmla="val 6429"/>
             </a:avLst>
           </a:prstGeom>
           <a:solidFill>
@@ -13573,8 +13028,8 @@
         </p:nvSpPr>
         <p:spPr>
           <a:xfrm>
-            <a:off x="722376" y="1490472"/>
-            <a:ext cx="5070348" cy="1865376"/>
+            <a:off x="722376" y="1673352"/>
+            <a:ext cx="5070348" cy="1133856"/>
           </a:xfrm>
           <a:prstGeom prst="rect">
             <a:avLst/>
@@ -13590,7 +13045,7 @@
               <a:buNone/>
             </a:pPr>
             <a:r>
-              <a:rPr lang="en-US" sz="1500" b="1" dirty="0">
+              <a:rPr lang="en-US" sz="1700" b="1" dirty="0">
                 <a:solidFill>
                   <a:srgbClr val="AC4D33"/>
                 </a:solidFill>
@@ -13598,16 +13053,16 @@
                 <a:ea typeface="Calibri" pitchFamily="34" charset="-122"/>
                 <a:cs typeface="Calibri" pitchFamily="34" charset="-120"/>
               </a:rPr>
-              <a:t>Ánh mắt – nét mặt – nụ cười</a:t>
-            </a:r>
-            <a:endParaRPr lang="en-US" sz="1500" dirty="0"/>
+              <a:t>Ánh mắt – nét mặt</a:t>
+            </a:r>
+            <a:endParaRPr lang="en-US" sz="1700" dirty="0"/>
           </a:p>
           <a:p>
             <a:pPr indent="0" marL="0">
               <a:buNone/>
             </a:pPr>
             <a:r>
-              <a:rPr lang="en-US" sz="1250" dirty="0">
+              <a:rPr lang="en-US" sz="1400" dirty="0">
                 <a:solidFill>
                   <a:srgbClr val="3A2B28"/>
                 </a:solidFill>
@@ -13615,9 +13070,9 @@
                 <a:ea typeface="Calibri" pitchFamily="34" charset="-122"/>
                 <a:cs typeface="Calibri" pitchFamily="34" charset="-120"/>
               </a:rPr>
-              <a:t>Kênh biểu cảm mạnh nhất; giao tiếp bằng mắt thể hiện tự tin và tôn trọng người đối diện.</a:t>
-            </a:r>
-            <a:endParaRPr lang="en-US" sz="1500" dirty="0"/>
+              <a:t>Kênh biểu cảm mạnh nhất</a:t>
+            </a:r>
+            <a:endParaRPr lang="en-US" sz="1700" dirty="0"/>
           </a:p>
         </p:txBody>
       </p:sp>
@@ -13629,12 +13084,12 @@
         </p:nvSpPr>
         <p:spPr>
           <a:xfrm>
-            <a:off x="6195060" y="1417320"/>
-            <a:ext cx="5509260" cy="2011680"/>
+            <a:off x="6195060" y="1600200"/>
+            <a:ext cx="5509260" cy="1280160"/>
           </a:xfrm>
           <a:prstGeom prst="roundRect">
             <a:avLst>
-              <a:gd name="adj" fmla="val 4091"/>
+              <a:gd name="adj" fmla="val 6429"/>
             </a:avLst>
           </a:prstGeom>
           <a:solidFill>
@@ -13660,8 +13115,8 @@
         </p:nvSpPr>
         <p:spPr>
           <a:xfrm>
-            <a:off x="6414516" y="1490472"/>
-            <a:ext cx="5070348" cy="1865376"/>
+            <a:off x="6414516" y="1673352"/>
+            <a:ext cx="5070348" cy="1133856"/>
           </a:xfrm>
           <a:prstGeom prst="rect">
             <a:avLst/>
@@ -13677,7 +13132,7 @@
               <a:buNone/>
             </a:pPr>
             <a:r>
-              <a:rPr lang="en-US" sz="1500" b="1" dirty="0">
+              <a:rPr lang="en-US" sz="1700" b="1" dirty="0">
                 <a:solidFill>
                   <a:srgbClr val="AC4D33"/>
                 </a:solidFill>
@@ -13685,16 +13140,16 @@
                 <a:ea typeface="Calibri" pitchFamily="34" charset="-122"/>
                 <a:cs typeface="Calibri" pitchFamily="34" charset="-120"/>
               </a:rPr>
-              <a:t>Cử chỉ – tư thế – dáng đi</a:t>
-            </a:r>
-            <a:endParaRPr lang="en-US" sz="1500" dirty="0"/>
+              <a:t>Cử chỉ – tư thế</a:t>
+            </a:r>
+            <a:endParaRPr lang="en-US" sz="1700" dirty="0"/>
           </a:p>
           <a:p>
             <a:pPr indent="0" marL="0">
               <a:buNone/>
             </a:pPr>
             <a:r>
-              <a:rPr lang="en-US" sz="1250" dirty="0">
+              <a:rPr lang="en-US" sz="1400" dirty="0">
                 <a:solidFill>
                   <a:srgbClr val="3A2B28"/>
                 </a:solidFill>
@@ -13702,9 +13157,9 @@
                 <a:ea typeface="Calibri" pitchFamily="34" charset="-122"/>
                 <a:cs typeface="Calibri" pitchFamily="34" charset="-120"/>
               </a:rPr>
-              <a:t>Tư thế thẳng, cởi mở tạo thiện cảm; khoanh tay, nhìn đồng hồ phát tín hiệu khép kín, sốt ruột.</a:t>
-            </a:r>
-            <a:endParaRPr lang="en-US" sz="1500" dirty="0"/>
+              <a:t>Thẳng và cởi mở tạo thiện cảm</a:t>
+            </a:r>
+            <a:endParaRPr lang="en-US" sz="1700" dirty="0"/>
           </a:p>
         </p:txBody>
       </p:sp>
@@ -13716,12 +13171,12 @@
         </p:nvSpPr>
         <p:spPr>
           <a:xfrm>
-            <a:off x="502920" y="3611880"/>
-            <a:ext cx="5509260" cy="2011680"/>
+            <a:off x="502920" y="3063240"/>
+            <a:ext cx="5509260" cy="1280160"/>
           </a:xfrm>
           <a:prstGeom prst="roundRect">
             <a:avLst>
-              <a:gd name="adj" fmla="val 4091"/>
+              <a:gd name="adj" fmla="val 6429"/>
             </a:avLst>
           </a:prstGeom>
           <a:solidFill>
@@ -13747,8 +13202,8 @@
         </p:nvSpPr>
         <p:spPr>
           <a:xfrm>
-            <a:off x="722376" y="3685032"/>
-            <a:ext cx="5070348" cy="1865376"/>
+            <a:off x="722376" y="3136392"/>
+            <a:ext cx="5070348" cy="1133856"/>
           </a:xfrm>
           <a:prstGeom prst="rect">
             <a:avLst/>
@@ -13764,7 +13219,7 @@
               <a:buNone/>
             </a:pPr>
             <a:r>
-              <a:rPr lang="en-US" sz="1500" b="1" dirty="0">
+              <a:rPr lang="en-US" sz="1700" b="1" dirty="0">
                 <a:solidFill>
                   <a:srgbClr val="AC4D33"/>
                 </a:solidFill>
@@ -13772,16 +13227,16 @@
                 <a:ea typeface="Calibri" pitchFamily="34" charset="-122"/>
                 <a:cs typeface="Calibri" pitchFamily="34" charset="-120"/>
               </a:rPr>
-              <a:t>Khoảng cách và không gian</a:t>
-            </a:r>
-            <a:endParaRPr lang="en-US" sz="1500" dirty="0"/>
+              <a:t>Khoảng cách</a:t>
+            </a:r>
+            <a:endParaRPr lang="en-US" sz="1700" dirty="0"/>
           </a:p>
           <a:p>
             <a:pPr indent="0" marL="0">
               <a:buNone/>
             </a:pPr>
             <a:r>
-              <a:rPr lang="en-US" sz="1250" dirty="0">
+              <a:rPr lang="en-US" sz="1400" dirty="0">
                 <a:solidFill>
                   <a:srgbClr val="3A2B28"/>
                 </a:solidFill>
@@ -13789,9 +13244,9 @@
                 <a:ea typeface="Calibri" pitchFamily="34" charset="-122"/>
                 <a:cs typeface="Calibri" pitchFamily="34" charset="-120"/>
               </a:rPr>
-              <a:t>Thân mật (&lt;0,5m) – cá nhân – xã giao (1,2–3,5m) – công cộng; chọn sai khoảng cách gây khó chịu.</a:t>
-            </a:r>
-            <a:endParaRPr lang="en-US" sz="1500" dirty="0"/>
+              <a:t>Thân mật · cá nhân · xã giao · công cộng</a:t>
+            </a:r>
+            <a:endParaRPr lang="en-US" sz="1700" dirty="0"/>
           </a:p>
         </p:txBody>
       </p:sp>
@@ -13803,12 +13258,12 @@
         </p:nvSpPr>
         <p:spPr>
           <a:xfrm>
-            <a:off x="6195060" y="3611880"/>
-            <a:ext cx="5509260" cy="2011680"/>
+            <a:off x="6195060" y="3063240"/>
+            <a:ext cx="5509260" cy="1280160"/>
           </a:xfrm>
           <a:prstGeom prst="roundRect">
             <a:avLst>
-              <a:gd name="adj" fmla="val 4091"/>
+              <a:gd name="adj" fmla="val 6429"/>
             </a:avLst>
           </a:prstGeom>
           <a:solidFill>
@@ -13834,8 +13289,8 @@
         </p:nvSpPr>
         <p:spPr>
           <a:xfrm>
-            <a:off x="6414516" y="3685032"/>
-            <a:ext cx="5070348" cy="1865376"/>
+            <a:off x="6414516" y="3136392"/>
+            <a:ext cx="5070348" cy="1133856"/>
           </a:xfrm>
           <a:prstGeom prst="rect">
             <a:avLst/>
@@ -13851,7 +13306,7 @@
               <a:buNone/>
             </a:pPr>
             <a:r>
-              <a:rPr lang="en-US" sz="1500" b="1" dirty="0">
+              <a:rPr lang="en-US" sz="1700" b="1" dirty="0">
                 <a:solidFill>
                   <a:srgbClr val="AC4D33"/>
                 </a:solidFill>
@@ -13859,16 +13314,16 @@
                 <a:ea typeface="Calibri" pitchFamily="34" charset="-122"/>
                 <a:cs typeface="Calibri" pitchFamily="34" charset="-120"/>
               </a:rPr>
-              <a:t>Trang phục – giọng điệu – thời gian</a:t>
-            </a:r>
-            <a:endParaRPr lang="en-US" sz="1500" dirty="0"/>
+              <a:t>Trang phục – giọng – giờ giấc</a:t>
+            </a:r>
+            <a:endParaRPr lang="en-US" sz="1700" dirty="0"/>
           </a:p>
           <a:p>
             <a:pPr indent="0" marL="0">
               <a:buNone/>
             </a:pPr>
             <a:r>
-              <a:rPr lang="en-US" sz="1250" dirty="0">
+              <a:rPr lang="en-US" sz="1400" dirty="0">
                 <a:solidFill>
                   <a:srgbClr val="3A2B28"/>
                 </a:solidFill>
@@ -13876,9 +13331,9 @@
                 <a:ea typeface="Calibri" pitchFamily="34" charset="-122"/>
                 <a:cs typeface="Calibri" pitchFamily="34" charset="-120"/>
               </a:rPr>
-              <a:t>Ăn mặc phù hợp bối cảnh; giọng điệu quyết định cách thông điệp được đón nhận; đúng giờ cũng là thông điệp.</a:t>
-            </a:r>
-            <a:endParaRPr lang="en-US" sz="1500" dirty="0"/>
+              <a:t>Đúng giờ cũng là một thông điệp</a:t>
+            </a:r>
+            <a:endParaRPr lang="en-US" sz="1700" dirty="0"/>
           </a:p>
         </p:txBody>
       </p:sp>
@@ -13890,8 +13345,8 @@
         </p:nvSpPr>
         <p:spPr>
           <a:xfrm>
-            <a:off x="502920" y="5760720"/>
-            <a:ext cx="11201400" cy="502920"/>
+            <a:off x="777240" y="4617720"/>
+            <a:ext cx="3566160" cy="868680"/>
           </a:xfrm>
           <a:prstGeom prst="rect">
             <a:avLst/>
@@ -13903,7 +13358,241 @@
           <a:bodyPr wrap="square" lIns="0" tIns="0" rIns="0" bIns="0" rtlCol="0" anchor="ctr"/>
           <a:lstStyle/>
           <a:p>
-            <a:pPr indent="0" marL="0">
+            <a:pPr algn="ctr" indent="0" marL="0">
+              <a:buNone/>
+            </a:pPr>
+            <a:r>
+              <a:rPr lang="en-US" sz="4400" b="1" dirty="0">
+                <a:solidFill>
+                  <a:srgbClr val="DC756A"/>
+                </a:solidFill>
+                <a:latin typeface="Cambria" pitchFamily="34" charset="0"/>
+                <a:ea typeface="Cambria" pitchFamily="34" charset="-122"/>
+                <a:cs typeface="Cambria" pitchFamily="34" charset="-120"/>
+              </a:rPr>
+              <a:t>7%</a:t>
+            </a:r>
+            <a:endParaRPr lang="en-US" sz="4400" dirty="0"/>
+          </a:p>
+        </p:txBody>
+      </p:sp>
+      <p:sp>
+        <p:nvSpPr>
+          <p:cNvPr id="18" name="Text 15"/>
+          <p:cNvSpPr/>
+          <p:nvPr/>
+        </p:nvSpPr>
+        <p:spPr>
+          <a:xfrm>
+            <a:off x="777240" y="5486400"/>
+            <a:ext cx="3566160" cy="365760"/>
+          </a:xfrm>
+          <a:prstGeom prst="rect">
+            <a:avLst/>
+          </a:prstGeom>
+          <a:noFill/>
+          <a:ln/>
+        </p:spPr>
+        <p:txBody>
+          <a:bodyPr wrap="square" lIns="0" tIns="0" rIns="0" bIns="0" rtlCol="0" anchor="ctr"/>
+          <a:lstStyle/>
+          <a:p>
+            <a:pPr algn="ctr" indent="0" marL="0">
+              <a:buNone/>
+            </a:pPr>
+            <a:r>
+              <a:rPr lang="en-US" sz="1300" b="1" spc="200" kern="0" dirty="0">
+                <a:solidFill>
+                  <a:srgbClr val="8A7A76"/>
+                </a:solidFill>
+                <a:latin typeface="Calibri" pitchFamily="34" charset="0"/>
+                <a:ea typeface="Calibri" pitchFamily="34" charset="-122"/>
+                <a:cs typeface="Calibri" pitchFamily="34" charset="-120"/>
+              </a:rPr>
+              <a:t>TỪ NGỮ</a:t>
+            </a:r>
+            <a:endParaRPr lang="en-US" sz="1300" dirty="0"/>
+          </a:p>
+        </p:txBody>
+      </p:sp>
+      <p:sp>
+        <p:nvSpPr>
+          <p:cNvPr id="19" name="Text 16"/>
+          <p:cNvSpPr/>
+          <p:nvPr/>
+        </p:nvSpPr>
+        <p:spPr>
+          <a:xfrm>
+            <a:off x="4754880" y="4617720"/>
+            <a:ext cx="3566160" cy="868680"/>
+          </a:xfrm>
+          <a:prstGeom prst="rect">
+            <a:avLst/>
+          </a:prstGeom>
+          <a:noFill/>
+          <a:ln/>
+        </p:spPr>
+        <p:txBody>
+          <a:bodyPr wrap="square" lIns="0" tIns="0" rIns="0" bIns="0" rtlCol="0" anchor="ctr"/>
+          <a:lstStyle/>
+          <a:p>
+            <a:pPr algn="ctr" indent="0" marL="0">
+              <a:buNone/>
+            </a:pPr>
+            <a:r>
+              <a:rPr lang="en-US" sz="4400" b="1" dirty="0">
+                <a:solidFill>
+                  <a:srgbClr val="DC756A"/>
+                </a:solidFill>
+                <a:latin typeface="Cambria" pitchFamily="34" charset="0"/>
+                <a:ea typeface="Cambria" pitchFamily="34" charset="-122"/>
+                <a:cs typeface="Cambria" pitchFamily="34" charset="-120"/>
+              </a:rPr>
+              <a:t>38%</a:t>
+            </a:r>
+            <a:endParaRPr lang="en-US" sz="4400" dirty="0"/>
+          </a:p>
+        </p:txBody>
+      </p:sp>
+      <p:sp>
+        <p:nvSpPr>
+          <p:cNvPr id="20" name="Text 17"/>
+          <p:cNvSpPr/>
+          <p:nvPr/>
+        </p:nvSpPr>
+        <p:spPr>
+          <a:xfrm>
+            <a:off x="4754880" y="5486400"/>
+            <a:ext cx="3566160" cy="365760"/>
+          </a:xfrm>
+          <a:prstGeom prst="rect">
+            <a:avLst/>
+          </a:prstGeom>
+          <a:noFill/>
+          <a:ln/>
+        </p:spPr>
+        <p:txBody>
+          <a:bodyPr wrap="square" lIns="0" tIns="0" rIns="0" bIns="0" rtlCol="0" anchor="ctr"/>
+          <a:lstStyle/>
+          <a:p>
+            <a:pPr algn="ctr" indent="0" marL="0">
+              <a:buNone/>
+            </a:pPr>
+            <a:r>
+              <a:rPr lang="en-US" sz="1300" b="1" spc="200" kern="0" dirty="0">
+                <a:solidFill>
+                  <a:srgbClr val="8A7A76"/>
+                </a:solidFill>
+                <a:latin typeface="Calibri" pitchFamily="34" charset="0"/>
+                <a:ea typeface="Calibri" pitchFamily="34" charset="-122"/>
+                <a:cs typeface="Calibri" pitchFamily="34" charset="-120"/>
+              </a:rPr>
+              <a:t>GIỌNG NÓI</a:t>
+            </a:r>
+            <a:endParaRPr lang="en-US" sz="1300" dirty="0"/>
+          </a:p>
+        </p:txBody>
+      </p:sp>
+      <p:sp>
+        <p:nvSpPr>
+          <p:cNvPr id="21" name="Text 18"/>
+          <p:cNvSpPr/>
+          <p:nvPr/>
+        </p:nvSpPr>
+        <p:spPr>
+          <a:xfrm>
+            <a:off x="8732520" y="4617720"/>
+            <a:ext cx="3566160" cy="868680"/>
+          </a:xfrm>
+          <a:prstGeom prst="rect">
+            <a:avLst/>
+          </a:prstGeom>
+          <a:noFill/>
+          <a:ln/>
+        </p:spPr>
+        <p:txBody>
+          <a:bodyPr wrap="square" lIns="0" tIns="0" rIns="0" bIns="0" rtlCol="0" anchor="ctr"/>
+          <a:lstStyle/>
+          <a:p>
+            <a:pPr algn="ctr" indent="0" marL="0">
+              <a:buNone/>
+            </a:pPr>
+            <a:r>
+              <a:rPr lang="en-US" sz="4400" b="1" dirty="0">
+                <a:solidFill>
+                  <a:srgbClr val="AC4D33"/>
+                </a:solidFill>
+                <a:latin typeface="Cambria" pitchFamily="34" charset="0"/>
+                <a:ea typeface="Cambria" pitchFamily="34" charset="-122"/>
+                <a:cs typeface="Cambria" pitchFamily="34" charset="-120"/>
+              </a:rPr>
+              <a:t>55%</a:t>
+            </a:r>
+            <a:endParaRPr lang="en-US" sz="4400" dirty="0"/>
+          </a:p>
+        </p:txBody>
+      </p:sp>
+      <p:sp>
+        <p:nvSpPr>
+          <p:cNvPr id="22" name="Text 19"/>
+          <p:cNvSpPr/>
+          <p:nvPr/>
+        </p:nvSpPr>
+        <p:spPr>
+          <a:xfrm>
+            <a:off x="8732520" y="5486400"/>
+            <a:ext cx="3566160" cy="365760"/>
+          </a:xfrm>
+          <a:prstGeom prst="rect">
+            <a:avLst/>
+          </a:prstGeom>
+          <a:noFill/>
+          <a:ln/>
+        </p:spPr>
+        <p:txBody>
+          <a:bodyPr wrap="square" lIns="0" tIns="0" rIns="0" bIns="0" rtlCol="0" anchor="ctr"/>
+          <a:lstStyle/>
+          <a:p>
+            <a:pPr algn="ctr" indent="0" marL="0">
+              <a:buNone/>
+            </a:pPr>
+            <a:r>
+              <a:rPr lang="en-US" sz="1300" b="1" spc="200" kern="0" dirty="0">
+                <a:solidFill>
+                  <a:srgbClr val="8A7A76"/>
+                </a:solidFill>
+                <a:latin typeface="Calibri" pitchFamily="34" charset="0"/>
+                <a:ea typeface="Calibri" pitchFamily="34" charset="-122"/>
+                <a:cs typeface="Calibri" pitchFamily="34" charset="-120"/>
+              </a:rPr>
+              <a:t>CƠ THỂ</a:t>
+            </a:r>
+            <a:endParaRPr lang="en-US" sz="1300" dirty="0"/>
+          </a:p>
+        </p:txBody>
+      </p:sp>
+      <p:sp>
+        <p:nvSpPr>
+          <p:cNvPr id="23" name="Text 20"/>
+          <p:cNvSpPr/>
+          <p:nvPr/>
+        </p:nvSpPr>
+        <p:spPr>
+          <a:xfrm>
+            <a:off x="502920" y="5943600"/>
+            <a:ext cx="11201400" cy="365760"/>
+          </a:xfrm>
+          <a:prstGeom prst="rect">
+            <a:avLst/>
+          </a:prstGeom>
+          <a:noFill/>
+          <a:ln/>
+        </p:spPr>
+        <p:txBody>
+          <a:bodyPr wrap="square" lIns="0" tIns="0" rIns="0" bIns="0" rtlCol="0" anchor="ctr"/>
+          <a:lstStyle/>
+          <a:p>
+            <a:pPr algn="ctr" indent="0" marL="0">
               <a:buNone/>
             </a:pPr>
             <a:r>
@@ -13915,7 +13604,7 @@
                 <a:ea typeface="Calibri" pitchFamily="34" charset="-122"/>
                 <a:cs typeface="Calibri" pitchFamily="34" charset="-120"/>
               </a:rPr>
-              <a:t>Nghiên cứu của Mehrabian: với thông điệp cảm xúc, tác động của từ ngữ ~7%, giọng nói ~38%, ngôn ngữ cơ thể ~55% — đừng để cơ thể “nói” ngược với lời.</a:t>
+              <a:t>Mehrabian — với thông điệp cảm xúc</a:t>
             </a:r>
             <a:endParaRPr lang="en-US" sz="1200" dirty="0"/>
           </a:p>
@@ -13972,14 +13661,108 @@
     </a:clrScheme>
     <a:fontScheme name="Office">
       <a:majorFont>
-        <a:latin typeface="Cambria" panose="020F0302020204030204"/>
-        <a:ea typeface="Cambria"/>
-        <a:cs typeface="Cambria"/>
+        <a:latin typeface="Calibri Light" panose="020F0302020204030204"/>
+        <a:ea typeface=""/>
+        <a:cs typeface=""/>
+        <a:font script="Jpan" typeface="游ゴシック Light"/>
+        <a:font script="Hang" typeface="맑은 고딕"/>
+        <a:font script="Hans" typeface="等线 Light"/>
+        <a:font script="Hant" typeface="新細明體"/>
+        <a:font script="Arab" typeface="Times New Roman"/>
+        <a:font script="Hebr" typeface="Times New Roman"/>
+        <a:font script="Thai" typeface="Angsana New"/>
+        <a:font script="Ethi" typeface="Nyala"/>
+        <a:font script="Beng" typeface="Vrinda"/>
+        <a:font script="Gujr" typeface="Shruti"/>
+        <a:font script="Khmr" typeface="MoolBoran"/>
+        <a:font script="Knda" typeface="Tunga"/>
+        <a:font script="Guru" typeface="Raavi"/>
+        <a:font script="Cans" typeface="Euphemia"/>
+        <a:font script="Cher" typeface="Plantagenet Cherokee"/>
+        <a:font script="Yiii" typeface="Microsoft Yi Baiti"/>
+        <a:font script="Tibt" typeface="Microsoft Himalaya"/>
+        <a:font script="Thaa" typeface="MV Boli"/>
+        <a:font script="Deva" typeface="Mangal"/>
+        <a:font script="Telu" typeface="Gautami"/>
+        <a:font script="Taml" typeface="Latha"/>
+        <a:font script="Syrc" typeface="Estrangelo Edessa"/>
+        <a:font script="Orya" typeface="Kalinga"/>
+        <a:font script="Mlym" typeface="Kartika"/>
+        <a:font script="Laoo" typeface="DokChampa"/>
+        <a:font script="Sinh" typeface="Iskoola Pota"/>
+        <a:font script="Mong" typeface="Mongolian Baiti"/>
+        <a:font script="Viet" typeface="Times New Roman"/>
+        <a:font script="Uigh" typeface="Microsoft Uighur"/>
+        <a:font script="Geor" typeface="Sylfaen"/>
+        <a:font script="Armn" typeface="Arial"/>
+        <a:font script="Bugi" typeface="Leelawadee UI"/>
+        <a:font script="Bopo" typeface="Microsoft JhengHei"/>
+        <a:font script="Java" typeface="Javanese Text"/>
+        <a:font script="Lisu" typeface="Segoe UI"/>
+        <a:font script="Mymr" typeface="Myanmar Text"/>
+        <a:font script="Nkoo" typeface="Ebrima"/>
+        <a:font script="Olck" typeface="Nirmala UI"/>
+        <a:font script="Osma" typeface="Ebrima"/>
+        <a:font script="Phag" typeface="Phagspa"/>
+        <a:font script="Syrn" typeface="Estrangelo Edessa"/>
+        <a:font script="Syrj" typeface="Estrangelo Edessa"/>
+        <a:font script="Syre" typeface="Estrangelo Edessa"/>
+        <a:font script="Sora" typeface="Nirmala UI"/>
+        <a:font script="Tale" typeface="Microsoft Tai Le"/>
+        <a:font script="Talu" typeface="Microsoft New Tai Lue"/>
+        <a:font script="Tfng" typeface="Ebrima"/>
       </a:majorFont>
       <a:minorFont>
         <a:latin typeface="Calibri" panose="020F0502020204030204"/>
-        <a:ea typeface="Calibri"/>
-        <a:cs typeface="Calibri"/>
+        <a:ea typeface=""/>
+        <a:cs typeface=""/>
+        <a:font script="Jpan" typeface="游ゴシック"/>
+        <a:font script="Hang" typeface="맑은 고딕"/>
+        <a:font script="Hans" typeface="等线"/>
+        <a:font script="Hant" typeface="新細明體"/>
+        <a:font script="Arab" typeface="Arial"/>
+        <a:font script="Hebr" typeface="Arial"/>
+        <a:font script="Thai" typeface="Cordia New"/>
+        <a:font script="Ethi" typeface="Nyala"/>
+        <a:font script="Beng" typeface="Vrinda"/>
+        <a:font script="Gujr" typeface="Shruti"/>
+        <a:font script="Khmr" typeface="DaunPenh"/>
+        <a:font script="Knda" typeface="Tunga"/>
+        <a:font script="Guru" typeface="Raavi"/>
+        <a:font script="Cans" typeface="Euphemia"/>
+        <a:font script="Cher" typeface="Plantagenet Cherokee"/>
+        <a:font script="Yiii" typeface="Microsoft Yi Baiti"/>
+        <a:font script="Tibt" typeface="Microsoft Himalaya"/>
+        <a:font script="Thaa" typeface="MV Boli"/>
+        <a:font script="Deva" typeface="Mangal"/>
+        <a:font script="Telu" typeface="Gautami"/>
+        <a:font script="Taml" typeface="Latha"/>
+        <a:font script="Syrc" typeface="Estrangelo Edessa"/>
+        <a:font script="Orya" typeface="Kalinga"/>
+        <a:font script="Mlym" typeface="Kartika"/>
+        <a:font script="Laoo" typeface="DokChampa"/>
+        <a:font script="Sinh" typeface="Iskoola Pota"/>
+        <a:font script="Mong" typeface="Mongolian Baiti"/>
+        <a:font script="Viet" typeface="Arial"/>
+        <a:font script="Uigh" typeface="Microsoft Uighur"/>
+        <a:font script="Geor" typeface="Sylfaen"/>
+        <a:font script="Armn" typeface="Arial"/>
+        <a:font script="Bugi" typeface="Leelawadee UI"/>
+        <a:font script="Bopo" typeface="Microsoft JhengHei"/>
+        <a:font script="Java" typeface="Javanese Text"/>
+        <a:font script="Lisu" typeface="Segoe UI"/>
+        <a:font script="Mymr" typeface="Myanmar Text"/>
+        <a:font script="Nkoo" typeface="Ebrima"/>
+        <a:font script="Olck" typeface="Nirmala UI"/>
+        <a:font script="Osma" typeface="Ebrima"/>
+        <a:font script="Phag" typeface="Phagspa"/>
+        <a:font script="Syrn" typeface="Estrangelo Edessa"/>
+        <a:font script="Syrj" typeface="Estrangelo Edessa"/>
+        <a:font script="Syre" typeface="Estrangelo Edessa"/>
+        <a:font script="Sora" typeface="Nirmala UI"/>
+        <a:font script="Tale" typeface="Microsoft Tai Le"/>
+        <a:font script="Talu" typeface="Microsoft New Tai Lue"/>
+        <a:font script="Tfng" typeface="Ebrima"/>
       </a:minorFont>
     </a:fontScheme>
     <a:fmtScheme name="Office">

--- a/slides/01-tong-quan-giao-tiep.pptx
+++ b/slides/01-tong-quan-giao-tiep.pptx
@@ -2984,7 +2984,7 @@
       </p:sp>
       <p:pic>
         <p:nvPicPr>
-          <p:cNvPr id="3" name="Image 0" descr="assets/logo_tron.png">    </p:cNvPr>
+          <p:cNvPr id="3" name="Image 0" descr="/home/user/comdraft/assets/img/dau-huong.png">    </p:cNvPr>
           <p:cNvPicPr>
             <a:picLocks noChangeAspect="1"/>
           </p:cNvPicPr>
@@ -3010,7 +3010,7 @@
       </p:pic>
       <p:pic>
         <p:nvPicPr>
-          <p:cNvPr id="4" name="Image 1" descr="assets/logo_ngang.png">    </p:cNvPr>
+          <p:cNvPr id="4" name="Image 1" descr="/home/user/comdraft/assets/img/lockup-huong.png">    </p:cNvPr>
           <p:cNvPicPr>
             <a:picLocks noChangeAspect="1"/>
           </p:cNvPicPr>
@@ -3318,6 +3318,1413 @@
 </file>
 
 <file path=ppt/slides/slide10.xml><?xml version="1.0" encoding="utf-8"?>
+<p:sld xmlns:a="http://schemas.openxmlformats.org/drawingml/2006/main" xmlns:r="http://schemas.openxmlformats.org/officeDocument/2006/relationships" xmlns:p="http://schemas.openxmlformats.org/presentationml/2006/main">
+  <p:cSld name="Slide 9">
+    <p:bg>
+      <p:bgPr>
+        <a:solidFill>
+          <a:srgbClr val="FDFBF8"/>
+        </a:solidFill>
+      </p:bgPr>
+    </p:bg>
+    <p:spTree>
+      <p:nvGrpSpPr>
+        <p:cNvPr id="1" name=""/>
+        <p:cNvGrpSpPr/>
+        <p:nvPr/>
+      </p:nvGrpSpPr>
+      <p:grpSpPr>
+        <a:xfrm>
+          <a:off x="0" y="0"/>
+          <a:ext cx="0" cy="0"/>
+          <a:chOff x="0" y="0"/>
+          <a:chExt cx="0" cy="0"/>
+        </a:xfrm>
+      </p:grpSpPr>
+      <p:pic>
+        <p:nvPicPr>
+          <p:cNvPr id="2" name="Image 0" descr="/home/user/comdraft/assets/img/dau-huong.png">    </p:cNvPr>
+          <p:cNvPicPr>
+            <a:picLocks noChangeAspect="1"/>
+          </p:cNvPicPr>
+          <p:nvPr/>
+        </p:nvPicPr>
+        <p:blipFill>
+          <a:blip r:embed="rId1"/>
+          <a:stretch>
+            <a:fillRect/>
+          </a:stretch>
+        </p:blipFill>
+        <p:spPr>
+          <a:xfrm>
+            <a:off x="411480" y="6327648"/>
+            <a:ext cx="384048" cy="384048"/>
+          </a:xfrm>
+          <a:prstGeom prst="rect">
+            <a:avLst/>
+          </a:prstGeom>
+        </p:spPr>
+      </p:pic>
+      <p:sp>
+        <p:nvSpPr>
+          <p:cNvPr id="3" name="Text 0"/>
+          <p:cNvSpPr/>
+          <p:nvPr/>
+        </p:nvSpPr>
+        <p:spPr>
+          <a:xfrm>
+            <a:off x="868680" y="6355080"/>
+            <a:ext cx="7498080" cy="310896"/>
+          </a:xfrm>
+          <a:prstGeom prst="rect">
+            <a:avLst/>
+          </a:prstGeom>
+          <a:noFill/>
+          <a:ln/>
+        </p:spPr>
+        <p:txBody>
+          <a:bodyPr wrap="square" lIns="0" tIns="0" rIns="0" bIns="0" rtlCol="0" anchor="ctr"/>
+          <a:lstStyle/>
+          <a:p>
+            <a:pPr indent="0" marL="0">
+              <a:buNone/>
+            </a:pPr>
+            <a:r>
+              <a:rPr lang="en-US" sz="900" dirty="0">
+                <a:solidFill>
+                  <a:srgbClr val="8A7A76"/>
+                </a:solidFill>
+                <a:latin typeface="Calibri" pitchFamily="34" charset="0"/>
+                <a:ea typeface="Calibri" pitchFamily="34" charset="-122"/>
+                <a:cs typeface="Calibri" pitchFamily="34" charset="-120"/>
+              </a:rPr>
+              <a:t>Je m'appelle Huong  •  GV. Đỗ Thùy Hương  •  EC1103</a:t>
+            </a:r>
+            <a:endParaRPr lang="en-US" sz="900" dirty="0"/>
+          </a:p>
+        </p:txBody>
+      </p:sp>
+      <p:sp>
+        <p:nvSpPr>
+          <p:cNvPr id="4" name="Text 1"/>
+          <p:cNvSpPr/>
+          <p:nvPr/>
+        </p:nvSpPr>
+        <p:spPr>
+          <a:xfrm>
+            <a:off x="8503920" y="6355080"/>
+            <a:ext cx="2743200" cy="310896"/>
+          </a:xfrm>
+          <a:prstGeom prst="rect">
+            <a:avLst/>
+          </a:prstGeom>
+          <a:noFill/>
+          <a:ln/>
+        </p:spPr>
+        <p:txBody>
+          <a:bodyPr wrap="square" lIns="0" tIns="0" rIns="0" bIns="0" rtlCol="0" anchor="ctr"/>
+          <a:lstStyle/>
+          <a:p>
+            <a:pPr algn="r" indent="0" marL="0">
+              <a:buNone/>
+            </a:pPr>
+            <a:r>
+              <a:rPr lang="en-US" sz="900" dirty="0">
+                <a:solidFill>
+                  <a:srgbClr val="8A7A76"/>
+                </a:solidFill>
+                <a:latin typeface="Calibri" pitchFamily="34" charset="0"/>
+                <a:ea typeface="Calibri" pitchFamily="34" charset="-122"/>
+                <a:cs typeface="Calibri" pitchFamily="34" charset="-120"/>
+              </a:rPr>
+              <a:t>Chương 1</a:t>
+            </a:r>
+            <a:endParaRPr lang="en-US" sz="900" dirty="0"/>
+          </a:p>
+        </p:txBody>
+      </p:sp>
+      <p:sp>
+        <p:nvSpPr>
+          <p:cNvPr id="5" name="Shape 2"/>
+          <p:cNvSpPr/>
+          <p:nvPr/>
+        </p:nvSpPr>
+        <p:spPr>
+          <a:xfrm>
+            <a:off x="11430000" y="6327648"/>
+            <a:ext cx="365760" cy="365760"/>
+          </a:xfrm>
+          <a:prstGeom prst="ellipse">
+            <a:avLst/>
+          </a:prstGeom>
+          <a:solidFill>
+            <a:srgbClr val="DC756A"/>
+          </a:solidFill>
+          <a:ln/>
+        </p:spPr>
+        <p:txBody>
+          <a:bodyPr/>
+          <a:p/>
+        </p:txBody>
+      </p:sp>
+      <p:sp>
+        <p:nvSpPr>
+          <p:cNvPr id="6" name="Text 3"/>
+          <p:cNvSpPr/>
+          <p:nvPr/>
+        </p:nvSpPr>
+        <p:spPr>
+          <a:xfrm>
+            <a:off x="11430000" y="6327648"/>
+            <a:ext cx="365760" cy="365760"/>
+          </a:xfrm>
+          <a:prstGeom prst="rect">
+            <a:avLst/>
+          </a:prstGeom>
+          <a:noFill/>
+          <a:ln/>
+        </p:spPr>
+        <p:txBody>
+          <a:bodyPr wrap="square" lIns="0" tIns="0" rIns="0" bIns="0" rtlCol="0" anchor="ctr"/>
+          <a:lstStyle/>
+          <a:p>
+            <a:pPr algn="ctr" indent="0" marL="0">
+              <a:buNone/>
+            </a:pPr>
+            <a:r>
+              <a:rPr lang="en-US" sz="1000" b="1" dirty="0">
+                <a:solidFill>
+                  <a:srgbClr val="FFFFFF"/>
+                </a:solidFill>
+                <a:latin typeface="Calibri" pitchFamily="34" charset="0"/>
+                <a:ea typeface="Calibri" pitchFamily="34" charset="-122"/>
+                <a:cs typeface="Calibri" pitchFamily="34" charset="-120"/>
+              </a:rPr>
+              <a:t>9</a:t>
+            </a:r>
+            <a:endParaRPr lang="en-US" sz="1000" dirty="0"/>
+          </a:p>
+        </p:txBody>
+      </p:sp>
+      <p:sp>
+        <p:nvSpPr>
+          <p:cNvPr id="7" name="Text 4"/>
+          <p:cNvSpPr/>
+          <p:nvPr/>
+        </p:nvSpPr>
+        <p:spPr>
+          <a:xfrm>
+            <a:off x="502920" y="310896"/>
+            <a:ext cx="11155680" cy="274320"/>
+          </a:xfrm>
+          <a:prstGeom prst="rect">
+            <a:avLst/>
+          </a:prstGeom>
+          <a:noFill/>
+          <a:ln/>
+        </p:spPr>
+        <p:txBody>
+          <a:bodyPr wrap="square" lIns="0" tIns="0" rIns="0" bIns="0" rtlCol="0" anchor="ctr"/>
+          <a:lstStyle/>
+          <a:p>
+            <a:pPr indent="0" marL="0">
+              <a:buNone/>
+            </a:pPr>
+            <a:r>
+              <a:rPr lang="en-US" sz="1100" b="1" spc="300" kern="0" dirty="0">
+                <a:solidFill>
+                  <a:srgbClr val="DC756A"/>
+                </a:solidFill>
+                <a:latin typeface="Calibri" pitchFamily="34" charset="0"/>
+                <a:ea typeface="Calibri" pitchFamily="34" charset="-122"/>
+                <a:cs typeface="Calibri" pitchFamily="34" charset="-120"/>
+              </a:rPr>
+              <a:t>1.2</a:t>
+            </a:r>
+            <a:endParaRPr lang="en-US" sz="1100" dirty="0"/>
+          </a:p>
+        </p:txBody>
+      </p:sp>
+      <p:sp>
+        <p:nvSpPr>
+          <p:cNvPr id="8" name="Text 5"/>
+          <p:cNvSpPr/>
+          <p:nvPr/>
+        </p:nvSpPr>
+        <p:spPr>
+          <a:xfrm>
+            <a:off x="502920" y="576072"/>
+            <a:ext cx="11155680" cy="713232"/>
+          </a:xfrm>
+          <a:prstGeom prst="rect">
+            <a:avLst/>
+          </a:prstGeom>
+          <a:noFill/>
+          <a:ln/>
+        </p:spPr>
+        <p:txBody>
+          <a:bodyPr wrap="square" lIns="0" tIns="0" rIns="0" bIns="0" rtlCol="0" anchor="ctr"/>
+          <a:lstStyle/>
+          <a:p>
+            <a:pPr indent="0" marL="0">
+              <a:buNone/>
+            </a:pPr>
+            <a:r>
+              <a:rPr lang="en-US" sz="2700" b="1" dirty="0">
+                <a:solidFill>
+                  <a:srgbClr val="AC4D33"/>
+                </a:solidFill>
+                <a:latin typeface="Cambria" pitchFamily="34" charset="0"/>
+                <a:ea typeface="Cambria" pitchFamily="34" charset="-122"/>
+                <a:cs typeface="Cambria" pitchFamily="34" charset="-120"/>
+              </a:rPr>
+              <a:t>Phương tiện giao tiếp: phi ngôn ngữ</a:t>
+            </a:r>
+            <a:endParaRPr lang="en-US" sz="2700" dirty="0"/>
+          </a:p>
+        </p:txBody>
+      </p:sp>
+      <p:sp>
+        <p:nvSpPr>
+          <p:cNvPr id="9" name="Shape 6"/>
+          <p:cNvSpPr/>
+          <p:nvPr/>
+        </p:nvSpPr>
+        <p:spPr>
+          <a:xfrm>
+            <a:off x="502920" y="1600200"/>
+            <a:ext cx="5509260" cy="1280160"/>
+          </a:xfrm>
+          <a:prstGeom prst="roundRect">
+            <a:avLst>
+              <a:gd name="adj" fmla="val 6429"/>
+            </a:avLst>
+          </a:prstGeom>
+          <a:solidFill>
+            <a:srgbClr val="FDF1EF"/>
+          </a:solidFill>
+          <a:ln w="15875">
+            <a:solidFill>
+              <a:srgbClr val="FBCEC9"/>
+            </a:solidFill>
+            <a:prstDash val="solid"/>
+          </a:ln>
+        </p:spPr>
+        <p:txBody>
+          <a:bodyPr/>
+          <a:p/>
+        </p:txBody>
+      </p:sp>
+      <p:sp>
+        <p:nvSpPr>
+          <p:cNvPr id="10" name="Text 7"/>
+          <p:cNvSpPr/>
+          <p:nvPr/>
+        </p:nvSpPr>
+        <p:spPr>
+          <a:xfrm>
+            <a:off x="722376" y="1673352"/>
+            <a:ext cx="5070348" cy="1133856"/>
+          </a:xfrm>
+          <a:prstGeom prst="rect">
+            <a:avLst/>
+          </a:prstGeom>
+          <a:noFill/>
+          <a:ln/>
+        </p:spPr>
+        <p:txBody>
+          <a:bodyPr wrap="square" lIns="0" tIns="0" rIns="0" bIns="0" rtlCol="0" anchor="ctr"/>
+          <a:lstStyle/>
+          <a:p>
+            <a:pPr indent="0" marL="0">
+              <a:buNone/>
+            </a:pPr>
+            <a:r>
+              <a:rPr lang="en-US" sz="1700" b="1" dirty="0">
+                <a:solidFill>
+                  <a:srgbClr val="AC4D33"/>
+                </a:solidFill>
+                <a:latin typeface="Calibri" pitchFamily="34" charset="0"/>
+                <a:ea typeface="Calibri" pitchFamily="34" charset="-122"/>
+                <a:cs typeface="Calibri" pitchFamily="34" charset="-120"/>
+              </a:rPr>
+              <a:t>Ánh mắt – nét mặt</a:t>
+            </a:r>
+            <a:endParaRPr lang="en-US" sz="1700" dirty="0"/>
+          </a:p>
+          <a:p>
+            <a:pPr indent="0" marL="0">
+              <a:buNone/>
+            </a:pPr>
+            <a:r>
+              <a:rPr lang="en-US" sz="1400" dirty="0">
+                <a:solidFill>
+                  <a:srgbClr val="3A2B28"/>
+                </a:solidFill>
+                <a:latin typeface="Calibri" pitchFamily="34" charset="0"/>
+                <a:ea typeface="Calibri" pitchFamily="34" charset="-122"/>
+                <a:cs typeface="Calibri" pitchFamily="34" charset="-120"/>
+              </a:rPr>
+              <a:t>Kênh biểu cảm mạnh nhất</a:t>
+            </a:r>
+            <a:endParaRPr lang="en-US" sz="1700" dirty="0"/>
+          </a:p>
+        </p:txBody>
+      </p:sp>
+      <p:sp>
+        <p:nvSpPr>
+          <p:cNvPr id="11" name="Shape 8"/>
+          <p:cNvSpPr/>
+          <p:nvPr/>
+        </p:nvSpPr>
+        <p:spPr>
+          <a:xfrm>
+            <a:off x="6195060" y="1600200"/>
+            <a:ext cx="5509260" cy="1280160"/>
+          </a:xfrm>
+          <a:prstGeom prst="roundRect">
+            <a:avLst>
+              <a:gd name="adj" fmla="val 6429"/>
+            </a:avLst>
+          </a:prstGeom>
+          <a:solidFill>
+            <a:srgbClr val="FDF1EF"/>
+          </a:solidFill>
+          <a:ln w="15875">
+            <a:solidFill>
+              <a:srgbClr val="FBCEC9"/>
+            </a:solidFill>
+            <a:prstDash val="solid"/>
+          </a:ln>
+        </p:spPr>
+        <p:txBody>
+          <a:bodyPr/>
+          <a:p/>
+        </p:txBody>
+      </p:sp>
+      <p:sp>
+        <p:nvSpPr>
+          <p:cNvPr id="12" name="Text 9"/>
+          <p:cNvSpPr/>
+          <p:nvPr/>
+        </p:nvSpPr>
+        <p:spPr>
+          <a:xfrm>
+            <a:off x="6414516" y="1673352"/>
+            <a:ext cx="5070348" cy="1133856"/>
+          </a:xfrm>
+          <a:prstGeom prst="rect">
+            <a:avLst/>
+          </a:prstGeom>
+          <a:noFill/>
+          <a:ln/>
+        </p:spPr>
+        <p:txBody>
+          <a:bodyPr wrap="square" lIns="0" tIns="0" rIns="0" bIns="0" rtlCol="0" anchor="ctr"/>
+          <a:lstStyle/>
+          <a:p>
+            <a:pPr indent="0" marL="0">
+              <a:buNone/>
+            </a:pPr>
+            <a:r>
+              <a:rPr lang="en-US" sz="1700" b="1" dirty="0">
+                <a:solidFill>
+                  <a:srgbClr val="AC4D33"/>
+                </a:solidFill>
+                <a:latin typeface="Calibri" pitchFamily="34" charset="0"/>
+                <a:ea typeface="Calibri" pitchFamily="34" charset="-122"/>
+                <a:cs typeface="Calibri" pitchFamily="34" charset="-120"/>
+              </a:rPr>
+              <a:t>Cử chỉ – tư thế</a:t>
+            </a:r>
+            <a:endParaRPr lang="en-US" sz="1700" dirty="0"/>
+          </a:p>
+          <a:p>
+            <a:pPr indent="0" marL="0">
+              <a:buNone/>
+            </a:pPr>
+            <a:r>
+              <a:rPr lang="en-US" sz="1400" dirty="0">
+                <a:solidFill>
+                  <a:srgbClr val="3A2B28"/>
+                </a:solidFill>
+                <a:latin typeface="Calibri" pitchFamily="34" charset="0"/>
+                <a:ea typeface="Calibri" pitchFamily="34" charset="-122"/>
+                <a:cs typeface="Calibri" pitchFamily="34" charset="-120"/>
+              </a:rPr>
+              <a:t>Thẳng và cởi mở tạo thiện cảm</a:t>
+            </a:r>
+            <a:endParaRPr lang="en-US" sz="1700" dirty="0"/>
+          </a:p>
+        </p:txBody>
+      </p:sp>
+      <p:sp>
+        <p:nvSpPr>
+          <p:cNvPr id="13" name="Shape 10"/>
+          <p:cNvSpPr/>
+          <p:nvPr/>
+        </p:nvSpPr>
+        <p:spPr>
+          <a:xfrm>
+            <a:off x="502920" y="3063240"/>
+            <a:ext cx="5509260" cy="1280160"/>
+          </a:xfrm>
+          <a:prstGeom prst="roundRect">
+            <a:avLst>
+              <a:gd name="adj" fmla="val 6429"/>
+            </a:avLst>
+          </a:prstGeom>
+          <a:solidFill>
+            <a:srgbClr val="FDF1EF"/>
+          </a:solidFill>
+          <a:ln w="15875">
+            <a:solidFill>
+              <a:srgbClr val="FBCEC9"/>
+            </a:solidFill>
+            <a:prstDash val="solid"/>
+          </a:ln>
+        </p:spPr>
+        <p:txBody>
+          <a:bodyPr/>
+          <a:p/>
+        </p:txBody>
+      </p:sp>
+      <p:sp>
+        <p:nvSpPr>
+          <p:cNvPr id="14" name="Text 11"/>
+          <p:cNvSpPr/>
+          <p:nvPr/>
+        </p:nvSpPr>
+        <p:spPr>
+          <a:xfrm>
+            <a:off x="722376" y="3136392"/>
+            <a:ext cx="5070348" cy="1133856"/>
+          </a:xfrm>
+          <a:prstGeom prst="rect">
+            <a:avLst/>
+          </a:prstGeom>
+          <a:noFill/>
+          <a:ln/>
+        </p:spPr>
+        <p:txBody>
+          <a:bodyPr wrap="square" lIns="0" tIns="0" rIns="0" bIns="0" rtlCol="0" anchor="ctr"/>
+          <a:lstStyle/>
+          <a:p>
+            <a:pPr indent="0" marL="0">
+              <a:buNone/>
+            </a:pPr>
+            <a:r>
+              <a:rPr lang="en-US" sz="1700" b="1" dirty="0">
+                <a:solidFill>
+                  <a:srgbClr val="AC4D33"/>
+                </a:solidFill>
+                <a:latin typeface="Calibri" pitchFamily="34" charset="0"/>
+                <a:ea typeface="Calibri" pitchFamily="34" charset="-122"/>
+                <a:cs typeface="Calibri" pitchFamily="34" charset="-120"/>
+              </a:rPr>
+              <a:t>Khoảng cách</a:t>
+            </a:r>
+            <a:endParaRPr lang="en-US" sz="1700" dirty="0"/>
+          </a:p>
+          <a:p>
+            <a:pPr indent="0" marL="0">
+              <a:buNone/>
+            </a:pPr>
+            <a:r>
+              <a:rPr lang="en-US" sz="1400" dirty="0">
+                <a:solidFill>
+                  <a:srgbClr val="3A2B28"/>
+                </a:solidFill>
+                <a:latin typeface="Calibri" pitchFamily="34" charset="0"/>
+                <a:ea typeface="Calibri" pitchFamily="34" charset="-122"/>
+                <a:cs typeface="Calibri" pitchFamily="34" charset="-120"/>
+              </a:rPr>
+              <a:t>Thân mật · cá nhân · xã giao · công cộng</a:t>
+            </a:r>
+            <a:endParaRPr lang="en-US" sz="1700" dirty="0"/>
+          </a:p>
+        </p:txBody>
+      </p:sp>
+      <p:sp>
+        <p:nvSpPr>
+          <p:cNvPr id="15" name="Shape 12"/>
+          <p:cNvSpPr/>
+          <p:nvPr/>
+        </p:nvSpPr>
+        <p:spPr>
+          <a:xfrm>
+            <a:off x="6195060" y="3063240"/>
+            <a:ext cx="5509260" cy="1280160"/>
+          </a:xfrm>
+          <a:prstGeom prst="roundRect">
+            <a:avLst>
+              <a:gd name="adj" fmla="val 6429"/>
+            </a:avLst>
+          </a:prstGeom>
+          <a:solidFill>
+            <a:srgbClr val="FDF1EF"/>
+          </a:solidFill>
+          <a:ln w="15875">
+            <a:solidFill>
+              <a:srgbClr val="FBCEC9"/>
+            </a:solidFill>
+            <a:prstDash val="solid"/>
+          </a:ln>
+        </p:spPr>
+        <p:txBody>
+          <a:bodyPr/>
+          <a:p/>
+        </p:txBody>
+      </p:sp>
+      <p:sp>
+        <p:nvSpPr>
+          <p:cNvPr id="16" name="Text 13"/>
+          <p:cNvSpPr/>
+          <p:nvPr/>
+        </p:nvSpPr>
+        <p:spPr>
+          <a:xfrm>
+            <a:off x="6414516" y="3136392"/>
+            <a:ext cx="5070348" cy="1133856"/>
+          </a:xfrm>
+          <a:prstGeom prst="rect">
+            <a:avLst/>
+          </a:prstGeom>
+          <a:noFill/>
+          <a:ln/>
+        </p:spPr>
+        <p:txBody>
+          <a:bodyPr wrap="square" lIns="0" tIns="0" rIns="0" bIns="0" rtlCol="0" anchor="ctr"/>
+          <a:lstStyle/>
+          <a:p>
+            <a:pPr indent="0" marL="0">
+              <a:buNone/>
+            </a:pPr>
+            <a:r>
+              <a:rPr lang="en-US" sz="1700" b="1" dirty="0">
+                <a:solidFill>
+                  <a:srgbClr val="AC4D33"/>
+                </a:solidFill>
+                <a:latin typeface="Calibri" pitchFamily="34" charset="0"/>
+                <a:ea typeface="Calibri" pitchFamily="34" charset="-122"/>
+                <a:cs typeface="Calibri" pitchFamily="34" charset="-120"/>
+              </a:rPr>
+              <a:t>Trang phục – giọng – giờ giấc</a:t>
+            </a:r>
+            <a:endParaRPr lang="en-US" sz="1700" dirty="0"/>
+          </a:p>
+          <a:p>
+            <a:pPr indent="0" marL="0">
+              <a:buNone/>
+            </a:pPr>
+            <a:r>
+              <a:rPr lang="en-US" sz="1400" dirty="0">
+                <a:solidFill>
+                  <a:srgbClr val="3A2B28"/>
+                </a:solidFill>
+                <a:latin typeface="Calibri" pitchFamily="34" charset="0"/>
+                <a:ea typeface="Calibri" pitchFamily="34" charset="-122"/>
+                <a:cs typeface="Calibri" pitchFamily="34" charset="-120"/>
+              </a:rPr>
+              <a:t>Đúng giờ cũng là một thông điệp</a:t>
+            </a:r>
+            <a:endParaRPr lang="en-US" sz="1700" dirty="0"/>
+          </a:p>
+        </p:txBody>
+      </p:sp>
+      <p:sp>
+        <p:nvSpPr>
+          <p:cNvPr id="17" name="Text 14"/>
+          <p:cNvSpPr/>
+          <p:nvPr/>
+        </p:nvSpPr>
+        <p:spPr>
+          <a:xfrm>
+            <a:off x="777240" y="4617720"/>
+            <a:ext cx="3566160" cy="868680"/>
+          </a:xfrm>
+          <a:prstGeom prst="rect">
+            <a:avLst/>
+          </a:prstGeom>
+          <a:noFill/>
+          <a:ln/>
+        </p:spPr>
+        <p:txBody>
+          <a:bodyPr wrap="square" lIns="0" tIns="0" rIns="0" bIns="0" rtlCol="0" anchor="ctr"/>
+          <a:lstStyle/>
+          <a:p>
+            <a:pPr algn="ctr" indent="0" marL="0">
+              <a:buNone/>
+            </a:pPr>
+            <a:r>
+              <a:rPr lang="en-US" sz="4400" b="1" dirty="0">
+                <a:solidFill>
+                  <a:srgbClr val="DC756A"/>
+                </a:solidFill>
+                <a:latin typeface="Cambria" pitchFamily="34" charset="0"/>
+                <a:ea typeface="Cambria" pitchFamily="34" charset="-122"/>
+                <a:cs typeface="Cambria" pitchFamily="34" charset="-120"/>
+              </a:rPr>
+              <a:t>7%</a:t>
+            </a:r>
+            <a:endParaRPr lang="en-US" sz="4400" dirty="0"/>
+          </a:p>
+        </p:txBody>
+      </p:sp>
+      <p:sp>
+        <p:nvSpPr>
+          <p:cNvPr id="18" name="Text 15"/>
+          <p:cNvSpPr/>
+          <p:nvPr/>
+        </p:nvSpPr>
+        <p:spPr>
+          <a:xfrm>
+            <a:off x="777240" y="5486400"/>
+            <a:ext cx="3566160" cy="365760"/>
+          </a:xfrm>
+          <a:prstGeom prst="rect">
+            <a:avLst/>
+          </a:prstGeom>
+          <a:noFill/>
+          <a:ln/>
+        </p:spPr>
+        <p:txBody>
+          <a:bodyPr wrap="square" lIns="0" tIns="0" rIns="0" bIns="0" rtlCol="0" anchor="ctr"/>
+          <a:lstStyle/>
+          <a:p>
+            <a:pPr algn="ctr" indent="0" marL="0">
+              <a:buNone/>
+            </a:pPr>
+            <a:r>
+              <a:rPr lang="en-US" sz="1300" b="1" spc="200" kern="0" dirty="0">
+                <a:solidFill>
+                  <a:srgbClr val="8A7A76"/>
+                </a:solidFill>
+                <a:latin typeface="Calibri" pitchFamily="34" charset="0"/>
+                <a:ea typeface="Calibri" pitchFamily="34" charset="-122"/>
+                <a:cs typeface="Calibri" pitchFamily="34" charset="-120"/>
+              </a:rPr>
+              <a:t>TỪ NGỮ</a:t>
+            </a:r>
+            <a:endParaRPr lang="en-US" sz="1300" dirty="0"/>
+          </a:p>
+        </p:txBody>
+      </p:sp>
+      <p:sp>
+        <p:nvSpPr>
+          <p:cNvPr id="19" name="Text 16"/>
+          <p:cNvSpPr/>
+          <p:nvPr/>
+        </p:nvSpPr>
+        <p:spPr>
+          <a:xfrm>
+            <a:off x="4754880" y="4617720"/>
+            <a:ext cx="3566160" cy="868680"/>
+          </a:xfrm>
+          <a:prstGeom prst="rect">
+            <a:avLst/>
+          </a:prstGeom>
+          <a:noFill/>
+          <a:ln/>
+        </p:spPr>
+        <p:txBody>
+          <a:bodyPr wrap="square" lIns="0" tIns="0" rIns="0" bIns="0" rtlCol="0" anchor="ctr"/>
+          <a:lstStyle/>
+          <a:p>
+            <a:pPr algn="ctr" indent="0" marL="0">
+              <a:buNone/>
+            </a:pPr>
+            <a:r>
+              <a:rPr lang="en-US" sz="4400" b="1" dirty="0">
+                <a:solidFill>
+                  <a:srgbClr val="DC756A"/>
+                </a:solidFill>
+                <a:latin typeface="Cambria" pitchFamily="34" charset="0"/>
+                <a:ea typeface="Cambria" pitchFamily="34" charset="-122"/>
+                <a:cs typeface="Cambria" pitchFamily="34" charset="-120"/>
+              </a:rPr>
+              <a:t>38%</a:t>
+            </a:r>
+            <a:endParaRPr lang="en-US" sz="4400" dirty="0"/>
+          </a:p>
+        </p:txBody>
+      </p:sp>
+      <p:sp>
+        <p:nvSpPr>
+          <p:cNvPr id="20" name="Text 17"/>
+          <p:cNvSpPr/>
+          <p:nvPr/>
+        </p:nvSpPr>
+        <p:spPr>
+          <a:xfrm>
+            <a:off x="4754880" y="5486400"/>
+            <a:ext cx="3566160" cy="365760"/>
+          </a:xfrm>
+          <a:prstGeom prst="rect">
+            <a:avLst/>
+          </a:prstGeom>
+          <a:noFill/>
+          <a:ln/>
+        </p:spPr>
+        <p:txBody>
+          <a:bodyPr wrap="square" lIns="0" tIns="0" rIns="0" bIns="0" rtlCol="0" anchor="ctr"/>
+          <a:lstStyle/>
+          <a:p>
+            <a:pPr algn="ctr" indent="0" marL="0">
+              <a:buNone/>
+            </a:pPr>
+            <a:r>
+              <a:rPr lang="en-US" sz="1300" b="1" spc="200" kern="0" dirty="0">
+                <a:solidFill>
+                  <a:srgbClr val="8A7A76"/>
+                </a:solidFill>
+                <a:latin typeface="Calibri" pitchFamily="34" charset="0"/>
+                <a:ea typeface="Calibri" pitchFamily="34" charset="-122"/>
+                <a:cs typeface="Calibri" pitchFamily="34" charset="-120"/>
+              </a:rPr>
+              <a:t>GIỌNG NÓI</a:t>
+            </a:r>
+            <a:endParaRPr lang="en-US" sz="1300" dirty="0"/>
+          </a:p>
+        </p:txBody>
+      </p:sp>
+      <p:sp>
+        <p:nvSpPr>
+          <p:cNvPr id="21" name="Text 18"/>
+          <p:cNvSpPr/>
+          <p:nvPr/>
+        </p:nvSpPr>
+        <p:spPr>
+          <a:xfrm>
+            <a:off x="8732520" y="4617720"/>
+            <a:ext cx="3566160" cy="868680"/>
+          </a:xfrm>
+          <a:prstGeom prst="rect">
+            <a:avLst/>
+          </a:prstGeom>
+          <a:noFill/>
+          <a:ln/>
+        </p:spPr>
+        <p:txBody>
+          <a:bodyPr wrap="square" lIns="0" tIns="0" rIns="0" bIns="0" rtlCol="0" anchor="ctr"/>
+          <a:lstStyle/>
+          <a:p>
+            <a:pPr algn="ctr" indent="0" marL="0">
+              <a:buNone/>
+            </a:pPr>
+            <a:r>
+              <a:rPr lang="en-US" sz="4400" b="1" dirty="0">
+                <a:solidFill>
+                  <a:srgbClr val="AC4D33"/>
+                </a:solidFill>
+                <a:latin typeface="Cambria" pitchFamily="34" charset="0"/>
+                <a:ea typeface="Cambria" pitchFamily="34" charset="-122"/>
+                <a:cs typeface="Cambria" pitchFamily="34" charset="-120"/>
+              </a:rPr>
+              <a:t>55%</a:t>
+            </a:r>
+            <a:endParaRPr lang="en-US" sz="4400" dirty="0"/>
+          </a:p>
+        </p:txBody>
+      </p:sp>
+      <p:sp>
+        <p:nvSpPr>
+          <p:cNvPr id="22" name="Text 19"/>
+          <p:cNvSpPr/>
+          <p:nvPr/>
+        </p:nvSpPr>
+        <p:spPr>
+          <a:xfrm>
+            <a:off x="8732520" y="5486400"/>
+            <a:ext cx="3566160" cy="365760"/>
+          </a:xfrm>
+          <a:prstGeom prst="rect">
+            <a:avLst/>
+          </a:prstGeom>
+          <a:noFill/>
+          <a:ln/>
+        </p:spPr>
+        <p:txBody>
+          <a:bodyPr wrap="square" lIns="0" tIns="0" rIns="0" bIns="0" rtlCol="0" anchor="ctr"/>
+          <a:lstStyle/>
+          <a:p>
+            <a:pPr algn="ctr" indent="0" marL="0">
+              <a:buNone/>
+            </a:pPr>
+            <a:r>
+              <a:rPr lang="en-US" sz="1300" b="1" spc="200" kern="0" dirty="0">
+                <a:solidFill>
+                  <a:srgbClr val="8A7A76"/>
+                </a:solidFill>
+                <a:latin typeface="Calibri" pitchFamily="34" charset="0"/>
+                <a:ea typeface="Calibri" pitchFamily="34" charset="-122"/>
+                <a:cs typeface="Calibri" pitchFamily="34" charset="-120"/>
+              </a:rPr>
+              <a:t>CƠ THỂ</a:t>
+            </a:r>
+            <a:endParaRPr lang="en-US" sz="1300" dirty="0"/>
+          </a:p>
+        </p:txBody>
+      </p:sp>
+      <p:sp>
+        <p:nvSpPr>
+          <p:cNvPr id="23" name="Text 20"/>
+          <p:cNvSpPr/>
+          <p:nvPr/>
+        </p:nvSpPr>
+        <p:spPr>
+          <a:xfrm>
+            <a:off x="502920" y="5943600"/>
+            <a:ext cx="11201400" cy="365760"/>
+          </a:xfrm>
+          <a:prstGeom prst="rect">
+            <a:avLst/>
+          </a:prstGeom>
+          <a:noFill/>
+          <a:ln/>
+        </p:spPr>
+        <p:txBody>
+          <a:bodyPr wrap="square" lIns="0" tIns="0" rIns="0" bIns="0" rtlCol="0" anchor="ctr"/>
+          <a:lstStyle/>
+          <a:p>
+            <a:pPr algn="ctr" indent="0" marL="0">
+              <a:buNone/>
+            </a:pPr>
+            <a:r>
+              <a:rPr lang="en-US" sz="1200" i="1" dirty="0">
+                <a:solidFill>
+                  <a:srgbClr val="8A7A76"/>
+                </a:solidFill>
+                <a:latin typeface="Calibri" pitchFamily="34" charset="0"/>
+                <a:ea typeface="Calibri" pitchFamily="34" charset="-122"/>
+                <a:cs typeface="Calibri" pitchFamily="34" charset="-120"/>
+              </a:rPr>
+              <a:t>Mehrabian — với thông điệp cảm xúc</a:t>
+            </a:r>
+            <a:endParaRPr lang="en-US" sz="1200" dirty="0"/>
+          </a:p>
+        </p:txBody>
+      </p:sp>
+    </p:spTree>
+  </p:cSld>
+  <p:clrMapOvr>
+    <a:masterClrMapping/>
+  </p:clrMapOvr>
+</p:sld>
+</file>
+
+<file path=ppt/slides/slide11.xml><?xml version="1.0" encoding="utf-8"?>
+<p:sld xmlns:a="http://schemas.openxmlformats.org/drawingml/2006/main" xmlns:p="http://schemas.openxmlformats.org/presentationml/2006/main" xmlns:r="http://schemas.openxmlformats.org/officeDocument/2006/relationships">
+  <p:cSld>
+    <p:spTree>
+      <p:nvGrpSpPr>
+        <p:cNvPr id="1" name=""/>
+        <p:cNvGrpSpPr/>
+        <p:nvPr/>
+      </p:nvGrpSpPr>
+      <p:grpSpPr/>
+      <p:sp>
+        <p:nvSpPr>
+          <p:cNvPr id="2" name="Rectangle 1"/>
+          <p:cNvSpPr/>
+          <p:nvPr/>
+        </p:nvSpPr>
+        <p:spPr>
+          <a:xfrm>
+            <a:off x="0" y="0"/>
+            <a:ext cx="12191695" cy="6858000"/>
+          </a:xfrm>
+          <a:prstGeom prst="rect">
+            <a:avLst/>
+          </a:prstGeom>
+          <a:solidFill>
+            <a:srgbClr val="FDFBF8"/>
+          </a:solidFill>
+          <a:ln>
+            <a:noFill/>
+          </a:ln>
+          <a:effectLst/>
+        </p:spPr>
+        <p:style>
+          <a:lnRef idx="1">
+            <a:schemeClr val="accent1"/>
+          </a:lnRef>
+          <a:fillRef idx="3">
+            <a:schemeClr val="accent1"/>
+          </a:fillRef>
+          <a:effectRef idx="2">
+            <a:schemeClr val="accent1"/>
+          </a:effectRef>
+          <a:fontRef idx="minor">
+            <a:schemeClr val="lt1"/>
+          </a:fontRef>
+        </p:style>
+        <p:txBody>
+          <a:bodyPr rtlCol="0" anchor="ctr"/>
+          <a:lstStyle/>
+          <a:p>
+            <a:pPr algn="ctr"/>
+          </a:p>
+        </p:txBody>
+      </p:sp>
+      <p:sp>
+        <p:nvSpPr>
+          <p:cNvPr id="3" name="TextBox 2"/>
+          <p:cNvSpPr txBox="1"/>
+          <p:nvPr/>
+        </p:nvSpPr>
+        <p:spPr>
+          <a:xfrm>
+            <a:off x="502920" y="292608"/>
+            <a:ext cx="11155680" cy="292608"/>
+          </a:xfrm>
+          <a:prstGeom prst="rect">
+            <a:avLst/>
+          </a:prstGeom>
+          <a:noFill/>
+        </p:spPr>
+        <p:txBody>
+          <a:bodyPr wrap="none">
+            <a:spAutoFit/>
+          </a:bodyPr>
+          <a:lstStyle/>
+          <a:p>
+            <a:r>
+              <a:rPr sz="1100" b="1">
+                <a:solidFill>
+                  <a:srgbClr val="DC756A"/>
+                </a:solidFill>
+                <a:latin typeface="Calibri"/>
+              </a:rPr>
+              <a:t>CON SỐ PHẢI NHỚ</a:t>
+            </a:r>
+          </a:p>
+        </p:txBody>
+      </p:sp>
+      <p:sp>
+        <p:nvSpPr>
+          <p:cNvPr id="4" name="TextBox 3"/>
+          <p:cNvSpPr txBox="1"/>
+          <p:nvPr/>
+        </p:nvSpPr>
+        <p:spPr>
+          <a:xfrm>
+            <a:off x="502920" y="603504"/>
+            <a:ext cx="11155680" cy="731520"/>
+          </a:xfrm>
+          <a:prstGeom prst="rect">
+            <a:avLst/>
+          </a:prstGeom>
+          <a:noFill/>
+        </p:spPr>
+        <p:txBody>
+          <a:bodyPr wrap="square">
+            <a:spAutoFit/>
+          </a:bodyPr>
+          <a:lstStyle/>
+          <a:p>
+            <a:r>
+              <a:rPr sz="2700" b="1">
+                <a:solidFill>
+                  <a:srgbClr val="3A2B28"/>
+                </a:solidFill>
+                <a:latin typeface="Cambria"/>
+              </a:rPr>
+              <a:t>Thông điệp cảm xúc được truyền đi thế nào?</a:t>
+            </a:r>
+          </a:p>
+        </p:txBody>
+      </p:sp>
+      <p:sp>
+        <p:nvSpPr>
+          <p:cNvPr id="5" name="Rounded Rectangle 4"/>
+          <p:cNvSpPr/>
+          <p:nvPr/>
+        </p:nvSpPr>
+        <p:spPr>
+          <a:xfrm>
+            <a:off x="502920" y="1783080"/>
+            <a:ext cx="3575304" cy="3429000"/>
+          </a:xfrm>
+          <a:prstGeom prst="roundRect">
+            <a:avLst>
+              <a:gd name="adj" fmla="val 7000"/>
+            </a:avLst>
+          </a:prstGeom>
+          <a:solidFill>
+            <a:srgbClr val="FFFFFF"/>
+          </a:solidFill>
+          <a:ln w="15875">
+            <a:solidFill>
+              <a:srgbClr val="FBCEC9"/>
+            </a:solidFill>
+          </a:ln>
+          <a:effectLst/>
+        </p:spPr>
+        <p:style>
+          <a:lnRef idx="1">
+            <a:schemeClr val="accent1"/>
+          </a:lnRef>
+          <a:fillRef idx="3">
+            <a:schemeClr val="accent1"/>
+          </a:fillRef>
+          <a:effectRef idx="2">
+            <a:schemeClr val="accent1"/>
+          </a:effectRef>
+          <a:fontRef idx="minor">
+            <a:schemeClr val="lt1"/>
+          </a:fontRef>
+        </p:style>
+        <p:txBody>
+          <a:bodyPr rtlCol="0" anchor="ctr" wrap="square" lIns="182880" rIns="182880" tIns="274320" bIns="182880"/>
+          <a:lstStyle/>
+          <a:p>
+            <a:pPr algn="ctr"/>
+            <a:r>
+              <a:rPr sz="5800" b="1">
+                <a:solidFill>
+                  <a:srgbClr val="DC756A"/>
+                </a:solidFill>
+                <a:latin typeface="Cambria"/>
+              </a:rPr>
+              <a:t>7%</a:t>
+            </a:r>
+          </a:p>
+          <a:p>
+            <a:pPr algn="ctr"/>
+            <a:r>
+              <a:rPr sz="1400" b="1">
+                <a:solidFill>
+                  <a:srgbClr val="AC4D33"/>
+                </a:solidFill>
+                <a:latin typeface="Calibri"/>
+              </a:rPr>
+              <a:t>TỪ NGỮ</a:t>
+            </a:r>
+          </a:p>
+          <a:p>
+            <a:pPr algn="ctr">
+              <a:spcBef>
+                <a:spcPts val="1200"/>
+              </a:spcBef>
+            </a:pPr>
+            <a:r>
+              <a:rPr sz="1250">
+                <a:solidFill>
+                  <a:srgbClr val="3A2B28"/>
+                </a:solidFill>
+                <a:latin typeface="Calibri"/>
+              </a:rPr>
+              <a:t>Nội dung lời nói — phần nhỏ nhất, dù ta thường đầu tư nhiều nhất vào đây</a:t>
+            </a:r>
+          </a:p>
+        </p:txBody>
+      </p:sp>
+      <p:sp>
+        <p:nvSpPr>
+          <p:cNvPr id="6" name="Rounded Rectangle 5"/>
+          <p:cNvSpPr/>
+          <p:nvPr/>
+        </p:nvSpPr>
+        <p:spPr>
+          <a:xfrm>
+            <a:off x="4315968" y="1783080"/>
+            <a:ext cx="3575304" cy="3429000"/>
+          </a:xfrm>
+          <a:prstGeom prst="roundRect">
+            <a:avLst>
+              <a:gd name="adj" fmla="val 7000"/>
+            </a:avLst>
+          </a:prstGeom>
+          <a:solidFill>
+            <a:srgbClr val="FFFFFF"/>
+          </a:solidFill>
+          <a:ln w="15875">
+            <a:solidFill>
+              <a:srgbClr val="FBCEC9"/>
+            </a:solidFill>
+          </a:ln>
+          <a:effectLst/>
+        </p:spPr>
+        <p:style>
+          <a:lnRef idx="1">
+            <a:schemeClr val="accent1"/>
+          </a:lnRef>
+          <a:fillRef idx="3">
+            <a:schemeClr val="accent1"/>
+          </a:fillRef>
+          <a:effectRef idx="2">
+            <a:schemeClr val="accent1"/>
+          </a:effectRef>
+          <a:fontRef idx="minor">
+            <a:schemeClr val="lt1"/>
+          </a:fontRef>
+        </p:style>
+        <p:txBody>
+          <a:bodyPr rtlCol="0" anchor="ctr" wrap="square" lIns="182880" rIns="182880" tIns="274320" bIns="182880"/>
+          <a:lstStyle/>
+          <a:p>
+            <a:pPr algn="ctr"/>
+            <a:r>
+              <a:rPr sz="5800" b="1">
+                <a:solidFill>
+                  <a:srgbClr val="DC756A"/>
+                </a:solidFill>
+                <a:latin typeface="Cambria"/>
+              </a:rPr>
+              <a:t>38%</a:t>
+            </a:r>
+          </a:p>
+          <a:p>
+            <a:pPr algn="ctr"/>
+            <a:r>
+              <a:rPr sz="1400" b="1">
+                <a:solidFill>
+                  <a:srgbClr val="AC4D33"/>
+                </a:solidFill>
+                <a:latin typeface="Calibri"/>
+              </a:rPr>
+              <a:t>GIỌNG NÓI</a:t>
+            </a:r>
+          </a:p>
+          <a:p>
+            <a:pPr algn="ctr">
+              <a:spcBef>
+                <a:spcPts val="1200"/>
+              </a:spcBef>
+            </a:pPr>
+            <a:r>
+              <a:rPr sz="1250">
+                <a:solidFill>
+                  <a:srgbClr val="3A2B28"/>
+                </a:solidFill>
+                <a:latin typeface="Calibri"/>
+              </a:rPr>
+              <a:t>Âm lượng, tốc độ, ngữ điệu, khoảng dừng</a:t>
+            </a:r>
+          </a:p>
+        </p:txBody>
+      </p:sp>
+      <p:sp>
+        <p:nvSpPr>
+          <p:cNvPr id="7" name="Rounded Rectangle 6"/>
+          <p:cNvSpPr/>
+          <p:nvPr/>
+        </p:nvSpPr>
+        <p:spPr>
+          <a:xfrm>
+            <a:off x="8129016" y="1783080"/>
+            <a:ext cx="3575304" cy="3429000"/>
+          </a:xfrm>
+          <a:prstGeom prst="roundRect">
+            <a:avLst>
+              <a:gd name="adj" fmla="val 7000"/>
+            </a:avLst>
+          </a:prstGeom>
+          <a:solidFill>
+            <a:srgbClr val="FFFFFF"/>
+          </a:solidFill>
+          <a:ln w="15875">
+            <a:solidFill>
+              <a:srgbClr val="FBCEC9"/>
+            </a:solidFill>
+          </a:ln>
+          <a:effectLst/>
+        </p:spPr>
+        <p:style>
+          <a:lnRef idx="1">
+            <a:schemeClr val="accent1"/>
+          </a:lnRef>
+          <a:fillRef idx="3">
+            <a:schemeClr val="accent1"/>
+          </a:fillRef>
+          <a:effectRef idx="2">
+            <a:schemeClr val="accent1"/>
+          </a:effectRef>
+          <a:fontRef idx="minor">
+            <a:schemeClr val="lt1"/>
+          </a:fontRef>
+        </p:style>
+        <p:txBody>
+          <a:bodyPr rtlCol="0" anchor="ctr" wrap="square" lIns="182880" rIns="182880" tIns="274320" bIns="182880"/>
+          <a:lstStyle/>
+          <a:p>
+            <a:pPr algn="ctr"/>
+            <a:r>
+              <a:rPr sz="5800" b="1">
+                <a:solidFill>
+                  <a:srgbClr val="DC756A"/>
+                </a:solidFill>
+                <a:latin typeface="Cambria"/>
+              </a:rPr>
+              <a:t>55%</a:t>
+            </a:r>
+          </a:p>
+          <a:p>
+            <a:pPr algn="ctr"/>
+            <a:r>
+              <a:rPr sz="1400" b="1">
+                <a:solidFill>
+                  <a:srgbClr val="AC4D33"/>
+                </a:solidFill>
+                <a:latin typeface="Calibri"/>
+              </a:rPr>
+              <a:t>NGÔN NGỮ CƠ THỂ</a:t>
+            </a:r>
+          </a:p>
+          <a:p>
+            <a:pPr algn="ctr">
+              <a:spcBef>
+                <a:spcPts val="1200"/>
+              </a:spcBef>
+            </a:pPr>
+            <a:r>
+              <a:rPr sz="1250">
+                <a:solidFill>
+                  <a:srgbClr val="3A2B28"/>
+                </a:solidFill>
+                <a:latin typeface="Calibri"/>
+              </a:rPr>
+              <a:t>Ánh mắt, nét mặt, cử chỉ, tư thế, khoảng cách</a:t>
+            </a:r>
+          </a:p>
+        </p:txBody>
+      </p:sp>
+      <p:sp>
+        <p:nvSpPr>
+          <p:cNvPr id="8" name="Rounded Rectangle 7"/>
+          <p:cNvSpPr/>
+          <p:nvPr/>
+        </p:nvSpPr>
+        <p:spPr>
+          <a:xfrm>
+            <a:off x="502920" y="5440680"/>
+            <a:ext cx="11201400" cy="685800"/>
+          </a:xfrm>
+          <a:prstGeom prst="roundRect">
+            <a:avLst>
+              <a:gd name="adj" fmla="val 12000"/>
+            </a:avLst>
+          </a:prstGeom>
+          <a:solidFill>
+            <a:srgbClr val="FDF1EF"/>
+          </a:solidFill>
+          <a:ln w="12700">
+            <a:solidFill>
+              <a:srgbClr val="FBCEC9"/>
+            </a:solidFill>
+          </a:ln>
+          <a:effectLst/>
+        </p:spPr>
+        <p:style>
+          <a:lnRef idx="1">
+            <a:schemeClr val="accent1"/>
+          </a:lnRef>
+          <a:fillRef idx="3">
+            <a:schemeClr val="accent1"/>
+          </a:fillRef>
+          <a:effectRef idx="2">
+            <a:schemeClr val="accent1"/>
+          </a:effectRef>
+          <a:fontRef idx="minor">
+            <a:schemeClr val="lt1"/>
+          </a:fontRef>
+        </p:style>
+        <p:txBody>
+          <a:bodyPr rtlCol="0" anchor="ctr" wrap="square" lIns="201168" rIns="201168"/>
+          <a:lstStyle/>
+          <a:p>
+            <a:pPr algn="ctr"/>
+            <a:r>
+              <a:rPr sz="1300">
+                <a:solidFill>
+                  <a:srgbClr val="3A2B28"/>
+                </a:solidFill>
+                <a:latin typeface="Calibri"/>
+              </a:rPr>
+              <a:t>Nghiên cứu của Albert Mehrabian — chỉ áp dụng cho thông điệp mang tính CẢM XÚC, không phải mọi tình huống giao tiếp.</a:t>
+            </a:r>
+          </a:p>
+        </p:txBody>
+      </p:sp>
+      <p:sp>
+        <p:nvSpPr>
+          <p:cNvPr id="9" name="TextBox 8"/>
+          <p:cNvSpPr txBox="1"/>
+          <p:nvPr/>
+        </p:nvSpPr>
+        <p:spPr>
+          <a:xfrm>
+            <a:off x="502920" y="6419088"/>
+            <a:ext cx="7772400" cy="292608"/>
+          </a:xfrm>
+          <a:prstGeom prst="rect">
+            <a:avLst/>
+          </a:prstGeom>
+          <a:noFill/>
+        </p:spPr>
+        <p:txBody>
+          <a:bodyPr wrap="none">
+            <a:spAutoFit/>
+          </a:bodyPr>
+          <a:lstStyle/>
+          <a:p>
+            <a:r>
+              <a:rPr sz="900">
+                <a:solidFill>
+                  <a:srgbClr val="8A7A76"/>
+                </a:solidFill>
+                <a:latin typeface="Calibri"/>
+              </a:rPr>
+              <a:t>Je m'appelle Huong  •  GV. Đỗ Thùy Hương  •  EC1103</a:t>
+            </a:r>
+          </a:p>
+        </p:txBody>
+      </p:sp>
+      <p:sp>
+        <p:nvSpPr>
+          <p:cNvPr id="10" name="TextBox 9"/>
+          <p:cNvSpPr txBox="1"/>
+          <p:nvPr/>
+        </p:nvSpPr>
+        <p:spPr>
+          <a:xfrm>
+            <a:off x="9326880" y="6419088"/>
+            <a:ext cx="1920240" cy="292608"/>
+          </a:xfrm>
+          <a:prstGeom prst="rect">
+            <a:avLst/>
+          </a:prstGeom>
+          <a:noFill/>
+        </p:spPr>
+        <p:txBody>
+          <a:bodyPr wrap="none">
+            <a:spAutoFit/>
+          </a:bodyPr>
+          <a:lstStyle/>
+          <a:p>
+            <a:pPr algn="r"/>
+            <a:r>
+              <a:rPr sz="900">
+                <a:solidFill>
+                  <a:srgbClr val="8A7A76"/>
+                </a:solidFill>
+                <a:latin typeface="Calibri"/>
+              </a:rPr>
+              <a:t>Chương 1</a:t>
+            </a:r>
+          </a:p>
+        </p:txBody>
+      </p:sp>
+    </p:spTree>
+  </p:cSld>
+  <p:clrMapOvr>
+    <a:masterClrMapping/>
+  </p:clrMapOvr>
+</p:sld>
+</file>
+
+<file path=ppt/slides/slide12.xml><?xml version="1.0" encoding="utf-8"?>
 <p:sld xmlns:a="http://schemas.openxmlformats.org/drawingml/2006/main" xmlns:r="http://schemas.openxmlformats.org/officeDocument/2006/relationships" xmlns:p="http://schemas.openxmlformats.org/presentationml/2006/main">
   <p:cSld name="Slide 10">
     <p:bg>
@@ -3343,7 +4750,7 @@
       </p:grpSpPr>
       <p:pic>
         <p:nvPicPr>
-          <p:cNvPr id="2" name="Image 0" descr="assets/logo_tron.png">    </p:cNvPr>
+          <p:cNvPr id="2" name="Image 0" descr="/home/user/comdraft/assets/img/dau-huong.png">    </p:cNvPr>
           <p:cNvPicPr>
             <a:picLocks noChangeAspect="1"/>
           </p:cNvPicPr>
@@ -3651,7 +5058,328 @@
 </p:sld>
 </file>
 
-<file path=ppt/slides/slide11.xml><?xml version="1.0" encoding="utf-8"?>
+<file path=ppt/slides/slide13.xml><?xml version="1.0" encoding="utf-8"?>
+<p:sld xmlns:a="http://schemas.openxmlformats.org/drawingml/2006/main" xmlns:p="http://schemas.openxmlformats.org/presentationml/2006/main" xmlns:r="http://schemas.openxmlformats.org/officeDocument/2006/relationships">
+  <p:cSld>
+    <p:spTree>
+      <p:nvGrpSpPr>
+        <p:cNvPr id="1" name=""/>
+        <p:cNvGrpSpPr/>
+        <p:nvPr/>
+      </p:nvGrpSpPr>
+      <p:grpSpPr/>
+      <p:sp>
+        <p:nvSpPr>
+          <p:cNvPr id="2" name="Rectangle 1"/>
+          <p:cNvSpPr/>
+          <p:nvPr/>
+        </p:nvSpPr>
+        <p:spPr>
+          <a:xfrm>
+            <a:off x="0" y="0"/>
+            <a:ext cx="12191695" cy="6858000"/>
+          </a:xfrm>
+          <a:prstGeom prst="rect">
+            <a:avLst/>
+          </a:prstGeom>
+          <a:solidFill>
+            <a:srgbClr val="FDFBF8"/>
+          </a:solidFill>
+          <a:ln>
+            <a:noFill/>
+          </a:ln>
+          <a:effectLst/>
+        </p:spPr>
+        <p:style>
+          <a:lnRef idx="1">
+            <a:schemeClr val="accent1"/>
+          </a:lnRef>
+          <a:fillRef idx="3">
+            <a:schemeClr val="accent1"/>
+          </a:fillRef>
+          <a:effectRef idx="2">
+            <a:schemeClr val="accent1"/>
+          </a:effectRef>
+          <a:fontRef idx="minor">
+            <a:schemeClr val="lt1"/>
+          </a:fontRef>
+        </p:style>
+        <p:txBody>
+          <a:bodyPr rtlCol="0" anchor="ctr"/>
+          <a:lstStyle/>
+          <a:p>
+            <a:pPr algn="ctr"/>
+          </a:p>
+        </p:txBody>
+      </p:sp>
+      <p:sp>
+        <p:nvSpPr>
+          <p:cNvPr id="3" name="Rectangle 2"/>
+          <p:cNvSpPr/>
+          <p:nvPr/>
+        </p:nvSpPr>
+        <p:spPr>
+          <a:xfrm>
+            <a:off x="0" y="2103120"/>
+            <a:ext cx="12191695" cy="2743200"/>
+          </a:xfrm>
+          <a:prstGeom prst="rect">
+            <a:avLst/>
+          </a:prstGeom>
+          <a:solidFill>
+            <a:srgbClr val="FDF1EF"/>
+          </a:solidFill>
+          <a:ln>
+            <a:noFill/>
+          </a:ln>
+          <a:effectLst/>
+        </p:spPr>
+        <p:style>
+          <a:lnRef idx="1">
+            <a:schemeClr val="accent1"/>
+          </a:lnRef>
+          <a:fillRef idx="3">
+            <a:schemeClr val="accent1"/>
+          </a:fillRef>
+          <a:effectRef idx="2">
+            <a:schemeClr val="accent1"/>
+          </a:effectRef>
+          <a:fontRef idx="minor">
+            <a:schemeClr val="lt1"/>
+          </a:fontRef>
+        </p:style>
+        <p:txBody>
+          <a:bodyPr rtlCol="0" anchor="ctr"/>
+          <a:lstStyle/>
+          <a:p>
+            <a:pPr algn="ctr"/>
+          </a:p>
+        </p:txBody>
+      </p:sp>
+      <p:sp>
+        <p:nvSpPr>
+          <p:cNvPr id="4" name="Rectangle 3"/>
+          <p:cNvSpPr/>
+          <p:nvPr/>
+        </p:nvSpPr>
+        <p:spPr>
+          <a:xfrm>
+            <a:off x="0" y="0"/>
+            <a:ext cx="274320" cy="6858000"/>
+          </a:xfrm>
+          <a:prstGeom prst="rect">
+            <a:avLst/>
+          </a:prstGeom>
+          <a:solidFill>
+            <a:srgbClr val="DC756A"/>
+          </a:solidFill>
+          <a:ln>
+            <a:noFill/>
+          </a:ln>
+          <a:effectLst/>
+        </p:spPr>
+        <p:style>
+          <a:lnRef idx="1">
+            <a:schemeClr val="accent1"/>
+          </a:lnRef>
+          <a:fillRef idx="3">
+            <a:schemeClr val="accent1"/>
+          </a:fillRef>
+          <a:effectRef idx="2">
+            <a:schemeClr val="accent1"/>
+          </a:effectRef>
+          <a:fontRef idx="minor">
+            <a:schemeClr val="lt1"/>
+          </a:fontRef>
+        </p:style>
+        <p:txBody>
+          <a:bodyPr rtlCol="0" anchor="ctr"/>
+          <a:lstStyle/>
+          <a:p>
+            <a:pPr algn="ctr"/>
+          </a:p>
+        </p:txBody>
+      </p:sp>
+      <p:sp>
+        <p:nvSpPr>
+          <p:cNvPr id="5" name="TextBox 4"/>
+          <p:cNvSpPr txBox="1"/>
+          <p:nvPr/>
+        </p:nvSpPr>
+        <p:spPr>
+          <a:xfrm>
+            <a:off x="1280160" y="2377440"/>
+            <a:ext cx="9692640" cy="411480"/>
+          </a:xfrm>
+          <a:prstGeom prst="rect">
+            <a:avLst/>
+          </a:prstGeom>
+          <a:noFill/>
+        </p:spPr>
+        <p:txBody>
+          <a:bodyPr wrap="none">
+            <a:spAutoFit/>
+          </a:bodyPr>
+          <a:lstStyle/>
+          <a:p>
+            <a:r>
+              <a:rPr sz="1500" b="1">
+                <a:solidFill>
+                  <a:srgbClr val="DC756A"/>
+                </a:solidFill>
+                <a:latin typeface="Calibri"/>
+              </a:rPr>
+              <a:t>MỤC 1.4 – 1.5</a:t>
+            </a:r>
+          </a:p>
+        </p:txBody>
+      </p:sp>
+      <p:sp>
+        <p:nvSpPr>
+          <p:cNvPr id="6" name="TextBox 5"/>
+          <p:cNvSpPr txBox="1"/>
+          <p:nvPr/>
+        </p:nvSpPr>
+        <p:spPr>
+          <a:xfrm>
+            <a:off x="1280160" y="2788920"/>
+            <a:ext cx="9601200" cy="1371600"/>
+          </a:xfrm>
+          <a:prstGeom prst="rect">
+            <a:avLst/>
+          </a:prstGeom>
+          <a:noFill/>
+        </p:spPr>
+        <p:txBody>
+          <a:bodyPr wrap="square">
+            <a:spAutoFit/>
+          </a:bodyPr>
+          <a:lstStyle/>
+          <a:p>
+            <a:r>
+              <a:rPr sz="3800" b="1">
+                <a:solidFill>
+                  <a:srgbClr val="AC4D33"/>
+                </a:solidFill>
+                <a:latin typeface="Cambria"/>
+              </a:rPr>
+              <a:t>Yếu tố ảnh hưởng và nguyên tắc</a:t>
+            </a:r>
+          </a:p>
+        </p:txBody>
+      </p:sp>
+      <p:sp>
+        <p:nvSpPr>
+          <p:cNvPr id="7" name="TextBox 6"/>
+          <p:cNvSpPr txBox="1"/>
+          <p:nvPr/>
+        </p:nvSpPr>
+        <p:spPr>
+          <a:xfrm>
+            <a:off x="1280160" y="4224528"/>
+            <a:ext cx="9418320" cy="640080"/>
+          </a:xfrm>
+          <a:prstGeom prst="rect">
+            <a:avLst/>
+          </a:prstGeom>
+          <a:noFill/>
+        </p:spPr>
+        <p:txBody>
+          <a:bodyPr wrap="square">
+            <a:spAutoFit/>
+          </a:bodyPr>
+          <a:lstStyle/>
+          <a:p>
+            <a:r>
+              <a:rPr sz="1450" i="1">
+                <a:solidFill>
+                  <a:srgbClr val="8A7A76"/>
+                </a:solidFill>
+                <a:latin typeface="Calibri"/>
+              </a:rPr>
+              <a:t>Điều gì làm hỏng một cuộc giao tiếp, và năm nguyên tắc giúp ta tránh được điều đó.</a:t>
+            </a:r>
+          </a:p>
+        </p:txBody>
+      </p:sp>
+      <p:sp>
+        <p:nvSpPr>
+          <p:cNvPr id="8" name="TextBox 7"/>
+          <p:cNvSpPr txBox="1"/>
+          <p:nvPr/>
+        </p:nvSpPr>
+        <p:spPr>
+          <a:xfrm>
+            <a:off x="502920" y="6419088"/>
+            <a:ext cx="7772400" cy="292608"/>
+          </a:xfrm>
+          <a:prstGeom prst="rect">
+            <a:avLst/>
+          </a:prstGeom>
+          <a:noFill/>
+        </p:spPr>
+        <p:txBody>
+          <a:bodyPr wrap="none">
+            <a:spAutoFit/>
+          </a:bodyPr>
+          <a:lstStyle/>
+          <a:p>
+            <a:r>
+              <a:rPr sz="900">
+                <a:solidFill>
+                  <a:srgbClr val="8A7A76"/>
+                </a:solidFill>
+                <a:latin typeface="Calibri"/>
+              </a:rPr>
+              <a:t>Je m'appelle Huong  •  GV. Đỗ Thùy Hương  •  EC1103</a:t>
+            </a:r>
+          </a:p>
+        </p:txBody>
+      </p:sp>
+      <p:sp>
+        <p:nvSpPr>
+          <p:cNvPr id="9" name="TextBox 8"/>
+          <p:cNvSpPr txBox="1"/>
+          <p:nvPr/>
+        </p:nvSpPr>
+        <p:spPr>
+          <a:xfrm>
+            <a:off x="9326880" y="6419088"/>
+            <a:ext cx="1920240" cy="292608"/>
+          </a:xfrm>
+          <a:prstGeom prst="rect">
+            <a:avLst/>
+          </a:prstGeom>
+          <a:noFill/>
+        </p:spPr>
+        <p:txBody>
+          <a:bodyPr wrap="none">
+            <a:spAutoFit/>
+          </a:bodyPr>
+          <a:lstStyle/>
+          <a:p>
+            <a:pPr algn="r"/>
+            <a:r>
+              <a:rPr sz="900">
+                <a:solidFill>
+                  <a:srgbClr val="8A7A76"/>
+                </a:solidFill>
+                <a:latin typeface="Calibri"/>
+              </a:rPr>
+              <a:t>Chương 1</a:t>
+            </a:r>
+          </a:p>
+        </p:txBody>
+      </p:sp>
+    </p:spTree>
+  </p:cSld>
+  <p:clrMapOvr>
+    <a:masterClrMapping/>
+  </p:clrMapOvr>
+</p:sld>
+</file>
+
+<file path=ppt/slides/slide14.xml><?xml version="1.0" encoding="utf-8"?>
 <p:sld xmlns:a="http://schemas.openxmlformats.org/drawingml/2006/main" xmlns:r="http://schemas.openxmlformats.org/officeDocument/2006/relationships" xmlns:p="http://schemas.openxmlformats.org/presentationml/2006/main">
   <p:cSld name="Slide 11">
     <p:bg>
@@ -3677,7 +5405,7 @@
       </p:grpSpPr>
       <p:pic>
         <p:nvPicPr>
-          <p:cNvPr id="2" name="Image 0" descr="assets/logo_tron.png">    </p:cNvPr>
+          <p:cNvPr id="2" name="Image 0" descr="/home/user/comdraft/assets/img/dau-huong.png">    </p:cNvPr>
           <p:cNvPicPr>
             <a:picLocks noChangeAspect="1"/>
           </p:cNvPicPr>
@@ -3985,7 +5713,7 @@
 </p:sld>
 </file>
 
-<file path=ppt/slides/slide12.xml><?xml version="1.0" encoding="utf-8"?>
+<file path=ppt/slides/slide15.xml><?xml version="1.0" encoding="utf-8"?>
 <p:sld xmlns:a="http://schemas.openxmlformats.org/drawingml/2006/main" xmlns:r="http://schemas.openxmlformats.org/officeDocument/2006/relationships" xmlns:p="http://schemas.openxmlformats.org/presentationml/2006/main">
   <p:cSld name="Slide 12">
     <p:bg>
@@ -4011,7 +5739,7 @@
       </p:grpSpPr>
       <p:pic>
         <p:nvPicPr>
-          <p:cNvPr id="2" name="Image 0" descr="assets/logo_tron.png">    </p:cNvPr>
+          <p:cNvPr id="2" name="Image 0" descr="/home/user/comdraft/assets/img/dau-huong.png">    </p:cNvPr>
           <p:cNvPicPr>
             <a:picLocks noChangeAspect="1"/>
           </p:cNvPicPr>
@@ -4840,7 +6568,7 @@
 </p:sld>
 </file>
 
-<file path=ppt/slides/slide13.xml><?xml version="1.0" encoding="utf-8"?>
+<file path=ppt/slides/slide16.xml><?xml version="1.0" encoding="utf-8"?>
 <p:sld xmlns:a="http://schemas.openxmlformats.org/drawingml/2006/main" xmlns:r="http://schemas.openxmlformats.org/officeDocument/2006/relationships" xmlns:p="http://schemas.openxmlformats.org/presentationml/2006/main">
   <p:cSld name="Slide 13">
     <p:bg>
@@ -4866,7 +6594,7 @@
       </p:grpSpPr>
       <p:pic>
         <p:nvPicPr>
-          <p:cNvPr id="2" name="Image 0" descr="assets/logo_tron.png">    </p:cNvPr>
+          <p:cNvPr id="2" name="Image 0" descr="/home/user/comdraft/assets/img/dau-huong.png">    </p:cNvPr>
           <p:cNvPicPr>
             <a:picLocks noChangeAspect="1"/>
           </p:cNvPicPr>
@@ -5571,7 +7299,7 @@
 </p:sld>
 </file>
 
-<file path=ppt/slides/slide14.xml><?xml version="1.0" encoding="utf-8"?>
+<file path=ppt/slides/slide17.xml><?xml version="1.0" encoding="utf-8"?>
 <p:sld xmlns:a="http://schemas.openxmlformats.org/drawingml/2006/main" xmlns:r="http://schemas.openxmlformats.org/officeDocument/2006/relationships" xmlns:p="http://schemas.openxmlformats.org/presentationml/2006/main">
   <p:cSld name="Slide 14">
     <p:bg>
@@ -5597,7 +7325,7 @@
       </p:grpSpPr>
       <p:pic>
         <p:nvPicPr>
-          <p:cNvPr id="2" name="Image 0" descr="assets/logo_tron.png">    </p:cNvPr>
+          <p:cNvPr id="2" name="Image 0" descr="/home/user/comdraft/assets/img/dau-huong.png">    </p:cNvPr>
           <p:cNvPicPr>
             <a:picLocks noChangeAspect="1"/>
           </p:cNvPicPr>
@@ -6107,7 +7835,7 @@
 </p:sld>
 </file>
 
-<file path=ppt/slides/slide15.xml><?xml version="1.0" encoding="utf-8"?>
+<file path=ppt/slides/slide18.xml><?xml version="1.0" encoding="utf-8"?>
 <p:sld xmlns:a="http://schemas.openxmlformats.org/drawingml/2006/main" xmlns:r="http://schemas.openxmlformats.org/officeDocument/2006/relationships" xmlns:p="http://schemas.openxmlformats.org/presentationml/2006/main">
   <p:cSld name="Slide 15">
     <p:bg>
@@ -6133,7 +7861,7 @@
       </p:grpSpPr>
       <p:pic>
         <p:nvPicPr>
-          <p:cNvPr id="2" name="Image 0" descr="assets/logo_tron.png">    </p:cNvPr>
+          <p:cNvPr id="2" name="Image 0" descr="/home/user/comdraft/assets/img/dau-huong.png">    </p:cNvPr>
           <p:cNvPicPr>
             <a:picLocks noChangeAspect="1"/>
           </p:cNvPicPr>
@@ -6874,7 +8602,7 @@
 </p:sld>
 </file>
 
-<file path=ppt/slides/slide16.xml><?xml version="1.0" encoding="utf-8"?>
+<file path=ppt/slides/slide19.xml><?xml version="1.0" encoding="utf-8"?>
 <p:sld xmlns:a="http://schemas.openxmlformats.org/drawingml/2006/main" xmlns:r="http://schemas.openxmlformats.org/officeDocument/2006/relationships" xmlns:p="http://schemas.openxmlformats.org/presentationml/2006/main">
   <p:cSld name="Slide 16">
     <p:bg>
@@ -6900,7 +8628,7 @@
       </p:grpSpPr>
       <p:pic>
         <p:nvPicPr>
-          <p:cNvPr id="2" name="Image 0" descr="assets/logo_tron.png">    </p:cNvPr>
+          <p:cNvPr id="2" name="Image 0" descr="/home/user/comdraft/assets/img/dau-huong.png">    </p:cNvPr>
           <p:cNvPicPr>
             <a:picLocks noChangeAspect="1"/>
           </p:cNvPicPr>
@@ -7399,1159 +9127,6 @@
               <a:t>Slide bài giảng, tình huống và bài tập do GV. Đỗ Thùy Hương biên soạn; cung cấp sau mỗi buổi học trên nhóm lớp.</a:t>
             </a:r>
             <a:endParaRPr lang="en-US" sz="1500" dirty="0"/>
-          </a:p>
-        </p:txBody>
-      </p:sp>
-    </p:spTree>
-  </p:cSld>
-  <p:clrMapOvr>
-    <a:masterClrMapping/>
-  </p:clrMapOvr>
-</p:sld>
-</file>
-
-<file path=ppt/slides/slide17.xml><?xml version="1.0" encoding="utf-8"?>
-<p:sld xmlns:a="http://schemas.openxmlformats.org/drawingml/2006/main" xmlns:p="http://schemas.openxmlformats.org/presentationml/2006/main" xmlns:r="http://schemas.openxmlformats.org/officeDocument/2006/relationships">
-  <p:cSld>
-    <p:spTree>
-      <p:nvGrpSpPr>
-        <p:cNvPr id="1" name=""/>
-        <p:cNvGrpSpPr/>
-        <p:nvPr/>
-      </p:nvGrpSpPr>
-      <p:grpSpPr/>
-      <p:sp>
-        <p:nvSpPr>
-          <p:cNvPr id="2" name="Rectangle 1"/>
-          <p:cNvSpPr/>
-          <p:nvPr/>
-        </p:nvSpPr>
-        <p:spPr>
-          <a:xfrm>
-            <a:off x="0" y="0"/>
-            <a:ext cx="12191695" cy="6858000"/>
-          </a:xfrm>
-          <a:prstGeom prst="rect">
-            <a:avLst/>
-          </a:prstGeom>
-          <a:solidFill>
-            <a:srgbClr val="FDFBF8"/>
-          </a:solidFill>
-          <a:ln>
-            <a:noFill/>
-          </a:ln>
-          <a:effectLst/>
-        </p:spPr>
-        <p:style>
-          <a:lnRef idx="1">
-            <a:schemeClr val="accent1"/>
-          </a:lnRef>
-          <a:fillRef idx="3">
-            <a:schemeClr val="accent1"/>
-          </a:fillRef>
-          <a:effectRef idx="2">
-            <a:schemeClr val="accent1"/>
-          </a:effectRef>
-          <a:fontRef idx="minor">
-            <a:schemeClr val="lt1"/>
-          </a:fontRef>
-        </p:style>
-        <p:txBody>
-          <a:bodyPr rtlCol="0" anchor="ctr"/>
-          <a:lstStyle/>
-          <a:p>
-            <a:pPr algn="ctr"/>
-          </a:p>
-        </p:txBody>
-      </p:sp>
-      <p:sp>
-        <p:nvSpPr>
-          <p:cNvPr id="3" name="TextBox 2"/>
-          <p:cNvSpPr txBox="1"/>
-          <p:nvPr/>
-        </p:nvSpPr>
-        <p:spPr>
-          <a:xfrm>
-            <a:off x="502920" y="292608"/>
-            <a:ext cx="11155680" cy="292608"/>
-          </a:xfrm>
-          <a:prstGeom prst="rect">
-            <a:avLst/>
-          </a:prstGeom>
-          <a:noFill/>
-        </p:spPr>
-        <p:txBody>
-          <a:bodyPr wrap="none">
-            <a:spAutoFit/>
-          </a:bodyPr>
-          <a:lstStyle/>
-          <a:p>
-            <a:r>
-              <a:rPr sz="1100" b="1">
-                <a:solidFill>
-                  <a:srgbClr val="DC756A"/>
-                </a:solidFill>
-                <a:latin typeface="Calibri"/>
-              </a:rPr>
-              <a:t>CON SỐ PHẢI NHỚ</a:t>
-            </a:r>
-          </a:p>
-        </p:txBody>
-      </p:sp>
-      <p:sp>
-        <p:nvSpPr>
-          <p:cNvPr id="4" name="TextBox 3"/>
-          <p:cNvSpPr txBox="1"/>
-          <p:nvPr/>
-        </p:nvSpPr>
-        <p:spPr>
-          <a:xfrm>
-            <a:off x="502920" y="603504"/>
-            <a:ext cx="11155680" cy="731520"/>
-          </a:xfrm>
-          <a:prstGeom prst="rect">
-            <a:avLst/>
-          </a:prstGeom>
-          <a:noFill/>
-        </p:spPr>
-        <p:txBody>
-          <a:bodyPr wrap="square">
-            <a:spAutoFit/>
-          </a:bodyPr>
-          <a:lstStyle/>
-          <a:p>
-            <a:r>
-              <a:rPr sz="2700" b="1">
-                <a:solidFill>
-                  <a:srgbClr val="3A2B28"/>
-                </a:solidFill>
-                <a:latin typeface="Cambria"/>
-              </a:rPr>
-              <a:t>Thông điệp cảm xúc được truyền đi thế nào?</a:t>
-            </a:r>
-          </a:p>
-        </p:txBody>
-      </p:sp>
-      <p:sp>
-        <p:nvSpPr>
-          <p:cNvPr id="5" name="Rounded Rectangle 4"/>
-          <p:cNvSpPr/>
-          <p:nvPr/>
-        </p:nvSpPr>
-        <p:spPr>
-          <a:xfrm>
-            <a:off x="502920" y="1783080"/>
-            <a:ext cx="3575304" cy="3429000"/>
-          </a:xfrm>
-          <a:prstGeom prst="roundRect">
-            <a:avLst>
-              <a:gd name="adj" fmla="val 7000"/>
-            </a:avLst>
-          </a:prstGeom>
-          <a:solidFill>
-            <a:srgbClr val="FFFFFF"/>
-          </a:solidFill>
-          <a:ln w="15875">
-            <a:solidFill>
-              <a:srgbClr val="FBCEC9"/>
-            </a:solidFill>
-          </a:ln>
-          <a:effectLst/>
-        </p:spPr>
-        <p:style>
-          <a:lnRef idx="1">
-            <a:schemeClr val="accent1"/>
-          </a:lnRef>
-          <a:fillRef idx="3">
-            <a:schemeClr val="accent1"/>
-          </a:fillRef>
-          <a:effectRef idx="2">
-            <a:schemeClr val="accent1"/>
-          </a:effectRef>
-          <a:fontRef idx="minor">
-            <a:schemeClr val="lt1"/>
-          </a:fontRef>
-        </p:style>
-        <p:txBody>
-          <a:bodyPr rtlCol="0" anchor="ctr" wrap="square" lIns="182880" rIns="182880" tIns="274320" bIns="182880"/>
-          <a:lstStyle/>
-          <a:p>
-            <a:pPr algn="ctr"/>
-            <a:r>
-              <a:rPr sz="5800" b="1">
-                <a:solidFill>
-                  <a:srgbClr val="DC756A"/>
-                </a:solidFill>
-                <a:latin typeface="Cambria"/>
-              </a:rPr>
-              <a:t>7%</a:t>
-            </a:r>
-          </a:p>
-          <a:p>
-            <a:pPr algn="ctr"/>
-            <a:r>
-              <a:rPr sz="1400" b="1">
-                <a:solidFill>
-                  <a:srgbClr val="AC4D33"/>
-                </a:solidFill>
-                <a:latin typeface="Calibri"/>
-              </a:rPr>
-              <a:t>TỪ NGỮ</a:t>
-            </a:r>
-          </a:p>
-          <a:p>
-            <a:pPr algn="ctr">
-              <a:spcBef>
-                <a:spcPts val="1200"/>
-              </a:spcBef>
-            </a:pPr>
-            <a:r>
-              <a:rPr sz="1250">
-                <a:solidFill>
-                  <a:srgbClr val="3A2B28"/>
-                </a:solidFill>
-                <a:latin typeface="Calibri"/>
-              </a:rPr>
-              <a:t>Nội dung lời nói — phần nhỏ nhất, dù ta thường đầu tư nhiều nhất vào đây</a:t>
-            </a:r>
-          </a:p>
-        </p:txBody>
-      </p:sp>
-      <p:sp>
-        <p:nvSpPr>
-          <p:cNvPr id="6" name="Rounded Rectangle 5"/>
-          <p:cNvSpPr/>
-          <p:nvPr/>
-        </p:nvSpPr>
-        <p:spPr>
-          <a:xfrm>
-            <a:off x="4315968" y="1783080"/>
-            <a:ext cx="3575304" cy="3429000"/>
-          </a:xfrm>
-          <a:prstGeom prst="roundRect">
-            <a:avLst>
-              <a:gd name="adj" fmla="val 7000"/>
-            </a:avLst>
-          </a:prstGeom>
-          <a:solidFill>
-            <a:srgbClr val="FFFFFF"/>
-          </a:solidFill>
-          <a:ln w="15875">
-            <a:solidFill>
-              <a:srgbClr val="FBCEC9"/>
-            </a:solidFill>
-          </a:ln>
-          <a:effectLst/>
-        </p:spPr>
-        <p:style>
-          <a:lnRef idx="1">
-            <a:schemeClr val="accent1"/>
-          </a:lnRef>
-          <a:fillRef idx="3">
-            <a:schemeClr val="accent1"/>
-          </a:fillRef>
-          <a:effectRef idx="2">
-            <a:schemeClr val="accent1"/>
-          </a:effectRef>
-          <a:fontRef idx="minor">
-            <a:schemeClr val="lt1"/>
-          </a:fontRef>
-        </p:style>
-        <p:txBody>
-          <a:bodyPr rtlCol="0" anchor="ctr" wrap="square" lIns="182880" rIns="182880" tIns="274320" bIns="182880"/>
-          <a:lstStyle/>
-          <a:p>
-            <a:pPr algn="ctr"/>
-            <a:r>
-              <a:rPr sz="5800" b="1">
-                <a:solidFill>
-                  <a:srgbClr val="DC756A"/>
-                </a:solidFill>
-                <a:latin typeface="Cambria"/>
-              </a:rPr>
-              <a:t>38%</a:t>
-            </a:r>
-          </a:p>
-          <a:p>
-            <a:pPr algn="ctr"/>
-            <a:r>
-              <a:rPr sz="1400" b="1">
-                <a:solidFill>
-                  <a:srgbClr val="AC4D33"/>
-                </a:solidFill>
-                <a:latin typeface="Calibri"/>
-              </a:rPr>
-              <a:t>GIỌNG NÓI</a:t>
-            </a:r>
-          </a:p>
-          <a:p>
-            <a:pPr algn="ctr">
-              <a:spcBef>
-                <a:spcPts val="1200"/>
-              </a:spcBef>
-            </a:pPr>
-            <a:r>
-              <a:rPr sz="1250">
-                <a:solidFill>
-                  <a:srgbClr val="3A2B28"/>
-                </a:solidFill>
-                <a:latin typeface="Calibri"/>
-              </a:rPr>
-              <a:t>Âm lượng, tốc độ, ngữ điệu, khoảng dừng</a:t>
-            </a:r>
-          </a:p>
-        </p:txBody>
-      </p:sp>
-      <p:sp>
-        <p:nvSpPr>
-          <p:cNvPr id="7" name="Rounded Rectangle 6"/>
-          <p:cNvSpPr/>
-          <p:nvPr/>
-        </p:nvSpPr>
-        <p:spPr>
-          <a:xfrm>
-            <a:off x="8129016" y="1783080"/>
-            <a:ext cx="3575304" cy="3429000"/>
-          </a:xfrm>
-          <a:prstGeom prst="roundRect">
-            <a:avLst>
-              <a:gd name="adj" fmla="val 7000"/>
-            </a:avLst>
-          </a:prstGeom>
-          <a:solidFill>
-            <a:srgbClr val="FFFFFF"/>
-          </a:solidFill>
-          <a:ln w="15875">
-            <a:solidFill>
-              <a:srgbClr val="FBCEC9"/>
-            </a:solidFill>
-          </a:ln>
-          <a:effectLst/>
-        </p:spPr>
-        <p:style>
-          <a:lnRef idx="1">
-            <a:schemeClr val="accent1"/>
-          </a:lnRef>
-          <a:fillRef idx="3">
-            <a:schemeClr val="accent1"/>
-          </a:fillRef>
-          <a:effectRef idx="2">
-            <a:schemeClr val="accent1"/>
-          </a:effectRef>
-          <a:fontRef idx="minor">
-            <a:schemeClr val="lt1"/>
-          </a:fontRef>
-        </p:style>
-        <p:txBody>
-          <a:bodyPr rtlCol="0" anchor="ctr" wrap="square" lIns="182880" rIns="182880" tIns="274320" bIns="182880"/>
-          <a:lstStyle/>
-          <a:p>
-            <a:pPr algn="ctr"/>
-            <a:r>
-              <a:rPr sz="5800" b="1">
-                <a:solidFill>
-                  <a:srgbClr val="DC756A"/>
-                </a:solidFill>
-                <a:latin typeface="Cambria"/>
-              </a:rPr>
-              <a:t>55%</a:t>
-            </a:r>
-          </a:p>
-          <a:p>
-            <a:pPr algn="ctr"/>
-            <a:r>
-              <a:rPr sz="1400" b="1">
-                <a:solidFill>
-                  <a:srgbClr val="AC4D33"/>
-                </a:solidFill>
-                <a:latin typeface="Calibri"/>
-              </a:rPr>
-              <a:t>NGÔN NGỮ CƠ THỂ</a:t>
-            </a:r>
-          </a:p>
-          <a:p>
-            <a:pPr algn="ctr">
-              <a:spcBef>
-                <a:spcPts val="1200"/>
-              </a:spcBef>
-            </a:pPr>
-            <a:r>
-              <a:rPr sz="1250">
-                <a:solidFill>
-                  <a:srgbClr val="3A2B28"/>
-                </a:solidFill>
-                <a:latin typeface="Calibri"/>
-              </a:rPr>
-              <a:t>Ánh mắt, nét mặt, cử chỉ, tư thế, khoảng cách</a:t>
-            </a:r>
-          </a:p>
-        </p:txBody>
-      </p:sp>
-      <p:sp>
-        <p:nvSpPr>
-          <p:cNvPr id="8" name="Rounded Rectangle 7"/>
-          <p:cNvSpPr/>
-          <p:nvPr/>
-        </p:nvSpPr>
-        <p:spPr>
-          <a:xfrm>
-            <a:off x="502920" y="5440680"/>
-            <a:ext cx="11201400" cy="685800"/>
-          </a:xfrm>
-          <a:prstGeom prst="roundRect">
-            <a:avLst>
-              <a:gd name="adj" fmla="val 12000"/>
-            </a:avLst>
-          </a:prstGeom>
-          <a:solidFill>
-            <a:srgbClr val="FDF1EF"/>
-          </a:solidFill>
-          <a:ln w="12700">
-            <a:solidFill>
-              <a:srgbClr val="FBCEC9"/>
-            </a:solidFill>
-          </a:ln>
-          <a:effectLst/>
-        </p:spPr>
-        <p:style>
-          <a:lnRef idx="1">
-            <a:schemeClr val="accent1"/>
-          </a:lnRef>
-          <a:fillRef idx="3">
-            <a:schemeClr val="accent1"/>
-          </a:fillRef>
-          <a:effectRef idx="2">
-            <a:schemeClr val="accent1"/>
-          </a:effectRef>
-          <a:fontRef idx="minor">
-            <a:schemeClr val="lt1"/>
-          </a:fontRef>
-        </p:style>
-        <p:txBody>
-          <a:bodyPr rtlCol="0" anchor="ctr" wrap="square" lIns="201168" rIns="201168"/>
-          <a:lstStyle/>
-          <a:p>
-            <a:pPr algn="ctr"/>
-            <a:r>
-              <a:rPr sz="1300">
-                <a:solidFill>
-                  <a:srgbClr val="3A2B28"/>
-                </a:solidFill>
-                <a:latin typeface="Calibri"/>
-              </a:rPr>
-              <a:t>Nghiên cứu của Albert Mehrabian — chỉ áp dụng cho thông điệp mang tính CẢM XÚC, không phải mọi tình huống giao tiếp.</a:t>
-            </a:r>
-          </a:p>
-        </p:txBody>
-      </p:sp>
-      <p:sp>
-        <p:nvSpPr>
-          <p:cNvPr id="9" name="TextBox 8"/>
-          <p:cNvSpPr txBox="1"/>
-          <p:nvPr/>
-        </p:nvSpPr>
-        <p:spPr>
-          <a:xfrm>
-            <a:off x="502920" y="6419088"/>
-            <a:ext cx="7772400" cy="292608"/>
-          </a:xfrm>
-          <a:prstGeom prst="rect">
-            <a:avLst/>
-          </a:prstGeom>
-          <a:noFill/>
-        </p:spPr>
-        <p:txBody>
-          <a:bodyPr wrap="none">
-            <a:spAutoFit/>
-          </a:bodyPr>
-          <a:lstStyle/>
-          <a:p>
-            <a:r>
-              <a:rPr sz="900">
-                <a:solidFill>
-                  <a:srgbClr val="8A7A76"/>
-                </a:solidFill>
-                <a:latin typeface="Calibri"/>
-              </a:rPr>
-              <a:t>Je m'appelle Huong  •  GV. Đỗ Thùy Hương  •  EC1103</a:t>
-            </a:r>
-          </a:p>
-        </p:txBody>
-      </p:sp>
-      <p:sp>
-        <p:nvSpPr>
-          <p:cNvPr id="10" name="TextBox 9"/>
-          <p:cNvSpPr txBox="1"/>
-          <p:nvPr/>
-        </p:nvSpPr>
-        <p:spPr>
-          <a:xfrm>
-            <a:off x="9326880" y="6419088"/>
-            <a:ext cx="1920240" cy="292608"/>
-          </a:xfrm>
-          <a:prstGeom prst="rect">
-            <a:avLst/>
-          </a:prstGeom>
-          <a:noFill/>
-        </p:spPr>
-        <p:txBody>
-          <a:bodyPr wrap="none">
-            <a:spAutoFit/>
-          </a:bodyPr>
-          <a:lstStyle/>
-          <a:p>
-            <a:pPr algn="r"/>
-            <a:r>
-              <a:rPr sz="900">
-                <a:solidFill>
-                  <a:srgbClr val="8A7A76"/>
-                </a:solidFill>
-                <a:latin typeface="Calibri"/>
-              </a:rPr>
-              <a:t>Chương 1</a:t>
-            </a:r>
-          </a:p>
-        </p:txBody>
-      </p:sp>
-    </p:spTree>
-  </p:cSld>
-  <p:clrMapOvr>
-    <a:masterClrMapping/>
-  </p:clrMapOvr>
-</p:sld>
-</file>
-
-<file path=ppt/slides/slide18.xml><?xml version="1.0" encoding="utf-8"?>
-<p:sld xmlns:a="http://schemas.openxmlformats.org/drawingml/2006/main" xmlns:p="http://schemas.openxmlformats.org/presentationml/2006/main" xmlns:r="http://schemas.openxmlformats.org/officeDocument/2006/relationships">
-  <p:cSld>
-    <p:spTree>
-      <p:nvGrpSpPr>
-        <p:cNvPr id="1" name=""/>
-        <p:cNvGrpSpPr/>
-        <p:nvPr/>
-      </p:nvGrpSpPr>
-      <p:grpSpPr/>
-      <p:sp>
-        <p:nvSpPr>
-          <p:cNvPr id="2" name="Rectangle 1"/>
-          <p:cNvSpPr/>
-          <p:nvPr/>
-        </p:nvSpPr>
-        <p:spPr>
-          <a:xfrm>
-            <a:off x="0" y="0"/>
-            <a:ext cx="12191695" cy="6858000"/>
-          </a:xfrm>
-          <a:prstGeom prst="rect">
-            <a:avLst/>
-          </a:prstGeom>
-          <a:solidFill>
-            <a:srgbClr val="FDFBF8"/>
-          </a:solidFill>
-          <a:ln>
-            <a:noFill/>
-          </a:ln>
-          <a:effectLst/>
-        </p:spPr>
-        <p:style>
-          <a:lnRef idx="1">
-            <a:schemeClr val="accent1"/>
-          </a:lnRef>
-          <a:fillRef idx="3">
-            <a:schemeClr val="accent1"/>
-          </a:fillRef>
-          <a:effectRef idx="2">
-            <a:schemeClr val="accent1"/>
-          </a:effectRef>
-          <a:fontRef idx="minor">
-            <a:schemeClr val="lt1"/>
-          </a:fontRef>
-        </p:style>
-        <p:txBody>
-          <a:bodyPr rtlCol="0" anchor="ctr"/>
-          <a:lstStyle/>
-          <a:p>
-            <a:pPr algn="ctr"/>
-          </a:p>
-        </p:txBody>
-      </p:sp>
-      <p:sp>
-        <p:nvSpPr>
-          <p:cNvPr id="3" name="Rectangle 2"/>
-          <p:cNvSpPr/>
-          <p:nvPr/>
-        </p:nvSpPr>
-        <p:spPr>
-          <a:xfrm>
-            <a:off x="0" y="2103120"/>
-            <a:ext cx="12191695" cy="2743200"/>
-          </a:xfrm>
-          <a:prstGeom prst="rect">
-            <a:avLst/>
-          </a:prstGeom>
-          <a:solidFill>
-            <a:srgbClr val="FDF1EF"/>
-          </a:solidFill>
-          <a:ln>
-            <a:noFill/>
-          </a:ln>
-          <a:effectLst/>
-        </p:spPr>
-        <p:style>
-          <a:lnRef idx="1">
-            <a:schemeClr val="accent1"/>
-          </a:lnRef>
-          <a:fillRef idx="3">
-            <a:schemeClr val="accent1"/>
-          </a:fillRef>
-          <a:effectRef idx="2">
-            <a:schemeClr val="accent1"/>
-          </a:effectRef>
-          <a:fontRef idx="minor">
-            <a:schemeClr val="lt1"/>
-          </a:fontRef>
-        </p:style>
-        <p:txBody>
-          <a:bodyPr rtlCol="0" anchor="ctr"/>
-          <a:lstStyle/>
-          <a:p>
-            <a:pPr algn="ctr"/>
-          </a:p>
-        </p:txBody>
-      </p:sp>
-      <p:sp>
-        <p:nvSpPr>
-          <p:cNvPr id="4" name="Rectangle 3"/>
-          <p:cNvSpPr/>
-          <p:nvPr/>
-        </p:nvSpPr>
-        <p:spPr>
-          <a:xfrm>
-            <a:off x="0" y="0"/>
-            <a:ext cx="274320" cy="6858000"/>
-          </a:xfrm>
-          <a:prstGeom prst="rect">
-            <a:avLst/>
-          </a:prstGeom>
-          <a:solidFill>
-            <a:srgbClr val="DC756A"/>
-          </a:solidFill>
-          <a:ln>
-            <a:noFill/>
-          </a:ln>
-          <a:effectLst/>
-        </p:spPr>
-        <p:style>
-          <a:lnRef idx="1">
-            <a:schemeClr val="accent1"/>
-          </a:lnRef>
-          <a:fillRef idx="3">
-            <a:schemeClr val="accent1"/>
-          </a:fillRef>
-          <a:effectRef idx="2">
-            <a:schemeClr val="accent1"/>
-          </a:effectRef>
-          <a:fontRef idx="minor">
-            <a:schemeClr val="lt1"/>
-          </a:fontRef>
-        </p:style>
-        <p:txBody>
-          <a:bodyPr rtlCol="0" anchor="ctr"/>
-          <a:lstStyle/>
-          <a:p>
-            <a:pPr algn="ctr"/>
-          </a:p>
-        </p:txBody>
-      </p:sp>
-      <p:sp>
-        <p:nvSpPr>
-          <p:cNvPr id="5" name="TextBox 4"/>
-          <p:cNvSpPr txBox="1"/>
-          <p:nvPr/>
-        </p:nvSpPr>
-        <p:spPr>
-          <a:xfrm>
-            <a:off x="1280160" y="2377440"/>
-            <a:ext cx="9692640" cy="411480"/>
-          </a:xfrm>
-          <a:prstGeom prst="rect">
-            <a:avLst/>
-          </a:prstGeom>
-          <a:noFill/>
-        </p:spPr>
-        <p:txBody>
-          <a:bodyPr wrap="none">
-            <a:spAutoFit/>
-          </a:bodyPr>
-          <a:lstStyle/>
-          <a:p>
-            <a:r>
-              <a:rPr sz="1500" b="1">
-                <a:solidFill>
-                  <a:srgbClr val="DC756A"/>
-                </a:solidFill>
-                <a:latin typeface="Calibri"/>
-              </a:rPr>
-              <a:t>MỤC 1.1 – 1.2</a:t>
-            </a:r>
-          </a:p>
-        </p:txBody>
-      </p:sp>
-      <p:sp>
-        <p:nvSpPr>
-          <p:cNvPr id="6" name="TextBox 5"/>
-          <p:cNvSpPr txBox="1"/>
-          <p:nvPr/>
-        </p:nvSpPr>
-        <p:spPr>
-          <a:xfrm>
-            <a:off x="1280160" y="2788920"/>
-            <a:ext cx="9601200" cy="1371600"/>
-          </a:xfrm>
-          <a:prstGeom prst="rect">
-            <a:avLst/>
-          </a:prstGeom>
-          <a:noFill/>
-        </p:spPr>
-        <p:txBody>
-          <a:bodyPr wrap="square">
-            <a:spAutoFit/>
-          </a:bodyPr>
-          <a:lstStyle/>
-          <a:p>
-            <a:r>
-              <a:rPr sz="3800" b="1">
-                <a:solidFill>
-                  <a:srgbClr val="AC4D33"/>
-                </a:solidFill>
-                <a:latin typeface="Cambria"/>
-              </a:rPr>
-              <a:t>Bản chất và phương tiện giao tiếp</a:t>
-            </a:r>
-          </a:p>
-        </p:txBody>
-      </p:sp>
-      <p:sp>
-        <p:nvSpPr>
-          <p:cNvPr id="7" name="TextBox 6"/>
-          <p:cNvSpPr txBox="1"/>
-          <p:nvPr/>
-        </p:nvSpPr>
-        <p:spPr>
-          <a:xfrm>
-            <a:off x="1280160" y="4224528"/>
-            <a:ext cx="9418320" cy="640080"/>
-          </a:xfrm>
-          <a:prstGeom prst="rect">
-            <a:avLst/>
-          </a:prstGeom>
-          <a:noFill/>
-        </p:spPr>
-        <p:txBody>
-          <a:bodyPr wrap="square">
-            <a:spAutoFit/>
-          </a:bodyPr>
-          <a:lstStyle/>
-          <a:p>
-            <a:r>
-              <a:rPr sz="1450" i="1">
-                <a:solidFill>
-                  <a:srgbClr val="8A7A76"/>
-                </a:solidFill>
-                <a:latin typeface="Calibri"/>
-              </a:rPr>
-              <a:t>Hiểu đúng bản chất trước khi luyện kỹ năng: giao tiếp là gì, diễn ra qua những khâu nào, bằng phương tiện gì.</a:t>
-            </a:r>
-          </a:p>
-        </p:txBody>
-      </p:sp>
-      <p:sp>
-        <p:nvSpPr>
-          <p:cNvPr id="8" name="TextBox 7"/>
-          <p:cNvSpPr txBox="1"/>
-          <p:nvPr/>
-        </p:nvSpPr>
-        <p:spPr>
-          <a:xfrm>
-            <a:off x="502920" y="6419088"/>
-            <a:ext cx="7772400" cy="292608"/>
-          </a:xfrm>
-          <a:prstGeom prst="rect">
-            <a:avLst/>
-          </a:prstGeom>
-          <a:noFill/>
-        </p:spPr>
-        <p:txBody>
-          <a:bodyPr wrap="none">
-            <a:spAutoFit/>
-          </a:bodyPr>
-          <a:lstStyle/>
-          <a:p>
-            <a:r>
-              <a:rPr sz="900">
-                <a:solidFill>
-                  <a:srgbClr val="8A7A76"/>
-                </a:solidFill>
-                <a:latin typeface="Calibri"/>
-              </a:rPr>
-              <a:t>Je m'appelle Huong  •  GV. Đỗ Thùy Hương  •  EC1103</a:t>
-            </a:r>
-          </a:p>
-        </p:txBody>
-      </p:sp>
-      <p:sp>
-        <p:nvSpPr>
-          <p:cNvPr id="9" name="TextBox 8"/>
-          <p:cNvSpPr txBox="1"/>
-          <p:nvPr/>
-        </p:nvSpPr>
-        <p:spPr>
-          <a:xfrm>
-            <a:off x="9326880" y="6419088"/>
-            <a:ext cx="1920240" cy="292608"/>
-          </a:xfrm>
-          <a:prstGeom prst="rect">
-            <a:avLst/>
-          </a:prstGeom>
-          <a:noFill/>
-        </p:spPr>
-        <p:txBody>
-          <a:bodyPr wrap="none">
-            <a:spAutoFit/>
-          </a:bodyPr>
-          <a:lstStyle/>
-          <a:p>
-            <a:pPr algn="r"/>
-            <a:r>
-              <a:rPr sz="900">
-                <a:solidFill>
-                  <a:srgbClr val="8A7A76"/>
-                </a:solidFill>
-                <a:latin typeface="Calibri"/>
-              </a:rPr>
-              <a:t>Chương 1</a:t>
-            </a:r>
-          </a:p>
-        </p:txBody>
-      </p:sp>
-    </p:spTree>
-  </p:cSld>
-  <p:clrMapOvr>
-    <a:masterClrMapping/>
-  </p:clrMapOvr>
-</p:sld>
-</file>
-
-<file path=ppt/slides/slide19.xml><?xml version="1.0" encoding="utf-8"?>
-<p:sld xmlns:a="http://schemas.openxmlformats.org/drawingml/2006/main" xmlns:p="http://schemas.openxmlformats.org/presentationml/2006/main" xmlns:r="http://schemas.openxmlformats.org/officeDocument/2006/relationships">
-  <p:cSld>
-    <p:spTree>
-      <p:nvGrpSpPr>
-        <p:cNvPr id="1" name=""/>
-        <p:cNvGrpSpPr/>
-        <p:nvPr/>
-      </p:nvGrpSpPr>
-      <p:grpSpPr/>
-      <p:sp>
-        <p:nvSpPr>
-          <p:cNvPr id="2" name="Rectangle 1"/>
-          <p:cNvSpPr/>
-          <p:nvPr/>
-        </p:nvSpPr>
-        <p:spPr>
-          <a:xfrm>
-            <a:off x="0" y="0"/>
-            <a:ext cx="12191695" cy="6858000"/>
-          </a:xfrm>
-          <a:prstGeom prst="rect">
-            <a:avLst/>
-          </a:prstGeom>
-          <a:solidFill>
-            <a:srgbClr val="FDFBF8"/>
-          </a:solidFill>
-          <a:ln>
-            <a:noFill/>
-          </a:ln>
-          <a:effectLst/>
-        </p:spPr>
-        <p:style>
-          <a:lnRef idx="1">
-            <a:schemeClr val="accent1"/>
-          </a:lnRef>
-          <a:fillRef idx="3">
-            <a:schemeClr val="accent1"/>
-          </a:fillRef>
-          <a:effectRef idx="2">
-            <a:schemeClr val="accent1"/>
-          </a:effectRef>
-          <a:fontRef idx="minor">
-            <a:schemeClr val="lt1"/>
-          </a:fontRef>
-        </p:style>
-        <p:txBody>
-          <a:bodyPr rtlCol="0" anchor="ctr"/>
-          <a:lstStyle/>
-          <a:p>
-            <a:pPr algn="ctr"/>
-          </a:p>
-        </p:txBody>
-      </p:sp>
-      <p:sp>
-        <p:nvSpPr>
-          <p:cNvPr id="3" name="Rectangle 2"/>
-          <p:cNvSpPr/>
-          <p:nvPr/>
-        </p:nvSpPr>
-        <p:spPr>
-          <a:xfrm>
-            <a:off x="0" y="2103120"/>
-            <a:ext cx="12191695" cy="2743200"/>
-          </a:xfrm>
-          <a:prstGeom prst="rect">
-            <a:avLst/>
-          </a:prstGeom>
-          <a:solidFill>
-            <a:srgbClr val="FDF1EF"/>
-          </a:solidFill>
-          <a:ln>
-            <a:noFill/>
-          </a:ln>
-          <a:effectLst/>
-        </p:spPr>
-        <p:style>
-          <a:lnRef idx="1">
-            <a:schemeClr val="accent1"/>
-          </a:lnRef>
-          <a:fillRef idx="3">
-            <a:schemeClr val="accent1"/>
-          </a:fillRef>
-          <a:effectRef idx="2">
-            <a:schemeClr val="accent1"/>
-          </a:effectRef>
-          <a:fontRef idx="minor">
-            <a:schemeClr val="lt1"/>
-          </a:fontRef>
-        </p:style>
-        <p:txBody>
-          <a:bodyPr rtlCol="0" anchor="ctr"/>
-          <a:lstStyle/>
-          <a:p>
-            <a:pPr algn="ctr"/>
-          </a:p>
-        </p:txBody>
-      </p:sp>
-      <p:sp>
-        <p:nvSpPr>
-          <p:cNvPr id="4" name="Rectangle 3"/>
-          <p:cNvSpPr/>
-          <p:nvPr/>
-        </p:nvSpPr>
-        <p:spPr>
-          <a:xfrm>
-            <a:off x="0" y="0"/>
-            <a:ext cx="274320" cy="6858000"/>
-          </a:xfrm>
-          <a:prstGeom prst="rect">
-            <a:avLst/>
-          </a:prstGeom>
-          <a:solidFill>
-            <a:srgbClr val="DC756A"/>
-          </a:solidFill>
-          <a:ln>
-            <a:noFill/>
-          </a:ln>
-          <a:effectLst/>
-        </p:spPr>
-        <p:style>
-          <a:lnRef idx="1">
-            <a:schemeClr val="accent1"/>
-          </a:lnRef>
-          <a:fillRef idx="3">
-            <a:schemeClr val="accent1"/>
-          </a:fillRef>
-          <a:effectRef idx="2">
-            <a:schemeClr val="accent1"/>
-          </a:effectRef>
-          <a:fontRef idx="minor">
-            <a:schemeClr val="lt1"/>
-          </a:fontRef>
-        </p:style>
-        <p:txBody>
-          <a:bodyPr rtlCol="0" anchor="ctr"/>
-          <a:lstStyle/>
-          <a:p>
-            <a:pPr algn="ctr"/>
-          </a:p>
-        </p:txBody>
-      </p:sp>
-      <p:sp>
-        <p:nvSpPr>
-          <p:cNvPr id="5" name="TextBox 4"/>
-          <p:cNvSpPr txBox="1"/>
-          <p:nvPr/>
-        </p:nvSpPr>
-        <p:spPr>
-          <a:xfrm>
-            <a:off x="1280160" y="2377440"/>
-            <a:ext cx="9692640" cy="411480"/>
-          </a:xfrm>
-          <a:prstGeom prst="rect">
-            <a:avLst/>
-          </a:prstGeom>
-          <a:noFill/>
-        </p:spPr>
-        <p:txBody>
-          <a:bodyPr wrap="none">
-            <a:spAutoFit/>
-          </a:bodyPr>
-          <a:lstStyle/>
-          <a:p>
-            <a:r>
-              <a:rPr sz="1500" b="1">
-                <a:solidFill>
-                  <a:srgbClr val="DC756A"/>
-                </a:solidFill>
-                <a:latin typeface="Calibri"/>
-              </a:rPr>
-              <a:t>MỤC 1.4 – 1.5</a:t>
-            </a:r>
-          </a:p>
-        </p:txBody>
-      </p:sp>
-      <p:sp>
-        <p:nvSpPr>
-          <p:cNvPr id="6" name="TextBox 5"/>
-          <p:cNvSpPr txBox="1"/>
-          <p:nvPr/>
-        </p:nvSpPr>
-        <p:spPr>
-          <a:xfrm>
-            <a:off x="1280160" y="2788920"/>
-            <a:ext cx="9601200" cy="1371600"/>
-          </a:xfrm>
-          <a:prstGeom prst="rect">
-            <a:avLst/>
-          </a:prstGeom>
-          <a:noFill/>
-        </p:spPr>
-        <p:txBody>
-          <a:bodyPr wrap="square">
-            <a:spAutoFit/>
-          </a:bodyPr>
-          <a:lstStyle/>
-          <a:p>
-            <a:r>
-              <a:rPr sz="3800" b="1">
-                <a:solidFill>
-                  <a:srgbClr val="AC4D33"/>
-                </a:solidFill>
-                <a:latin typeface="Cambria"/>
-              </a:rPr>
-              <a:t>Yếu tố ảnh hưởng và nguyên tắc</a:t>
-            </a:r>
-          </a:p>
-        </p:txBody>
-      </p:sp>
-      <p:sp>
-        <p:nvSpPr>
-          <p:cNvPr id="7" name="TextBox 6"/>
-          <p:cNvSpPr txBox="1"/>
-          <p:nvPr/>
-        </p:nvSpPr>
-        <p:spPr>
-          <a:xfrm>
-            <a:off x="1280160" y="4224528"/>
-            <a:ext cx="9418320" cy="640080"/>
-          </a:xfrm>
-          <a:prstGeom prst="rect">
-            <a:avLst/>
-          </a:prstGeom>
-          <a:noFill/>
-        </p:spPr>
-        <p:txBody>
-          <a:bodyPr wrap="square">
-            <a:spAutoFit/>
-          </a:bodyPr>
-          <a:lstStyle/>
-          <a:p>
-            <a:r>
-              <a:rPr sz="1450" i="1">
-                <a:solidFill>
-                  <a:srgbClr val="8A7A76"/>
-                </a:solidFill>
-                <a:latin typeface="Calibri"/>
-              </a:rPr>
-              <a:t>Điều gì làm hỏng một cuộc giao tiếp, và năm nguyên tắc giúp ta tránh được điều đó.</a:t>
-            </a:r>
-          </a:p>
-        </p:txBody>
-      </p:sp>
-      <p:sp>
-        <p:nvSpPr>
-          <p:cNvPr id="8" name="TextBox 7"/>
-          <p:cNvSpPr txBox="1"/>
-          <p:nvPr/>
-        </p:nvSpPr>
-        <p:spPr>
-          <a:xfrm>
-            <a:off x="502920" y="6419088"/>
-            <a:ext cx="7772400" cy="292608"/>
-          </a:xfrm>
-          <a:prstGeom prst="rect">
-            <a:avLst/>
-          </a:prstGeom>
-          <a:noFill/>
-        </p:spPr>
-        <p:txBody>
-          <a:bodyPr wrap="none">
-            <a:spAutoFit/>
-          </a:bodyPr>
-          <a:lstStyle/>
-          <a:p>
-            <a:r>
-              <a:rPr sz="900">
-                <a:solidFill>
-                  <a:srgbClr val="8A7A76"/>
-                </a:solidFill>
-                <a:latin typeface="Calibri"/>
-              </a:rPr>
-              <a:t>Je m'appelle Huong  •  GV. Đỗ Thùy Hương  •  EC1103</a:t>
-            </a:r>
-          </a:p>
-        </p:txBody>
-      </p:sp>
-      <p:sp>
-        <p:nvSpPr>
-          <p:cNvPr id="9" name="TextBox 8"/>
-          <p:cNvSpPr txBox="1"/>
-          <p:nvPr/>
-        </p:nvSpPr>
-        <p:spPr>
-          <a:xfrm>
-            <a:off x="9326880" y="6419088"/>
-            <a:ext cx="1920240" cy="292608"/>
-          </a:xfrm>
-          <a:prstGeom prst="rect">
-            <a:avLst/>
-          </a:prstGeom>
-          <a:noFill/>
-        </p:spPr>
-        <p:txBody>
-          <a:bodyPr wrap="none">
-            <a:spAutoFit/>
-          </a:bodyPr>
-          <a:lstStyle/>
-          <a:p>
-            <a:pPr algn="r"/>
-            <a:r>
-              <a:rPr sz="900">
-                <a:solidFill>
-                  <a:srgbClr val="8A7A76"/>
-                </a:solidFill>
-                <a:latin typeface="Calibri"/>
-              </a:rPr>
-              <a:t>Chương 1</a:t>
-            </a:r>
           </a:p>
         </p:txBody>
       </p:sp>
@@ -8589,7 +9164,7 @@
       </p:grpSpPr>
       <p:pic>
         <p:nvPicPr>
-          <p:cNvPr id="2" name="Image 0" descr="assets/logo_tron.png">    </p:cNvPr>
+          <p:cNvPr id="2" name="Image 0" descr="/home/user/comdraft/assets/img/dau-huong.png">    </p:cNvPr>
           <p:cNvPicPr>
             <a:picLocks noChangeAspect="1"/>
           </p:cNvPicPr>
@@ -9125,7 +9700,7 @@
       </p:grpSpPr>
       <p:pic>
         <p:nvPicPr>
-          <p:cNvPr id="2" name="Image 0" descr="assets/logo_tron.png">    </p:cNvPr>
+          <p:cNvPr id="2" name="Image 0" descr="/home/user/comdraft/assets/img/dau-huong.png">    </p:cNvPr>
           <p:cNvPicPr>
             <a:picLocks noChangeAspect="1"/>
           </p:cNvPicPr>
@@ -9864,7 +10439,7 @@
       </p:grpSpPr>
       <p:pic>
         <p:nvPicPr>
-          <p:cNvPr id="2" name="Image 0" descr="assets/logo_tron.png">    </p:cNvPr>
+          <p:cNvPr id="2" name="Image 0" descr="/home/user/comdraft/assets/img/dau-huong.png">    </p:cNvPr>
           <p:cNvPicPr>
             <a:picLocks noChangeAspect="1"/>
           </p:cNvPicPr>
@@ -10694,6 +11269,327 @@
 </file>
 
 <file path=ppt/slides/slide5.xml><?xml version="1.0" encoding="utf-8"?>
+<p:sld xmlns:a="http://schemas.openxmlformats.org/drawingml/2006/main" xmlns:p="http://schemas.openxmlformats.org/presentationml/2006/main" xmlns:r="http://schemas.openxmlformats.org/officeDocument/2006/relationships">
+  <p:cSld>
+    <p:spTree>
+      <p:nvGrpSpPr>
+        <p:cNvPr id="1" name=""/>
+        <p:cNvGrpSpPr/>
+        <p:nvPr/>
+      </p:nvGrpSpPr>
+      <p:grpSpPr/>
+      <p:sp>
+        <p:nvSpPr>
+          <p:cNvPr id="2" name="Rectangle 1"/>
+          <p:cNvSpPr/>
+          <p:nvPr/>
+        </p:nvSpPr>
+        <p:spPr>
+          <a:xfrm>
+            <a:off x="0" y="0"/>
+            <a:ext cx="12191695" cy="6858000"/>
+          </a:xfrm>
+          <a:prstGeom prst="rect">
+            <a:avLst/>
+          </a:prstGeom>
+          <a:solidFill>
+            <a:srgbClr val="FDFBF8"/>
+          </a:solidFill>
+          <a:ln>
+            <a:noFill/>
+          </a:ln>
+          <a:effectLst/>
+        </p:spPr>
+        <p:style>
+          <a:lnRef idx="1">
+            <a:schemeClr val="accent1"/>
+          </a:lnRef>
+          <a:fillRef idx="3">
+            <a:schemeClr val="accent1"/>
+          </a:fillRef>
+          <a:effectRef idx="2">
+            <a:schemeClr val="accent1"/>
+          </a:effectRef>
+          <a:fontRef idx="minor">
+            <a:schemeClr val="lt1"/>
+          </a:fontRef>
+        </p:style>
+        <p:txBody>
+          <a:bodyPr rtlCol="0" anchor="ctr"/>
+          <a:lstStyle/>
+          <a:p>
+            <a:pPr algn="ctr"/>
+          </a:p>
+        </p:txBody>
+      </p:sp>
+      <p:sp>
+        <p:nvSpPr>
+          <p:cNvPr id="3" name="Rectangle 2"/>
+          <p:cNvSpPr/>
+          <p:nvPr/>
+        </p:nvSpPr>
+        <p:spPr>
+          <a:xfrm>
+            <a:off x="0" y="2103120"/>
+            <a:ext cx="12191695" cy="2743200"/>
+          </a:xfrm>
+          <a:prstGeom prst="rect">
+            <a:avLst/>
+          </a:prstGeom>
+          <a:solidFill>
+            <a:srgbClr val="FDF1EF"/>
+          </a:solidFill>
+          <a:ln>
+            <a:noFill/>
+          </a:ln>
+          <a:effectLst/>
+        </p:spPr>
+        <p:style>
+          <a:lnRef idx="1">
+            <a:schemeClr val="accent1"/>
+          </a:lnRef>
+          <a:fillRef idx="3">
+            <a:schemeClr val="accent1"/>
+          </a:fillRef>
+          <a:effectRef idx="2">
+            <a:schemeClr val="accent1"/>
+          </a:effectRef>
+          <a:fontRef idx="minor">
+            <a:schemeClr val="lt1"/>
+          </a:fontRef>
+        </p:style>
+        <p:txBody>
+          <a:bodyPr rtlCol="0" anchor="ctr"/>
+          <a:lstStyle/>
+          <a:p>
+            <a:pPr algn="ctr"/>
+          </a:p>
+        </p:txBody>
+      </p:sp>
+      <p:sp>
+        <p:nvSpPr>
+          <p:cNvPr id="4" name="Rectangle 3"/>
+          <p:cNvSpPr/>
+          <p:nvPr/>
+        </p:nvSpPr>
+        <p:spPr>
+          <a:xfrm>
+            <a:off x="0" y="0"/>
+            <a:ext cx="274320" cy="6858000"/>
+          </a:xfrm>
+          <a:prstGeom prst="rect">
+            <a:avLst/>
+          </a:prstGeom>
+          <a:solidFill>
+            <a:srgbClr val="DC756A"/>
+          </a:solidFill>
+          <a:ln>
+            <a:noFill/>
+          </a:ln>
+          <a:effectLst/>
+        </p:spPr>
+        <p:style>
+          <a:lnRef idx="1">
+            <a:schemeClr val="accent1"/>
+          </a:lnRef>
+          <a:fillRef idx="3">
+            <a:schemeClr val="accent1"/>
+          </a:fillRef>
+          <a:effectRef idx="2">
+            <a:schemeClr val="accent1"/>
+          </a:effectRef>
+          <a:fontRef idx="minor">
+            <a:schemeClr val="lt1"/>
+          </a:fontRef>
+        </p:style>
+        <p:txBody>
+          <a:bodyPr rtlCol="0" anchor="ctr"/>
+          <a:lstStyle/>
+          <a:p>
+            <a:pPr algn="ctr"/>
+          </a:p>
+        </p:txBody>
+      </p:sp>
+      <p:sp>
+        <p:nvSpPr>
+          <p:cNvPr id="5" name="TextBox 4"/>
+          <p:cNvSpPr txBox="1"/>
+          <p:nvPr/>
+        </p:nvSpPr>
+        <p:spPr>
+          <a:xfrm>
+            <a:off x="1280160" y="2377440"/>
+            <a:ext cx="9692640" cy="411480"/>
+          </a:xfrm>
+          <a:prstGeom prst="rect">
+            <a:avLst/>
+          </a:prstGeom>
+          <a:noFill/>
+        </p:spPr>
+        <p:txBody>
+          <a:bodyPr wrap="none">
+            <a:spAutoFit/>
+          </a:bodyPr>
+          <a:lstStyle/>
+          <a:p>
+            <a:r>
+              <a:rPr sz="1500" b="1">
+                <a:solidFill>
+                  <a:srgbClr val="DC756A"/>
+                </a:solidFill>
+                <a:latin typeface="Calibri"/>
+              </a:rPr>
+              <a:t>MỤC 1.1 – 1.2</a:t>
+            </a:r>
+          </a:p>
+        </p:txBody>
+      </p:sp>
+      <p:sp>
+        <p:nvSpPr>
+          <p:cNvPr id="6" name="TextBox 5"/>
+          <p:cNvSpPr txBox="1"/>
+          <p:nvPr/>
+        </p:nvSpPr>
+        <p:spPr>
+          <a:xfrm>
+            <a:off x="1280160" y="2788920"/>
+            <a:ext cx="9601200" cy="1371600"/>
+          </a:xfrm>
+          <a:prstGeom prst="rect">
+            <a:avLst/>
+          </a:prstGeom>
+          <a:noFill/>
+        </p:spPr>
+        <p:txBody>
+          <a:bodyPr wrap="square">
+            <a:spAutoFit/>
+          </a:bodyPr>
+          <a:lstStyle/>
+          <a:p>
+            <a:r>
+              <a:rPr sz="3800" b="1">
+                <a:solidFill>
+                  <a:srgbClr val="AC4D33"/>
+                </a:solidFill>
+                <a:latin typeface="Cambria"/>
+              </a:rPr>
+              <a:t>Bản chất và phương tiện giao tiếp</a:t>
+            </a:r>
+          </a:p>
+        </p:txBody>
+      </p:sp>
+      <p:sp>
+        <p:nvSpPr>
+          <p:cNvPr id="7" name="TextBox 6"/>
+          <p:cNvSpPr txBox="1"/>
+          <p:nvPr/>
+        </p:nvSpPr>
+        <p:spPr>
+          <a:xfrm>
+            <a:off x="1280160" y="4224528"/>
+            <a:ext cx="9418320" cy="640080"/>
+          </a:xfrm>
+          <a:prstGeom prst="rect">
+            <a:avLst/>
+          </a:prstGeom>
+          <a:noFill/>
+        </p:spPr>
+        <p:txBody>
+          <a:bodyPr wrap="square">
+            <a:spAutoFit/>
+          </a:bodyPr>
+          <a:lstStyle/>
+          <a:p>
+            <a:r>
+              <a:rPr sz="1450" i="1">
+                <a:solidFill>
+                  <a:srgbClr val="8A7A76"/>
+                </a:solidFill>
+                <a:latin typeface="Calibri"/>
+              </a:rPr>
+              <a:t>Hiểu đúng bản chất trước khi luyện kỹ năng: giao tiếp là gì, diễn ra qua những khâu nào, bằng phương tiện gì.</a:t>
+            </a:r>
+          </a:p>
+        </p:txBody>
+      </p:sp>
+      <p:sp>
+        <p:nvSpPr>
+          <p:cNvPr id="8" name="TextBox 7"/>
+          <p:cNvSpPr txBox="1"/>
+          <p:nvPr/>
+        </p:nvSpPr>
+        <p:spPr>
+          <a:xfrm>
+            <a:off x="502920" y="6419088"/>
+            <a:ext cx="7772400" cy="292608"/>
+          </a:xfrm>
+          <a:prstGeom prst="rect">
+            <a:avLst/>
+          </a:prstGeom>
+          <a:noFill/>
+        </p:spPr>
+        <p:txBody>
+          <a:bodyPr wrap="none">
+            <a:spAutoFit/>
+          </a:bodyPr>
+          <a:lstStyle/>
+          <a:p>
+            <a:r>
+              <a:rPr sz="900">
+                <a:solidFill>
+                  <a:srgbClr val="8A7A76"/>
+                </a:solidFill>
+                <a:latin typeface="Calibri"/>
+              </a:rPr>
+              <a:t>Je m'appelle Huong  •  GV. Đỗ Thùy Hương  •  EC1103</a:t>
+            </a:r>
+          </a:p>
+        </p:txBody>
+      </p:sp>
+      <p:sp>
+        <p:nvSpPr>
+          <p:cNvPr id="9" name="TextBox 8"/>
+          <p:cNvSpPr txBox="1"/>
+          <p:nvPr/>
+        </p:nvSpPr>
+        <p:spPr>
+          <a:xfrm>
+            <a:off x="9326880" y="6419088"/>
+            <a:ext cx="1920240" cy="292608"/>
+          </a:xfrm>
+          <a:prstGeom prst="rect">
+            <a:avLst/>
+          </a:prstGeom>
+          <a:noFill/>
+        </p:spPr>
+        <p:txBody>
+          <a:bodyPr wrap="none">
+            <a:spAutoFit/>
+          </a:bodyPr>
+          <a:lstStyle/>
+          <a:p>
+            <a:pPr algn="r"/>
+            <a:r>
+              <a:rPr sz="900">
+                <a:solidFill>
+                  <a:srgbClr val="8A7A76"/>
+                </a:solidFill>
+                <a:latin typeface="Calibri"/>
+              </a:rPr>
+              <a:t>Chương 1</a:t>
+            </a:r>
+          </a:p>
+        </p:txBody>
+      </p:sp>
+    </p:spTree>
+  </p:cSld>
+  <p:clrMapOvr>
+    <a:masterClrMapping/>
+  </p:clrMapOvr>
+</p:sld>
+</file>
+
+<file path=ppt/slides/slide6.xml><?xml version="1.0" encoding="utf-8"?>
 <p:sld xmlns:a="http://schemas.openxmlformats.org/drawingml/2006/main" xmlns:r="http://schemas.openxmlformats.org/officeDocument/2006/relationships" xmlns:p="http://schemas.openxmlformats.org/presentationml/2006/main">
   <p:cSld name="Slide 5">
     <p:bg>
@@ -10719,7 +11615,7 @@
       </p:grpSpPr>
       <p:pic>
         <p:nvPicPr>
-          <p:cNvPr id="2" name="Image 0" descr="assets/logo_tron.png">    </p:cNvPr>
+          <p:cNvPr id="2" name="Image 0" descr="/home/user/comdraft/assets/img/dau-huong.png">    </p:cNvPr>
           <p:cNvPicPr>
             <a:picLocks noChangeAspect="1"/>
           </p:cNvPicPr>
@@ -11229,7 +12125,7 @@
 </p:sld>
 </file>
 
-<file path=ppt/slides/slide6.xml><?xml version="1.0" encoding="utf-8"?>
+<file path=ppt/slides/slide7.xml><?xml version="1.0" encoding="utf-8"?>
 <p:sld xmlns:a="http://schemas.openxmlformats.org/drawingml/2006/main" xmlns:r="http://schemas.openxmlformats.org/officeDocument/2006/relationships" xmlns:p="http://schemas.openxmlformats.org/presentationml/2006/main">
   <p:cSld name="Slide 6">
     <p:bg>
@@ -11255,7 +12151,7 @@
       </p:grpSpPr>
       <p:pic>
         <p:nvPicPr>
-          <p:cNvPr id="2" name="Image 0" descr="assets/logo_tron.png">    </p:cNvPr>
+          <p:cNvPr id="2" name="Image 0" descr="/home/user/comdraft/assets/img/dau-huong.png">    </p:cNvPr>
           <p:cNvPicPr>
             <a:picLocks noChangeAspect="1"/>
           </p:cNvPicPr>
@@ -11852,7 +12748,7 @@
 </p:sld>
 </file>
 
-<file path=ppt/slides/slide7.xml><?xml version="1.0" encoding="utf-8"?>
+<file path=ppt/slides/slide8.xml><?xml version="1.0" encoding="utf-8"?>
 <p:sld xmlns:a="http://schemas.openxmlformats.org/drawingml/2006/main" xmlns:r="http://schemas.openxmlformats.org/officeDocument/2006/relationships" xmlns:p="http://schemas.openxmlformats.org/presentationml/2006/main">
   <p:cSld name="Slide 7">
     <p:bg>
@@ -11878,7 +12774,7 @@
       </p:grpSpPr>
       <p:pic>
         <p:nvPicPr>
-          <p:cNvPr id="2" name="Image 0" descr="assets/logo_tron.png">    </p:cNvPr>
+          <p:cNvPr id="2" name="Image 0" descr="/home/user/comdraft/assets/img/dau-huong.png">    </p:cNvPr>
           <p:cNvPicPr>
             <a:picLocks noChangeAspect="1"/>
           </p:cNvPicPr>
@@ -12186,7 +13082,7 @@
 </p:sld>
 </file>
 
-<file path=ppt/slides/slide8.xml><?xml version="1.0" encoding="utf-8"?>
+<file path=ppt/slides/slide9.xml><?xml version="1.0" encoding="utf-8"?>
 <p:sld xmlns:a="http://schemas.openxmlformats.org/drawingml/2006/main" xmlns:r="http://schemas.openxmlformats.org/officeDocument/2006/relationships" xmlns:p="http://schemas.openxmlformats.org/presentationml/2006/main">
   <p:cSld name="Slide 8">
     <p:bg>
@@ -12212,7 +13108,7 @@
       </p:grpSpPr>
       <p:pic>
         <p:nvPicPr>
-          <p:cNvPr id="2" name="Image 0" descr="assets/logo_tron.png">    </p:cNvPr>
+          <p:cNvPr id="2" name="Image 0" descr="/home/user/comdraft/assets/img/dau-huong.png">    </p:cNvPr>
           <p:cNvPicPr>
             <a:picLocks noChangeAspect="1"/>
           </p:cNvPicPr>
@@ -12711,902 +13607,6 @@
               <a:t>Rõ  •  lịch sự  •  tích cực  •  ngắn gọn</a:t>
             </a:r>
             <a:endParaRPr lang="en-US" sz="2000" dirty="0"/>
-          </a:p>
-        </p:txBody>
-      </p:sp>
-    </p:spTree>
-  </p:cSld>
-  <p:clrMapOvr>
-    <a:masterClrMapping/>
-  </p:clrMapOvr>
-</p:sld>
-</file>
-
-<file path=ppt/slides/slide9.xml><?xml version="1.0" encoding="utf-8"?>
-<p:sld xmlns:a="http://schemas.openxmlformats.org/drawingml/2006/main" xmlns:r="http://schemas.openxmlformats.org/officeDocument/2006/relationships" xmlns:p="http://schemas.openxmlformats.org/presentationml/2006/main">
-  <p:cSld name="Slide 9">
-    <p:bg>
-      <p:bgPr>
-        <a:solidFill>
-          <a:srgbClr val="FDFBF8"/>
-        </a:solidFill>
-      </p:bgPr>
-    </p:bg>
-    <p:spTree>
-      <p:nvGrpSpPr>
-        <p:cNvPr id="1" name=""/>
-        <p:cNvGrpSpPr/>
-        <p:nvPr/>
-      </p:nvGrpSpPr>
-      <p:grpSpPr>
-        <a:xfrm>
-          <a:off x="0" y="0"/>
-          <a:ext cx="0" cy="0"/>
-          <a:chOff x="0" y="0"/>
-          <a:chExt cx="0" cy="0"/>
-        </a:xfrm>
-      </p:grpSpPr>
-      <p:pic>
-        <p:nvPicPr>
-          <p:cNvPr id="2" name="Image 0" descr="assets/logo_tron.png">    </p:cNvPr>
-          <p:cNvPicPr>
-            <a:picLocks noChangeAspect="1"/>
-          </p:cNvPicPr>
-          <p:nvPr/>
-        </p:nvPicPr>
-        <p:blipFill>
-          <a:blip r:embed="rId1"/>
-          <a:stretch>
-            <a:fillRect/>
-          </a:stretch>
-        </p:blipFill>
-        <p:spPr>
-          <a:xfrm>
-            <a:off x="411480" y="6327648"/>
-            <a:ext cx="384048" cy="384048"/>
-          </a:xfrm>
-          <a:prstGeom prst="rect">
-            <a:avLst/>
-          </a:prstGeom>
-        </p:spPr>
-      </p:pic>
-      <p:sp>
-        <p:nvSpPr>
-          <p:cNvPr id="3" name="Text 0"/>
-          <p:cNvSpPr/>
-          <p:nvPr/>
-        </p:nvSpPr>
-        <p:spPr>
-          <a:xfrm>
-            <a:off x="868680" y="6355080"/>
-            <a:ext cx="7498080" cy="310896"/>
-          </a:xfrm>
-          <a:prstGeom prst="rect">
-            <a:avLst/>
-          </a:prstGeom>
-          <a:noFill/>
-          <a:ln/>
-        </p:spPr>
-        <p:txBody>
-          <a:bodyPr wrap="square" lIns="0" tIns="0" rIns="0" bIns="0" rtlCol="0" anchor="ctr"/>
-          <a:lstStyle/>
-          <a:p>
-            <a:pPr indent="0" marL="0">
-              <a:buNone/>
-            </a:pPr>
-            <a:r>
-              <a:rPr lang="en-US" sz="900" dirty="0">
-                <a:solidFill>
-                  <a:srgbClr val="8A7A76"/>
-                </a:solidFill>
-                <a:latin typeface="Calibri" pitchFamily="34" charset="0"/>
-                <a:ea typeface="Calibri" pitchFamily="34" charset="-122"/>
-                <a:cs typeface="Calibri" pitchFamily="34" charset="-120"/>
-              </a:rPr>
-              <a:t>Je m'appelle Huong  •  GV. Đỗ Thùy Hương  •  EC1103</a:t>
-            </a:r>
-            <a:endParaRPr lang="en-US" sz="900" dirty="0"/>
-          </a:p>
-        </p:txBody>
-      </p:sp>
-      <p:sp>
-        <p:nvSpPr>
-          <p:cNvPr id="4" name="Text 1"/>
-          <p:cNvSpPr/>
-          <p:nvPr/>
-        </p:nvSpPr>
-        <p:spPr>
-          <a:xfrm>
-            <a:off x="8503920" y="6355080"/>
-            <a:ext cx="2743200" cy="310896"/>
-          </a:xfrm>
-          <a:prstGeom prst="rect">
-            <a:avLst/>
-          </a:prstGeom>
-          <a:noFill/>
-          <a:ln/>
-        </p:spPr>
-        <p:txBody>
-          <a:bodyPr wrap="square" lIns="0" tIns="0" rIns="0" bIns="0" rtlCol="0" anchor="ctr"/>
-          <a:lstStyle/>
-          <a:p>
-            <a:pPr algn="r" indent="0" marL="0">
-              <a:buNone/>
-            </a:pPr>
-            <a:r>
-              <a:rPr lang="en-US" sz="900" dirty="0">
-                <a:solidFill>
-                  <a:srgbClr val="8A7A76"/>
-                </a:solidFill>
-                <a:latin typeface="Calibri" pitchFamily="34" charset="0"/>
-                <a:ea typeface="Calibri" pitchFamily="34" charset="-122"/>
-                <a:cs typeface="Calibri" pitchFamily="34" charset="-120"/>
-              </a:rPr>
-              <a:t>Chương 1</a:t>
-            </a:r>
-            <a:endParaRPr lang="en-US" sz="900" dirty="0"/>
-          </a:p>
-        </p:txBody>
-      </p:sp>
-      <p:sp>
-        <p:nvSpPr>
-          <p:cNvPr id="5" name="Shape 2"/>
-          <p:cNvSpPr/>
-          <p:nvPr/>
-        </p:nvSpPr>
-        <p:spPr>
-          <a:xfrm>
-            <a:off x="11430000" y="6327648"/>
-            <a:ext cx="365760" cy="365760"/>
-          </a:xfrm>
-          <a:prstGeom prst="ellipse">
-            <a:avLst/>
-          </a:prstGeom>
-          <a:solidFill>
-            <a:srgbClr val="DC756A"/>
-          </a:solidFill>
-          <a:ln/>
-        </p:spPr>
-        <p:txBody>
-          <a:bodyPr/>
-          <a:p/>
-        </p:txBody>
-      </p:sp>
-      <p:sp>
-        <p:nvSpPr>
-          <p:cNvPr id="6" name="Text 3"/>
-          <p:cNvSpPr/>
-          <p:nvPr/>
-        </p:nvSpPr>
-        <p:spPr>
-          <a:xfrm>
-            <a:off x="11430000" y="6327648"/>
-            <a:ext cx="365760" cy="365760"/>
-          </a:xfrm>
-          <a:prstGeom prst="rect">
-            <a:avLst/>
-          </a:prstGeom>
-          <a:noFill/>
-          <a:ln/>
-        </p:spPr>
-        <p:txBody>
-          <a:bodyPr wrap="square" lIns="0" tIns="0" rIns="0" bIns="0" rtlCol="0" anchor="ctr"/>
-          <a:lstStyle/>
-          <a:p>
-            <a:pPr algn="ctr" indent="0" marL="0">
-              <a:buNone/>
-            </a:pPr>
-            <a:r>
-              <a:rPr lang="en-US" sz="1000" b="1" dirty="0">
-                <a:solidFill>
-                  <a:srgbClr val="FFFFFF"/>
-                </a:solidFill>
-                <a:latin typeface="Calibri" pitchFamily="34" charset="0"/>
-                <a:ea typeface="Calibri" pitchFamily="34" charset="-122"/>
-                <a:cs typeface="Calibri" pitchFamily="34" charset="-120"/>
-              </a:rPr>
-              <a:t>9</a:t>
-            </a:r>
-            <a:endParaRPr lang="en-US" sz="1000" dirty="0"/>
-          </a:p>
-        </p:txBody>
-      </p:sp>
-      <p:sp>
-        <p:nvSpPr>
-          <p:cNvPr id="7" name="Text 4"/>
-          <p:cNvSpPr/>
-          <p:nvPr/>
-        </p:nvSpPr>
-        <p:spPr>
-          <a:xfrm>
-            <a:off x="502920" y="310896"/>
-            <a:ext cx="11155680" cy="274320"/>
-          </a:xfrm>
-          <a:prstGeom prst="rect">
-            <a:avLst/>
-          </a:prstGeom>
-          <a:noFill/>
-          <a:ln/>
-        </p:spPr>
-        <p:txBody>
-          <a:bodyPr wrap="square" lIns="0" tIns="0" rIns="0" bIns="0" rtlCol="0" anchor="ctr"/>
-          <a:lstStyle/>
-          <a:p>
-            <a:pPr indent="0" marL="0">
-              <a:buNone/>
-            </a:pPr>
-            <a:r>
-              <a:rPr lang="en-US" sz="1100" b="1" spc="300" kern="0" dirty="0">
-                <a:solidFill>
-                  <a:srgbClr val="DC756A"/>
-                </a:solidFill>
-                <a:latin typeface="Calibri" pitchFamily="34" charset="0"/>
-                <a:ea typeface="Calibri" pitchFamily="34" charset="-122"/>
-                <a:cs typeface="Calibri" pitchFamily="34" charset="-120"/>
-              </a:rPr>
-              <a:t>1.2</a:t>
-            </a:r>
-            <a:endParaRPr lang="en-US" sz="1100" dirty="0"/>
-          </a:p>
-        </p:txBody>
-      </p:sp>
-      <p:sp>
-        <p:nvSpPr>
-          <p:cNvPr id="8" name="Text 5"/>
-          <p:cNvSpPr/>
-          <p:nvPr/>
-        </p:nvSpPr>
-        <p:spPr>
-          <a:xfrm>
-            <a:off x="502920" y="576072"/>
-            <a:ext cx="11155680" cy="713232"/>
-          </a:xfrm>
-          <a:prstGeom prst="rect">
-            <a:avLst/>
-          </a:prstGeom>
-          <a:noFill/>
-          <a:ln/>
-        </p:spPr>
-        <p:txBody>
-          <a:bodyPr wrap="square" lIns="0" tIns="0" rIns="0" bIns="0" rtlCol="0" anchor="ctr"/>
-          <a:lstStyle/>
-          <a:p>
-            <a:pPr indent="0" marL="0">
-              <a:buNone/>
-            </a:pPr>
-            <a:r>
-              <a:rPr lang="en-US" sz="2700" b="1" dirty="0">
-                <a:solidFill>
-                  <a:srgbClr val="AC4D33"/>
-                </a:solidFill>
-                <a:latin typeface="Cambria" pitchFamily="34" charset="0"/>
-                <a:ea typeface="Cambria" pitchFamily="34" charset="-122"/>
-                <a:cs typeface="Cambria" pitchFamily="34" charset="-120"/>
-              </a:rPr>
-              <a:t>Phương tiện giao tiếp: phi ngôn ngữ</a:t>
-            </a:r>
-            <a:endParaRPr lang="en-US" sz="2700" dirty="0"/>
-          </a:p>
-        </p:txBody>
-      </p:sp>
-      <p:sp>
-        <p:nvSpPr>
-          <p:cNvPr id="9" name="Shape 6"/>
-          <p:cNvSpPr/>
-          <p:nvPr/>
-        </p:nvSpPr>
-        <p:spPr>
-          <a:xfrm>
-            <a:off x="502920" y="1600200"/>
-            <a:ext cx="5509260" cy="1280160"/>
-          </a:xfrm>
-          <a:prstGeom prst="roundRect">
-            <a:avLst>
-              <a:gd name="adj" fmla="val 6429"/>
-            </a:avLst>
-          </a:prstGeom>
-          <a:solidFill>
-            <a:srgbClr val="FDF1EF"/>
-          </a:solidFill>
-          <a:ln w="15875">
-            <a:solidFill>
-              <a:srgbClr val="FBCEC9"/>
-            </a:solidFill>
-            <a:prstDash val="solid"/>
-          </a:ln>
-        </p:spPr>
-        <p:txBody>
-          <a:bodyPr/>
-          <a:p/>
-        </p:txBody>
-      </p:sp>
-      <p:sp>
-        <p:nvSpPr>
-          <p:cNvPr id="10" name="Text 7"/>
-          <p:cNvSpPr/>
-          <p:nvPr/>
-        </p:nvSpPr>
-        <p:spPr>
-          <a:xfrm>
-            <a:off x="722376" y="1673352"/>
-            <a:ext cx="5070348" cy="1133856"/>
-          </a:xfrm>
-          <a:prstGeom prst="rect">
-            <a:avLst/>
-          </a:prstGeom>
-          <a:noFill/>
-          <a:ln/>
-        </p:spPr>
-        <p:txBody>
-          <a:bodyPr wrap="square" lIns="0" tIns="0" rIns="0" bIns="0" rtlCol="0" anchor="ctr"/>
-          <a:lstStyle/>
-          <a:p>
-            <a:pPr indent="0" marL="0">
-              <a:buNone/>
-            </a:pPr>
-            <a:r>
-              <a:rPr lang="en-US" sz="1700" b="1" dirty="0">
-                <a:solidFill>
-                  <a:srgbClr val="AC4D33"/>
-                </a:solidFill>
-                <a:latin typeface="Calibri" pitchFamily="34" charset="0"/>
-                <a:ea typeface="Calibri" pitchFamily="34" charset="-122"/>
-                <a:cs typeface="Calibri" pitchFamily="34" charset="-120"/>
-              </a:rPr>
-              <a:t>Ánh mắt – nét mặt</a:t>
-            </a:r>
-            <a:endParaRPr lang="en-US" sz="1700" dirty="0"/>
-          </a:p>
-          <a:p>
-            <a:pPr indent="0" marL="0">
-              <a:buNone/>
-            </a:pPr>
-            <a:r>
-              <a:rPr lang="en-US" sz="1400" dirty="0">
-                <a:solidFill>
-                  <a:srgbClr val="3A2B28"/>
-                </a:solidFill>
-                <a:latin typeface="Calibri" pitchFamily="34" charset="0"/>
-                <a:ea typeface="Calibri" pitchFamily="34" charset="-122"/>
-                <a:cs typeface="Calibri" pitchFamily="34" charset="-120"/>
-              </a:rPr>
-              <a:t>Kênh biểu cảm mạnh nhất</a:t>
-            </a:r>
-            <a:endParaRPr lang="en-US" sz="1700" dirty="0"/>
-          </a:p>
-        </p:txBody>
-      </p:sp>
-      <p:sp>
-        <p:nvSpPr>
-          <p:cNvPr id="11" name="Shape 8"/>
-          <p:cNvSpPr/>
-          <p:nvPr/>
-        </p:nvSpPr>
-        <p:spPr>
-          <a:xfrm>
-            <a:off x="6195060" y="1600200"/>
-            <a:ext cx="5509260" cy="1280160"/>
-          </a:xfrm>
-          <a:prstGeom prst="roundRect">
-            <a:avLst>
-              <a:gd name="adj" fmla="val 6429"/>
-            </a:avLst>
-          </a:prstGeom>
-          <a:solidFill>
-            <a:srgbClr val="FDF1EF"/>
-          </a:solidFill>
-          <a:ln w="15875">
-            <a:solidFill>
-              <a:srgbClr val="FBCEC9"/>
-            </a:solidFill>
-            <a:prstDash val="solid"/>
-          </a:ln>
-        </p:spPr>
-        <p:txBody>
-          <a:bodyPr/>
-          <a:p/>
-        </p:txBody>
-      </p:sp>
-      <p:sp>
-        <p:nvSpPr>
-          <p:cNvPr id="12" name="Text 9"/>
-          <p:cNvSpPr/>
-          <p:nvPr/>
-        </p:nvSpPr>
-        <p:spPr>
-          <a:xfrm>
-            <a:off x="6414516" y="1673352"/>
-            <a:ext cx="5070348" cy="1133856"/>
-          </a:xfrm>
-          <a:prstGeom prst="rect">
-            <a:avLst/>
-          </a:prstGeom>
-          <a:noFill/>
-          <a:ln/>
-        </p:spPr>
-        <p:txBody>
-          <a:bodyPr wrap="square" lIns="0" tIns="0" rIns="0" bIns="0" rtlCol="0" anchor="ctr"/>
-          <a:lstStyle/>
-          <a:p>
-            <a:pPr indent="0" marL="0">
-              <a:buNone/>
-            </a:pPr>
-            <a:r>
-              <a:rPr lang="en-US" sz="1700" b="1" dirty="0">
-                <a:solidFill>
-                  <a:srgbClr val="AC4D33"/>
-                </a:solidFill>
-                <a:latin typeface="Calibri" pitchFamily="34" charset="0"/>
-                <a:ea typeface="Calibri" pitchFamily="34" charset="-122"/>
-                <a:cs typeface="Calibri" pitchFamily="34" charset="-120"/>
-              </a:rPr>
-              <a:t>Cử chỉ – tư thế</a:t>
-            </a:r>
-            <a:endParaRPr lang="en-US" sz="1700" dirty="0"/>
-          </a:p>
-          <a:p>
-            <a:pPr indent="0" marL="0">
-              <a:buNone/>
-            </a:pPr>
-            <a:r>
-              <a:rPr lang="en-US" sz="1400" dirty="0">
-                <a:solidFill>
-                  <a:srgbClr val="3A2B28"/>
-                </a:solidFill>
-                <a:latin typeface="Calibri" pitchFamily="34" charset="0"/>
-                <a:ea typeface="Calibri" pitchFamily="34" charset="-122"/>
-                <a:cs typeface="Calibri" pitchFamily="34" charset="-120"/>
-              </a:rPr>
-              <a:t>Thẳng và cởi mở tạo thiện cảm</a:t>
-            </a:r>
-            <a:endParaRPr lang="en-US" sz="1700" dirty="0"/>
-          </a:p>
-        </p:txBody>
-      </p:sp>
-      <p:sp>
-        <p:nvSpPr>
-          <p:cNvPr id="13" name="Shape 10"/>
-          <p:cNvSpPr/>
-          <p:nvPr/>
-        </p:nvSpPr>
-        <p:spPr>
-          <a:xfrm>
-            <a:off x="502920" y="3063240"/>
-            <a:ext cx="5509260" cy="1280160"/>
-          </a:xfrm>
-          <a:prstGeom prst="roundRect">
-            <a:avLst>
-              <a:gd name="adj" fmla="val 6429"/>
-            </a:avLst>
-          </a:prstGeom>
-          <a:solidFill>
-            <a:srgbClr val="FDF1EF"/>
-          </a:solidFill>
-          <a:ln w="15875">
-            <a:solidFill>
-              <a:srgbClr val="FBCEC9"/>
-            </a:solidFill>
-            <a:prstDash val="solid"/>
-          </a:ln>
-        </p:spPr>
-        <p:txBody>
-          <a:bodyPr/>
-          <a:p/>
-        </p:txBody>
-      </p:sp>
-      <p:sp>
-        <p:nvSpPr>
-          <p:cNvPr id="14" name="Text 11"/>
-          <p:cNvSpPr/>
-          <p:nvPr/>
-        </p:nvSpPr>
-        <p:spPr>
-          <a:xfrm>
-            <a:off x="722376" y="3136392"/>
-            <a:ext cx="5070348" cy="1133856"/>
-          </a:xfrm>
-          <a:prstGeom prst="rect">
-            <a:avLst/>
-          </a:prstGeom>
-          <a:noFill/>
-          <a:ln/>
-        </p:spPr>
-        <p:txBody>
-          <a:bodyPr wrap="square" lIns="0" tIns="0" rIns="0" bIns="0" rtlCol="0" anchor="ctr"/>
-          <a:lstStyle/>
-          <a:p>
-            <a:pPr indent="0" marL="0">
-              <a:buNone/>
-            </a:pPr>
-            <a:r>
-              <a:rPr lang="en-US" sz="1700" b="1" dirty="0">
-                <a:solidFill>
-                  <a:srgbClr val="AC4D33"/>
-                </a:solidFill>
-                <a:latin typeface="Calibri" pitchFamily="34" charset="0"/>
-                <a:ea typeface="Calibri" pitchFamily="34" charset="-122"/>
-                <a:cs typeface="Calibri" pitchFamily="34" charset="-120"/>
-              </a:rPr>
-              <a:t>Khoảng cách</a:t>
-            </a:r>
-            <a:endParaRPr lang="en-US" sz="1700" dirty="0"/>
-          </a:p>
-          <a:p>
-            <a:pPr indent="0" marL="0">
-              <a:buNone/>
-            </a:pPr>
-            <a:r>
-              <a:rPr lang="en-US" sz="1400" dirty="0">
-                <a:solidFill>
-                  <a:srgbClr val="3A2B28"/>
-                </a:solidFill>
-                <a:latin typeface="Calibri" pitchFamily="34" charset="0"/>
-                <a:ea typeface="Calibri" pitchFamily="34" charset="-122"/>
-                <a:cs typeface="Calibri" pitchFamily="34" charset="-120"/>
-              </a:rPr>
-              <a:t>Thân mật · cá nhân · xã giao · công cộng</a:t>
-            </a:r>
-            <a:endParaRPr lang="en-US" sz="1700" dirty="0"/>
-          </a:p>
-        </p:txBody>
-      </p:sp>
-      <p:sp>
-        <p:nvSpPr>
-          <p:cNvPr id="15" name="Shape 12"/>
-          <p:cNvSpPr/>
-          <p:nvPr/>
-        </p:nvSpPr>
-        <p:spPr>
-          <a:xfrm>
-            <a:off x="6195060" y="3063240"/>
-            <a:ext cx="5509260" cy="1280160"/>
-          </a:xfrm>
-          <a:prstGeom prst="roundRect">
-            <a:avLst>
-              <a:gd name="adj" fmla="val 6429"/>
-            </a:avLst>
-          </a:prstGeom>
-          <a:solidFill>
-            <a:srgbClr val="FDF1EF"/>
-          </a:solidFill>
-          <a:ln w="15875">
-            <a:solidFill>
-              <a:srgbClr val="FBCEC9"/>
-            </a:solidFill>
-            <a:prstDash val="solid"/>
-          </a:ln>
-        </p:spPr>
-        <p:txBody>
-          <a:bodyPr/>
-          <a:p/>
-        </p:txBody>
-      </p:sp>
-      <p:sp>
-        <p:nvSpPr>
-          <p:cNvPr id="16" name="Text 13"/>
-          <p:cNvSpPr/>
-          <p:nvPr/>
-        </p:nvSpPr>
-        <p:spPr>
-          <a:xfrm>
-            <a:off x="6414516" y="3136392"/>
-            <a:ext cx="5070348" cy="1133856"/>
-          </a:xfrm>
-          <a:prstGeom prst="rect">
-            <a:avLst/>
-          </a:prstGeom>
-          <a:noFill/>
-          <a:ln/>
-        </p:spPr>
-        <p:txBody>
-          <a:bodyPr wrap="square" lIns="0" tIns="0" rIns="0" bIns="0" rtlCol="0" anchor="ctr"/>
-          <a:lstStyle/>
-          <a:p>
-            <a:pPr indent="0" marL="0">
-              <a:buNone/>
-            </a:pPr>
-            <a:r>
-              <a:rPr lang="en-US" sz="1700" b="1" dirty="0">
-                <a:solidFill>
-                  <a:srgbClr val="AC4D33"/>
-                </a:solidFill>
-                <a:latin typeface="Calibri" pitchFamily="34" charset="0"/>
-                <a:ea typeface="Calibri" pitchFamily="34" charset="-122"/>
-                <a:cs typeface="Calibri" pitchFamily="34" charset="-120"/>
-              </a:rPr>
-              <a:t>Trang phục – giọng – giờ giấc</a:t>
-            </a:r>
-            <a:endParaRPr lang="en-US" sz="1700" dirty="0"/>
-          </a:p>
-          <a:p>
-            <a:pPr indent="0" marL="0">
-              <a:buNone/>
-            </a:pPr>
-            <a:r>
-              <a:rPr lang="en-US" sz="1400" dirty="0">
-                <a:solidFill>
-                  <a:srgbClr val="3A2B28"/>
-                </a:solidFill>
-                <a:latin typeface="Calibri" pitchFamily="34" charset="0"/>
-                <a:ea typeface="Calibri" pitchFamily="34" charset="-122"/>
-                <a:cs typeface="Calibri" pitchFamily="34" charset="-120"/>
-              </a:rPr>
-              <a:t>Đúng giờ cũng là một thông điệp</a:t>
-            </a:r>
-            <a:endParaRPr lang="en-US" sz="1700" dirty="0"/>
-          </a:p>
-        </p:txBody>
-      </p:sp>
-      <p:sp>
-        <p:nvSpPr>
-          <p:cNvPr id="17" name="Text 14"/>
-          <p:cNvSpPr/>
-          <p:nvPr/>
-        </p:nvSpPr>
-        <p:spPr>
-          <a:xfrm>
-            <a:off x="777240" y="4617720"/>
-            <a:ext cx="3566160" cy="868680"/>
-          </a:xfrm>
-          <a:prstGeom prst="rect">
-            <a:avLst/>
-          </a:prstGeom>
-          <a:noFill/>
-          <a:ln/>
-        </p:spPr>
-        <p:txBody>
-          <a:bodyPr wrap="square" lIns="0" tIns="0" rIns="0" bIns="0" rtlCol="0" anchor="ctr"/>
-          <a:lstStyle/>
-          <a:p>
-            <a:pPr algn="ctr" indent="0" marL="0">
-              <a:buNone/>
-            </a:pPr>
-            <a:r>
-              <a:rPr lang="en-US" sz="4400" b="1" dirty="0">
-                <a:solidFill>
-                  <a:srgbClr val="DC756A"/>
-                </a:solidFill>
-                <a:latin typeface="Cambria" pitchFamily="34" charset="0"/>
-                <a:ea typeface="Cambria" pitchFamily="34" charset="-122"/>
-                <a:cs typeface="Cambria" pitchFamily="34" charset="-120"/>
-              </a:rPr>
-              <a:t>7%</a:t>
-            </a:r>
-            <a:endParaRPr lang="en-US" sz="4400" dirty="0"/>
-          </a:p>
-        </p:txBody>
-      </p:sp>
-      <p:sp>
-        <p:nvSpPr>
-          <p:cNvPr id="18" name="Text 15"/>
-          <p:cNvSpPr/>
-          <p:nvPr/>
-        </p:nvSpPr>
-        <p:spPr>
-          <a:xfrm>
-            <a:off x="777240" y="5486400"/>
-            <a:ext cx="3566160" cy="365760"/>
-          </a:xfrm>
-          <a:prstGeom prst="rect">
-            <a:avLst/>
-          </a:prstGeom>
-          <a:noFill/>
-          <a:ln/>
-        </p:spPr>
-        <p:txBody>
-          <a:bodyPr wrap="square" lIns="0" tIns="0" rIns="0" bIns="0" rtlCol="0" anchor="ctr"/>
-          <a:lstStyle/>
-          <a:p>
-            <a:pPr algn="ctr" indent="0" marL="0">
-              <a:buNone/>
-            </a:pPr>
-            <a:r>
-              <a:rPr lang="en-US" sz="1300" b="1" spc="200" kern="0" dirty="0">
-                <a:solidFill>
-                  <a:srgbClr val="8A7A76"/>
-                </a:solidFill>
-                <a:latin typeface="Calibri" pitchFamily="34" charset="0"/>
-                <a:ea typeface="Calibri" pitchFamily="34" charset="-122"/>
-                <a:cs typeface="Calibri" pitchFamily="34" charset="-120"/>
-              </a:rPr>
-              <a:t>TỪ NGỮ</a:t>
-            </a:r>
-            <a:endParaRPr lang="en-US" sz="1300" dirty="0"/>
-          </a:p>
-        </p:txBody>
-      </p:sp>
-      <p:sp>
-        <p:nvSpPr>
-          <p:cNvPr id="19" name="Text 16"/>
-          <p:cNvSpPr/>
-          <p:nvPr/>
-        </p:nvSpPr>
-        <p:spPr>
-          <a:xfrm>
-            <a:off x="4754880" y="4617720"/>
-            <a:ext cx="3566160" cy="868680"/>
-          </a:xfrm>
-          <a:prstGeom prst="rect">
-            <a:avLst/>
-          </a:prstGeom>
-          <a:noFill/>
-          <a:ln/>
-        </p:spPr>
-        <p:txBody>
-          <a:bodyPr wrap="square" lIns="0" tIns="0" rIns="0" bIns="0" rtlCol="0" anchor="ctr"/>
-          <a:lstStyle/>
-          <a:p>
-            <a:pPr algn="ctr" indent="0" marL="0">
-              <a:buNone/>
-            </a:pPr>
-            <a:r>
-              <a:rPr lang="en-US" sz="4400" b="1" dirty="0">
-                <a:solidFill>
-                  <a:srgbClr val="DC756A"/>
-                </a:solidFill>
-                <a:latin typeface="Cambria" pitchFamily="34" charset="0"/>
-                <a:ea typeface="Cambria" pitchFamily="34" charset="-122"/>
-                <a:cs typeface="Cambria" pitchFamily="34" charset="-120"/>
-              </a:rPr>
-              <a:t>38%</a:t>
-            </a:r>
-            <a:endParaRPr lang="en-US" sz="4400" dirty="0"/>
-          </a:p>
-        </p:txBody>
-      </p:sp>
-      <p:sp>
-        <p:nvSpPr>
-          <p:cNvPr id="20" name="Text 17"/>
-          <p:cNvSpPr/>
-          <p:nvPr/>
-        </p:nvSpPr>
-        <p:spPr>
-          <a:xfrm>
-            <a:off x="4754880" y="5486400"/>
-            <a:ext cx="3566160" cy="365760"/>
-          </a:xfrm>
-          <a:prstGeom prst="rect">
-            <a:avLst/>
-          </a:prstGeom>
-          <a:noFill/>
-          <a:ln/>
-        </p:spPr>
-        <p:txBody>
-          <a:bodyPr wrap="square" lIns="0" tIns="0" rIns="0" bIns="0" rtlCol="0" anchor="ctr"/>
-          <a:lstStyle/>
-          <a:p>
-            <a:pPr algn="ctr" indent="0" marL="0">
-              <a:buNone/>
-            </a:pPr>
-            <a:r>
-              <a:rPr lang="en-US" sz="1300" b="1" spc="200" kern="0" dirty="0">
-                <a:solidFill>
-                  <a:srgbClr val="8A7A76"/>
-                </a:solidFill>
-                <a:latin typeface="Calibri" pitchFamily="34" charset="0"/>
-                <a:ea typeface="Calibri" pitchFamily="34" charset="-122"/>
-                <a:cs typeface="Calibri" pitchFamily="34" charset="-120"/>
-              </a:rPr>
-              <a:t>GIỌNG NÓI</a:t>
-            </a:r>
-            <a:endParaRPr lang="en-US" sz="1300" dirty="0"/>
-          </a:p>
-        </p:txBody>
-      </p:sp>
-      <p:sp>
-        <p:nvSpPr>
-          <p:cNvPr id="21" name="Text 18"/>
-          <p:cNvSpPr/>
-          <p:nvPr/>
-        </p:nvSpPr>
-        <p:spPr>
-          <a:xfrm>
-            <a:off x="8732520" y="4617720"/>
-            <a:ext cx="3566160" cy="868680"/>
-          </a:xfrm>
-          <a:prstGeom prst="rect">
-            <a:avLst/>
-          </a:prstGeom>
-          <a:noFill/>
-          <a:ln/>
-        </p:spPr>
-        <p:txBody>
-          <a:bodyPr wrap="square" lIns="0" tIns="0" rIns="0" bIns="0" rtlCol="0" anchor="ctr"/>
-          <a:lstStyle/>
-          <a:p>
-            <a:pPr algn="ctr" indent="0" marL="0">
-              <a:buNone/>
-            </a:pPr>
-            <a:r>
-              <a:rPr lang="en-US" sz="4400" b="1" dirty="0">
-                <a:solidFill>
-                  <a:srgbClr val="AC4D33"/>
-                </a:solidFill>
-                <a:latin typeface="Cambria" pitchFamily="34" charset="0"/>
-                <a:ea typeface="Cambria" pitchFamily="34" charset="-122"/>
-                <a:cs typeface="Cambria" pitchFamily="34" charset="-120"/>
-              </a:rPr>
-              <a:t>55%</a:t>
-            </a:r>
-            <a:endParaRPr lang="en-US" sz="4400" dirty="0"/>
-          </a:p>
-        </p:txBody>
-      </p:sp>
-      <p:sp>
-        <p:nvSpPr>
-          <p:cNvPr id="22" name="Text 19"/>
-          <p:cNvSpPr/>
-          <p:nvPr/>
-        </p:nvSpPr>
-        <p:spPr>
-          <a:xfrm>
-            <a:off x="8732520" y="5486400"/>
-            <a:ext cx="3566160" cy="365760"/>
-          </a:xfrm>
-          <a:prstGeom prst="rect">
-            <a:avLst/>
-          </a:prstGeom>
-          <a:noFill/>
-          <a:ln/>
-        </p:spPr>
-        <p:txBody>
-          <a:bodyPr wrap="square" lIns="0" tIns="0" rIns="0" bIns="0" rtlCol="0" anchor="ctr"/>
-          <a:lstStyle/>
-          <a:p>
-            <a:pPr algn="ctr" indent="0" marL="0">
-              <a:buNone/>
-            </a:pPr>
-            <a:r>
-              <a:rPr lang="en-US" sz="1300" b="1" spc="200" kern="0" dirty="0">
-                <a:solidFill>
-                  <a:srgbClr val="8A7A76"/>
-                </a:solidFill>
-                <a:latin typeface="Calibri" pitchFamily="34" charset="0"/>
-                <a:ea typeface="Calibri" pitchFamily="34" charset="-122"/>
-                <a:cs typeface="Calibri" pitchFamily="34" charset="-120"/>
-              </a:rPr>
-              <a:t>CƠ THỂ</a:t>
-            </a:r>
-            <a:endParaRPr lang="en-US" sz="1300" dirty="0"/>
-          </a:p>
-        </p:txBody>
-      </p:sp>
-      <p:sp>
-        <p:nvSpPr>
-          <p:cNvPr id="23" name="Text 20"/>
-          <p:cNvSpPr/>
-          <p:nvPr/>
-        </p:nvSpPr>
-        <p:spPr>
-          <a:xfrm>
-            <a:off x="502920" y="5943600"/>
-            <a:ext cx="11201400" cy="365760"/>
-          </a:xfrm>
-          <a:prstGeom prst="rect">
-            <a:avLst/>
-          </a:prstGeom>
-          <a:noFill/>
-          <a:ln/>
-        </p:spPr>
-        <p:txBody>
-          <a:bodyPr wrap="square" lIns="0" tIns="0" rIns="0" bIns="0" rtlCol="0" anchor="ctr"/>
-          <a:lstStyle/>
-          <a:p>
-            <a:pPr algn="ctr" indent="0" marL="0">
-              <a:buNone/>
-            </a:pPr>
-            <a:r>
-              <a:rPr lang="en-US" sz="1200" i="1" dirty="0">
-                <a:solidFill>
-                  <a:srgbClr val="8A7A76"/>
-                </a:solidFill>
-                <a:latin typeface="Calibri" pitchFamily="34" charset="0"/>
-                <a:ea typeface="Calibri" pitchFamily="34" charset="-122"/>
-                <a:cs typeface="Calibri" pitchFamily="34" charset="-120"/>
-              </a:rPr>
-              <a:t>Mehrabian — với thông điệp cảm xúc</a:t>
-            </a:r>
-            <a:endParaRPr lang="en-US" sz="1200" dirty="0"/>
           </a:p>
         </p:txBody>
       </p:sp>

--- a/slides/01-tong-quan-giao-tiep.pptx
+++ b/slides/01-tong-quan-giao-tiep.pptx
@@ -752,10 +752,54 @@
           <a:lstStyle/>
           <a:p>
             <a:r>
-              <a:rPr lang="en-US" dirty="0"/>
-              <a:t/>
-            </a:r>
-            <a:endParaRPr lang="en-US" dirty="0"/>
+              <a:t>YẾU TỐ ẢNH HƯỞNG (2 phút)</a:t>
+            </a:r>
+          </a:p>
+          <a:p>
+            <a:r>
+              <a:t>• Nhấn yếu tố ĐỊNH KIẾN — thứ khó thấy nhất nhưng phá hỏng nhiều cuộc giao tiếp nhất.</a:t>
+            </a:r>
+          </a:p>
+          <a:p>
+            <a:r>
+              <a:t>• Ví dụ: nghe giọng vùng miền rồi đánh giá năng lực; thấy người trẻ rồi cho là thiếu kinh nghiệm.</a:t>
+            </a:r>
+          </a:p>
+          <a:p>
+            <a:r>
+              <a:t>• Liên hệ Chương 3: phần giao tiếp đa văn hóa sẽ quay lại điểm này.</a:t>
+            </a:r>
+          </a:p>
+          <a:p/>
+          <a:p>
+            <a:r>
+              <a:t>NÓI ĐỦ Ý (phần đã rút khỏi slide)</a:t>
+            </a:r>
+          </a:p>
+          <a:p>
+            <a:r>
+              <a:t>• Chủ thể: trạng thái tâm lý, cảm xúc, sức khỏe, vốn hiểu biết, kỹ năng, uy tín.</a:t>
+            </a:r>
+          </a:p>
+          <a:p>
+            <a:r>
+              <a:t>• Thông điệp: rõ hay mơ hồ, cấu trúc hợp lý hay lộn xộn, hợp người nghe hay không.</a:t>
+            </a:r>
+          </a:p>
+          <a:p>
+            <a:r>
+              <a:t>• Kênh và nhiễu: chọn kênh sai (việc hệ trọng lại nhắn tin), đường truyền kém, môi trường ồn ào.</a:t>
+            </a:r>
+          </a:p>
+          <a:p>
+            <a:r>
+              <a:t>• Bối cảnh văn hóa – xã hội: chuẩn mực, tôn giáo, vùng miền, thứ bậc — bình thường nơi này có thể thất lễ nơi khác.</a:t>
+            </a:r>
+          </a:p>
+          <a:p>
+            <a:r>
+              <a:t>• Quan hệ và định kiến: ấn tượng cũ, tin đồn, khoảng cách quyền lực làm méo cách diễn giải.</a:t>
+            </a:r>
           </a:p>
         </p:txBody>
       </p:sp>
@@ -1567,53 +1611,7 @@
           <a:lstStyle/>
           <a:p>
             <a:r>
-              <a:t>YẾU TỐ ẢNH HƯỞNG (2 phút)</a:t>
-            </a:r>
-          </a:p>
-          <a:p>
-            <a:r>
-              <a:t>• Nhấn yếu tố ĐỊNH KIẾN — thứ khó thấy nhất nhưng phá hỏng nhiều cuộc giao tiếp nhất.</a:t>
-            </a:r>
-          </a:p>
-          <a:p>
-            <a:r>
-              <a:t>• Ví dụ: nghe giọng vùng miền rồi đánh giá năng lực; thấy người trẻ rồi cho là thiếu kinh nghiệm.</a:t>
-            </a:r>
-          </a:p>
-          <a:p>
-            <a:r>
-              <a:t>• Liên hệ Chương 3: phần giao tiếp đa văn hóa sẽ quay lại điểm này.</a:t>
-            </a:r>
-          </a:p>
-          <a:p/>
-          <a:p>
-            <a:r>
-              <a:t>NÓI ĐỦ Ý (phần đã rút khỏi slide)</a:t>
-            </a:r>
-          </a:p>
-          <a:p>
-            <a:r>
-              <a:t>• Chủ thể: trạng thái tâm lý, cảm xúc, sức khỏe, vốn hiểu biết, kỹ năng, uy tín.</a:t>
-            </a:r>
-          </a:p>
-          <a:p>
-            <a:r>
-              <a:t>• Thông điệp: rõ hay mơ hồ, cấu trúc hợp lý hay lộn xộn, hợp người nghe hay không.</a:t>
-            </a:r>
-          </a:p>
-          <a:p>
-            <a:r>
-              <a:t>• Kênh và nhiễu: chọn kênh sai (việc hệ trọng lại nhắn tin), đường truyền kém, môi trường ồn ào.</a:t>
-            </a:r>
-          </a:p>
-          <a:p>
-            <a:r>
-              <a:t>• Bối cảnh văn hóa – xã hội: chuẩn mực, tôn giáo, vùng miền, thứ bậc — bình thường nơi này có thể thất lễ nơi khác.</a:t>
-            </a:r>
-          </a:p>
-          <a:p>
-            <a:r>
-              <a:t>• Quan hệ và định kiến: ấn tượng cũ, tin đồn, khoảng cách quyền lực làm méo cách diễn giải.</a:t>
+              <a:t>CHUYỂN MỤC (30 giây) — nhắc: phần còn lại của chương là phần hay ra thi.</a:t>
             </a:r>
           </a:p>
         </p:txBody>

--- a/slides/01-tong-quan-giao-tiep.pptx
+++ b/slides/01-tong-quan-giao-tiep.pptx
@@ -3065,7 +3065,7 @@
                 <a:ea typeface="Calibri" pitchFamily="34" charset="-122"/>
                 <a:cs typeface="Calibri" pitchFamily="34" charset="-120"/>
               </a:rPr>
-              <a:t>CHƯƠNG 1</a:t>
+              <a:t>CHAPTER 1</a:t>
             </a:r>
             <a:endParaRPr lang="en-US" sz="1800" dirty="0"/>
           </a:p>
@@ -3128,7 +3128,7 @@
                 <a:ea typeface="Cambria" pitchFamily="34" charset="-122"/>
                 <a:cs typeface="Cambria" pitchFamily="34" charset="-120"/>
               </a:rPr>
-              <a:t>Tổng quan về giao tiếp</a:t>
+              <a:t>An overview of</a:t>
             </a:r>
             <a:endParaRPr lang="en-US" sz="3800" dirty="0"/>
           </a:p>
@@ -3145,7 +3145,7 @@
                 <a:ea typeface="Cambria" pitchFamily="34" charset="-122"/>
                 <a:cs typeface="Cambria" pitchFamily="34" charset="-120"/>
               </a:rPr>
-              <a:t>trong kinh doanh</a:t>
+              <a:t>business communication</a:t>
             </a:r>
             <a:endParaRPr lang="en-US" sz="3800" dirty="0"/>
           </a:p>
@@ -3184,7 +3184,7 @@
                 <a:ea typeface="Calibri" pitchFamily="34" charset="-122"/>
                 <a:cs typeface="Calibri" pitchFamily="34" charset="-120"/>
               </a:rPr>
-              <a:t>Nền móng của mọi kỹ năng nghề nghiệp: hiểu đúng về giao tiếp trước khi luyện kỹ năng.</a:t>
+              <a:t>The foundation of every professional skill: understand communication before you practice it.</a:t>
             </a:r>
             <a:endParaRPr lang="en-US" sz="1400" dirty="0"/>
           </a:p>
@@ -3223,7 +3223,7 @@
                 <a:ea typeface="Calibri" pitchFamily="34" charset="-122"/>
                 <a:cs typeface="Calibri" pitchFamily="34" charset="-120"/>
               </a:rPr>
-              <a:t>GV. Đỗ Thùy Hương</a:t>
+              <a:t>Lecturer Đỗ Thùy Hương</a:t>
             </a:r>
             <a:endParaRPr lang="en-US" sz="1500" dirty="0"/>
           </a:p>
@@ -3240,7 +3240,7 @@
                 <a:ea typeface="Calibri" pitchFamily="34" charset="-122"/>
                 <a:cs typeface="Calibri" pitchFamily="34" charset="-120"/>
               </a:rPr>
-              <a:t>EC1103 – Kỹ năng giao tiếp và soạn thảo văn bản (2:1)  •  Lớp 261b, HK1 năm học 2026 – 2027</a:t>
+              <a:t>EC1103 – Business Communication and Document Drafting (2:1)  •  Class 261b, Semester 1, AY 2026–2027</a:t>
             </a:r>
             <a:endParaRPr lang="en-US" sz="1500" dirty="0"/>
           </a:p>
@@ -3279,7 +3279,7 @@
                 <a:ea typeface="Calibri" pitchFamily="34" charset="-122"/>
                 <a:cs typeface="Calibri" pitchFamily="34" charset="-120"/>
               </a:rPr>
-              <a:t>© Đỗ Thùy Hương, 2026 — Bài giảng biên soạn cho lớp giảng dạy trực tiếp. Vui lòng ghi nguồn khi sử dụng.</a:t>
+              <a:t>© Đỗ Thùy Hương, 2026 — Course material prepared for in-person teaching. Please credit the source when reused.</a:t>
             </a:r>
             <a:endParaRPr lang="en-US" sz="900" dirty="0"/>
           </a:p>
@@ -3318,6 +3318,1413 @@
 </file>
 
 <file path=ppt/slides/slide10.xml><?xml version="1.0" encoding="utf-8"?>
+<p:sld xmlns:a="http://schemas.openxmlformats.org/drawingml/2006/main" xmlns:r="http://schemas.openxmlformats.org/officeDocument/2006/relationships" xmlns:p="http://schemas.openxmlformats.org/presentationml/2006/main">
+  <p:cSld name="Slide 9">
+    <p:bg>
+      <p:bgPr>
+        <a:solidFill>
+          <a:srgbClr val="FDFBF8"/>
+        </a:solidFill>
+      </p:bgPr>
+    </p:bg>
+    <p:spTree>
+      <p:nvGrpSpPr>
+        <p:cNvPr id="1" name=""/>
+        <p:cNvGrpSpPr/>
+        <p:nvPr/>
+      </p:nvGrpSpPr>
+      <p:grpSpPr>
+        <a:xfrm>
+          <a:off x="0" y="0"/>
+          <a:ext cx="0" cy="0"/>
+          <a:chOff x="0" y="0"/>
+          <a:chExt cx="0" cy="0"/>
+        </a:xfrm>
+      </p:grpSpPr>
+      <p:pic>
+        <p:nvPicPr>
+          <p:cNvPr id="2" name="Image 0" descr="assets/logo_tron.png">    </p:cNvPr>
+          <p:cNvPicPr>
+            <a:picLocks noChangeAspect="1"/>
+          </p:cNvPicPr>
+          <p:nvPr/>
+        </p:nvPicPr>
+        <p:blipFill>
+          <a:blip r:embed="rId1"/>
+          <a:stretch>
+            <a:fillRect/>
+          </a:stretch>
+        </p:blipFill>
+        <p:spPr>
+          <a:xfrm>
+            <a:off x="411480" y="6327648"/>
+            <a:ext cx="384048" cy="384048"/>
+          </a:xfrm>
+          <a:prstGeom prst="rect">
+            <a:avLst/>
+          </a:prstGeom>
+        </p:spPr>
+      </p:pic>
+      <p:sp>
+        <p:nvSpPr>
+          <p:cNvPr id="3" name="Text 0"/>
+          <p:cNvSpPr/>
+          <p:nvPr/>
+        </p:nvSpPr>
+        <p:spPr>
+          <a:xfrm>
+            <a:off x="868680" y="6355080"/>
+            <a:ext cx="7498080" cy="310896"/>
+          </a:xfrm>
+          <a:prstGeom prst="rect">
+            <a:avLst/>
+          </a:prstGeom>
+          <a:noFill/>
+          <a:ln/>
+        </p:spPr>
+        <p:txBody>
+          <a:bodyPr wrap="square" lIns="0" tIns="0" rIns="0" bIns="0" rtlCol="0" anchor="ctr"/>
+          <a:lstStyle/>
+          <a:p>
+            <a:pPr indent="0" marL="0">
+              <a:buNone/>
+            </a:pPr>
+            <a:r>
+              <a:rPr lang="en-US" sz="900" dirty="0">
+                <a:solidFill>
+                  <a:srgbClr val="8A7A76"/>
+                </a:solidFill>
+                <a:latin typeface="Calibri" pitchFamily="34" charset="0"/>
+                <a:ea typeface="Calibri" pitchFamily="34" charset="-122"/>
+                <a:cs typeface="Calibri" pitchFamily="34" charset="-120"/>
+              </a:rPr>
+              <a:t>Je m'appelle Huong  •  GV. Đỗ Thùy Hương  •  EC1103</a:t>
+            </a:r>
+            <a:endParaRPr lang="en-US" sz="900" dirty="0"/>
+          </a:p>
+        </p:txBody>
+      </p:sp>
+      <p:sp>
+        <p:nvSpPr>
+          <p:cNvPr id="4" name="Text 1"/>
+          <p:cNvSpPr/>
+          <p:nvPr/>
+        </p:nvSpPr>
+        <p:spPr>
+          <a:xfrm>
+            <a:off x="8503920" y="6355080"/>
+            <a:ext cx="2743200" cy="310896"/>
+          </a:xfrm>
+          <a:prstGeom prst="rect">
+            <a:avLst/>
+          </a:prstGeom>
+          <a:noFill/>
+          <a:ln/>
+        </p:spPr>
+        <p:txBody>
+          <a:bodyPr wrap="square" lIns="0" tIns="0" rIns="0" bIns="0" rtlCol="0" anchor="ctr"/>
+          <a:lstStyle/>
+          <a:p>
+            <a:pPr algn="r" indent="0" marL="0">
+              <a:buNone/>
+            </a:pPr>
+            <a:r>
+              <a:rPr lang="en-US" sz="900" dirty="0">
+                <a:solidFill>
+                  <a:srgbClr val="8A7A76"/>
+                </a:solidFill>
+                <a:latin typeface="Calibri" pitchFamily="34" charset="0"/>
+                <a:ea typeface="Calibri" pitchFamily="34" charset="-122"/>
+                <a:cs typeface="Calibri" pitchFamily="34" charset="-120"/>
+              </a:rPr>
+              <a:t>Chương 1</a:t>
+            </a:r>
+            <a:endParaRPr lang="en-US" sz="900" dirty="0"/>
+          </a:p>
+        </p:txBody>
+      </p:sp>
+      <p:sp>
+        <p:nvSpPr>
+          <p:cNvPr id="5" name="Shape 2"/>
+          <p:cNvSpPr/>
+          <p:nvPr/>
+        </p:nvSpPr>
+        <p:spPr>
+          <a:xfrm>
+            <a:off x="11430000" y="6327648"/>
+            <a:ext cx="365760" cy="365760"/>
+          </a:xfrm>
+          <a:prstGeom prst="ellipse">
+            <a:avLst/>
+          </a:prstGeom>
+          <a:solidFill>
+            <a:srgbClr val="DC756A"/>
+          </a:solidFill>
+          <a:ln/>
+        </p:spPr>
+        <p:txBody>
+          <a:bodyPr/>
+          <a:p/>
+        </p:txBody>
+      </p:sp>
+      <p:sp>
+        <p:nvSpPr>
+          <p:cNvPr id="6" name="Text 3"/>
+          <p:cNvSpPr/>
+          <p:nvPr/>
+        </p:nvSpPr>
+        <p:spPr>
+          <a:xfrm>
+            <a:off x="11430000" y="6327648"/>
+            <a:ext cx="365760" cy="365760"/>
+          </a:xfrm>
+          <a:prstGeom prst="rect">
+            <a:avLst/>
+          </a:prstGeom>
+          <a:noFill/>
+          <a:ln/>
+        </p:spPr>
+        <p:txBody>
+          <a:bodyPr wrap="square" lIns="0" tIns="0" rIns="0" bIns="0" rtlCol="0" anchor="ctr"/>
+          <a:lstStyle/>
+          <a:p>
+            <a:pPr algn="ctr" indent="0" marL="0">
+              <a:buNone/>
+            </a:pPr>
+            <a:r>
+              <a:rPr lang="en-US" sz="1000" b="1" dirty="0">
+                <a:solidFill>
+                  <a:srgbClr val="FFFFFF"/>
+                </a:solidFill>
+                <a:latin typeface="Calibri" pitchFamily="34" charset="0"/>
+                <a:ea typeface="Calibri" pitchFamily="34" charset="-122"/>
+                <a:cs typeface="Calibri" pitchFamily="34" charset="-120"/>
+              </a:rPr>
+              <a:t>9</a:t>
+            </a:r>
+            <a:endParaRPr lang="en-US" sz="1000" dirty="0"/>
+          </a:p>
+        </p:txBody>
+      </p:sp>
+      <p:sp>
+        <p:nvSpPr>
+          <p:cNvPr id="7" name="Text 4"/>
+          <p:cNvSpPr/>
+          <p:nvPr/>
+        </p:nvSpPr>
+        <p:spPr>
+          <a:xfrm>
+            <a:off x="502920" y="310896"/>
+            <a:ext cx="11155680" cy="274320"/>
+          </a:xfrm>
+          <a:prstGeom prst="rect">
+            <a:avLst/>
+          </a:prstGeom>
+          <a:noFill/>
+          <a:ln/>
+        </p:spPr>
+        <p:txBody>
+          <a:bodyPr wrap="square" lIns="0" tIns="0" rIns="0" bIns="0" rtlCol="0" anchor="ctr"/>
+          <a:lstStyle/>
+          <a:p>
+            <a:pPr indent="0" marL="0">
+              <a:buNone/>
+            </a:pPr>
+            <a:r>
+              <a:rPr lang="en-US" sz="1100" b="1" spc="300" kern="0" dirty="0">
+                <a:solidFill>
+                  <a:srgbClr val="DC756A"/>
+                </a:solidFill>
+                <a:latin typeface="Calibri" pitchFamily="34" charset="0"/>
+                <a:ea typeface="Calibri" pitchFamily="34" charset="-122"/>
+                <a:cs typeface="Calibri" pitchFamily="34" charset="-120"/>
+              </a:rPr>
+              <a:t>1.2</a:t>
+            </a:r>
+            <a:endParaRPr lang="en-US" sz="1100" dirty="0"/>
+          </a:p>
+        </p:txBody>
+      </p:sp>
+      <p:sp>
+        <p:nvSpPr>
+          <p:cNvPr id="8" name="Text 5"/>
+          <p:cNvSpPr/>
+          <p:nvPr/>
+        </p:nvSpPr>
+        <p:spPr>
+          <a:xfrm>
+            <a:off x="502920" y="576072"/>
+            <a:ext cx="11155680" cy="713232"/>
+          </a:xfrm>
+          <a:prstGeom prst="rect">
+            <a:avLst/>
+          </a:prstGeom>
+          <a:noFill/>
+          <a:ln/>
+        </p:spPr>
+        <p:txBody>
+          <a:bodyPr wrap="square" lIns="0" tIns="0" rIns="0" bIns="0" rtlCol="0" anchor="ctr"/>
+          <a:lstStyle/>
+          <a:p>
+            <a:pPr indent="0" marL="0">
+              <a:buNone/>
+            </a:pPr>
+            <a:r>
+              <a:rPr lang="en-US" sz="2700" b="1" dirty="0">
+                <a:solidFill>
+                  <a:srgbClr val="AC4D33"/>
+                </a:solidFill>
+                <a:latin typeface="Cambria" pitchFamily="34" charset="0"/>
+                <a:ea typeface="Cambria" pitchFamily="34" charset="-122"/>
+                <a:cs typeface="Cambria" pitchFamily="34" charset="-120"/>
+              </a:rPr>
+              <a:t>Phương tiện giao tiếp: phi ngôn ngữ</a:t>
+            </a:r>
+            <a:endParaRPr lang="en-US" sz="2700" dirty="0"/>
+          </a:p>
+        </p:txBody>
+      </p:sp>
+      <p:sp>
+        <p:nvSpPr>
+          <p:cNvPr id="9" name="Shape 6"/>
+          <p:cNvSpPr/>
+          <p:nvPr/>
+        </p:nvSpPr>
+        <p:spPr>
+          <a:xfrm>
+            <a:off x="502920" y="1600200"/>
+            <a:ext cx="5509260" cy="1280160"/>
+          </a:xfrm>
+          <a:prstGeom prst="roundRect">
+            <a:avLst>
+              <a:gd name="adj" fmla="val 6429"/>
+            </a:avLst>
+          </a:prstGeom>
+          <a:solidFill>
+            <a:srgbClr val="FDF1EF"/>
+          </a:solidFill>
+          <a:ln w="15875">
+            <a:solidFill>
+              <a:srgbClr val="FBCEC9"/>
+            </a:solidFill>
+            <a:prstDash val="solid"/>
+          </a:ln>
+        </p:spPr>
+        <p:txBody>
+          <a:bodyPr/>
+          <a:p/>
+        </p:txBody>
+      </p:sp>
+      <p:sp>
+        <p:nvSpPr>
+          <p:cNvPr id="10" name="Text 7"/>
+          <p:cNvSpPr/>
+          <p:nvPr/>
+        </p:nvSpPr>
+        <p:spPr>
+          <a:xfrm>
+            <a:off x="722376" y="1673352"/>
+            <a:ext cx="5070348" cy="1133856"/>
+          </a:xfrm>
+          <a:prstGeom prst="rect">
+            <a:avLst/>
+          </a:prstGeom>
+          <a:noFill/>
+          <a:ln/>
+        </p:spPr>
+        <p:txBody>
+          <a:bodyPr wrap="square" lIns="0" tIns="0" rIns="0" bIns="0" rtlCol="0" anchor="ctr"/>
+          <a:lstStyle/>
+          <a:p>
+            <a:pPr indent="0" marL="0">
+              <a:buNone/>
+            </a:pPr>
+            <a:r>
+              <a:rPr lang="en-US" sz="1700" b="1" dirty="0">
+                <a:solidFill>
+                  <a:srgbClr val="AC4D33"/>
+                </a:solidFill>
+                <a:latin typeface="Calibri" pitchFamily="34" charset="0"/>
+                <a:ea typeface="Calibri" pitchFamily="34" charset="-122"/>
+                <a:cs typeface="Calibri" pitchFamily="34" charset="-120"/>
+              </a:rPr>
+              <a:t>Ánh mắt – nét mặt</a:t>
+            </a:r>
+            <a:endParaRPr lang="en-US" sz="1700" dirty="0"/>
+          </a:p>
+          <a:p>
+            <a:pPr indent="0" marL="0">
+              <a:buNone/>
+            </a:pPr>
+            <a:r>
+              <a:rPr lang="en-US" sz="1400" dirty="0">
+                <a:solidFill>
+                  <a:srgbClr val="3A2B28"/>
+                </a:solidFill>
+                <a:latin typeface="Calibri" pitchFamily="34" charset="0"/>
+                <a:ea typeface="Calibri" pitchFamily="34" charset="-122"/>
+                <a:cs typeface="Calibri" pitchFamily="34" charset="-120"/>
+              </a:rPr>
+              <a:t>Kênh biểu cảm mạnh nhất</a:t>
+            </a:r>
+            <a:endParaRPr lang="en-US" sz="1700" dirty="0"/>
+          </a:p>
+        </p:txBody>
+      </p:sp>
+      <p:sp>
+        <p:nvSpPr>
+          <p:cNvPr id="11" name="Shape 8"/>
+          <p:cNvSpPr/>
+          <p:nvPr/>
+        </p:nvSpPr>
+        <p:spPr>
+          <a:xfrm>
+            <a:off x="6195060" y="1600200"/>
+            <a:ext cx="5509260" cy="1280160"/>
+          </a:xfrm>
+          <a:prstGeom prst="roundRect">
+            <a:avLst>
+              <a:gd name="adj" fmla="val 6429"/>
+            </a:avLst>
+          </a:prstGeom>
+          <a:solidFill>
+            <a:srgbClr val="FDF1EF"/>
+          </a:solidFill>
+          <a:ln w="15875">
+            <a:solidFill>
+              <a:srgbClr val="FBCEC9"/>
+            </a:solidFill>
+            <a:prstDash val="solid"/>
+          </a:ln>
+        </p:spPr>
+        <p:txBody>
+          <a:bodyPr/>
+          <a:p/>
+        </p:txBody>
+      </p:sp>
+      <p:sp>
+        <p:nvSpPr>
+          <p:cNvPr id="12" name="Text 9"/>
+          <p:cNvSpPr/>
+          <p:nvPr/>
+        </p:nvSpPr>
+        <p:spPr>
+          <a:xfrm>
+            <a:off x="6414516" y="1673352"/>
+            <a:ext cx="5070348" cy="1133856"/>
+          </a:xfrm>
+          <a:prstGeom prst="rect">
+            <a:avLst/>
+          </a:prstGeom>
+          <a:noFill/>
+          <a:ln/>
+        </p:spPr>
+        <p:txBody>
+          <a:bodyPr wrap="square" lIns="0" tIns="0" rIns="0" bIns="0" rtlCol="0" anchor="ctr"/>
+          <a:lstStyle/>
+          <a:p>
+            <a:pPr indent="0" marL="0">
+              <a:buNone/>
+            </a:pPr>
+            <a:r>
+              <a:rPr lang="en-US" sz="1700" b="1" dirty="0">
+                <a:solidFill>
+                  <a:srgbClr val="AC4D33"/>
+                </a:solidFill>
+                <a:latin typeface="Calibri" pitchFamily="34" charset="0"/>
+                <a:ea typeface="Calibri" pitchFamily="34" charset="-122"/>
+                <a:cs typeface="Calibri" pitchFamily="34" charset="-120"/>
+              </a:rPr>
+              <a:t>Cử chỉ – tư thế</a:t>
+            </a:r>
+            <a:endParaRPr lang="en-US" sz="1700" dirty="0"/>
+          </a:p>
+          <a:p>
+            <a:pPr indent="0" marL="0">
+              <a:buNone/>
+            </a:pPr>
+            <a:r>
+              <a:rPr lang="en-US" sz="1400" dirty="0">
+                <a:solidFill>
+                  <a:srgbClr val="3A2B28"/>
+                </a:solidFill>
+                <a:latin typeface="Calibri" pitchFamily="34" charset="0"/>
+                <a:ea typeface="Calibri" pitchFamily="34" charset="-122"/>
+                <a:cs typeface="Calibri" pitchFamily="34" charset="-120"/>
+              </a:rPr>
+              <a:t>Thẳng và cởi mở tạo thiện cảm</a:t>
+            </a:r>
+            <a:endParaRPr lang="en-US" sz="1700" dirty="0"/>
+          </a:p>
+        </p:txBody>
+      </p:sp>
+      <p:sp>
+        <p:nvSpPr>
+          <p:cNvPr id="13" name="Shape 10"/>
+          <p:cNvSpPr/>
+          <p:nvPr/>
+        </p:nvSpPr>
+        <p:spPr>
+          <a:xfrm>
+            <a:off x="502920" y="3063240"/>
+            <a:ext cx="5509260" cy="1280160"/>
+          </a:xfrm>
+          <a:prstGeom prst="roundRect">
+            <a:avLst>
+              <a:gd name="adj" fmla="val 6429"/>
+            </a:avLst>
+          </a:prstGeom>
+          <a:solidFill>
+            <a:srgbClr val="FDF1EF"/>
+          </a:solidFill>
+          <a:ln w="15875">
+            <a:solidFill>
+              <a:srgbClr val="FBCEC9"/>
+            </a:solidFill>
+            <a:prstDash val="solid"/>
+          </a:ln>
+        </p:spPr>
+        <p:txBody>
+          <a:bodyPr/>
+          <a:p/>
+        </p:txBody>
+      </p:sp>
+      <p:sp>
+        <p:nvSpPr>
+          <p:cNvPr id="14" name="Text 11"/>
+          <p:cNvSpPr/>
+          <p:nvPr/>
+        </p:nvSpPr>
+        <p:spPr>
+          <a:xfrm>
+            <a:off x="722376" y="3136392"/>
+            <a:ext cx="5070348" cy="1133856"/>
+          </a:xfrm>
+          <a:prstGeom prst="rect">
+            <a:avLst/>
+          </a:prstGeom>
+          <a:noFill/>
+          <a:ln/>
+        </p:spPr>
+        <p:txBody>
+          <a:bodyPr wrap="square" lIns="0" tIns="0" rIns="0" bIns="0" rtlCol="0" anchor="ctr"/>
+          <a:lstStyle/>
+          <a:p>
+            <a:pPr indent="0" marL="0">
+              <a:buNone/>
+            </a:pPr>
+            <a:r>
+              <a:rPr lang="en-US" sz="1700" b="1" dirty="0">
+                <a:solidFill>
+                  <a:srgbClr val="AC4D33"/>
+                </a:solidFill>
+                <a:latin typeface="Calibri" pitchFamily="34" charset="0"/>
+                <a:ea typeface="Calibri" pitchFamily="34" charset="-122"/>
+                <a:cs typeface="Calibri" pitchFamily="34" charset="-120"/>
+              </a:rPr>
+              <a:t>Khoảng cách</a:t>
+            </a:r>
+            <a:endParaRPr lang="en-US" sz="1700" dirty="0"/>
+          </a:p>
+          <a:p>
+            <a:pPr indent="0" marL="0">
+              <a:buNone/>
+            </a:pPr>
+            <a:r>
+              <a:rPr lang="en-US" sz="1400" dirty="0">
+                <a:solidFill>
+                  <a:srgbClr val="3A2B28"/>
+                </a:solidFill>
+                <a:latin typeface="Calibri" pitchFamily="34" charset="0"/>
+                <a:ea typeface="Calibri" pitchFamily="34" charset="-122"/>
+                <a:cs typeface="Calibri" pitchFamily="34" charset="-120"/>
+              </a:rPr>
+              <a:t>Thân mật · cá nhân · xã giao · công cộng</a:t>
+            </a:r>
+            <a:endParaRPr lang="en-US" sz="1700" dirty="0"/>
+          </a:p>
+        </p:txBody>
+      </p:sp>
+      <p:sp>
+        <p:nvSpPr>
+          <p:cNvPr id="15" name="Shape 12"/>
+          <p:cNvSpPr/>
+          <p:nvPr/>
+        </p:nvSpPr>
+        <p:spPr>
+          <a:xfrm>
+            <a:off x="6195060" y="3063240"/>
+            <a:ext cx="5509260" cy="1280160"/>
+          </a:xfrm>
+          <a:prstGeom prst="roundRect">
+            <a:avLst>
+              <a:gd name="adj" fmla="val 6429"/>
+            </a:avLst>
+          </a:prstGeom>
+          <a:solidFill>
+            <a:srgbClr val="FDF1EF"/>
+          </a:solidFill>
+          <a:ln w="15875">
+            <a:solidFill>
+              <a:srgbClr val="FBCEC9"/>
+            </a:solidFill>
+            <a:prstDash val="solid"/>
+          </a:ln>
+        </p:spPr>
+        <p:txBody>
+          <a:bodyPr/>
+          <a:p/>
+        </p:txBody>
+      </p:sp>
+      <p:sp>
+        <p:nvSpPr>
+          <p:cNvPr id="16" name="Text 13"/>
+          <p:cNvSpPr/>
+          <p:nvPr/>
+        </p:nvSpPr>
+        <p:spPr>
+          <a:xfrm>
+            <a:off x="6414516" y="3136392"/>
+            <a:ext cx="5070348" cy="1133856"/>
+          </a:xfrm>
+          <a:prstGeom prst="rect">
+            <a:avLst/>
+          </a:prstGeom>
+          <a:noFill/>
+          <a:ln/>
+        </p:spPr>
+        <p:txBody>
+          <a:bodyPr wrap="square" lIns="0" tIns="0" rIns="0" bIns="0" rtlCol="0" anchor="ctr"/>
+          <a:lstStyle/>
+          <a:p>
+            <a:pPr indent="0" marL="0">
+              <a:buNone/>
+            </a:pPr>
+            <a:r>
+              <a:rPr lang="en-US" sz="1700" b="1" dirty="0">
+                <a:solidFill>
+                  <a:srgbClr val="AC4D33"/>
+                </a:solidFill>
+                <a:latin typeface="Calibri" pitchFamily="34" charset="0"/>
+                <a:ea typeface="Calibri" pitchFamily="34" charset="-122"/>
+                <a:cs typeface="Calibri" pitchFamily="34" charset="-120"/>
+              </a:rPr>
+              <a:t>Trang phục – giọng – giờ giấc</a:t>
+            </a:r>
+            <a:endParaRPr lang="en-US" sz="1700" dirty="0"/>
+          </a:p>
+          <a:p>
+            <a:pPr indent="0" marL="0">
+              <a:buNone/>
+            </a:pPr>
+            <a:r>
+              <a:rPr lang="en-US" sz="1400" dirty="0">
+                <a:solidFill>
+                  <a:srgbClr val="3A2B28"/>
+                </a:solidFill>
+                <a:latin typeface="Calibri" pitchFamily="34" charset="0"/>
+                <a:ea typeface="Calibri" pitchFamily="34" charset="-122"/>
+                <a:cs typeface="Calibri" pitchFamily="34" charset="-120"/>
+              </a:rPr>
+              <a:t>Đúng giờ cũng là một thông điệp</a:t>
+            </a:r>
+            <a:endParaRPr lang="en-US" sz="1700" dirty="0"/>
+          </a:p>
+        </p:txBody>
+      </p:sp>
+      <p:sp>
+        <p:nvSpPr>
+          <p:cNvPr id="17" name="Text 14"/>
+          <p:cNvSpPr/>
+          <p:nvPr/>
+        </p:nvSpPr>
+        <p:spPr>
+          <a:xfrm>
+            <a:off x="777240" y="4617720"/>
+            <a:ext cx="3566160" cy="868680"/>
+          </a:xfrm>
+          <a:prstGeom prst="rect">
+            <a:avLst/>
+          </a:prstGeom>
+          <a:noFill/>
+          <a:ln/>
+        </p:spPr>
+        <p:txBody>
+          <a:bodyPr wrap="square" lIns="0" tIns="0" rIns="0" bIns="0" rtlCol="0" anchor="ctr"/>
+          <a:lstStyle/>
+          <a:p>
+            <a:pPr algn="ctr" indent="0" marL="0">
+              <a:buNone/>
+            </a:pPr>
+            <a:r>
+              <a:rPr lang="en-US" sz="4400" b="1" dirty="0">
+                <a:solidFill>
+                  <a:srgbClr val="DC756A"/>
+                </a:solidFill>
+                <a:latin typeface="Cambria" pitchFamily="34" charset="0"/>
+                <a:ea typeface="Cambria" pitchFamily="34" charset="-122"/>
+                <a:cs typeface="Cambria" pitchFamily="34" charset="-120"/>
+              </a:rPr>
+              <a:t>7%</a:t>
+            </a:r>
+            <a:endParaRPr lang="en-US" sz="4400" dirty="0"/>
+          </a:p>
+        </p:txBody>
+      </p:sp>
+      <p:sp>
+        <p:nvSpPr>
+          <p:cNvPr id="18" name="Text 15"/>
+          <p:cNvSpPr/>
+          <p:nvPr/>
+        </p:nvSpPr>
+        <p:spPr>
+          <a:xfrm>
+            <a:off x="777240" y="5486400"/>
+            <a:ext cx="3566160" cy="365760"/>
+          </a:xfrm>
+          <a:prstGeom prst="rect">
+            <a:avLst/>
+          </a:prstGeom>
+          <a:noFill/>
+          <a:ln/>
+        </p:spPr>
+        <p:txBody>
+          <a:bodyPr wrap="square" lIns="0" tIns="0" rIns="0" bIns="0" rtlCol="0" anchor="ctr"/>
+          <a:lstStyle/>
+          <a:p>
+            <a:pPr algn="ctr" indent="0" marL="0">
+              <a:buNone/>
+            </a:pPr>
+            <a:r>
+              <a:rPr lang="en-US" sz="1300" b="1" spc="200" kern="0" dirty="0">
+                <a:solidFill>
+                  <a:srgbClr val="8A7A76"/>
+                </a:solidFill>
+                <a:latin typeface="Calibri" pitchFamily="34" charset="0"/>
+                <a:ea typeface="Calibri" pitchFamily="34" charset="-122"/>
+                <a:cs typeface="Calibri" pitchFamily="34" charset="-120"/>
+              </a:rPr>
+              <a:t>TỪ NGỮ</a:t>
+            </a:r>
+            <a:endParaRPr lang="en-US" sz="1300" dirty="0"/>
+          </a:p>
+        </p:txBody>
+      </p:sp>
+      <p:sp>
+        <p:nvSpPr>
+          <p:cNvPr id="19" name="Text 16"/>
+          <p:cNvSpPr/>
+          <p:nvPr/>
+        </p:nvSpPr>
+        <p:spPr>
+          <a:xfrm>
+            <a:off x="4754880" y="4617720"/>
+            <a:ext cx="3566160" cy="868680"/>
+          </a:xfrm>
+          <a:prstGeom prst="rect">
+            <a:avLst/>
+          </a:prstGeom>
+          <a:noFill/>
+          <a:ln/>
+        </p:spPr>
+        <p:txBody>
+          <a:bodyPr wrap="square" lIns="0" tIns="0" rIns="0" bIns="0" rtlCol="0" anchor="ctr"/>
+          <a:lstStyle/>
+          <a:p>
+            <a:pPr algn="ctr" indent="0" marL="0">
+              <a:buNone/>
+            </a:pPr>
+            <a:r>
+              <a:rPr lang="en-US" sz="4400" b="1" dirty="0">
+                <a:solidFill>
+                  <a:srgbClr val="DC756A"/>
+                </a:solidFill>
+                <a:latin typeface="Cambria" pitchFamily="34" charset="0"/>
+                <a:ea typeface="Cambria" pitchFamily="34" charset="-122"/>
+                <a:cs typeface="Cambria" pitchFamily="34" charset="-120"/>
+              </a:rPr>
+              <a:t>38%</a:t>
+            </a:r>
+            <a:endParaRPr lang="en-US" sz="4400" dirty="0"/>
+          </a:p>
+        </p:txBody>
+      </p:sp>
+      <p:sp>
+        <p:nvSpPr>
+          <p:cNvPr id="20" name="Text 17"/>
+          <p:cNvSpPr/>
+          <p:nvPr/>
+        </p:nvSpPr>
+        <p:spPr>
+          <a:xfrm>
+            <a:off x="4754880" y="5486400"/>
+            <a:ext cx="3566160" cy="365760"/>
+          </a:xfrm>
+          <a:prstGeom prst="rect">
+            <a:avLst/>
+          </a:prstGeom>
+          <a:noFill/>
+          <a:ln/>
+        </p:spPr>
+        <p:txBody>
+          <a:bodyPr wrap="square" lIns="0" tIns="0" rIns="0" bIns="0" rtlCol="0" anchor="ctr"/>
+          <a:lstStyle/>
+          <a:p>
+            <a:pPr algn="ctr" indent="0" marL="0">
+              <a:buNone/>
+            </a:pPr>
+            <a:r>
+              <a:rPr lang="en-US" sz="1300" b="1" spc="200" kern="0" dirty="0">
+                <a:solidFill>
+                  <a:srgbClr val="8A7A76"/>
+                </a:solidFill>
+                <a:latin typeface="Calibri" pitchFamily="34" charset="0"/>
+                <a:ea typeface="Calibri" pitchFamily="34" charset="-122"/>
+                <a:cs typeface="Calibri" pitchFamily="34" charset="-120"/>
+              </a:rPr>
+              <a:t>GIỌNG NÓI</a:t>
+            </a:r>
+            <a:endParaRPr lang="en-US" sz="1300" dirty="0"/>
+          </a:p>
+        </p:txBody>
+      </p:sp>
+      <p:sp>
+        <p:nvSpPr>
+          <p:cNvPr id="21" name="Text 18"/>
+          <p:cNvSpPr/>
+          <p:nvPr/>
+        </p:nvSpPr>
+        <p:spPr>
+          <a:xfrm>
+            <a:off x="8732520" y="4617720"/>
+            <a:ext cx="3566160" cy="868680"/>
+          </a:xfrm>
+          <a:prstGeom prst="rect">
+            <a:avLst/>
+          </a:prstGeom>
+          <a:noFill/>
+          <a:ln/>
+        </p:spPr>
+        <p:txBody>
+          <a:bodyPr wrap="square" lIns="0" tIns="0" rIns="0" bIns="0" rtlCol="0" anchor="ctr"/>
+          <a:lstStyle/>
+          <a:p>
+            <a:pPr algn="ctr" indent="0" marL="0">
+              <a:buNone/>
+            </a:pPr>
+            <a:r>
+              <a:rPr lang="en-US" sz="4400" b="1" dirty="0">
+                <a:solidFill>
+                  <a:srgbClr val="AC4D33"/>
+                </a:solidFill>
+                <a:latin typeface="Cambria" pitchFamily="34" charset="0"/>
+                <a:ea typeface="Cambria" pitchFamily="34" charset="-122"/>
+                <a:cs typeface="Cambria" pitchFamily="34" charset="-120"/>
+              </a:rPr>
+              <a:t>55%</a:t>
+            </a:r>
+            <a:endParaRPr lang="en-US" sz="4400" dirty="0"/>
+          </a:p>
+        </p:txBody>
+      </p:sp>
+      <p:sp>
+        <p:nvSpPr>
+          <p:cNvPr id="22" name="Text 19"/>
+          <p:cNvSpPr/>
+          <p:nvPr/>
+        </p:nvSpPr>
+        <p:spPr>
+          <a:xfrm>
+            <a:off x="8732520" y="5486400"/>
+            <a:ext cx="3566160" cy="365760"/>
+          </a:xfrm>
+          <a:prstGeom prst="rect">
+            <a:avLst/>
+          </a:prstGeom>
+          <a:noFill/>
+          <a:ln/>
+        </p:spPr>
+        <p:txBody>
+          <a:bodyPr wrap="square" lIns="0" tIns="0" rIns="0" bIns="0" rtlCol="0" anchor="ctr"/>
+          <a:lstStyle/>
+          <a:p>
+            <a:pPr algn="ctr" indent="0" marL="0">
+              <a:buNone/>
+            </a:pPr>
+            <a:r>
+              <a:rPr lang="en-US" sz="1300" b="1" spc="200" kern="0" dirty="0">
+                <a:solidFill>
+                  <a:srgbClr val="8A7A76"/>
+                </a:solidFill>
+                <a:latin typeface="Calibri" pitchFamily="34" charset="0"/>
+                <a:ea typeface="Calibri" pitchFamily="34" charset="-122"/>
+                <a:cs typeface="Calibri" pitchFamily="34" charset="-120"/>
+              </a:rPr>
+              <a:t>CƠ THỂ</a:t>
+            </a:r>
+            <a:endParaRPr lang="en-US" sz="1300" dirty="0"/>
+          </a:p>
+        </p:txBody>
+      </p:sp>
+      <p:sp>
+        <p:nvSpPr>
+          <p:cNvPr id="23" name="Text 20"/>
+          <p:cNvSpPr/>
+          <p:nvPr/>
+        </p:nvSpPr>
+        <p:spPr>
+          <a:xfrm>
+            <a:off x="502920" y="5943600"/>
+            <a:ext cx="11201400" cy="365760"/>
+          </a:xfrm>
+          <a:prstGeom prst="rect">
+            <a:avLst/>
+          </a:prstGeom>
+          <a:noFill/>
+          <a:ln/>
+        </p:spPr>
+        <p:txBody>
+          <a:bodyPr wrap="square" lIns="0" tIns="0" rIns="0" bIns="0" rtlCol="0" anchor="ctr"/>
+          <a:lstStyle/>
+          <a:p>
+            <a:pPr algn="ctr" indent="0" marL="0">
+              <a:buNone/>
+            </a:pPr>
+            <a:r>
+              <a:rPr lang="en-US" sz="1200" i="1" dirty="0">
+                <a:solidFill>
+                  <a:srgbClr val="8A7A76"/>
+                </a:solidFill>
+                <a:latin typeface="Calibri" pitchFamily="34" charset="0"/>
+                <a:ea typeface="Calibri" pitchFamily="34" charset="-122"/>
+                <a:cs typeface="Calibri" pitchFamily="34" charset="-120"/>
+              </a:rPr>
+              <a:t>Mehrabian — với thông điệp cảm xúc</a:t>
+            </a:r>
+            <a:endParaRPr lang="en-US" sz="1200" dirty="0"/>
+          </a:p>
+        </p:txBody>
+      </p:sp>
+    </p:spTree>
+  </p:cSld>
+  <p:clrMapOvr>
+    <a:masterClrMapping/>
+  </p:clrMapOvr>
+</p:sld>
+</file>
+
+<file path=ppt/slides/slide11.xml><?xml version="1.0" encoding="utf-8"?>
+<p:sld xmlns:a="http://schemas.openxmlformats.org/drawingml/2006/main" xmlns:p="http://schemas.openxmlformats.org/presentationml/2006/main" xmlns:r="http://schemas.openxmlformats.org/officeDocument/2006/relationships">
+  <p:cSld>
+    <p:spTree>
+      <p:nvGrpSpPr>
+        <p:cNvPr id="1" name=""/>
+        <p:cNvGrpSpPr/>
+        <p:nvPr/>
+      </p:nvGrpSpPr>
+      <p:grpSpPr/>
+      <p:sp>
+        <p:nvSpPr>
+          <p:cNvPr id="2" name="Rectangle 1"/>
+          <p:cNvSpPr/>
+          <p:nvPr/>
+        </p:nvSpPr>
+        <p:spPr>
+          <a:xfrm>
+            <a:off x="0" y="0"/>
+            <a:ext cx="12191695" cy="6858000"/>
+          </a:xfrm>
+          <a:prstGeom prst="rect">
+            <a:avLst/>
+          </a:prstGeom>
+          <a:solidFill>
+            <a:srgbClr val="FDFBF8"/>
+          </a:solidFill>
+          <a:ln>
+            <a:noFill/>
+          </a:ln>
+          <a:effectLst/>
+        </p:spPr>
+        <p:style>
+          <a:lnRef idx="1">
+            <a:schemeClr val="accent1"/>
+          </a:lnRef>
+          <a:fillRef idx="3">
+            <a:schemeClr val="accent1"/>
+          </a:fillRef>
+          <a:effectRef idx="2">
+            <a:schemeClr val="accent1"/>
+          </a:effectRef>
+          <a:fontRef idx="minor">
+            <a:schemeClr val="lt1"/>
+          </a:fontRef>
+        </p:style>
+        <p:txBody>
+          <a:bodyPr rtlCol="0" anchor="ctr"/>
+          <a:lstStyle/>
+          <a:p>
+            <a:pPr algn="ctr"/>
+          </a:p>
+        </p:txBody>
+      </p:sp>
+      <p:sp>
+        <p:nvSpPr>
+          <p:cNvPr id="3" name="TextBox 2"/>
+          <p:cNvSpPr txBox="1"/>
+          <p:nvPr/>
+        </p:nvSpPr>
+        <p:spPr>
+          <a:xfrm>
+            <a:off x="502920" y="292608"/>
+            <a:ext cx="11155680" cy="292608"/>
+          </a:xfrm>
+          <a:prstGeom prst="rect">
+            <a:avLst/>
+          </a:prstGeom>
+          <a:noFill/>
+        </p:spPr>
+        <p:txBody>
+          <a:bodyPr wrap="none">
+            <a:spAutoFit/>
+          </a:bodyPr>
+          <a:lstStyle/>
+          <a:p>
+            <a:r>
+              <a:rPr sz="1100" b="1">
+                <a:solidFill>
+                  <a:srgbClr val="DC756A"/>
+                </a:solidFill>
+                <a:latin typeface="Calibri"/>
+              </a:rPr>
+              <a:t>CON SỐ PHẢI NHỚ</a:t>
+            </a:r>
+          </a:p>
+        </p:txBody>
+      </p:sp>
+      <p:sp>
+        <p:nvSpPr>
+          <p:cNvPr id="4" name="TextBox 3"/>
+          <p:cNvSpPr txBox="1"/>
+          <p:nvPr/>
+        </p:nvSpPr>
+        <p:spPr>
+          <a:xfrm>
+            <a:off x="502920" y="603504"/>
+            <a:ext cx="11155680" cy="731520"/>
+          </a:xfrm>
+          <a:prstGeom prst="rect">
+            <a:avLst/>
+          </a:prstGeom>
+          <a:noFill/>
+        </p:spPr>
+        <p:txBody>
+          <a:bodyPr wrap="square">
+            <a:spAutoFit/>
+          </a:bodyPr>
+          <a:lstStyle/>
+          <a:p>
+            <a:r>
+              <a:rPr sz="2700" b="1">
+                <a:solidFill>
+                  <a:srgbClr val="3A2B28"/>
+                </a:solidFill>
+                <a:latin typeface="Cambria"/>
+              </a:rPr>
+              <a:t>Thông điệp cảm xúc được truyền đi thế nào?</a:t>
+            </a:r>
+          </a:p>
+        </p:txBody>
+      </p:sp>
+      <p:sp>
+        <p:nvSpPr>
+          <p:cNvPr id="5" name="Rounded Rectangle 4"/>
+          <p:cNvSpPr/>
+          <p:nvPr/>
+        </p:nvSpPr>
+        <p:spPr>
+          <a:xfrm>
+            <a:off x="502920" y="1783080"/>
+            <a:ext cx="3575304" cy="3429000"/>
+          </a:xfrm>
+          <a:prstGeom prst="roundRect">
+            <a:avLst>
+              <a:gd name="adj" fmla="val 7000"/>
+            </a:avLst>
+          </a:prstGeom>
+          <a:solidFill>
+            <a:srgbClr val="FFFFFF"/>
+          </a:solidFill>
+          <a:ln w="15875">
+            <a:solidFill>
+              <a:srgbClr val="FBCEC9"/>
+            </a:solidFill>
+          </a:ln>
+          <a:effectLst/>
+        </p:spPr>
+        <p:style>
+          <a:lnRef idx="1">
+            <a:schemeClr val="accent1"/>
+          </a:lnRef>
+          <a:fillRef idx="3">
+            <a:schemeClr val="accent1"/>
+          </a:fillRef>
+          <a:effectRef idx="2">
+            <a:schemeClr val="accent1"/>
+          </a:effectRef>
+          <a:fontRef idx="minor">
+            <a:schemeClr val="lt1"/>
+          </a:fontRef>
+        </p:style>
+        <p:txBody>
+          <a:bodyPr rtlCol="0" anchor="ctr" wrap="square" lIns="182880" rIns="182880" tIns="274320" bIns="182880"/>
+          <a:lstStyle/>
+          <a:p>
+            <a:pPr algn="ctr"/>
+            <a:r>
+              <a:rPr sz="5800" b="1">
+                <a:solidFill>
+                  <a:srgbClr val="DC756A"/>
+                </a:solidFill>
+                <a:latin typeface="Cambria"/>
+              </a:rPr>
+              <a:t>7%</a:t>
+            </a:r>
+          </a:p>
+          <a:p>
+            <a:pPr algn="ctr"/>
+            <a:r>
+              <a:rPr sz="1400" b="1">
+                <a:solidFill>
+                  <a:srgbClr val="AC4D33"/>
+                </a:solidFill>
+                <a:latin typeface="Calibri"/>
+              </a:rPr>
+              <a:t>TỪ NGỮ</a:t>
+            </a:r>
+          </a:p>
+          <a:p>
+            <a:pPr algn="ctr">
+              <a:spcBef>
+                <a:spcPts val="1200"/>
+              </a:spcBef>
+            </a:pPr>
+            <a:r>
+              <a:rPr sz="1250">
+                <a:solidFill>
+                  <a:srgbClr val="3A2B28"/>
+                </a:solidFill>
+                <a:latin typeface="Calibri"/>
+              </a:rPr>
+              <a:t>Nội dung lời nói — phần nhỏ nhất, dù ta thường đầu tư nhiều nhất vào đây</a:t>
+            </a:r>
+          </a:p>
+        </p:txBody>
+      </p:sp>
+      <p:sp>
+        <p:nvSpPr>
+          <p:cNvPr id="6" name="Rounded Rectangle 5"/>
+          <p:cNvSpPr/>
+          <p:nvPr/>
+        </p:nvSpPr>
+        <p:spPr>
+          <a:xfrm>
+            <a:off x="4315968" y="1783080"/>
+            <a:ext cx="3575304" cy="3429000"/>
+          </a:xfrm>
+          <a:prstGeom prst="roundRect">
+            <a:avLst>
+              <a:gd name="adj" fmla="val 7000"/>
+            </a:avLst>
+          </a:prstGeom>
+          <a:solidFill>
+            <a:srgbClr val="FFFFFF"/>
+          </a:solidFill>
+          <a:ln w="15875">
+            <a:solidFill>
+              <a:srgbClr val="FBCEC9"/>
+            </a:solidFill>
+          </a:ln>
+          <a:effectLst/>
+        </p:spPr>
+        <p:style>
+          <a:lnRef idx="1">
+            <a:schemeClr val="accent1"/>
+          </a:lnRef>
+          <a:fillRef idx="3">
+            <a:schemeClr val="accent1"/>
+          </a:fillRef>
+          <a:effectRef idx="2">
+            <a:schemeClr val="accent1"/>
+          </a:effectRef>
+          <a:fontRef idx="minor">
+            <a:schemeClr val="lt1"/>
+          </a:fontRef>
+        </p:style>
+        <p:txBody>
+          <a:bodyPr rtlCol="0" anchor="ctr" wrap="square" lIns="182880" rIns="182880" tIns="274320" bIns="182880"/>
+          <a:lstStyle/>
+          <a:p>
+            <a:pPr algn="ctr"/>
+            <a:r>
+              <a:rPr sz="5800" b="1">
+                <a:solidFill>
+                  <a:srgbClr val="DC756A"/>
+                </a:solidFill>
+                <a:latin typeface="Cambria"/>
+              </a:rPr>
+              <a:t>38%</a:t>
+            </a:r>
+          </a:p>
+          <a:p>
+            <a:pPr algn="ctr"/>
+            <a:r>
+              <a:rPr sz="1400" b="1">
+                <a:solidFill>
+                  <a:srgbClr val="AC4D33"/>
+                </a:solidFill>
+                <a:latin typeface="Calibri"/>
+              </a:rPr>
+              <a:t>GIỌNG NÓI</a:t>
+            </a:r>
+          </a:p>
+          <a:p>
+            <a:pPr algn="ctr">
+              <a:spcBef>
+                <a:spcPts val="1200"/>
+              </a:spcBef>
+            </a:pPr>
+            <a:r>
+              <a:rPr sz="1250">
+                <a:solidFill>
+                  <a:srgbClr val="3A2B28"/>
+                </a:solidFill>
+                <a:latin typeface="Calibri"/>
+              </a:rPr>
+              <a:t>Âm lượng, tốc độ, ngữ điệu, khoảng dừng</a:t>
+            </a:r>
+          </a:p>
+        </p:txBody>
+      </p:sp>
+      <p:sp>
+        <p:nvSpPr>
+          <p:cNvPr id="7" name="Rounded Rectangle 6"/>
+          <p:cNvSpPr/>
+          <p:nvPr/>
+        </p:nvSpPr>
+        <p:spPr>
+          <a:xfrm>
+            <a:off x="8129016" y="1783080"/>
+            <a:ext cx="3575304" cy="3429000"/>
+          </a:xfrm>
+          <a:prstGeom prst="roundRect">
+            <a:avLst>
+              <a:gd name="adj" fmla="val 7000"/>
+            </a:avLst>
+          </a:prstGeom>
+          <a:solidFill>
+            <a:srgbClr val="FFFFFF"/>
+          </a:solidFill>
+          <a:ln w="15875">
+            <a:solidFill>
+              <a:srgbClr val="FBCEC9"/>
+            </a:solidFill>
+          </a:ln>
+          <a:effectLst/>
+        </p:spPr>
+        <p:style>
+          <a:lnRef idx="1">
+            <a:schemeClr val="accent1"/>
+          </a:lnRef>
+          <a:fillRef idx="3">
+            <a:schemeClr val="accent1"/>
+          </a:fillRef>
+          <a:effectRef idx="2">
+            <a:schemeClr val="accent1"/>
+          </a:effectRef>
+          <a:fontRef idx="minor">
+            <a:schemeClr val="lt1"/>
+          </a:fontRef>
+        </p:style>
+        <p:txBody>
+          <a:bodyPr rtlCol="0" anchor="ctr" wrap="square" lIns="182880" rIns="182880" tIns="274320" bIns="182880"/>
+          <a:lstStyle/>
+          <a:p>
+            <a:pPr algn="ctr"/>
+            <a:r>
+              <a:rPr sz="5800" b="1">
+                <a:solidFill>
+                  <a:srgbClr val="DC756A"/>
+                </a:solidFill>
+                <a:latin typeface="Cambria"/>
+              </a:rPr>
+              <a:t>55%</a:t>
+            </a:r>
+          </a:p>
+          <a:p>
+            <a:pPr algn="ctr"/>
+            <a:r>
+              <a:rPr sz="1400" b="1">
+                <a:solidFill>
+                  <a:srgbClr val="AC4D33"/>
+                </a:solidFill>
+                <a:latin typeface="Calibri"/>
+              </a:rPr>
+              <a:t>NGÔN NGỮ CƠ THỂ</a:t>
+            </a:r>
+          </a:p>
+          <a:p>
+            <a:pPr algn="ctr">
+              <a:spcBef>
+                <a:spcPts val="1200"/>
+              </a:spcBef>
+            </a:pPr>
+            <a:r>
+              <a:rPr sz="1250">
+                <a:solidFill>
+                  <a:srgbClr val="3A2B28"/>
+                </a:solidFill>
+                <a:latin typeface="Calibri"/>
+              </a:rPr>
+              <a:t>Ánh mắt, nét mặt, cử chỉ, tư thế, khoảng cách</a:t>
+            </a:r>
+          </a:p>
+        </p:txBody>
+      </p:sp>
+      <p:sp>
+        <p:nvSpPr>
+          <p:cNvPr id="8" name="Rounded Rectangle 7"/>
+          <p:cNvSpPr/>
+          <p:nvPr/>
+        </p:nvSpPr>
+        <p:spPr>
+          <a:xfrm>
+            <a:off x="502920" y="5440680"/>
+            <a:ext cx="11201400" cy="685800"/>
+          </a:xfrm>
+          <a:prstGeom prst="roundRect">
+            <a:avLst>
+              <a:gd name="adj" fmla="val 12000"/>
+            </a:avLst>
+          </a:prstGeom>
+          <a:solidFill>
+            <a:srgbClr val="FDF1EF"/>
+          </a:solidFill>
+          <a:ln w="12700">
+            <a:solidFill>
+              <a:srgbClr val="FBCEC9"/>
+            </a:solidFill>
+          </a:ln>
+          <a:effectLst/>
+        </p:spPr>
+        <p:style>
+          <a:lnRef idx="1">
+            <a:schemeClr val="accent1"/>
+          </a:lnRef>
+          <a:fillRef idx="3">
+            <a:schemeClr val="accent1"/>
+          </a:fillRef>
+          <a:effectRef idx="2">
+            <a:schemeClr val="accent1"/>
+          </a:effectRef>
+          <a:fontRef idx="minor">
+            <a:schemeClr val="lt1"/>
+          </a:fontRef>
+        </p:style>
+        <p:txBody>
+          <a:bodyPr rtlCol="0" anchor="ctr" wrap="square" lIns="201168" rIns="201168"/>
+          <a:lstStyle/>
+          <a:p>
+            <a:pPr algn="ctr"/>
+            <a:r>
+              <a:rPr sz="1300">
+                <a:solidFill>
+                  <a:srgbClr val="3A2B28"/>
+                </a:solidFill>
+                <a:latin typeface="Calibri"/>
+              </a:rPr>
+              <a:t>Nghiên cứu của Albert Mehrabian — chỉ áp dụng cho thông điệp mang tính CẢM XÚC, không phải mọi tình huống giao tiếp.</a:t>
+            </a:r>
+          </a:p>
+        </p:txBody>
+      </p:sp>
+      <p:sp>
+        <p:nvSpPr>
+          <p:cNvPr id="9" name="TextBox 8"/>
+          <p:cNvSpPr txBox="1"/>
+          <p:nvPr/>
+        </p:nvSpPr>
+        <p:spPr>
+          <a:xfrm>
+            <a:off x="502920" y="6419088"/>
+            <a:ext cx="7772400" cy="292608"/>
+          </a:xfrm>
+          <a:prstGeom prst="rect">
+            <a:avLst/>
+          </a:prstGeom>
+          <a:noFill/>
+        </p:spPr>
+        <p:txBody>
+          <a:bodyPr wrap="none">
+            <a:spAutoFit/>
+          </a:bodyPr>
+          <a:lstStyle/>
+          <a:p>
+            <a:r>
+              <a:rPr sz="900">
+                <a:solidFill>
+                  <a:srgbClr val="8A7A76"/>
+                </a:solidFill>
+                <a:latin typeface="Calibri"/>
+              </a:rPr>
+              <a:t>Je m'appelle Huong  •  GV. Đỗ Thùy Hương  •  EC1103</a:t>
+            </a:r>
+          </a:p>
+        </p:txBody>
+      </p:sp>
+      <p:sp>
+        <p:nvSpPr>
+          <p:cNvPr id="10" name="TextBox 9"/>
+          <p:cNvSpPr txBox="1"/>
+          <p:nvPr/>
+        </p:nvSpPr>
+        <p:spPr>
+          <a:xfrm>
+            <a:off x="9326880" y="6419088"/>
+            <a:ext cx="1920240" cy="292608"/>
+          </a:xfrm>
+          <a:prstGeom prst="rect">
+            <a:avLst/>
+          </a:prstGeom>
+          <a:noFill/>
+        </p:spPr>
+        <p:txBody>
+          <a:bodyPr wrap="none">
+            <a:spAutoFit/>
+          </a:bodyPr>
+          <a:lstStyle/>
+          <a:p>
+            <a:pPr algn="r"/>
+            <a:r>
+              <a:rPr sz="900">
+                <a:solidFill>
+                  <a:srgbClr val="8A7A76"/>
+                </a:solidFill>
+                <a:latin typeface="Calibri"/>
+              </a:rPr>
+              <a:t>Chương 1</a:t>
+            </a:r>
+          </a:p>
+        </p:txBody>
+      </p:sp>
+    </p:spTree>
+  </p:cSld>
+  <p:clrMapOvr>
+    <a:masterClrMapping/>
+  </p:clrMapOvr>
+</p:sld>
+</file>
+
+<file path=ppt/slides/slide12.xml><?xml version="1.0" encoding="utf-8"?>
 <p:sld xmlns:a="http://schemas.openxmlformats.org/drawingml/2006/main" xmlns:r="http://schemas.openxmlformats.org/officeDocument/2006/relationships" xmlns:p="http://schemas.openxmlformats.org/presentationml/2006/main">
   <p:cSld name="Slide 10">
     <p:bg>
@@ -3651,7 +5058,328 @@
 </p:sld>
 </file>
 
-<file path=ppt/slides/slide11.xml><?xml version="1.0" encoding="utf-8"?>
+<file path=ppt/slides/slide13.xml><?xml version="1.0" encoding="utf-8"?>
+<p:sld xmlns:a="http://schemas.openxmlformats.org/drawingml/2006/main" xmlns:p="http://schemas.openxmlformats.org/presentationml/2006/main" xmlns:r="http://schemas.openxmlformats.org/officeDocument/2006/relationships">
+  <p:cSld>
+    <p:spTree>
+      <p:nvGrpSpPr>
+        <p:cNvPr id="1" name=""/>
+        <p:cNvGrpSpPr/>
+        <p:nvPr/>
+      </p:nvGrpSpPr>
+      <p:grpSpPr/>
+      <p:sp>
+        <p:nvSpPr>
+          <p:cNvPr id="2" name="Rectangle 1"/>
+          <p:cNvSpPr/>
+          <p:nvPr/>
+        </p:nvSpPr>
+        <p:spPr>
+          <a:xfrm>
+            <a:off x="0" y="0"/>
+            <a:ext cx="12191695" cy="6858000"/>
+          </a:xfrm>
+          <a:prstGeom prst="rect">
+            <a:avLst/>
+          </a:prstGeom>
+          <a:solidFill>
+            <a:srgbClr val="FDFBF8"/>
+          </a:solidFill>
+          <a:ln>
+            <a:noFill/>
+          </a:ln>
+          <a:effectLst/>
+        </p:spPr>
+        <p:style>
+          <a:lnRef idx="1">
+            <a:schemeClr val="accent1"/>
+          </a:lnRef>
+          <a:fillRef idx="3">
+            <a:schemeClr val="accent1"/>
+          </a:fillRef>
+          <a:effectRef idx="2">
+            <a:schemeClr val="accent1"/>
+          </a:effectRef>
+          <a:fontRef idx="minor">
+            <a:schemeClr val="lt1"/>
+          </a:fontRef>
+        </p:style>
+        <p:txBody>
+          <a:bodyPr rtlCol="0" anchor="ctr"/>
+          <a:lstStyle/>
+          <a:p>
+            <a:pPr algn="ctr"/>
+          </a:p>
+        </p:txBody>
+      </p:sp>
+      <p:sp>
+        <p:nvSpPr>
+          <p:cNvPr id="3" name="Rectangle 2"/>
+          <p:cNvSpPr/>
+          <p:nvPr/>
+        </p:nvSpPr>
+        <p:spPr>
+          <a:xfrm>
+            <a:off x="0" y="2103120"/>
+            <a:ext cx="12191695" cy="2743200"/>
+          </a:xfrm>
+          <a:prstGeom prst="rect">
+            <a:avLst/>
+          </a:prstGeom>
+          <a:solidFill>
+            <a:srgbClr val="FDF1EF"/>
+          </a:solidFill>
+          <a:ln>
+            <a:noFill/>
+          </a:ln>
+          <a:effectLst/>
+        </p:spPr>
+        <p:style>
+          <a:lnRef idx="1">
+            <a:schemeClr val="accent1"/>
+          </a:lnRef>
+          <a:fillRef idx="3">
+            <a:schemeClr val="accent1"/>
+          </a:fillRef>
+          <a:effectRef idx="2">
+            <a:schemeClr val="accent1"/>
+          </a:effectRef>
+          <a:fontRef idx="minor">
+            <a:schemeClr val="lt1"/>
+          </a:fontRef>
+        </p:style>
+        <p:txBody>
+          <a:bodyPr rtlCol="0" anchor="ctr"/>
+          <a:lstStyle/>
+          <a:p>
+            <a:pPr algn="ctr"/>
+          </a:p>
+        </p:txBody>
+      </p:sp>
+      <p:sp>
+        <p:nvSpPr>
+          <p:cNvPr id="4" name="Rectangle 3"/>
+          <p:cNvSpPr/>
+          <p:nvPr/>
+        </p:nvSpPr>
+        <p:spPr>
+          <a:xfrm>
+            <a:off x="0" y="0"/>
+            <a:ext cx="274320" cy="6858000"/>
+          </a:xfrm>
+          <a:prstGeom prst="rect">
+            <a:avLst/>
+          </a:prstGeom>
+          <a:solidFill>
+            <a:srgbClr val="DC756A"/>
+          </a:solidFill>
+          <a:ln>
+            <a:noFill/>
+          </a:ln>
+          <a:effectLst/>
+        </p:spPr>
+        <p:style>
+          <a:lnRef idx="1">
+            <a:schemeClr val="accent1"/>
+          </a:lnRef>
+          <a:fillRef idx="3">
+            <a:schemeClr val="accent1"/>
+          </a:fillRef>
+          <a:effectRef idx="2">
+            <a:schemeClr val="accent1"/>
+          </a:effectRef>
+          <a:fontRef idx="minor">
+            <a:schemeClr val="lt1"/>
+          </a:fontRef>
+        </p:style>
+        <p:txBody>
+          <a:bodyPr rtlCol="0" anchor="ctr"/>
+          <a:lstStyle/>
+          <a:p>
+            <a:pPr algn="ctr"/>
+          </a:p>
+        </p:txBody>
+      </p:sp>
+      <p:sp>
+        <p:nvSpPr>
+          <p:cNvPr id="5" name="TextBox 4"/>
+          <p:cNvSpPr txBox="1"/>
+          <p:nvPr/>
+        </p:nvSpPr>
+        <p:spPr>
+          <a:xfrm>
+            <a:off x="1280160" y="2377440"/>
+            <a:ext cx="9692640" cy="411480"/>
+          </a:xfrm>
+          <a:prstGeom prst="rect">
+            <a:avLst/>
+          </a:prstGeom>
+          <a:noFill/>
+        </p:spPr>
+        <p:txBody>
+          <a:bodyPr wrap="none">
+            <a:spAutoFit/>
+          </a:bodyPr>
+          <a:lstStyle/>
+          <a:p>
+            <a:r>
+              <a:rPr sz="1500" b="1">
+                <a:solidFill>
+                  <a:srgbClr val="DC756A"/>
+                </a:solidFill>
+                <a:latin typeface="Calibri"/>
+              </a:rPr>
+              <a:t>MỤC 1.4 – 1.5</a:t>
+            </a:r>
+          </a:p>
+        </p:txBody>
+      </p:sp>
+      <p:sp>
+        <p:nvSpPr>
+          <p:cNvPr id="6" name="TextBox 5"/>
+          <p:cNvSpPr txBox="1"/>
+          <p:nvPr/>
+        </p:nvSpPr>
+        <p:spPr>
+          <a:xfrm>
+            <a:off x="1280160" y="2788920"/>
+            <a:ext cx="9601200" cy="1371600"/>
+          </a:xfrm>
+          <a:prstGeom prst="rect">
+            <a:avLst/>
+          </a:prstGeom>
+          <a:noFill/>
+        </p:spPr>
+        <p:txBody>
+          <a:bodyPr wrap="square">
+            <a:spAutoFit/>
+          </a:bodyPr>
+          <a:lstStyle/>
+          <a:p>
+            <a:r>
+              <a:rPr sz="3800" b="1">
+                <a:solidFill>
+                  <a:srgbClr val="AC4D33"/>
+                </a:solidFill>
+                <a:latin typeface="Cambria"/>
+              </a:rPr>
+              <a:t>Yếu tố ảnh hưởng và nguyên tắc</a:t>
+            </a:r>
+          </a:p>
+        </p:txBody>
+      </p:sp>
+      <p:sp>
+        <p:nvSpPr>
+          <p:cNvPr id="7" name="TextBox 6"/>
+          <p:cNvSpPr txBox="1"/>
+          <p:nvPr/>
+        </p:nvSpPr>
+        <p:spPr>
+          <a:xfrm>
+            <a:off x="1280160" y="4224528"/>
+            <a:ext cx="9418320" cy="640080"/>
+          </a:xfrm>
+          <a:prstGeom prst="rect">
+            <a:avLst/>
+          </a:prstGeom>
+          <a:noFill/>
+        </p:spPr>
+        <p:txBody>
+          <a:bodyPr wrap="square">
+            <a:spAutoFit/>
+          </a:bodyPr>
+          <a:lstStyle/>
+          <a:p>
+            <a:r>
+              <a:rPr sz="1450" i="1">
+                <a:solidFill>
+                  <a:srgbClr val="8A7A76"/>
+                </a:solidFill>
+                <a:latin typeface="Calibri"/>
+              </a:rPr>
+              <a:t>Điều gì làm hỏng một cuộc giao tiếp, và năm nguyên tắc giúp ta tránh được điều đó.</a:t>
+            </a:r>
+          </a:p>
+        </p:txBody>
+      </p:sp>
+      <p:sp>
+        <p:nvSpPr>
+          <p:cNvPr id="8" name="TextBox 7"/>
+          <p:cNvSpPr txBox="1"/>
+          <p:nvPr/>
+        </p:nvSpPr>
+        <p:spPr>
+          <a:xfrm>
+            <a:off x="502920" y="6419088"/>
+            <a:ext cx="7772400" cy="292608"/>
+          </a:xfrm>
+          <a:prstGeom prst="rect">
+            <a:avLst/>
+          </a:prstGeom>
+          <a:noFill/>
+        </p:spPr>
+        <p:txBody>
+          <a:bodyPr wrap="none">
+            <a:spAutoFit/>
+          </a:bodyPr>
+          <a:lstStyle/>
+          <a:p>
+            <a:r>
+              <a:rPr sz="900">
+                <a:solidFill>
+                  <a:srgbClr val="8A7A76"/>
+                </a:solidFill>
+                <a:latin typeface="Calibri"/>
+              </a:rPr>
+              <a:t>Je m'appelle Huong  •  GV. Đỗ Thùy Hương  •  EC1103</a:t>
+            </a:r>
+          </a:p>
+        </p:txBody>
+      </p:sp>
+      <p:sp>
+        <p:nvSpPr>
+          <p:cNvPr id="9" name="TextBox 8"/>
+          <p:cNvSpPr txBox="1"/>
+          <p:nvPr/>
+        </p:nvSpPr>
+        <p:spPr>
+          <a:xfrm>
+            <a:off x="9326880" y="6419088"/>
+            <a:ext cx="1920240" cy="292608"/>
+          </a:xfrm>
+          <a:prstGeom prst="rect">
+            <a:avLst/>
+          </a:prstGeom>
+          <a:noFill/>
+        </p:spPr>
+        <p:txBody>
+          <a:bodyPr wrap="none">
+            <a:spAutoFit/>
+          </a:bodyPr>
+          <a:lstStyle/>
+          <a:p>
+            <a:pPr algn="r"/>
+            <a:r>
+              <a:rPr sz="900">
+                <a:solidFill>
+                  <a:srgbClr val="8A7A76"/>
+                </a:solidFill>
+                <a:latin typeface="Calibri"/>
+              </a:rPr>
+              <a:t>Chương 1</a:t>
+            </a:r>
+          </a:p>
+        </p:txBody>
+      </p:sp>
+    </p:spTree>
+  </p:cSld>
+  <p:clrMapOvr>
+    <a:masterClrMapping/>
+  </p:clrMapOvr>
+</p:sld>
+</file>
+
+<file path=ppt/slides/slide14.xml><?xml version="1.0" encoding="utf-8"?>
 <p:sld xmlns:a="http://schemas.openxmlformats.org/drawingml/2006/main" xmlns:r="http://schemas.openxmlformats.org/officeDocument/2006/relationships" xmlns:p="http://schemas.openxmlformats.org/presentationml/2006/main">
   <p:cSld name="Slide 11">
     <p:bg>
@@ -3985,7 +5713,7 @@
 </p:sld>
 </file>
 
-<file path=ppt/slides/slide12.xml><?xml version="1.0" encoding="utf-8"?>
+<file path=ppt/slides/slide15.xml><?xml version="1.0" encoding="utf-8"?>
 <p:sld xmlns:a="http://schemas.openxmlformats.org/drawingml/2006/main" xmlns:r="http://schemas.openxmlformats.org/officeDocument/2006/relationships" xmlns:p="http://schemas.openxmlformats.org/presentationml/2006/main">
   <p:cSld name="Slide 12">
     <p:bg>
@@ -4840,7 +6568,7 @@
 </p:sld>
 </file>
 
-<file path=ppt/slides/slide13.xml><?xml version="1.0" encoding="utf-8"?>
+<file path=ppt/slides/slide16.xml><?xml version="1.0" encoding="utf-8"?>
 <p:sld xmlns:a="http://schemas.openxmlformats.org/drawingml/2006/main" xmlns:r="http://schemas.openxmlformats.org/officeDocument/2006/relationships" xmlns:p="http://schemas.openxmlformats.org/presentationml/2006/main">
   <p:cSld name="Slide 13">
     <p:bg>
@@ -5571,7 +7299,7 @@
 </p:sld>
 </file>
 
-<file path=ppt/slides/slide14.xml><?xml version="1.0" encoding="utf-8"?>
+<file path=ppt/slides/slide17.xml><?xml version="1.0" encoding="utf-8"?>
 <p:sld xmlns:a="http://schemas.openxmlformats.org/drawingml/2006/main" xmlns:r="http://schemas.openxmlformats.org/officeDocument/2006/relationships" xmlns:p="http://schemas.openxmlformats.org/presentationml/2006/main">
   <p:cSld name="Slide 14">
     <p:bg>
@@ -6107,7 +7835,7 @@
 </p:sld>
 </file>
 
-<file path=ppt/slides/slide15.xml><?xml version="1.0" encoding="utf-8"?>
+<file path=ppt/slides/slide18.xml><?xml version="1.0" encoding="utf-8"?>
 <p:sld xmlns:a="http://schemas.openxmlformats.org/drawingml/2006/main" xmlns:r="http://schemas.openxmlformats.org/officeDocument/2006/relationships" xmlns:p="http://schemas.openxmlformats.org/presentationml/2006/main">
   <p:cSld name="Slide 15">
     <p:bg>
@@ -6874,7 +8602,7 @@
 </p:sld>
 </file>
 
-<file path=ppt/slides/slide16.xml><?xml version="1.0" encoding="utf-8"?>
+<file path=ppt/slides/slide19.xml><?xml version="1.0" encoding="utf-8"?>
 <p:sld xmlns:a="http://schemas.openxmlformats.org/drawingml/2006/main" xmlns:r="http://schemas.openxmlformats.org/officeDocument/2006/relationships" xmlns:p="http://schemas.openxmlformats.org/presentationml/2006/main">
   <p:cSld name="Slide 16">
     <p:bg>
@@ -7399,1159 +9127,6 @@
               <a:t>Slide bài giảng, tình huống và bài tập do GV. Đỗ Thùy Hương biên soạn; cung cấp sau mỗi buổi học trên nhóm lớp.</a:t>
             </a:r>
             <a:endParaRPr lang="en-US" sz="1500" dirty="0"/>
-          </a:p>
-        </p:txBody>
-      </p:sp>
-    </p:spTree>
-  </p:cSld>
-  <p:clrMapOvr>
-    <a:masterClrMapping/>
-  </p:clrMapOvr>
-</p:sld>
-</file>
-
-<file path=ppt/slides/slide17.xml><?xml version="1.0" encoding="utf-8"?>
-<p:sld xmlns:a="http://schemas.openxmlformats.org/drawingml/2006/main" xmlns:p="http://schemas.openxmlformats.org/presentationml/2006/main" xmlns:r="http://schemas.openxmlformats.org/officeDocument/2006/relationships">
-  <p:cSld>
-    <p:spTree>
-      <p:nvGrpSpPr>
-        <p:cNvPr id="1" name=""/>
-        <p:cNvGrpSpPr/>
-        <p:nvPr/>
-      </p:nvGrpSpPr>
-      <p:grpSpPr/>
-      <p:sp>
-        <p:nvSpPr>
-          <p:cNvPr id="2" name="Rectangle 1"/>
-          <p:cNvSpPr/>
-          <p:nvPr/>
-        </p:nvSpPr>
-        <p:spPr>
-          <a:xfrm>
-            <a:off x="0" y="0"/>
-            <a:ext cx="12191695" cy="6858000"/>
-          </a:xfrm>
-          <a:prstGeom prst="rect">
-            <a:avLst/>
-          </a:prstGeom>
-          <a:solidFill>
-            <a:srgbClr val="FDFBF8"/>
-          </a:solidFill>
-          <a:ln>
-            <a:noFill/>
-          </a:ln>
-          <a:effectLst/>
-        </p:spPr>
-        <p:style>
-          <a:lnRef idx="1">
-            <a:schemeClr val="accent1"/>
-          </a:lnRef>
-          <a:fillRef idx="3">
-            <a:schemeClr val="accent1"/>
-          </a:fillRef>
-          <a:effectRef idx="2">
-            <a:schemeClr val="accent1"/>
-          </a:effectRef>
-          <a:fontRef idx="minor">
-            <a:schemeClr val="lt1"/>
-          </a:fontRef>
-        </p:style>
-        <p:txBody>
-          <a:bodyPr rtlCol="0" anchor="ctr"/>
-          <a:lstStyle/>
-          <a:p>
-            <a:pPr algn="ctr"/>
-          </a:p>
-        </p:txBody>
-      </p:sp>
-      <p:sp>
-        <p:nvSpPr>
-          <p:cNvPr id="3" name="TextBox 2"/>
-          <p:cNvSpPr txBox="1"/>
-          <p:nvPr/>
-        </p:nvSpPr>
-        <p:spPr>
-          <a:xfrm>
-            <a:off x="502920" y="292608"/>
-            <a:ext cx="11155680" cy="292608"/>
-          </a:xfrm>
-          <a:prstGeom prst="rect">
-            <a:avLst/>
-          </a:prstGeom>
-          <a:noFill/>
-        </p:spPr>
-        <p:txBody>
-          <a:bodyPr wrap="none">
-            <a:spAutoFit/>
-          </a:bodyPr>
-          <a:lstStyle/>
-          <a:p>
-            <a:r>
-              <a:rPr sz="1100" b="1">
-                <a:solidFill>
-                  <a:srgbClr val="DC756A"/>
-                </a:solidFill>
-                <a:latin typeface="Calibri"/>
-              </a:rPr>
-              <a:t>CON SỐ PHẢI NHỚ</a:t>
-            </a:r>
-          </a:p>
-        </p:txBody>
-      </p:sp>
-      <p:sp>
-        <p:nvSpPr>
-          <p:cNvPr id="4" name="TextBox 3"/>
-          <p:cNvSpPr txBox="1"/>
-          <p:nvPr/>
-        </p:nvSpPr>
-        <p:spPr>
-          <a:xfrm>
-            <a:off x="502920" y="603504"/>
-            <a:ext cx="11155680" cy="731520"/>
-          </a:xfrm>
-          <a:prstGeom prst="rect">
-            <a:avLst/>
-          </a:prstGeom>
-          <a:noFill/>
-        </p:spPr>
-        <p:txBody>
-          <a:bodyPr wrap="square">
-            <a:spAutoFit/>
-          </a:bodyPr>
-          <a:lstStyle/>
-          <a:p>
-            <a:r>
-              <a:rPr sz="2700" b="1">
-                <a:solidFill>
-                  <a:srgbClr val="3A2B28"/>
-                </a:solidFill>
-                <a:latin typeface="Cambria"/>
-              </a:rPr>
-              <a:t>Thông điệp cảm xúc được truyền đi thế nào?</a:t>
-            </a:r>
-          </a:p>
-        </p:txBody>
-      </p:sp>
-      <p:sp>
-        <p:nvSpPr>
-          <p:cNvPr id="5" name="Rounded Rectangle 4"/>
-          <p:cNvSpPr/>
-          <p:nvPr/>
-        </p:nvSpPr>
-        <p:spPr>
-          <a:xfrm>
-            <a:off x="502920" y="1783080"/>
-            <a:ext cx="3575304" cy="3429000"/>
-          </a:xfrm>
-          <a:prstGeom prst="roundRect">
-            <a:avLst>
-              <a:gd name="adj" fmla="val 7000"/>
-            </a:avLst>
-          </a:prstGeom>
-          <a:solidFill>
-            <a:srgbClr val="FFFFFF"/>
-          </a:solidFill>
-          <a:ln w="15875">
-            <a:solidFill>
-              <a:srgbClr val="FBCEC9"/>
-            </a:solidFill>
-          </a:ln>
-          <a:effectLst/>
-        </p:spPr>
-        <p:style>
-          <a:lnRef idx="1">
-            <a:schemeClr val="accent1"/>
-          </a:lnRef>
-          <a:fillRef idx="3">
-            <a:schemeClr val="accent1"/>
-          </a:fillRef>
-          <a:effectRef idx="2">
-            <a:schemeClr val="accent1"/>
-          </a:effectRef>
-          <a:fontRef idx="minor">
-            <a:schemeClr val="lt1"/>
-          </a:fontRef>
-        </p:style>
-        <p:txBody>
-          <a:bodyPr rtlCol="0" anchor="ctr" wrap="square" lIns="182880" rIns="182880" tIns="274320" bIns="182880"/>
-          <a:lstStyle/>
-          <a:p>
-            <a:pPr algn="ctr"/>
-            <a:r>
-              <a:rPr sz="5800" b="1">
-                <a:solidFill>
-                  <a:srgbClr val="DC756A"/>
-                </a:solidFill>
-                <a:latin typeface="Cambria"/>
-              </a:rPr>
-              <a:t>7%</a:t>
-            </a:r>
-          </a:p>
-          <a:p>
-            <a:pPr algn="ctr"/>
-            <a:r>
-              <a:rPr sz="1400" b="1">
-                <a:solidFill>
-                  <a:srgbClr val="AC4D33"/>
-                </a:solidFill>
-                <a:latin typeface="Calibri"/>
-              </a:rPr>
-              <a:t>TỪ NGỮ</a:t>
-            </a:r>
-          </a:p>
-          <a:p>
-            <a:pPr algn="ctr">
-              <a:spcBef>
-                <a:spcPts val="1200"/>
-              </a:spcBef>
-            </a:pPr>
-            <a:r>
-              <a:rPr sz="1250">
-                <a:solidFill>
-                  <a:srgbClr val="3A2B28"/>
-                </a:solidFill>
-                <a:latin typeface="Calibri"/>
-              </a:rPr>
-              <a:t>Nội dung lời nói — phần nhỏ nhất, dù ta thường đầu tư nhiều nhất vào đây</a:t>
-            </a:r>
-          </a:p>
-        </p:txBody>
-      </p:sp>
-      <p:sp>
-        <p:nvSpPr>
-          <p:cNvPr id="6" name="Rounded Rectangle 5"/>
-          <p:cNvSpPr/>
-          <p:nvPr/>
-        </p:nvSpPr>
-        <p:spPr>
-          <a:xfrm>
-            <a:off x="4315968" y="1783080"/>
-            <a:ext cx="3575304" cy="3429000"/>
-          </a:xfrm>
-          <a:prstGeom prst="roundRect">
-            <a:avLst>
-              <a:gd name="adj" fmla="val 7000"/>
-            </a:avLst>
-          </a:prstGeom>
-          <a:solidFill>
-            <a:srgbClr val="FFFFFF"/>
-          </a:solidFill>
-          <a:ln w="15875">
-            <a:solidFill>
-              <a:srgbClr val="FBCEC9"/>
-            </a:solidFill>
-          </a:ln>
-          <a:effectLst/>
-        </p:spPr>
-        <p:style>
-          <a:lnRef idx="1">
-            <a:schemeClr val="accent1"/>
-          </a:lnRef>
-          <a:fillRef idx="3">
-            <a:schemeClr val="accent1"/>
-          </a:fillRef>
-          <a:effectRef idx="2">
-            <a:schemeClr val="accent1"/>
-          </a:effectRef>
-          <a:fontRef idx="minor">
-            <a:schemeClr val="lt1"/>
-          </a:fontRef>
-        </p:style>
-        <p:txBody>
-          <a:bodyPr rtlCol="0" anchor="ctr" wrap="square" lIns="182880" rIns="182880" tIns="274320" bIns="182880"/>
-          <a:lstStyle/>
-          <a:p>
-            <a:pPr algn="ctr"/>
-            <a:r>
-              <a:rPr sz="5800" b="1">
-                <a:solidFill>
-                  <a:srgbClr val="DC756A"/>
-                </a:solidFill>
-                <a:latin typeface="Cambria"/>
-              </a:rPr>
-              <a:t>38%</a:t>
-            </a:r>
-          </a:p>
-          <a:p>
-            <a:pPr algn="ctr"/>
-            <a:r>
-              <a:rPr sz="1400" b="1">
-                <a:solidFill>
-                  <a:srgbClr val="AC4D33"/>
-                </a:solidFill>
-                <a:latin typeface="Calibri"/>
-              </a:rPr>
-              <a:t>GIỌNG NÓI</a:t>
-            </a:r>
-          </a:p>
-          <a:p>
-            <a:pPr algn="ctr">
-              <a:spcBef>
-                <a:spcPts val="1200"/>
-              </a:spcBef>
-            </a:pPr>
-            <a:r>
-              <a:rPr sz="1250">
-                <a:solidFill>
-                  <a:srgbClr val="3A2B28"/>
-                </a:solidFill>
-                <a:latin typeface="Calibri"/>
-              </a:rPr>
-              <a:t>Âm lượng, tốc độ, ngữ điệu, khoảng dừng</a:t>
-            </a:r>
-          </a:p>
-        </p:txBody>
-      </p:sp>
-      <p:sp>
-        <p:nvSpPr>
-          <p:cNvPr id="7" name="Rounded Rectangle 6"/>
-          <p:cNvSpPr/>
-          <p:nvPr/>
-        </p:nvSpPr>
-        <p:spPr>
-          <a:xfrm>
-            <a:off x="8129016" y="1783080"/>
-            <a:ext cx="3575304" cy="3429000"/>
-          </a:xfrm>
-          <a:prstGeom prst="roundRect">
-            <a:avLst>
-              <a:gd name="adj" fmla="val 7000"/>
-            </a:avLst>
-          </a:prstGeom>
-          <a:solidFill>
-            <a:srgbClr val="FFFFFF"/>
-          </a:solidFill>
-          <a:ln w="15875">
-            <a:solidFill>
-              <a:srgbClr val="FBCEC9"/>
-            </a:solidFill>
-          </a:ln>
-          <a:effectLst/>
-        </p:spPr>
-        <p:style>
-          <a:lnRef idx="1">
-            <a:schemeClr val="accent1"/>
-          </a:lnRef>
-          <a:fillRef idx="3">
-            <a:schemeClr val="accent1"/>
-          </a:fillRef>
-          <a:effectRef idx="2">
-            <a:schemeClr val="accent1"/>
-          </a:effectRef>
-          <a:fontRef idx="minor">
-            <a:schemeClr val="lt1"/>
-          </a:fontRef>
-        </p:style>
-        <p:txBody>
-          <a:bodyPr rtlCol="0" anchor="ctr" wrap="square" lIns="182880" rIns="182880" tIns="274320" bIns="182880"/>
-          <a:lstStyle/>
-          <a:p>
-            <a:pPr algn="ctr"/>
-            <a:r>
-              <a:rPr sz="5800" b="1">
-                <a:solidFill>
-                  <a:srgbClr val="DC756A"/>
-                </a:solidFill>
-                <a:latin typeface="Cambria"/>
-              </a:rPr>
-              <a:t>55%</a:t>
-            </a:r>
-          </a:p>
-          <a:p>
-            <a:pPr algn="ctr"/>
-            <a:r>
-              <a:rPr sz="1400" b="1">
-                <a:solidFill>
-                  <a:srgbClr val="AC4D33"/>
-                </a:solidFill>
-                <a:latin typeface="Calibri"/>
-              </a:rPr>
-              <a:t>NGÔN NGỮ CƠ THỂ</a:t>
-            </a:r>
-          </a:p>
-          <a:p>
-            <a:pPr algn="ctr">
-              <a:spcBef>
-                <a:spcPts val="1200"/>
-              </a:spcBef>
-            </a:pPr>
-            <a:r>
-              <a:rPr sz="1250">
-                <a:solidFill>
-                  <a:srgbClr val="3A2B28"/>
-                </a:solidFill>
-                <a:latin typeface="Calibri"/>
-              </a:rPr>
-              <a:t>Ánh mắt, nét mặt, cử chỉ, tư thế, khoảng cách</a:t>
-            </a:r>
-          </a:p>
-        </p:txBody>
-      </p:sp>
-      <p:sp>
-        <p:nvSpPr>
-          <p:cNvPr id="8" name="Rounded Rectangle 7"/>
-          <p:cNvSpPr/>
-          <p:nvPr/>
-        </p:nvSpPr>
-        <p:spPr>
-          <a:xfrm>
-            <a:off x="502920" y="5440680"/>
-            <a:ext cx="11201400" cy="685800"/>
-          </a:xfrm>
-          <a:prstGeom prst="roundRect">
-            <a:avLst>
-              <a:gd name="adj" fmla="val 12000"/>
-            </a:avLst>
-          </a:prstGeom>
-          <a:solidFill>
-            <a:srgbClr val="FDF1EF"/>
-          </a:solidFill>
-          <a:ln w="12700">
-            <a:solidFill>
-              <a:srgbClr val="FBCEC9"/>
-            </a:solidFill>
-          </a:ln>
-          <a:effectLst/>
-        </p:spPr>
-        <p:style>
-          <a:lnRef idx="1">
-            <a:schemeClr val="accent1"/>
-          </a:lnRef>
-          <a:fillRef idx="3">
-            <a:schemeClr val="accent1"/>
-          </a:fillRef>
-          <a:effectRef idx="2">
-            <a:schemeClr val="accent1"/>
-          </a:effectRef>
-          <a:fontRef idx="minor">
-            <a:schemeClr val="lt1"/>
-          </a:fontRef>
-        </p:style>
-        <p:txBody>
-          <a:bodyPr rtlCol="0" anchor="ctr" wrap="square" lIns="201168" rIns="201168"/>
-          <a:lstStyle/>
-          <a:p>
-            <a:pPr algn="ctr"/>
-            <a:r>
-              <a:rPr sz="1300">
-                <a:solidFill>
-                  <a:srgbClr val="3A2B28"/>
-                </a:solidFill>
-                <a:latin typeface="Calibri"/>
-              </a:rPr>
-              <a:t>Nghiên cứu của Albert Mehrabian — chỉ áp dụng cho thông điệp mang tính CẢM XÚC, không phải mọi tình huống giao tiếp.</a:t>
-            </a:r>
-          </a:p>
-        </p:txBody>
-      </p:sp>
-      <p:sp>
-        <p:nvSpPr>
-          <p:cNvPr id="9" name="TextBox 8"/>
-          <p:cNvSpPr txBox="1"/>
-          <p:nvPr/>
-        </p:nvSpPr>
-        <p:spPr>
-          <a:xfrm>
-            <a:off x="502920" y="6419088"/>
-            <a:ext cx="7772400" cy="292608"/>
-          </a:xfrm>
-          <a:prstGeom prst="rect">
-            <a:avLst/>
-          </a:prstGeom>
-          <a:noFill/>
-        </p:spPr>
-        <p:txBody>
-          <a:bodyPr wrap="none">
-            <a:spAutoFit/>
-          </a:bodyPr>
-          <a:lstStyle/>
-          <a:p>
-            <a:r>
-              <a:rPr sz="900">
-                <a:solidFill>
-                  <a:srgbClr val="8A7A76"/>
-                </a:solidFill>
-                <a:latin typeface="Calibri"/>
-              </a:rPr>
-              <a:t>Je m'appelle Huong  •  GV. Đỗ Thùy Hương  •  EC1103</a:t>
-            </a:r>
-          </a:p>
-        </p:txBody>
-      </p:sp>
-      <p:sp>
-        <p:nvSpPr>
-          <p:cNvPr id="10" name="TextBox 9"/>
-          <p:cNvSpPr txBox="1"/>
-          <p:nvPr/>
-        </p:nvSpPr>
-        <p:spPr>
-          <a:xfrm>
-            <a:off x="9326880" y="6419088"/>
-            <a:ext cx="1920240" cy="292608"/>
-          </a:xfrm>
-          <a:prstGeom prst="rect">
-            <a:avLst/>
-          </a:prstGeom>
-          <a:noFill/>
-        </p:spPr>
-        <p:txBody>
-          <a:bodyPr wrap="none">
-            <a:spAutoFit/>
-          </a:bodyPr>
-          <a:lstStyle/>
-          <a:p>
-            <a:pPr algn="r"/>
-            <a:r>
-              <a:rPr sz="900">
-                <a:solidFill>
-                  <a:srgbClr val="8A7A76"/>
-                </a:solidFill>
-                <a:latin typeface="Calibri"/>
-              </a:rPr>
-              <a:t>Chương 1</a:t>
-            </a:r>
-          </a:p>
-        </p:txBody>
-      </p:sp>
-    </p:spTree>
-  </p:cSld>
-  <p:clrMapOvr>
-    <a:masterClrMapping/>
-  </p:clrMapOvr>
-</p:sld>
-</file>
-
-<file path=ppt/slides/slide18.xml><?xml version="1.0" encoding="utf-8"?>
-<p:sld xmlns:a="http://schemas.openxmlformats.org/drawingml/2006/main" xmlns:p="http://schemas.openxmlformats.org/presentationml/2006/main" xmlns:r="http://schemas.openxmlformats.org/officeDocument/2006/relationships">
-  <p:cSld>
-    <p:spTree>
-      <p:nvGrpSpPr>
-        <p:cNvPr id="1" name=""/>
-        <p:cNvGrpSpPr/>
-        <p:nvPr/>
-      </p:nvGrpSpPr>
-      <p:grpSpPr/>
-      <p:sp>
-        <p:nvSpPr>
-          <p:cNvPr id="2" name="Rectangle 1"/>
-          <p:cNvSpPr/>
-          <p:nvPr/>
-        </p:nvSpPr>
-        <p:spPr>
-          <a:xfrm>
-            <a:off x="0" y="0"/>
-            <a:ext cx="12191695" cy="6858000"/>
-          </a:xfrm>
-          <a:prstGeom prst="rect">
-            <a:avLst/>
-          </a:prstGeom>
-          <a:solidFill>
-            <a:srgbClr val="FDFBF8"/>
-          </a:solidFill>
-          <a:ln>
-            <a:noFill/>
-          </a:ln>
-          <a:effectLst/>
-        </p:spPr>
-        <p:style>
-          <a:lnRef idx="1">
-            <a:schemeClr val="accent1"/>
-          </a:lnRef>
-          <a:fillRef idx="3">
-            <a:schemeClr val="accent1"/>
-          </a:fillRef>
-          <a:effectRef idx="2">
-            <a:schemeClr val="accent1"/>
-          </a:effectRef>
-          <a:fontRef idx="minor">
-            <a:schemeClr val="lt1"/>
-          </a:fontRef>
-        </p:style>
-        <p:txBody>
-          <a:bodyPr rtlCol="0" anchor="ctr"/>
-          <a:lstStyle/>
-          <a:p>
-            <a:pPr algn="ctr"/>
-          </a:p>
-        </p:txBody>
-      </p:sp>
-      <p:sp>
-        <p:nvSpPr>
-          <p:cNvPr id="3" name="Rectangle 2"/>
-          <p:cNvSpPr/>
-          <p:nvPr/>
-        </p:nvSpPr>
-        <p:spPr>
-          <a:xfrm>
-            <a:off x="0" y="2103120"/>
-            <a:ext cx="12191695" cy="2743200"/>
-          </a:xfrm>
-          <a:prstGeom prst="rect">
-            <a:avLst/>
-          </a:prstGeom>
-          <a:solidFill>
-            <a:srgbClr val="FDF1EF"/>
-          </a:solidFill>
-          <a:ln>
-            <a:noFill/>
-          </a:ln>
-          <a:effectLst/>
-        </p:spPr>
-        <p:style>
-          <a:lnRef idx="1">
-            <a:schemeClr val="accent1"/>
-          </a:lnRef>
-          <a:fillRef idx="3">
-            <a:schemeClr val="accent1"/>
-          </a:fillRef>
-          <a:effectRef idx="2">
-            <a:schemeClr val="accent1"/>
-          </a:effectRef>
-          <a:fontRef idx="minor">
-            <a:schemeClr val="lt1"/>
-          </a:fontRef>
-        </p:style>
-        <p:txBody>
-          <a:bodyPr rtlCol="0" anchor="ctr"/>
-          <a:lstStyle/>
-          <a:p>
-            <a:pPr algn="ctr"/>
-          </a:p>
-        </p:txBody>
-      </p:sp>
-      <p:sp>
-        <p:nvSpPr>
-          <p:cNvPr id="4" name="Rectangle 3"/>
-          <p:cNvSpPr/>
-          <p:nvPr/>
-        </p:nvSpPr>
-        <p:spPr>
-          <a:xfrm>
-            <a:off x="0" y="0"/>
-            <a:ext cx="274320" cy="6858000"/>
-          </a:xfrm>
-          <a:prstGeom prst="rect">
-            <a:avLst/>
-          </a:prstGeom>
-          <a:solidFill>
-            <a:srgbClr val="DC756A"/>
-          </a:solidFill>
-          <a:ln>
-            <a:noFill/>
-          </a:ln>
-          <a:effectLst/>
-        </p:spPr>
-        <p:style>
-          <a:lnRef idx="1">
-            <a:schemeClr val="accent1"/>
-          </a:lnRef>
-          <a:fillRef idx="3">
-            <a:schemeClr val="accent1"/>
-          </a:fillRef>
-          <a:effectRef idx="2">
-            <a:schemeClr val="accent1"/>
-          </a:effectRef>
-          <a:fontRef idx="minor">
-            <a:schemeClr val="lt1"/>
-          </a:fontRef>
-        </p:style>
-        <p:txBody>
-          <a:bodyPr rtlCol="0" anchor="ctr"/>
-          <a:lstStyle/>
-          <a:p>
-            <a:pPr algn="ctr"/>
-          </a:p>
-        </p:txBody>
-      </p:sp>
-      <p:sp>
-        <p:nvSpPr>
-          <p:cNvPr id="5" name="TextBox 4"/>
-          <p:cNvSpPr txBox="1"/>
-          <p:nvPr/>
-        </p:nvSpPr>
-        <p:spPr>
-          <a:xfrm>
-            <a:off x="1280160" y="2377440"/>
-            <a:ext cx="9692640" cy="411480"/>
-          </a:xfrm>
-          <a:prstGeom prst="rect">
-            <a:avLst/>
-          </a:prstGeom>
-          <a:noFill/>
-        </p:spPr>
-        <p:txBody>
-          <a:bodyPr wrap="none">
-            <a:spAutoFit/>
-          </a:bodyPr>
-          <a:lstStyle/>
-          <a:p>
-            <a:r>
-              <a:rPr sz="1500" b="1">
-                <a:solidFill>
-                  <a:srgbClr val="DC756A"/>
-                </a:solidFill>
-                <a:latin typeface="Calibri"/>
-              </a:rPr>
-              <a:t>MỤC 1.1 – 1.2</a:t>
-            </a:r>
-          </a:p>
-        </p:txBody>
-      </p:sp>
-      <p:sp>
-        <p:nvSpPr>
-          <p:cNvPr id="6" name="TextBox 5"/>
-          <p:cNvSpPr txBox="1"/>
-          <p:nvPr/>
-        </p:nvSpPr>
-        <p:spPr>
-          <a:xfrm>
-            <a:off x="1280160" y="2788920"/>
-            <a:ext cx="9601200" cy="1371600"/>
-          </a:xfrm>
-          <a:prstGeom prst="rect">
-            <a:avLst/>
-          </a:prstGeom>
-          <a:noFill/>
-        </p:spPr>
-        <p:txBody>
-          <a:bodyPr wrap="square">
-            <a:spAutoFit/>
-          </a:bodyPr>
-          <a:lstStyle/>
-          <a:p>
-            <a:r>
-              <a:rPr sz="3800" b="1">
-                <a:solidFill>
-                  <a:srgbClr val="AC4D33"/>
-                </a:solidFill>
-                <a:latin typeface="Cambria"/>
-              </a:rPr>
-              <a:t>Bản chất và phương tiện giao tiếp</a:t>
-            </a:r>
-          </a:p>
-        </p:txBody>
-      </p:sp>
-      <p:sp>
-        <p:nvSpPr>
-          <p:cNvPr id="7" name="TextBox 6"/>
-          <p:cNvSpPr txBox="1"/>
-          <p:nvPr/>
-        </p:nvSpPr>
-        <p:spPr>
-          <a:xfrm>
-            <a:off x="1280160" y="4224528"/>
-            <a:ext cx="9418320" cy="640080"/>
-          </a:xfrm>
-          <a:prstGeom prst="rect">
-            <a:avLst/>
-          </a:prstGeom>
-          <a:noFill/>
-        </p:spPr>
-        <p:txBody>
-          <a:bodyPr wrap="square">
-            <a:spAutoFit/>
-          </a:bodyPr>
-          <a:lstStyle/>
-          <a:p>
-            <a:r>
-              <a:rPr sz="1450" i="1">
-                <a:solidFill>
-                  <a:srgbClr val="8A7A76"/>
-                </a:solidFill>
-                <a:latin typeface="Calibri"/>
-              </a:rPr>
-              <a:t>Hiểu đúng bản chất trước khi luyện kỹ năng: giao tiếp là gì, diễn ra qua những khâu nào, bằng phương tiện gì.</a:t>
-            </a:r>
-          </a:p>
-        </p:txBody>
-      </p:sp>
-      <p:sp>
-        <p:nvSpPr>
-          <p:cNvPr id="8" name="TextBox 7"/>
-          <p:cNvSpPr txBox="1"/>
-          <p:nvPr/>
-        </p:nvSpPr>
-        <p:spPr>
-          <a:xfrm>
-            <a:off x="502920" y="6419088"/>
-            <a:ext cx="7772400" cy="292608"/>
-          </a:xfrm>
-          <a:prstGeom prst="rect">
-            <a:avLst/>
-          </a:prstGeom>
-          <a:noFill/>
-        </p:spPr>
-        <p:txBody>
-          <a:bodyPr wrap="none">
-            <a:spAutoFit/>
-          </a:bodyPr>
-          <a:lstStyle/>
-          <a:p>
-            <a:r>
-              <a:rPr sz="900">
-                <a:solidFill>
-                  <a:srgbClr val="8A7A76"/>
-                </a:solidFill>
-                <a:latin typeface="Calibri"/>
-              </a:rPr>
-              <a:t>Je m'appelle Huong  •  GV. Đỗ Thùy Hương  •  EC1103</a:t>
-            </a:r>
-          </a:p>
-        </p:txBody>
-      </p:sp>
-      <p:sp>
-        <p:nvSpPr>
-          <p:cNvPr id="9" name="TextBox 8"/>
-          <p:cNvSpPr txBox="1"/>
-          <p:nvPr/>
-        </p:nvSpPr>
-        <p:spPr>
-          <a:xfrm>
-            <a:off x="9326880" y="6419088"/>
-            <a:ext cx="1920240" cy="292608"/>
-          </a:xfrm>
-          <a:prstGeom prst="rect">
-            <a:avLst/>
-          </a:prstGeom>
-          <a:noFill/>
-        </p:spPr>
-        <p:txBody>
-          <a:bodyPr wrap="none">
-            <a:spAutoFit/>
-          </a:bodyPr>
-          <a:lstStyle/>
-          <a:p>
-            <a:pPr algn="r"/>
-            <a:r>
-              <a:rPr sz="900">
-                <a:solidFill>
-                  <a:srgbClr val="8A7A76"/>
-                </a:solidFill>
-                <a:latin typeface="Calibri"/>
-              </a:rPr>
-              <a:t>Chương 1</a:t>
-            </a:r>
-          </a:p>
-        </p:txBody>
-      </p:sp>
-    </p:spTree>
-  </p:cSld>
-  <p:clrMapOvr>
-    <a:masterClrMapping/>
-  </p:clrMapOvr>
-</p:sld>
-</file>
-
-<file path=ppt/slides/slide19.xml><?xml version="1.0" encoding="utf-8"?>
-<p:sld xmlns:a="http://schemas.openxmlformats.org/drawingml/2006/main" xmlns:p="http://schemas.openxmlformats.org/presentationml/2006/main" xmlns:r="http://schemas.openxmlformats.org/officeDocument/2006/relationships">
-  <p:cSld>
-    <p:spTree>
-      <p:nvGrpSpPr>
-        <p:cNvPr id="1" name=""/>
-        <p:cNvGrpSpPr/>
-        <p:nvPr/>
-      </p:nvGrpSpPr>
-      <p:grpSpPr/>
-      <p:sp>
-        <p:nvSpPr>
-          <p:cNvPr id="2" name="Rectangle 1"/>
-          <p:cNvSpPr/>
-          <p:nvPr/>
-        </p:nvSpPr>
-        <p:spPr>
-          <a:xfrm>
-            <a:off x="0" y="0"/>
-            <a:ext cx="12191695" cy="6858000"/>
-          </a:xfrm>
-          <a:prstGeom prst="rect">
-            <a:avLst/>
-          </a:prstGeom>
-          <a:solidFill>
-            <a:srgbClr val="FDFBF8"/>
-          </a:solidFill>
-          <a:ln>
-            <a:noFill/>
-          </a:ln>
-          <a:effectLst/>
-        </p:spPr>
-        <p:style>
-          <a:lnRef idx="1">
-            <a:schemeClr val="accent1"/>
-          </a:lnRef>
-          <a:fillRef idx="3">
-            <a:schemeClr val="accent1"/>
-          </a:fillRef>
-          <a:effectRef idx="2">
-            <a:schemeClr val="accent1"/>
-          </a:effectRef>
-          <a:fontRef idx="minor">
-            <a:schemeClr val="lt1"/>
-          </a:fontRef>
-        </p:style>
-        <p:txBody>
-          <a:bodyPr rtlCol="0" anchor="ctr"/>
-          <a:lstStyle/>
-          <a:p>
-            <a:pPr algn="ctr"/>
-          </a:p>
-        </p:txBody>
-      </p:sp>
-      <p:sp>
-        <p:nvSpPr>
-          <p:cNvPr id="3" name="Rectangle 2"/>
-          <p:cNvSpPr/>
-          <p:nvPr/>
-        </p:nvSpPr>
-        <p:spPr>
-          <a:xfrm>
-            <a:off x="0" y="2103120"/>
-            <a:ext cx="12191695" cy="2743200"/>
-          </a:xfrm>
-          <a:prstGeom prst="rect">
-            <a:avLst/>
-          </a:prstGeom>
-          <a:solidFill>
-            <a:srgbClr val="FDF1EF"/>
-          </a:solidFill>
-          <a:ln>
-            <a:noFill/>
-          </a:ln>
-          <a:effectLst/>
-        </p:spPr>
-        <p:style>
-          <a:lnRef idx="1">
-            <a:schemeClr val="accent1"/>
-          </a:lnRef>
-          <a:fillRef idx="3">
-            <a:schemeClr val="accent1"/>
-          </a:fillRef>
-          <a:effectRef idx="2">
-            <a:schemeClr val="accent1"/>
-          </a:effectRef>
-          <a:fontRef idx="minor">
-            <a:schemeClr val="lt1"/>
-          </a:fontRef>
-        </p:style>
-        <p:txBody>
-          <a:bodyPr rtlCol="0" anchor="ctr"/>
-          <a:lstStyle/>
-          <a:p>
-            <a:pPr algn="ctr"/>
-          </a:p>
-        </p:txBody>
-      </p:sp>
-      <p:sp>
-        <p:nvSpPr>
-          <p:cNvPr id="4" name="Rectangle 3"/>
-          <p:cNvSpPr/>
-          <p:nvPr/>
-        </p:nvSpPr>
-        <p:spPr>
-          <a:xfrm>
-            <a:off x="0" y="0"/>
-            <a:ext cx="274320" cy="6858000"/>
-          </a:xfrm>
-          <a:prstGeom prst="rect">
-            <a:avLst/>
-          </a:prstGeom>
-          <a:solidFill>
-            <a:srgbClr val="DC756A"/>
-          </a:solidFill>
-          <a:ln>
-            <a:noFill/>
-          </a:ln>
-          <a:effectLst/>
-        </p:spPr>
-        <p:style>
-          <a:lnRef idx="1">
-            <a:schemeClr val="accent1"/>
-          </a:lnRef>
-          <a:fillRef idx="3">
-            <a:schemeClr val="accent1"/>
-          </a:fillRef>
-          <a:effectRef idx="2">
-            <a:schemeClr val="accent1"/>
-          </a:effectRef>
-          <a:fontRef idx="minor">
-            <a:schemeClr val="lt1"/>
-          </a:fontRef>
-        </p:style>
-        <p:txBody>
-          <a:bodyPr rtlCol="0" anchor="ctr"/>
-          <a:lstStyle/>
-          <a:p>
-            <a:pPr algn="ctr"/>
-          </a:p>
-        </p:txBody>
-      </p:sp>
-      <p:sp>
-        <p:nvSpPr>
-          <p:cNvPr id="5" name="TextBox 4"/>
-          <p:cNvSpPr txBox="1"/>
-          <p:nvPr/>
-        </p:nvSpPr>
-        <p:spPr>
-          <a:xfrm>
-            <a:off x="1280160" y="2377440"/>
-            <a:ext cx="9692640" cy="411480"/>
-          </a:xfrm>
-          <a:prstGeom prst="rect">
-            <a:avLst/>
-          </a:prstGeom>
-          <a:noFill/>
-        </p:spPr>
-        <p:txBody>
-          <a:bodyPr wrap="none">
-            <a:spAutoFit/>
-          </a:bodyPr>
-          <a:lstStyle/>
-          <a:p>
-            <a:r>
-              <a:rPr sz="1500" b="1">
-                <a:solidFill>
-                  <a:srgbClr val="DC756A"/>
-                </a:solidFill>
-                <a:latin typeface="Calibri"/>
-              </a:rPr>
-              <a:t>MỤC 1.4 – 1.5</a:t>
-            </a:r>
-          </a:p>
-        </p:txBody>
-      </p:sp>
-      <p:sp>
-        <p:nvSpPr>
-          <p:cNvPr id="6" name="TextBox 5"/>
-          <p:cNvSpPr txBox="1"/>
-          <p:nvPr/>
-        </p:nvSpPr>
-        <p:spPr>
-          <a:xfrm>
-            <a:off x="1280160" y="2788920"/>
-            <a:ext cx="9601200" cy="1371600"/>
-          </a:xfrm>
-          <a:prstGeom prst="rect">
-            <a:avLst/>
-          </a:prstGeom>
-          <a:noFill/>
-        </p:spPr>
-        <p:txBody>
-          <a:bodyPr wrap="square">
-            <a:spAutoFit/>
-          </a:bodyPr>
-          <a:lstStyle/>
-          <a:p>
-            <a:r>
-              <a:rPr sz="3800" b="1">
-                <a:solidFill>
-                  <a:srgbClr val="AC4D33"/>
-                </a:solidFill>
-                <a:latin typeface="Cambria"/>
-              </a:rPr>
-              <a:t>Yếu tố ảnh hưởng và nguyên tắc</a:t>
-            </a:r>
-          </a:p>
-        </p:txBody>
-      </p:sp>
-      <p:sp>
-        <p:nvSpPr>
-          <p:cNvPr id="7" name="TextBox 6"/>
-          <p:cNvSpPr txBox="1"/>
-          <p:nvPr/>
-        </p:nvSpPr>
-        <p:spPr>
-          <a:xfrm>
-            <a:off x="1280160" y="4224528"/>
-            <a:ext cx="9418320" cy="640080"/>
-          </a:xfrm>
-          <a:prstGeom prst="rect">
-            <a:avLst/>
-          </a:prstGeom>
-          <a:noFill/>
-        </p:spPr>
-        <p:txBody>
-          <a:bodyPr wrap="square">
-            <a:spAutoFit/>
-          </a:bodyPr>
-          <a:lstStyle/>
-          <a:p>
-            <a:r>
-              <a:rPr sz="1450" i="1">
-                <a:solidFill>
-                  <a:srgbClr val="8A7A76"/>
-                </a:solidFill>
-                <a:latin typeface="Calibri"/>
-              </a:rPr>
-              <a:t>Điều gì làm hỏng một cuộc giao tiếp, và năm nguyên tắc giúp ta tránh được điều đó.</a:t>
-            </a:r>
-          </a:p>
-        </p:txBody>
-      </p:sp>
-      <p:sp>
-        <p:nvSpPr>
-          <p:cNvPr id="8" name="TextBox 7"/>
-          <p:cNvSpPr txBox="1"/>
-          <p:nvPr/>
-        </p:nvSpPr>
-        <p:spPr>
-          <a:xfrm>
-            <a:off x="502920" y="6419088"/>
-            <a:ext cx="7772400" cy="292608"/>
-          </a:xfrm>
-          <a:prstGeom prst="rect">
-            <a:avLst/>
-          </a:prstGeom>
-          <a:noFill/>
-        </p:spPr>
-        <p:txBody>
-          <a:bodyPr wrap="none">
-            <a:spAutoFit/>
-          </a:bodyPr>
-          <a:lstStyle/>
-          <a:p>
-            <a:r>
-              <a:rPr sz="900">
-                <a:solidFill>
-                  <a:srgbClr val="8A7A76"/>
-                </a:solidFill>
-                <a:latin typeface="Calibri"/>
-              </a:rPr>
-              <a:t>Je m'appelle Huong  •  GV. Đỗ Thùy Hương  •  EC1103</a:t>
-            </a:r>
-          </a:p>
-        </p:txBody>
-      </p:sp>
-      <p:sp>
-        <p:nvSpPr>
-          <p:cNvPr id="9" name="TextBox 8"/>
-          <p:cNvSpPr txBox="1"/>
-          <p:nvPr/>
-        </p:nvSpPr>
-        <p:spPr>
-          <a:xfrm>
-            <a:off x="9326880" y="6419088"/>
-            <a:ext cx="1920240" cy="292608"/>
-          </a:xfrm>
-          <a:prstGeom prst="rect">
-            <a:avLst/>
-          </a:prstGeom>
-          <a:noFill/>
-        </p:spPr>
-        <p:txBody>
-          <a:bodyPr wrap="none">
-            <a:spAutoFit/>
-          </a:bodyPr>
-          <a:lstStyle/>
-          <a:p>
-            <a:pPr algn="r"/>
-            <a:r>
-              <a:rPr sz="900">
-                <a:solidFill>
-                  <a:srgbClr val="8A7A76"/>
-                </a:solidFill>
-                <a:latin typeface="Calibri"/>
-              </a:rPr>
-              <a:t>Chương 1</a:t>
-            </a:r>
           </a:p>
         </p:txBody>
       </p:sp>
@@ -10694,6 +11269,327 @@
 </file>
 
 <file path=ppt/slides/slide5.xml><?xml version="1.0" encoding="utf-8"?>
+<p:sld xmlns:a="http://schemas.openxmlformats.org/drawingml/2006/main" xmlns:p="http://schemas.openxmlformats.org/presentationml/2006/main" xmlns:r="http://schemas.openxmlformats.org/officeDocument/2006/relationships">
+  <p:cSld>
+    <p:spTree>
+      <p:nvGrpSpPr>
+        <p:cNvPr id="1" name=""/>
+        <p:cNvGrpSpPr/>
+        <p:nvPr/>
+      </p:nvGrpSpPr>
+      <p:grpSpPr/>
+      <p:sp>
+        <p:nvSpPr>
+          <p:cNvPr id="2" name="Rectangle 1"/>
+          <p:cNvSpPr/>
+          <p:nvPr/>
+        </p:nvSpPr>
+        <p:spPr>
+          <a:xfrm>
+            <a:off x="0" y="0"/>
+            <a:ext cx="12191695" cy="6858000"/>
+          </a:xfrm>
+          <a:prstGeom prst="rect">
+            <a:avLst/>
+          </a:prstGeom>
+          <a:solidFill>
+            <a:srgbClr val="FDFBF8"/>
+          </a:solidFill>
+          <a:ln>
+            <a:noFill/>
+          </a:ln>
+          <a:effectLst/>
+        </p:spPr>
+        <p:style>
+          <a:lnRef idx="1">
+            <a:schemeClr val="accent1"/>
+          </a:lnRef>
+          <a:fillRef idx="3">
+            <a:schemeClr val="accent1"/>
+          </a:fillRef>
+          <a:effectRef idx="2">
+            <a:schemeClr val="accent1"/>
+          </a:effectRef>
+          <a:fontRef idx="minor">
+            <a:schemeClr val="lt1"/>
+          </a:fontRef>
+        </p:style>
+        <p:txBody>
+          <a:bodyPr rtlCol="0" anchor="ctr"/>
+          <a:lstStyle/>
+          <a:p>
+            <a:pPr algn="ctr"/>
+          </a:p>
+        </p:txBody>
+      </p:sp>
+      <p:sp>
+        <p:nvSpPr>
+          <p:cNvPr id="3" name="Rectangle 2"/>
+          <p:cNvSpPr/>
+          <p:nvPr/>
+        </p:nvSpPr>
+        <p:spPr>
+          <a:xfrm>
+            <a:off x="0" y="2103120"/>
+            <a:ext cx="12191695" cy="2743200"/>
+          </a:xfrm>
+          <a:prstGeom prst="rect">
+            <a:avLst/>
+          </a:prstGeom>
+          <a:solidFill>
+            <a:srgbClr val="FDF1EF"/>
+          </a:solidFill>
+          <a:ln>
+            <a:noFill/>
+          </a:ln>
+          <a:effectLst/>
+        </p:spPr>
+        <p:style>
+          <a:lnRef idx="1">
+            <a:schemeClr val="accent1"/>
+          </a:lnRef>
+          <a:fillRef idx="3">
+            <a:schemeClr val="accent1"/>
+          </a:fillRef>
+          <a:effectRef idx="2">
+            <a:schemeClr val="accent1"/>
+          </a:effectRef>
+          <a:fontRef idx="minor">
+            <a:schemeClr val="lt1"/>
+          </a:fontRef>
+        </p:style>
+        <p:txBody>
+          <a:bodyPr rtlCol="0" anchor="ctr"/>
+          <a:lstStyle/>
+          <a:p>
+            <a:pPr algn="ctr"/>
+          </a:p>
+        </p:txBody>
+      </p:sp>
+      <p:sp>
+        <p:nvSpPr>
+          <p:cNvPr id="4" name="Rectangle 3"/>
+          <p:cNvSpPr/>
+          <p:nvPr/>
+        </p:nvSpPr>
+        <p:spPr>
+          <a:xfrm>
+            <a:off x="0" y="0"/>
+            <a:ext cx="274320" cy="6858000"/>
+          </a:xfrm>
+          <a:prstGeom prst="rect">
+            <a:avLst/>
+          </a:prstGeom>
+          <a:solidFill>
+            <a:srgbClr val="DC756A"/>
+          </a:solidFill>
+          <a:ln>
+            <a:noFill/>
+          </a:ln>
+          <a:effectLst/>
+        </p:spPr>
+        <p:style>
+          <a:lnRef idx="1">
+            <a:schemeClr val="accent1"/>
+          </a:lnRef>
+          <a:fillRef idx="3">
+            <a:schemeClr val="accent1"/>
+          </a:fillRef>
+          <a:effectRef idx="2">
+            <a:schemeClr val="accent1"/>
+          </a:effectRef>
+          <a:fontRef idx="minor">
+            <a:schemeClr val="lt1"/>
+          </a:fontRef>
+        </p:style>
+        <p:txBody>
+          <a:bodyPr rtlCol="0" anchor="ctr"/>
+          <a:lstStyle/>
+          <a:p>
+            <a:pPr algn="ctr"/>
+          </a:p>
+        </p:txBody>
+      </p:sp>
+      <p:sp>
+        <p:nvSpPr>
+          <p:cNvPr id="5" name="TextBox 4"/>
+          <p:cNvSpPr txBox="1"/>
+          <p:nvPr/>
+        </p:nvSpPr>
+        <p:spPr>
+          <a:xfrm>
+            <a:off x="1280160" y="2377440"/>
+            <a:ext cx="9692640" cy="411480"/>
+          </a:xfrm>
+          <a:prstGeom prst="rect">
+            <a:avLst/>
+          </a:prstGeom>
+          <a:noFill/>
+        </p:spPr>
+        <p:txBody>
+          <a:bodyPr wrap="none">
+            <a:spAutoFit/>
+          </a:bodyPr>
+          <a:lstStyle/>
+          <a:p>
+            <a:r>
+              <a:rPr sz="1500" b="1">
+                <a:solidFill>
+                  <a:srgbClr val="DC756A"/>
+                </a:solidFill>
+                <a:latin typeface="Calibri"/>
+              </a:rPr>
+              <a:t>MỤC 1.1 – 1.2</a:t>
+            </a:r>
+          </a:p>
+        </p:txBody>
+      </p:sp>
+      <p:sp>
+        <p:nvSpPr>
+          <p:cNvPr id="6" name="TextBox 5"/>
+          <p:cNvSpPr txBox="1"/>
+          <p:nvPr/>
+        </p:nvSpPr>
+        <p:spPr>
+          <a:xfrm>
+            <a:off x="1280160" y="2788920"/>
+            <a:ext cx="9601200" cy="1371600"/>
+          </a:xfrm>
+          <a:prstGeom prst="rect">
+            <a:avLst/>
+          </a:prstGeom>
+          <a:noFill/>
+        </p:spPr>
+        <p:txBody>
+          <a:bodyPr wrap="square">
+            <a:spAutoFit/>
+          </a:bodyPr>
+          <a:lstStyle/>
+          <a:p>
+            <a:r>
+              <a:rPr sz="3800" b="1">
+                <a:solidFill>
+                  <a:srgbClr val="AC4D33"/>
+                </a:solidFill>
+                <a:latin typeface="Cambria"/>
+              </a:rPr>
+              <a:t>Bản chất và phương tiện giao tiếp</a:t>
+            </a:r>
+          </a:p>
+        </p:txBody>
+      </p:sp>
+      <p:sp>
+        <p:nvSpPr>
+          <p:cNvPr id="7" name="TextBox 6"/>
+          <p:cNvSpPr txBox="1"/>
+          <p:nvPr/>
+        </p:nvSpPr>
+        <p:spPr>
+          <a:xfrm>
+            <a:off x="1280160" y="4224528"/>
+            <a:ext cx="9418320" cy="640080"/>
+          </a:xfrm>
+          <a:prstGeom prst="rect">
+            <a:avLst/>
+          </a:prstGeom>
+          <a:noFill/>
+        </p:spPr>
+        <p:txBody>
+          <a:bodyPr wrap="square">
+            <a:spAutoFit/>
+          </a:bodyPr>
+          <a:lstStyle/>
+          <a:p>
+            <a:r>
+              <a:rPr sz="1450" i="1">
+                <a:solidFill>
+                  <a:srgbClr val="8A7A76"/>
+                </a:solidFill>
+                <a:latin typeface="Calibri"/>
+              </a:rPr>
+              <a:t>Hiểu đúng bản chất trước khi luyện kỹ năng: giao tiếp là gì, diễn ra qua những khâu nào, bằng phương tiện gì.</a:t>
+            </a:r>
+          </a:p>
+        </p:txBody>
+      </p:sp>
+      <p:sp>
+        <p:nvSpPr>
+          <p:cNvPr id="8" name="TextBox 7"/>
+          <p:cNvSpPr txBox="1"/>
+          <p:nvPr/>
+        </p:nvSpPr>
+        <p:spPr>
+          <a:xfrm>
+            <a:off x="502920" y="6419088"/>
+            <a:ext cx="7772400" cy="292608"/>
+          </a:xfrm>
+          <a:prstGeom prst="rect">
+            <a:avLst/>
+          </a:prstGeom>
+          <a:noFill/>
+        </p:spPr>
+        <p:txBody>
+          <a:bodyPr wrap="none">
+            <a:spAutoFit/>
+          </a:bodyPr>
+          <a:lstStyle/>
+          <a:p>
+            <a:r>
+              <a:rPr sz="900">
+                <a:solidFill>
+                  <a:srgbClr val="8A7A76"/>
+                </a:solidFill>
+                <a:latin typeface="Calibri"/>
+              </a:rPr>
+              <a:t>Je m'appelle Huong  •  GV. Đỗ Thùy Hương  •  EC1103</a:t>
+            </a:r>
+          </a:p>
+        </p:txBody>
+      </p:sp>
+      <p:sp>
+        <p:nvSpPr>
+          <p:cNvPr id="9" name="TextBox 8"/>
+          <p:cNvSpPr txBox="1"/>
+          <p:nvPr/>
+        </p:nvSpPr>
+        <p:spPr>
+          <a:xfrm>
+            <a:off x="9326880" y="6419088"/>
+            <a:ext cx="1920240" cy="292608"/>
+          </a:xfrm>
+          <a:prstGeom prst="rect">
+            <a:avLst/>
+          </a:prstGeom>
+          <a:noFill/>
+        </p:spPr>
+        <p:txBody>
+          <a:bodyPr wrap="none">
+            <a:spAutoFit/>
+          </a:bodyPr>
+          <a:lstStyle/>
+          <a:p>
+            <a:pPr algn="r"/>
+            <a:r>
+              <a:rPr sz="900">
+                <a:solidFill>
+                  <a:srgbClr val="8A7A76"/>
+                </a:solidFill>
+                <a:latin typeface="Calibri"/>
+              </a:rPr>
+              <a:t>Chương 1</a:t>
+            </a:r>
+          </a:p>
+        </p:txBody>
+      </p:sp>
+    </p:spTree>
+  </p:cSld>
+  <p:clrMapOvr>
+    <a:masterClrMapping/>
+  </p:clrMapOvr>
+</p:sld>
+</file>
+
+<file path=ppt/slides/slide6.xml><?xml version="1.0" encoding="utf-8"?>
 <p:sld xmlns:a="http://schemas.openxmlformats.org/drawingml/2006/main" xmlns:r="http://schemas.openxmlformats.org/officeDocument/2006/relationships" xmlns:p="http://schemas.openxmlformats.org/presentationml/2006/main">
   <p:cSld name="Slide 5">
     <p:bg>
@@ -11229,7 +12125,7 @@
 </p:sld>
 </file>
 
-<file path=ppt/slides/slide6.xml><?xml version="1.0" encoding="utf-8"?>
+<file path=ppt/slides/slide7.xml><?xml version="1.0" encoding="utf-8"?>
 <p:sld xmlns:a="http://schemas.openxmlformats.org/drawingml/2006/main" xmlns:r="http://schemas.openxmlformats.org/officeDocument/2006/relationships" xmlns:p="http://schemas.openxmlformats.org/presentationml/2006/main">
   <p:cSld name="Slide 6">
     <p:bg>
@@ -11852,7 +12748,7 @@
 </p:sld>
 </file>
 
-<file path=ppt/slides/slide7.xml><?xml version="1.0" encoding="utf-8"?>
+<file path=ppt/slides/slide8.xml><?xml version="1.0" encoding="utf-8"?>
 <p:sld xmlns:a="http://schemas.openxmlformats.org/drawingml/2006/main" xmlns:r="http://schemas.openxmlformats.org/officeDocument/2006/relationships" xmlns:p="http://schemas.openxmlformats.org/presentationml/2006/main">
   <p:cSld name="Slide 7">
     <p:bg>
@@ -12186,7 +13082,7 @@
 </p:sld>
 </file>
 
-<file path=ppt/slides/slide8.xml><?xml version="1.0" encoding="utf-8"?>
+<file path=ppt/slides/slide9.xml><?xml version="1.0" encoding="utf-8"?>
 <p:sld xmlns:a="http://schemas.openxmlformats.org/drawingml/2006/main" xmlns:r="http://schemas.openxmlformats.org/officeDocument/2006/relationships" xmlns:p="http://schemas.openxmlformats.org/presentationml/2006/main">
   <p:cSld name="Slide 8">
     <p:bg>
@@ -12711,902 +13607,6 @@
               <a:t>Rõ  •  lịch sự  •  tích cực  •  ngắn gọn</a:t>
             </a:r>
             <a:endParaRPr lang="en-US" sz="2000" dirty="0"/>
-          </a:p>
-        </p:txBody>
-      </p:sp>
-    </p:spTree>
-  </p:cSld>
-  <p:clrMapOvr>
-    <a:masterClrMapping/>
-  </p:clrMapOvr>
-</p:sld>
-</file>
-
-<file path=ppt/slides/slide9.xml><?xml version="1.0" encoding="utf-8"?>
-<p:sld xmlns:a="http://schemas.openxmlformats.org/drawingml/2006/main" xmlns:r="http://schemas.openxmlformats.org/officeDocument/2006/relationships" xmlns:p="http://schemas.openxmlformats.org/presentationml/2006/main">
-  <p:cSld name="Slide 9">
-    <p:bg>
-      <p:bgPr>
-        <a:solidFill>
-          <a:srgbClr val="FDFBF8"/>
-        </a:solidFill>
-      </p:bgPr>
-    </p:bg>
-    <p:spTree>
-      <p:nvGrpSpPr>
-        <p:cNvPr id="1" name=""/>
-        <p:cNvGrpSpPr/>
-        <p:nvPr/>
-      </p:nvGrpSpPr>
-      <p:grpSpPr>
-        <a:xfrm>
-          <a:off x="0" y="0"/>
-          <a:ext cx="0" cy="0"/>
-          <a:chOff x="0" y="0"/>
-          <a:chExt cx="0" cy="0"/>
-        </a:xfrm>
-      </p:grpSpPr>
-      <p:pic>
-        <p:nvPicPr>
-          <p:cNvPr id="2" name="Image 0" descr="assets/logo_tron.png">    </p:cNvPr>
-          <p:cNvPicPr>
-            <a:picLocks noChangeAspect="1"/>
-          </p:cNvPicPr>
-          <p:nvPr/>
-        </p:nvPicPr>
-        <p:blipFill>
-          <a:blip r:embed="rId1"/>
-          <a:stretch>
-            <a:fillRect/>
-          </a:stretch>
-        </p:blipFill>
-        <p:spPr>
-          <a:xfrm>
-            <a:off x="411480" y="6327648"/>
-            <a:ext cx="384048" cy="384048"/>
-          </a:xfrm>
-          <a:prstGeom prst="rect">
-            <a:avLst/>
-          </a:prstGeom>
-        </p:spPr>
-      </p:pic>
-      <p:sp>
-        <p:nvSpPr>
-          <p:cNvPr id="3" name="Text 0"/>
-          <p:cNvSpPr/>
-          <p:nvPr/>
-        </p:nvSpPr>
-        <p:spPr>
-          <a:xfrm>
-            <a:off x="868680" y="6355080"/>
-            <a:ext cx="7498080" cy="310896"/>
-          </a:xfrm>
-          <a:prstGeom prst="rect">
-            <a:avLst/>
-          </a:prstGeom>
-          <a:noFill/>
-          <a:ln/>
-        </p:spPr>
-        <p:txBody>
-          <a:bodyPr wrap="square" lIns="0" tIns="0" rIns="0" bIns="0" rtlCol="0" anchor="ctr"/>
-          <a:lstStyle/>
-          <a:p>
-            <a:pPr indent="0" marL="0">
-              <a:buNone/>
-            </a:pPr>
-            <a:r>
-              <a:rPr lang="en-US" sz="900" dirty="0">
-                <a:solidFill>
-                  <a:srgbClr val="8A7A76"/>
-                </a:solidFill>
-                <a:latin typeface="Calibri" pitchFamily="34" charset="0"/>
-                <a:ea typeface="Calibri" pitchFamily="34" charset="-122"/>
-                <a:cs typeface="Calibri" pitchFamily="34" charset="-120"/>
-              </a:rPr>
-              <a:t>Je m'appelle Huong  •  GV. Đỗ Thùy Hương  •  EC1103</a:t>
-            </a:r>
-            <a:endParaRPr lang="en-US" sz="900" dirty="0"/>
-          </a:p>
-        </p:txBody>
-      </p:sp>
-      <p:sp>
-        <p:nvSpPr>
-          <p:cNvPr id="4" name="Text 1"/>
-          <p:cNvSpPr/>
-          <p:nvPr/>
-        </p:nvSpPr>
-        <p:spPr>
-          <a:xfrm>
-            <a:off x="8503920" y="6355080"/>
-            <a:ext cx="2743200" cy="310896"/>
-          </a:xfrm>
-          <a:prstGeom prst="rect">
-            <a:avLst/>
-          </a:prstGeom>
-          <a:noFill/>
-          <a:ln/>
-        </p:spPr>
-        <p:txBody>
-          <a:bodyPr wrap="square" lIns="0" tIns="0" rIns="0" bIns="0" rtlCol="0" anchor="ctr"/>
-          <a:lstStyle/>
-          <a:p>
-            <a:pPr algn="r" indent="0" marL="0">
-              <a:buNone/>
-            </a:pPr>
-            <a:r>
-              <a:rPr lang="en-US" sz="900" dirty="0">
-                <a:solidFill>
-                  <a:srgbClr val="8A7A76"/>
-                </a:solidFill>
-                <a:latin typeface="Calibri" pitchFamily="34" charset="0"/>
-                <a:ea typeface="Calibri" pitchFamily="34" charset="-122"/>
-                <a:cs typeface="Calibri" pitchFamily="34" charset="-120"/>
-              </a:rPr>
-              <a:t>Chương 1</a:t>
-            </a:r>
-            <a:endParaRPr lang="en-US" sz="900" dirty="0"/>
-          </a:p>
-        </p:txBody>
-      </p:sp>
-      <p:sp>
-        <p:nvSpPr>
-          <p:cNvPr id="5" name="Shape 2"/>
-          <p:cNvSpPr/>
-          <p:nvPr/>
-        </p:nvSpPr>
-        <p:spPr>
-          <a:xfrm>
-            <a:off x="11430000" y="6327648"/>
-            <a:ext cx="365760" cy="365760"/>
-          </a:xfrm>
-          <a:prstGeom prst="ellipse">
-            <a:avLst/>
-          </a:prstGeom>
-          <a:solidFill>
-            <a:srgbClr val="DC756A"/>
-          </a:solidFill>
-          <a:ln/>
-        </p:spPr>
-        <p:txBody>
-          <a:bodyPr/>
-          <a:p/>
-        </p:txBody>
-      </p:sp>
-      <p:sp>
-        <p:nvSpPr>
-          <p:cNvPr id="6" name="Text 3"/>
-          <p:cNvSpPr/>
-          <p:nvPr/>
-        </p:nvSpPr>
-        <p:spPr>
-          <a:xfrm>
-            <a:off x="11430000" y="6327648"/>
-            <a:ext cx="365760" cy="365760"/>
-          </a:xfrm>
-          <a:prstGeom prst="rect">
-            <a:avLst/>
-          </a:prstGeom>
-          <a:noFill/>
-          <a:ln/>
-        </p:spPr>
-        <p:txBody>
-          <a:bodyPr wrap="square" lIns="0" tIns="0" rIns="0" bIns="0" rtlCol="0" anchor="ctr"/>
-          <a:lstStyle/>
-          <a:p>
-            <a:pPr algn="ctr" indent="0" marL="0">
-              <a:buNone/>
-            </a:pPr>
-            <a:r>
-              <a:rPr lang="en-US" sz="1000" b="1" dirty="0">
-                <a:solidFill>
-                  <a:srgbClr val="FFFFFF"/>
-                </a:solidFill>
-                <a:latin typeface="Calibri" pitchFamily="34" charset="0"/>
-                <a:ea typeface="Calibri" pitchFamily="34" charset="-122"/>
-                <a:cs typeface="Calibri" pitchFamily="34" charset="-120"/>
-              </a:rPr>
-              <a:t>9</a:t>
-            </a:r>
-            <a:endParaRPr lang="en-US" sz="1000" dirty="0"/>
-          </a:p>
-        </p:txBody>
-      </p:sp>
-      <p:sp>
-        <p:nvSpPr>
-          <p:cNvPr id="7" name="Text 4"/>
-          <p:cNvSpPr/>
-          <p:nvPr/>
-        </p:nvSpPr>
-        <p:spPr>
-          <a:xfrm>
-            <a:off x="502920" y="310896"/>
-            <a:ext cx="11155680" cy="274320"/>
-          </a:xfrm>
-          <a:prstGeom prst="rect">
-            <a:avLst/>
-          </a:prstGeom>
-          <a:noFill/>
-          <a:ln/>
-        </p:spPr>
-        <p:txBody>
-          <a:bodyPr wrap="square" lIns="0" tIns="0" rIns="0" bIns="0" rtlCol="0" anchor="ctr"/>
-          <a:lstStyle/>
-          <a:p>
-            <a:pPr indent="0" marL="0">
-              <a:buNone/>
-            </a:pPr>
-            <a:r>
-              <a:rPr lang="en-US" sz="1100" b="1" spc="300" kern="0" dirty="0">
-                <a:solidFill>
-                  <a:srgbClr val="DC756A"/>
-                </a:solidFill>
-                <a:latin typeface="Calibri" pitchFamily="34" charset="0"/>
-                <a:ea typeface="Calibri" pitchFamily="34" charset="-122"/>
-                <a:cs typeface="Calibri" pitchFamily="34" charset="-120"/>
-              </a:rPr>
-              <a:t>1.2</a:t>
-            </a:r>
-            <a:endParaRPr lang="en-US" sz="1100" dirty="0"/>
-          </a:p>
-        </p:txBody>
-      </p:sp>
-      <p:sp>
-        <p:nvSpPr>
-          <p:cNvPr id="8" name="Text 5"/>
-          <p:cNvSpPr/>
-          <p:nvPr/>
-        </p:nvSpPr>
-        <p:spPr>
-          <a:xfrm>
-            <a:off x="502920" y="576072"/>
-            <a:ext cx="11155680" cy="713232"/>
-          </a:xfrm>
-          <a:prstGeom prst="rect">
-            <a:avLst/>
-          </a:prstGeom>
-          <a:noFill/>
-          <a:ln/>
-        </p:spPr>
-        <p:txBody>
-          <a:bodyPr wrap="square" lIns="0" tIns="0" rIns="0" bIns="0" rtlCol="0" anchor="ctr"/>
-          <a:lstStyle/>
-          <a:p>
-            <a:pPr indent="0" marL="0">
-              <a:buNone/>
-            </a:pPr>
-            <a:r>
-              <a:rPr lang="en-US" sz="2700" b="1" dirty="0">
-                <a:solidFill>
-                  <a:srgbClr val="AC4D33"/>
-                </a:solidFill>
-                <a:latin typeface="Cambria" pitchFamily="34" charset="0"/>
-                <a:ea typeface="Cambria" pitchFamily="34" charset="-122"/>
-                <a:cs typeface="Cambria" pitchFamily="34" charset="-120"/>
-              </a:rPr>
-              <a:t>Phương tiện giao tiếp: phi ngôn ngữ</a:t>
-            </a:r>
-            <a:endParaRPr lang="en-US" sz="2700" dirty="0"/>
-          </a:p>
-        </p:txBody>
-      </p:sp>
-      <p:sp>
-        <p:nvSpPr>
-          <p:cNvPr id="9" name="Shape 6"/>
-          <p:cNvSpPr/>
-          <p:nvPr/>
-        </p:nvSpPr>
-        <p:spPr>
-          <a:xfrm>
-            <a:off x="502920" y="1600200"/>
-            <a:ext cx="5509260" cy="1280160"/>
-          </a:xfrm>
-          <a:prstGeom prst="roundRect">
-            <a:avLst>
-              <a:gd name="adj" fmla="val 6429"/>
-            </a:avLst>
-          </a:prstGeom>
-          <a:solidFill>
-            <a:srgbClr val="FDF1EF"/>
-          </a:solidFill>
-          <a:ln w="15875">
-            <a:solidFill>
-              <a:srgbClr val="FBCEC9"/>
-            </a:solidFill>
-            <a:prstDash val="solid"/>
-          </a:ln>
-        </p:spPr>
-        <p:txBody>
-          <a:bodyPr/>
-          <a:p/>
-        </p:txBody>
-      </p:sp>
-      <p:sp>
-        <p:nvSpPr>
-          <p:cNvPr id="10" name="Text 7"/>
-          <p:cNvSpPr/>
-          <p:nvPr/>
-        </p:nvSpPr>
-        <p:spPr>
-          <a:xfrm>
-            <a:off x="722376" y="1673352"/>
-            <a:ext cx="5070348" cy="1133856"/>
-          </a:xfrm>
-          <a:prstGeom prst="rect">
-            <a:avLst/>
-          </a:prstGeom>
-          <a:noFill/>
-          <a:ln/>
-        </p:spPr>
-        <p:txBody>
-          <a:bodyPr wrap="square" lIns="0" tIns="0" rIns="0" bIns="0" rtlCol="0" anchor="ctr"/>
-          <a:lstStyle/>
-          <a:p>
-            <a:pPr indent="0" marL="0">
-              <a:buNone/>
-            </a:pPr>
-            <a:r>
-              <a:rPr lang="en-US" sz="1700" b="1" dirty="0">
-                <a:solidFill>
-                  <a:srgbClr val="AC4D33"/>
-                </a:solidFill>
-                <a:latin typeface="Calibri" pitchFamily="34" charset="0"/>
-                <a:ea typeface="Calibri" pitchFamily="34" charset="-122"/>
-                <a:cs typeface="Calibri" pitchFamily="34" charset="-120"/>
-              </a:rPr>
-              <a:t>Ánh mắt – nét mặt</a:t>
-            </a:r>
-            <a:endParaRPr lang="en-US" sz="1700" dirty="0"/>
-          </a:p>
-          <a:p>
-            <a:pPr indent="0" marL="0">
-              <a:buNone/>
-            </a:pPr>
-            <a:r>
-              <a:rPr lang="en-US" sz="1400" dirty="0">
-                <a:solidFill>
-                  <a:srgbClr val="3A2B28"/>
-                </a:solidFill>
-                <a:latin typeface="Calibri" pitchFamily="34" charset="0"/>
-                <a:ea typeface="Calibri" pitchFamily="34" charset="-122"/>
-                <a:cs typeface="Calibri" pitchFamily="34" charset="-120"/>
-              </a:rPr>
-              <a:t>Kênh biểu cảm mạnh nhất</a:t>
-            </a:r>
-            <a:endParaRPr lang="en-US" sz="1700" dirty="0"/>
-          </a:p>
-        </p:txBody>
-      </p:sp>
-      <p:sp>
-        <p:nvSpPr>
-          <p:cNvPr id="11" name="Shape 8"/>
-          <p:cNvSpPr/>
-          <p:nvPr/>
-        </p:nvSpPr>
-        <p:spPr>
-          <a:xfrm>
-            <a:off x="6195060" y="1600200"/>
-            <a:ext cx="5509260" cy="1280160"/>
-          </a:xfrm>
-          <a:prstGeom prst="roundRect">
-            <a:avLst>
-              <a:gd name="adj" fmla="val 6429"/>
-            </a:avLst>
-          </a:prstGeom>
-          <a:solidFill>
-            <a:srgbClr val="FDF1EF"/>
-          </a:solidFill>
-          <a:ln w="15875">
-            <a:solidFill>
-              <a:srgbClr val="FBCEC9"/>
-            </a:solidFill>
-            <a:prstDash val="solid"/>
-          </a:ln>
-        </p:spPr>
-        <p:txBody>
-          <a:bodyPr/>
-          <a:p/>
-        </p:txBody>
-      </p:sp>
-      <p:sp>
-        <p:nvSpPr>
-          <p:cNvPr id="12" name="Text 9"/>
-          <p:cNvSpPr/>
-          <p:nvPr/>
-        </p:nvSpPr>
-        <p:spPr>
-          <a:xfrm>
-            <a:off x="6414516" y="1673352"/>
-            <a:ext cx="5070348" cy="1133856"/>
-          </a:xfrm>
-          <a:prstGeom prst="rect">
-            <a:avLst/>
-          </a:prstGeom>
-          <a:noFill/>
-          <a:ln/>
-        </p:spPr>
-        <p:txBody>
-          <a:bodyPr wrap="square" lIns="0" tIns="0" rIns="0" bIns="0" rtlCol="0" anchor="ctr"/>
-          <a:lstStyle/>
-          <a:p>
-            <a:pPr indent="0" marL="0">
-              <a:buNone/>
-            </a:pPr>
-            <a:r>
-              <a:rPr lang="en-US" sz="1700" b="1" dirty="0">
-                <a:solidFill>
-                  <a:srgbClr val="AC4D33"/>
-                </a:solidFill>
-                <a:latin typeface="Calibri" pitchFamily="34" charset="0"/>
-                <a:ea typeface="Calibri" pitchFamily="34" charset="-122"/>
-                <a:cs typeface="Calibri" pitchFamily="34" charset="-120"/>
-              </a:rPr>
-              <a:t>Cử chỉ – tư thế</a:t>
-            </a:r>
-            <a:endParaRPr lang="en-US" sz="1700" dirty="0"/>
-          </a:p>
-          <a:p>
-            <a:pPr indent="0" marL="0">
-              <a:buNone/>
-            </a:pPr>
-            <a:r>
-              <a:rPr lang="en-US" sz="1400" dirty="0">
-                <a:solidFill>
-                  <a:srgbClr val="3A2B28"/>
-                </a:solidFill>
-                <a:latin typeface="Calibri" pitchFamily="34" charset="0"/>
-                <a:ea typeface="Calibri" pitchFamily="34" charset="-122"/>
-                <a:cs typeface="Calibri" pitchFamily="34" charset="-120"/>
-              </a:rPr>
-              <a:t>Thẳng và cởi mở tạo thiện cảm</a:t>
-            </a:r>
-            <a:endParaRPr lang="en-US" sz="1700" dirty="0"/>
-          </a:p>
-        </p:txBody>
-      </p:sp>
-      <p:sp>
-        <p:nvSpPr>
-          <p:cNvPr id="13" name="Shape 10"/>
-          <p:cNvSpPr/>
-          <p:nvPr/>
-        </p:nvSpPr>
-        <p:spPr>
-          <a:xfrm>
-            <a:off x="502920" y="3063240"/>
-            <a:ext cx="5509260" cy="1280160"/>
-          </a:xfrm>
-          <a:prstGeom prst="roundRect">
-            <a:avLst>
-              <a:gd name="adj" fmla="val 6429"/>
-            </a:avLst>
-          </a:prstGeom>
-          <a:solidFill>
-            <a:srgbClr val="FDF1EF"/>
-          </a:solidFill>
-          <a:ln w="15875">
-            <a:solidFill>
-              <a:srgbClr val="FBCEC9"/>
-            </a:solidFill>
-            <a:prstDash val="solid"/>
-          </a:ln>
-        </p:spPr>
-        <p:txBody>
-          <a:bodyPr/>
-          <a:p/>
-        </p:txBody>
-      </p:sp>
-      <p:sp>
-        <p:nvSpPr>
-          <p:cNvPr id="14" name="Text 11"/>
-          <p:cNvSpPr/>
-          <p:nvPr/>
-        </p:nvSpPr>
-        <p:spPr>
-          <a:xfrm>
-            <a:off x="722376" y="3136392"/>
-            <a:ext cx="5070348" cy="1133856"/>
-          </a:xfrm>
-          <a:prstGeom prst="rect">
-            <a:avLst/>
-          </a:prstGeom>
-          <a:noFill/>
-          <a:ln/>
-        </p:spPr>
-        <p:txBody>
-          <a:bodyPr wrap="square" lIns="0" tIns="0" rIns="0" bIns="0" rtlCol="0" anchor="ctr"/>
-          <a:lstStyle/>
-          <a:p>
-            <a:pPr indent="0" marL="0">
-              <a:buNone/>
-            </a:pPr>
-            <a:r>
-              <a:rPr lang="en-US" sz="1700" b="1" dirty="0">
-                <a:solidFill>
-                  <a:srgbClr val="AC4D33"/>
-                </a:solidFill>
-                <a:latin typeface="Calibri" pitchFamily="34" charset="0"/>
-                <a:ea typeface="Calibri" pitchFamily="34" charset="-122"/>
-                <a:cs typeface="Calibri" pitchFamily="34" charset="-120"/>
-              </a:rPr>
-              <a:t>Khoảng cách</a:t>
-            </a:r>
-            <a:endParaRPr lang="en-US" sz="1700" dirty="0"/>
-          </a:p>
-          <a:p>
-            <a:pPr indent="0" marL="0">
-              <a:buNone/>
-            </a:pPr>
-            <a:r>
-              <a:rPr lang="en-US" sz="1400" dirty="0">
-                <a:solidFill>
-                  <a:srgbClr val="3A2B28"/>
-                </a:solidFill>
-                <a:latin typeface="Calibri" pitchFamily="34" charset="0"/>
-                <a:ea typeface="Calibri" pitchFamily="34" charset="-122"/>
-                <a:cs typeface="Calibri" pitchFamily="34" charset="-120"/>
-              </a:rPr>
-              <a:t>Thân mật · cá nhân · xã giao · công cộng</a:t>
-            </a:r>
-            <a:endParaRPr lang="en-US" sz="1700" dirty="0"/>
-          </a:p>
-        </p:txBody>
-      </p:sp>
-      <p:sp>
-        <p:nvSpPr>
-          <p:cNvPr id="15" name="Shape 12"/>
-          <p:cNvSpPr/>
-          <p:nvPr/>
-        </p:nvSpPr>
-        <p:spPr>
-          <a:xfrm>
-            <a:off x="6195060" y="3063240"/>
-            <a:ext cx="5509260" cy="1280160"/>
-          </a:xfrm>
-          <a:prstGeom prst="roundRect">
-            <a:avLst>
-              <a:gd name="adj" fmla="val 6429"/>
-            </a:avLst>
-          </a:prstGeom>
-          <a:solidFill>
-            <a:srgbClr val="FDF1EF"/>
-          </a:solidFill>
-          <a:ln w="15875">
-            <a:solidFill>
-              <a:srgbClr val="FBCEC9"/>
-            </a:solidFill>
-            <a:prstDash val="solid"/>
-          </a:ln>
-        </p:spPr>
-        <p:txBody>
-          <a:bodyPr/>
-          <a:p/>
-        </p:txBody>
-      </p:sp>
-      <p:sp>
-        <p:nvSpPr>
-          <p:cNvPr id="16" name="Text 13"/>
-          <p:cNvSpPr/>
-          <p:nvPr/>
-        </p:nvSpPr>
-        <p:spPr>
-          <a:xfrm>
-            <a:off x="6414516" y="3136392"/>
-            <a:ext cx="5070348" cy="1133856"/>
-          </a:xfrm>
-          <a:prstGeom prst="rect">
-            <a:avLst/>
-          </a:prstGeom>
-          <a:noFill/>
-          <a:ln/>
-        </p:spPr>
-        <p:txBody>
-          <a:bodyPr wrap="square" lIns="0" tIns="0" rIns="0" bIns="0" rtlCol="0" anchor="ctr"/>
-          <a:lstStyle/>
-          <a:p>
-            <a:pPr indent="0" marL="0">
-              <a:buNone/>
-            </a:pPr>
-            <a:r>
-              <a:rPr lang="en-US" sz="1700" b="1" dirty="0">
-                <a:solidFill>
-                  <a:srgbClr val="AC4D33"/>
-                </a:solidFill>
-                <a:latin typeface="Calibri" pitchFamily="34" charset="0"/>
-                <a:ea typeface="Calibri" pitchFamily="34" charset="-122"/>
-                <a:cs typeface="Calibri" pitchFamily="34" charset="-120"/>
-              </a:rPr>
-              <a:t>Trang phục – giọng – giờ giấc</a:t>
-            </a:r>
-            <a:endParaRPr lang="en-US" sz="1700" dirty="0"/>
-          </a:p>
-          <a:p>
-            <a:pPr indent="0" marL="0">
-              <a:buNone/>
-            </a:pPr>
-            <a:r>
-              <a:rPr lang="en-US" sz="1400" dirty="0">
-                <a:solidFill>
-                  <a:srgbClr val="3A2B28"/>
-                </a:solidFill>
-                <a:latin typeface="Calibri" pitchFamily="34" charset="0"/>
-                <a:ea typeface="Calibri" pitchFamily="34" charset="-122"/>
-                <a:cs typeface="Calibri" pitchFamily="34" charset="-120"/>
-              </a:rPr>
-              <a:t>Đúng giờ cũng là một thông điệp</a:t>
-            </a:r>
-            <a:endParaRPr lang="en-US" sz="1700" dirty="0"/>
-          </a:p>
-        </p:txBody>
-      </p:sp>
-      <p:sp>
-        <p:nvSpPr>
-          <p:cNvPr id="17" name="Text 14"/>
-          <p:cNvSpPr/>
-          <p:nvPr/>
-        </p:nvSpPr>
-        <p:spPr>
-          <a:xfrm>
-            <a:off x="777240" y="4617720"/>
-            <a:ext cx="3566160" cy="868680"/>
-          </a:xfrm>
-          <a:prstGeom prst="rect">
-            <a:avLst/>
-          </a:prstGeom>
-          <a:noFill/>
-          <a:ln/>
-        </p:spPr>
-        <p:txBody>
-          <a:bodyPr wrap="square" lIns="0" tIns="0" rIns="0" bIns="0" rtlCol="0" anchor="ctr"/>
-          <a:lstStyle/>
-          <a:p>
-            <a:pPr algn="ctr" indent="0" marL="0">
-              <a:buNone/>
-            </a:pPr>
-            <a:r>
-              <a:rPr lang="en-US" sz="4400" b="1" dirty="0">
-                <a:solidFill>
-                  <a:srgbClr val="DC756A"/>
-                </a:solidFill>
-                <a:latin typeface="Cambria" pitchFamily="34" charset="0"/>
-                <a:ea typeface="Cambria" pitchFamily="34" charset="-122"/>
-                <a:cs typeface="Cambria" pitchFamily="34" charset="-120"/>
-              </a:rPr>
-              <a:t>7%</a:t>
-            </a:r>
-            <a:endParaRPr lang="en-US" sz="4400" dirty="0"/>
-          </a:p>
-        </p:txBody>
-      </p:sp>
-      <p:sp>
-        <p:nvSpPr>
-          <p:cNvPr id="18" name="Text 15"/>
-          <p:cNvSpPr/>
-          <p:nvPr/>
-        </p:nvSpPr>
-        <p:spPr>
-          <a:xfrm>
-            <a:off x="777240" y="5486400"/>
-            <a:ext cx="3566160" cy="365760"/>
-          </a:xfrm>
-          <a:prstGeom prst="rect">
-            <a:avLst/>
-          </a:prstGeom>
-          <a:noFill/>
-          <a:ln/>
-        </p:spPr>
-        <p:txBody>
-          <a:bodyPr wrap="square" lIns="0" tIns="0" rIns="0" bIns="0" rtlCol="0" anchor="ctr"/>
-          <a:lstStyle/>
-          <a:p>
-            <a:pPr algn="ctr" indent="0" marL="0">
-              <a:buNone/>
-            </a:pPr>
-            <a:r>
-              <a:rPr lang="en-US" sz="1300" b="1" spc="200" kern="0" dirty="0">
-                <a:solidFill>
-                  <a:srgbClr val="8A7A76"/>
-                </a:solidFill>
-                <a:latin typeface="Calibri" pitchFamily="34" charset="0"/>
-                <a:ea typeface="Calibri" pitchFamily="34" charset="-122"/>
-                <a:cs typeface="Calibri" pitchFamily="34" charset="-120"/>
-              </a:rPr>
-              <a:t>TỪ NGỮ</a:t>
-            </a:r>
-            <a:endParaRPr lang="en-US" sz="1300" dirty="0"/>
-          </a:p>
-        </p:txBody>
-      </p:sp>
-      <p:sp>
-        <p:nvSpPr>
-          <p:cNvPr id="19" name="Text 16"/>
-          <p:cNvSpPr/>
-          <p:nvPr/>
-        </p:nvSpPr>
-        <p:spPr>
-          <a:xfrm>
-            <a:off x="4754880" y="4617720"/>
-            <a:ext cx="3566160" cy="868680"/>
-          </a:xfrm>
-          <a:prstGeom prst="rect">
-            <a:avLst/>
-          </a:prstGeom>
-          <a:noFill/>
-          <a:ln/>
-        </p:spPr>
-        <p:txBody>
-          <a:bodyPr wrap="square" lIns="0" tIns="0" rIns="0" bIns="0" rtlCol="0" anchor="ctr"/>
-          <a:lstStyle/>
-          <a:p>
-            <a:pPr algn="ctr" indent="0" marL="0">
-              <a:buNone/>
-            </a:pPr>
-            <a:r>
-              <a:rPr lang="en-US" sz="4400" b="1" dirty="0">
-                <a:solidFill>
-                  <a:srgbClr val="DC756A"/>
-                </a:solidFill>
-                <a:latin typeface="Cambria" pitchFamily="34" charset="0"/>
-                <a:ea typeface="Cambria" pitchFamily="34" charset="-122"/>
-                <a:cs typeface="Cambria" pitchFamily="34" charset="-120"/>
-              </a:rPr>
-              <a:t>38%</a:t>
-            </a:r>
-            <a:endParaRPr lang="en-US" sz="4400" dirty="0"/>
-          </a:p>
-        </p:txBody>
-      </p:sp>
-      <p:sp>
-        <p:nvSpPr>
-          <p:cNvPr id="20" name="Text 17"/>
-          <p:cNvSpPr/>
-          <p:nvPr/>
-        </p:nvSpPr>
-        <p:spPr>
-          <a:xfrm>
-            <a:off x="4754880" y="5486400"/>
-            <a:ext cx="3566160" cy="365760"/>
-          </a:xfrm>
-          <a:prstGeom prst="rect">
-            <a:avLst/>
-          </a:prstGeom>
-          <a:noFill/>
-          <a:ln/>
-        </p:spPr>
-        <p:txBody>
-          <a:bodyPr wrap="square" lIns="0" tIns="0" rIns="0" bIns="0" rtlCol="0" anchor="ctr"/>
-          <a:lstStyle/>
-          <a:p>
-            <a:pPr algn="ctr" indent="0" marL="0">
-              <a:buNone/>
-            </a:pPr>
-            <a:r>
-              <a:rPr lang="en-US" sz="1300" b="1" spc="200" kern="0" dirty="0">
-                <a:solidFill>
-                  <a:srgbClr val="8A7A76"/>
-                </a:solidFill>
-                <a:latin typeface="Calibri" pitchFamily="34" charset="0"/>
-                <a:ea typeface="Calibri" pitchFamily="34" charset="-122"/>
-                <a:cs typeface="Calibri" pitchFamily="34" charset="-120"/>
-              </a:rPr>
-              <a:t>GIỌNG NÓI</a:t>
-            </a:r>
-            <a:endParaRPr lang="en-US" sz="1300" dirty="0"/>
-          </a:p>
-        </p:txBody>
-      </p:sp>
-      <p:sp>
-        <p:nvSpPr>
-          <p:cNvPr id="21" name="Text 18"/>
-          <p:cNvSpPr/>
-          <p:nvPr/>
-        </p:nvSpPr>
-        <p:spPr>
-          <a:xfrm>
-            <a:off x="8732520" y="4617720"/>
-            <a:ext cx="3566160" cy="868680"/>
-          </a:xfrm>
-          <a:prstGeom prst="rect">
-            <a:avLst/>
-          </a:prstGeom>
-          <a:noFill/>
-          <a:ln/>
-        </p:spPr>
-        <p:txBody>
-          <a:bodyPr wrap="square" lIns="0" tIns="0" rIns="0" bIns="0" rtlCol="0" anchor="ctr"/>
-          <a:lstStyle/>
-          <a:p>
-            <a:pPr algn="ctr" indent="0" marL="0">
-              <a:buNone/>
-            </a:pPr>
-            <a:r>
-              <a:rPr lang="en-US" sz="4400" b="1" dirty="0">
-                <a:solidFill>
-                  <a:srgbClr val="AC4D33"/>
-                </a:solidFill>
-                <a:latin typeface="Cambria" pitchFamily="34" charset="0"/>
-                <a:ea typeface="Cambria" pitchFamily="34" charset="-122"/>
-                <a:cs typeface="Cambria" pitchFamily="34" charset="-120"/>
-              </a:rPr>
-              <a:t>55%</a:t>
-            </a:r>
-            <a:endParaRPr lang="en-US" sz="4400" dirty="0"/>
-          </a:p>
-        </p:txBody>
-      </p:sp>
-      <p:sp>
-        <p:nvSpPr>
-          <p:cNvPr id="22" name="Text 19"/>
-          <p:cNvSpPr/>
-          <p:nvPr/>
-        </p:nvSpPr>
-        <p:spPr>
-          <a:xfrm>
-            <a:off x="8732520" y="5486400"/>
-            <a:ext cx="3566160" cy="365760"/>
-          </a:xfrm>
-          <a:prstGeom prst="rect">
-            <a:avLst/>
-          </a:prstGeom>
-          <a:noFill/>
-          <a:ln/>
-        </p:spPr>
-        <p:txBody>
-          <a:bodyPr wrap="square" lIns="0" tIns="0" rIns="0" bIns="0" rtlCol="0" anchor="ctr"/>
-          <a:lstStyle/>
-          <a:p>
-            <a:pPr algn="ctr" indent="0" marL="0">
-              <a:buNone/>
-            </a:pPr>
-            <a:r>
-              <a:rPr lang="en-US" sz="1300" b="1" spc="200" kern="0" dirty="0">
-                <a:solidFill>
-                  <a:srgbClr val="8A7A76"/>
-                </a:solidFill>
-                <a:latin typeface="Calibri" pitchFamily="34" charset="0"/>
-                <a:ea typeface="Calibri" pitchFamily="34" charset="-122"/>
-                <a:cs typeface="Calibri" pitchFamily="34" charset="-120"/>
-              </a:rPr>
-              <a:t>CƠ THỂ</a:t>
-            </a:r>
-            <a:endParaRPr lang="en-US" sz="1300" dirty="0"/>
-          </a:p>
-        </p:txBody>
-      </p:sp>
-      <p:sp>
-        <p:nvSpPr>
-          <p:cNvPr id="23" name="Text 20"/>
-          <p:cNvSpPr/>
-          <p:nvPr/>
-        </p:nvSpPr>
-        <p:spPr>
-          <a:xfrm>
-            <a:off x="502920" y="5943600"/>
-            <a:ext cx="11201400" cy="365760"/>
-          </a:xfrm>
-          <a:prstGeom prst="rect">
-            <a:avLst/>
-          </a:prstGeom>
-          <a:noFill/>
-          <a:ln/>
-        </p:spPr>
-        <p:txBody>
-          <a:bodyPr wrap="square" lIns="0" tIns="0" rIns="0" bIns="0" rtlCol="0" anchor="ctr"/>
-          <a:lstStyle/>
-          <a:p>
-            <a:pPr algn="ctr" indent="0" marL="0">
-              <a:buNone/>
-            </a:pPr>
-            <a:r>
-              <a:rPr lang="en-US" sz="1200" i="1" dirty="0">
-                <a:solidFill>
-                  <a:srgbClr val="8A7A76"/>
-                </a:solidFill>
-                <a:latin typeface="Calibri" pitchFamily="34" charset="0"/>
-                <a:ea typeface="Calibri" pitchFamily="34" charset="-122"/>
-                <a:cs typeface="Calibri" pitchFamily="34" charset="-120"/>
-              </a:rPr>
-              <a:t>Mehrabian — với thông điệp cảm xúc</a:t>
-            </a:r>
-            <a:endParaRPr lang="en-US" sz="1200" dirty="0"/>
           </a:p>
         </p:txBody>
       </p:sp>
